--- a/skills/presentation-template-library/skills/artifact-template-violet-operations/assets/reference.pptx
+++ b/skills/presentation-template-library/skills/artifact-template-violet-operations/assets/reference.pptx
@@ -508,7 +508,7 @@
           <p:nvPr/>
         </p:nvPicPr>
         <p:blipFill>
-          <a:blip xmlns:r="http://schemas.openxmlformats.org/officeDocument/2006/relationships" xmlns:a="http://schemas.openxmlformats.org/drawingml/2006/main" r:embed="rIdOfficeKitImage59ee3aa5202fd02f_1"/>
+          <a:blip xmlns:r="http://schemas.openxmlformats.org/officeDocument/2006/relationships" xmlns:a="http://schemas.openxmlformats.org/drawingml/2006/main" r:embed="rIdOfficeKitImage7650495d0c3b8602_1"/>
           <a:srcRect xmlns:a="http://schemas.openxmlformats.org/drawingml/2006/main" l="0" t="34180" r="0" b="34180"/>
           <a:stretch xmlns:a="http://schemas.openxmlformats.org/drawingml/2006/main">
             <a:fillRect/>
@@ -1322,8 +1322,8 @@
           <p:nvPr/>
         </p:nvPicPr>
         <p:blipFill>
-          <a:blip xmlns:r="http://schemas.openxmlformats.org/officeDocument/2006/relationships" xmlns:a="http://schemas.openxmlformats.org/drawingml/2006/main" r:embed="rIdOfficeKitImaged71bfa074cda59bb_1"/>
-          <a:srcRect xmlns:a="http://schemas.openxmlformats.org/drawingml/2006/main" l="0" t="34180" r="0" b="34180"/>
+          <a:blip xmlns:r="http://schemas.openxmlformats.org/officeDocument/2006/relationships" xmlns:a="http://schemas.openxmlformats.org/drawingml/2006/main" r:embed="rIdOfficeKitImagee4bd683f73b7a543_1"/>
+          <a:srcRect xmlns:a="http://schemas.openxmlformats.org/drawingml/2006/main" l="0" t="34171" r="0" b="34171"/>
           <a:stretch xmlns:a="http://schemas.openxmlformats.org/drawingml/2006/main">
             <a:fillRect/>
           </a:stretch>
@@ -2146,8 +2146,8 @@
           <p:nvPr/>
         </p:nvPicPr>
         <p:blipFill>
-          <a:blip xmlns:r="http://schemas.openxmlformats.org/officeDocument/2006/relationships" xmlns:a="http://schemas.openxmlformats.org/drawingml/2006/main" r:embed="rIdOfficeKitImage7650495d0c3b8602_1"/>
-          <a:srcRect xmlns:a="http://schemas.openxmlformats.org/drawingml/2006/main" l="0" t="34180" r="0" b="34180"/>
+          <a:blip xmlns:r="http://schemas.openxmlformats.org/officeDocument/2006/relationships" xmlns:a="http://schemas.openxmlformats.org/drawingml/2006/main" r:embed="rIdOfficeKitImagec7b73f8fac405495_1"/>
+          <a:srcRect xmlns:a="http://schemas.openxmlformats.org/drawingml/2006/main" l="0" t="34171" r="0" b="34171"/>
           <a:stretch xmlns:a="http://schemas.openxmlformats.org/drawingml/2006/main">
             <a:fillRect/>
           </a:stretch>
@@ -2431,7 +2431,7 @@
         </p:xfrm>
         <a:graphic xmlns:a="http://schemas.openxmlformats.org/drawingml/2006/main">
           <a:graphicData uri="http://schemas.openxmlformats.org/drawingml/2006/chart">
-            <c:chart xmlns:r="http://schemas.openxmlformats.org/officeDocument/2006/relationships" xmlns:c="http://schemas.openxmlformats.org/drawingml/2006/chart" r:id="Rdce51a98e2da4927"/>
+            <c:chart xmlns:r="http://schemas.openxmlformats.org/officeDocument/2006/relationships" xmlns:c="http://schemas.openxmlformats.org/drawingml/2006/chart" r:id="R3fa3e06d9ecd46fb"/>
           </a:graphicData>
         </a:graphic>
       </p:graphicFrame>
@@ -2449,7 +2449,7 @@
         </p:xfrm>
         <a:graphic xmlns:a="http://schemas.openxmlformats.org/drawingml/2006/main">
           <a:graphicData uri="http://schemas.openxmlformats.org/drawingml/2006/chart">
-            <c:chart xmlns:r="http://schemas.openxmlformats.org/officeDocument/2006/relationships" xmlns:c="http://schemas.openxmlformats.org/drawingml/2006/chart" r:id="Rd424ad46aab24218"/>
+            <c:chart xmlns:r="http://schemas.openxmlformats.org/officeDocument/2006/relationships" xmlns:c="http://schemas.openxmlformats.org/drawingml/2006/chart" r:id="R1c16994bc2574874"/>
           </a:graphicData>
         </a:graphic>
       </p:graphicFrame>
@@ -3938,7 +3938,7 @@
           <p:nvPr/>
         </p:nvPicPr>
         <p:blipFill>
-          <a:blip xmlns:r="http://schemas.openxmlformats.org/officeDocument/2006/relationships" xmlns:a="http://schemas.openxmlformats.org/drawingml/2006/main" r:embed="rIdOfficeKitImaged71bfa074cda59bb_1"/>
+          <a:blip xmlns:r="http://schemas.openxmlformats.org/officeDocument/2006/relationships" xmlns:a="http://schemas.openxmlformats.org/drawingml/2006/main" r:embed="rIdOfficeKitImage59ee3aa5202fd02f_1"/>
           <a:srcRect xmlns:a="http://schemas.openxmlformats.org/drawingml/2006/main" l="0" t="34180" r="0" b="34180"/>
           <a:stretch xmlns:a="http://schemas.openxmlformats.org/drawingml/2006/main">
             <a:fillRect/>
@@ -4287,7 +4287,7 @@
           <p:nvPr/>
         </p:nvPicPr>
         <p:blipFill>
-          <a:blip xmlns:r="http://schemas.openxmlformats.org/officeDocument/2006/relationships" xmlns:a="http://schemas.openxmlformats.org/drawingml/2006/main" r:embed="rIdOfficeKitImage7650495d0c3b8602_1"/>
+          <a:blip xmlns:r="http://schemas.openxmlformats.org/officeDocument/2006/relationships" xmlns:a="http://schemas.openxmlformats.org/drawingml/2006/main" r:embed="rIdOfficeKitImage33b8c33a8fc3d613_1"/>
           <a:srcRect xmlns:a="http://schemas.openxmlformats.org/drawingml/2006/main" l="0" t="34180" r="0" b="34180"/>
           <a:stretch xmlns:a="http://schemas.openxmlformats.org/drawingml/2006/main">
             <a:fillRect/>

--- a/skills/presentation-template-library/skills/artifact-template-violet-operations/assets/reference.pptx
+++ b/skills/presentation-template-library/skills/artifact-template-violet-operations/assets/reference.pptx
@@ -508,7 +508,7 @@
           <p:nvPr/>
         </p:nvPicPr>
         <p:blipFill>
-          <a:blip xmlns:r="http://schemas.openxmlformats.org/officeDocument/2006/relationships" xmlns:a="http://schemas.openxmlformats.org/drawingml/2006/main" r:embed="rIdOfficeKitImage7650495d0c3b8602_1"/>
+          <a:blip xmlns:r="http://schemas.openxmlformats.org/officeDocument/2006/relationships" xmlns:a="http://schemas.openxmlformats.org/drawingml/2006/main" r:embed="rIdOfficeKitImage33b8c33a8fc3d613_1"/>
           <a:srcRect xmlns:a="http://schemas.openxmlformats.org/drawingml/2006/main" l="0" t="34180" r="0" b="34180"/>
           <a:stretch xmlns:a="http://schemas.openxmlformats.org/drawingml/2006/main">
             <a:fillRect/>
@@ -1322,8 +1322,8 @@
           <p:nvPr/>
         </p:nvPicPr>
         <p:blipFill>
-          <a:blip xmlns:r="http://schemas.openxmlformats.org/officeDocument/2006/relationships" xmlns:a="http://schemas.openxmlformats.org/drawingml/2006/main" r:embed="rIdOfficeKitImagee4bd683f73b7a543_1"/>
-          <a:srcRect xmlns:a="http://schemas.openxmlformats.org/drawingml/2006/main" l="0" t="34171" r="0" b="34171"/>
+          <a:blip xmlns:r="http://schemas.openxmlformats.org/officeDocument/2006/relationships" xmlns:a="http://schemas.openxmlformats.org/drawingml/2006/main" r:embed="rIdOfficeKitImageb7d7d39d00e5a7e4_1"/>
+          <a:srcRect xmlns:a="http://schemas.openxmlformats.org/drawingml/2006/main" l="0" t="34170" r="0" b="34170"/>
           <a:stretch xmlns:a="http://schemas.openxmlformats.org/drawingml/2006/main">
             <a:fillRect/>
           </a:stretch>
@@ -2146,8 +2146,8 @@
           <p:nvPr/>
         </p:nvPicPr>
         <p:blipFill>
-          <a:blip xmlns:r="http://schemas.openxmlformats.org/officeDocument/2006/relationships" xmlns:a="http://schemas.openxmlformats.org/drawingml/2006/main" r:embed="rIdOfficeKitImagec7b73f8fac405495_1"/>
-          <a:srcRect xmlns:a="http://schemas.openxmlformats.org/drawingml/2006/main" l="0" t="34171" r="0" b="34171"/>
+          <a:blip xmlns:r="http://schemas.openxmlformats.org/officeDocument/2006/relationships" xmlns:a="http://schemas.openxmlformats.org/drawingml/2006/main" r:embed="rIdOfficeKitImage7650495d0c3b8602_1"/>
+          <a:srcRect xmlns:a="http://schemas.openxmlformats.org/drawingml/2006/main" l="0" t="34180" r="0" b="34180"/>
           <a:stretch xmlns:a="http://schemas.openxmlformats.org/drawingml/2006/main">
             <a:fillRect/>
           </a:stretch>
@@ -2431,7 +2431,7 @@
         </p:xfrm>
         <a:graphic xmlns:a="http://schemas.openxmlformats.org/drawingml/2006/main">
           <a:graphicData uri="http://schemas.openxmlformats.org/drawingml/2006/chart">
-            <c:chart xmlns:r="http://schemas.openxmlformats.org/officeDocument/2006/relationships" xmlns:c="http://schemas.openxmlformats.org/drawingml/2006/chart" r:id="R3fa3e06d9ecd46fb"/>
+            <c:chart xmlns:r="http://schemas.openxmlformats.org/officeDocument/2006/relationships" xmlns:c="http://schemas.openxmlformats.org/drawingml/2006/chart" r:id="Ra070ced91c624346"/>
           </a:graphicData>
         </a:graphic>
       </p:graphicFrame>
@@ -2449,7 +2449,7 @@
         </p:xfrm>
         <a:graphic xmlns:a="http://schemas.openxmlformats.org/drawingml/2006/main">
           <a:graphicData uri="http://schemas.openxmlformats.org/drawingml/2006/chart">
-            <c:chart xmlns:r="http://schemas.openxmlformats.org/officeDocument/2006/relationships" xmlns:c="http://schemas.openxmlformats.org/drawingml/2006/chart" r:id="R1c16994bc2574874"/>
+            <c:chart xmlns:r="http://schemas.openxmlformats.org/officeDocument/2006/relationships" xmlns:c="http://schemas.openxmlformats.org/drawingml/2006/chart" r:id="R9289b5b25137421a"/>
           </a:graphicData>
         </a:graphic>
       </p:graphicFrame>
@@ -3938,8 +3938,8 @@
           <p:nvPr/>
         </p:nvPicPr>
         <p:blipFill>
-          <a:blip xmlns:r="http://schemas.openxmlformats.org/officeDocument/2006/relationships" xmlns:a="http://schemas.openxmlformats.org/drawingml/2006/main" r:embed="rIdOfficeKitImage59ee3aa5202fd02f_1"/>
-          <a:srcRect xmlns:a="http://schemas.openxmlformats.org/drawingml/2006/main" l="0" t="34180" r="0" b="34180"/>
+          <a:blip xmlns:r="http://schemas.openxmlformats.org/officeDocument/2006/relationships" xmlns:a="http://schemas.openxmlformats.org/drawingml/2006/main" r:embed="rIdOfficeKitImagee4bd683f73b7a543_1"/>
+          <a:srcRect xmlns:a="http://schemas.openxmlformats.org/drawingml/2006/main" l="0" t="34171" r="0" b="34171"/>
           <a:stretch xmlns:a="http://schemas.openxmlformats.org/drawingml/2006/main">
             <a:fillRect/>
           </a:stretch>
@@ -4287,7 +4287,7 @@
           <p:nvPr/>
         </p:nvPicPr>
         <p:blipFill>
-          <a:blip xmlns:r="http://schemas.openxmlformats.org/officeDocument/2006/relationships" xmlns:a="http://schemas.openxmlformats.org/drawingml/2006/main" r:embed="rIdOfficeKitImage33b8c33a8fc3d613_1"/>
+          <a:blip xmlns:r="http://schemas.openxmlformats.org/officeDocument/2006/relationships" xmlns:a="http://schemas.openxmlformats.org/drawingml/2006/main" r:embed="rIdOfficeKitImage59ee3aa5202fd02f_1"/>
           <a:srcRect xmlns:a="http://schemas.openxmlformats.org/drawingml/2006/main" l="0" t="34180" r="0" b="34180"/>
           <a:stretch xmlns:a="http://schemas.openxmlformats.org/drawingml/2006/main">
             <a:fillRect/>

--- a/skills/presentation-template-library/skills/artifact-template-violet-operations/assets/reference.pptx
+++ b/skills/presentation-template-library/skills/artifact-template-violet-operations/assets/reference.pptx
@@ -481,6 +481,16 @@
 <file path=ppt/slides/slide1.xml><?xml version="1.0" encoding="utf-8"?>
 <p:sld xmlns:p="http://schemas.openxmlformats.org/presentationml/2006/main">
   <p:cSld name="Opening claim">
+    <p:bg>
+      <p:bgPr>
+        <a:blipFill xmlns:a="http://schemas.openxmlformats.org/drawingml/2006/main">
+          <a:blip xmlns:r="http://schemas.openxmlformats.org/officeDocument/2006/relationships" r:embed="rIdOfficeKitImage33b8c33a8fc3d613_1"/>
+          <a:stretch>
+            <a:fillRect/>
+          </a:stretch>
+        </a:blipFill>
+      </p:bgPr>
+    </p:bg>
     <p:spTree>
       <p:nvGrpSpPr>
         <p:cNvPr id="1" name=""/>
@@ -495,38 +505,9 @@
           <a:chExt cx="0" cy="0"/>
         </a:xfrm>
       </p:grpSpPr>
-      <p:pic>
-        <p:nvPicPr>
-          <p:cNvPr id="2" name="artifact-template-violet-operations-cover-field">
-            <a:extLst xmlns:a="http://schemas.openxmlformats.org/drawingml/2006/main">
-              <a:ext uri="{C183D7F6-B498-43B3-948B-1728B52AA6E4}">
-                <adec:decorative xmlns:adec="http://schemas.microsoft.com/office/drawing/2017/decorative" val="1"/>
-              </a:ext>
-            </a:extLst>
-          </p:cNvPr>
-          <p:cNvPicPr/>
-          <p:nvPr/>
-        </p:nvPicPr>
-        <p:blipFill>
-          <a:blip xmlns:r="http://schemas.openxmlformats.org/officeDocument/2006/relationships" xmlns:a="http://schemas.openxmlformats.org/drawingml/2006/main" r:embed="rIdOfficeKitImage33b8c33a8fc3d613_1"/>
-          <a:srcRect xmlns:a="http://schemas.openxmlformats.org/drawingml/2006/main" l="0" t="34180" r="0" b="34180"/>
-          <a:stretch xmlns:a="http://schemas.openxmlformats.org/drawingml/2006/main">
-            <a:fillRect/>
-          </a:stretch>
-        </p:blipFill>
-        <p:spPr>
-          <a:xfrm xmlns:a="http://schemas.openxmlformats.org/drawingml/2006/main">
-            <a:off x="0" y="0"/>
-            <a:ext cx="15240000" cy="8572500"/>
-          </a:xfrm>
-          <a:prstGeom xmlns:a="http://schemas.openxmlformats.org/drawingml/2006/main" prst="rect">
-            <a:avLst/>
-          </a:prstGeom>
-        </p:spPr>
-      </p:pic>
-      <p:sp>
-        <p:nvSpPr>
-          <p:cNvPr id="3" name="cover-paper-scrim"/>
+      <p:sp>
+        <p:nvSpPr>
+          <p:cNvPr id="2" name="cover-paper-scrim"/>
           <p:cNvSpPr/>
           <p:nvPr/>
         </p:nvSpPr>
@@ -564,7 +545,7 @@
       </p:sp>
       <p:sp>
         <p:nvSpPr>
-          <p:cNvPr id="4" name="top-rule"/>
+          <p:cNvPr id="3" name="top-rule"/>
           <p:cNvSpPr/>
           <p:nvPr/>
         </p:nvSpPr>
@@ -598,7 +579,7 @@
       </p:sp>
       <p:sp>
         <p:nvSpPr>
-          <p:cNvPr id="5" name="eyebrow"/>
+          <p:cNvPr id="4" name="eyebrow"/>
           <p:cNvSpPr txBox="1"/>
           <p:nvPr/>
         </p:nvSpPr>
@@ -635,7 +616,7 @@
       </p:sp>
       <p:sp>
         <p:nvSpPr>
-          <p:cNvPr id="6" name="cover-title"/>
+          <p:cNvPr id="5" name="cover-title"/>
           <p:cNvSpPr txBox="1"/>
           <p:nvPr/>
         </p:nvSpPr>
@@ -672,7 +653,7 @@
       </p:sp>
       <p:sp>
         <p:nvSpPr>
-          <p:cNvPr id="7" name="cover-subtitle"/>
+          <p:cNvPr id="6" name="cover-subtitle"/>
           <p:cNvSpPr txBox="1"/>
           <p:nvPr/>
         </p:nvSpPr>
@@ -709,7 +690,7 @@
       </p:sp>
       <p:sp>
         <p:nvSpPr>
-          <p:cNvPr id="8" name="cover-rule"/>
+          <p:cNvPr id="7" name="cover-rule"/>
           <p:cNvSpPr/>
           <p:nvPr/>
         </p:nvSpPr>
@@ -743,7 +724,7 @@
       </p:sp>
       <p:sp>
         <p:nvSpPr>
-          <p:cNvPr id="9" name="cover-basis"/>
+          <p:cNvPr id="8" name="cover-basis"/>
           <p:cNvSpPr txBox="1"/>
           <p:nvPr/>
         </p:nvSpPr>
@@ -780,7 +761,7 @@
       </p:sp>
       <p:sp>
         <p:nvSpPr>
-          <p:cNvPr id="10" name="cover-thesis"/>
+          <p:cNvPr id="9" name="cover-thesis"/>
           <p:cNvSpPr txBox="1"/>
           <p:nvPr/>
         </p:nvSpPr>
@@ -817,7 +798,7 @@
       </p:sp>
       <p:sp>
         <p:nvSpPr>
-          <p:cNvPr id="11" name="cover-source"/>
+          <p:cNvPr id="10" name="cover-source"/>
           <p:cNvSpPr txBox="1"/>
           <p:nvPr/>
         </p:nvSpPr>
@@ -854,7 +835,7 @@
       </p:sp>
       <p:sp>
         <p:nvSpPr>
-          <p:cNvPr id="12" name="page-number"/>
+          <p:cNvPr id="11" name="page-number"/>
           <p:cNvSpPr txBox="1"/>
           <p:nvPr/>
         </p:nvSpPr>
@@ -892,7 +873,7 @@
       </p:sp>
       <p:sp>
         <p:nvSpPr>
-          <p:cNvPr id="13" name="anchor-field"/>
+          <p:cNvPr id="12" name="anchor-field"/>
           <p:cNvSpPr/>
           <p:nvPr/>
         </p:nvSpPr>
@@ -928,7 +909,7 @@
       </p:sp>
       <p:sp>
         <p:nvSpPr>
-          <p:cNvPr id="14" name="anchor-grid-0-0"/>
+          <p:cNvPr id="13" name="anchor-grid-0-0"/>
           <p:cNvSpPr/>
           <p:nvPr/>
         </p:nvSpPr>
@@ -964,7 +945,7 @@
       </p:sp>
       <p:sp>
         <p:nvSpPr>
-          <p:cNvPr id="15" name="anchor-grid-0-1"/>
+          <p:cNvPr id="14" name="anchor-grid-0-1"/>
           <p:cNvSpPr/>
           <p:nvPr/>
         </p:nvSpPr>
@@ -1000,7 +981,7 @@
       </p:sp>
       <p:sp>
         <p:nvSpPr>
-          <p:cNvPr id="16" name="anchor-grid-0-2"/>
+          <p:cNvPr id="15" name="anchor-grid-0-2"/>
           <p:cNvSpPr/>
           <p:nvPr/>
         </p:nvSpPr>
@@ -1036,7 +1017,7 @@
       </p:sp>
       <p:sp>
         <p:nvSpPr>
-          <p:cNvPr id="17" name="anchor-grid-1-0"/>
+          <p:cNvPr id="16" name="anchor-grid-1-0"/>
           <p:cNvSpPr/>
           <p:nvPr/>
         </p:nvSpPr>
@@ -1072,7 +1053,7 @@
       </p:sp>
       <p:sp>
         <p:nvSpPr>
-          <p:cNvPr id="18" name="anchor-grid-1-1"/>
+          <p:cNvPr id="17" name="anchor-grid-1-1"/>
           <p:cNvSpPr/>
           <p:nvPr/>
         </p:nvSpPr>
@@ -1108,7 +1089,7 @@
       </p:sp>
       <p:sp>
         <p:nvSpPr>
-          <p:cNvPr id="19" name="anchor-grid-1-2"/>
+          <p:cNvPr id="18" name="anchor-grid-1-2"/>
           <p:cNvSpPr/>
           <p:nvPr/>
         </p:nvSpPr>
@@ -1144,7 +1125,7 @@
       </p:sp>
       <p:sp>
         <p:nvSpPr>
-          <p:cNvPr id="20" name="anchor-grid-2-0"/>
+          <p:cNvPr id="19" name="anchor-grid-2-0"/>
           <p:cNvSpPr/>
           <p:nvPr/>
         </p:nvSpPr>
@@ -1180,7 +1161,7 @@
       </p:sp>
       <p:sp>
         <p:nvSpPr>
-          <p:cNvPr id="21" name="anchor-grid-2-1"/>
+          <p:cNvPr id="20" name="anchor-grid-2-1"/>
           <p:cNvSpPr/>
           <p:nvPr/>
         </p:nvSpPr>
@@ -1216,7 +1197,7 @@
       </p:sp>
       <p:sp>
         <p:nvSpPr>
-          <p:cNvPr id="22" name="anchor-grid-2-2"/>
+          <p:cNvPr id="21" name="anchor-grid-2-2"/>
           <p:cNvSpPr/>
           <p:nvPr/>
         </p:nvSpPr>
@@ -1252,7 +1233,7 @@
       </p:sp>
       <p:sp>
         <p:nvSpPr>
-          <p:cNvPr id="23" name="anchor-axis"/>
+          <p:cNvPr id="22" name="anchor-axis"/>
           <p:cNvSpPr/>
           <p:nvPr/>
         </p:nvSpPr>
@@ -1295,6 +1276,16 @@
 <file path=ppt/slides/slide2.xml><?xml version="1.0" encoding="utf-8"?>
 <p:sld xmlns:p="http://schemas.openxmlformats.org/presentationml/2006/main">
   <p:cSld name="Argument">
+    <p:bg>
+      <p:bgPr>
+        <a:blipFill xmlns:a="http://schemas.openxmlformats.org/drawingml/2006/main">
+          <a:blip xmlns:r="http://schemas.openxmlformats.org/officeDocument/2006/relationships" r:embed="rIdOfficeKitImageb7d7d39d00e5a7e4_1"/>
+          <a:stretch>
+            <a:fillRect/>
+          </a:stretch>
+        </a:blipFill>
+      </p:bgPr>
+    </p:bg>
     <p:spTree>
       <p:nvGrpSpPr>
         <p:cNvPr id="1" name=""/>
@@ -1309,38 +1300,9 @@
           <a:chExt cx="0" cy="0"/>
         </a:xfrm>
       </p:grpSpPr>
-      <p:pic>
-        <p:nvPicPr>
-          <p:cNvPr id="2" name="argument-visual-field">
-            <a:extLst xmlns:a="http://schemas.openxmlformats.org/drawingml/2006/main">
-              <a:ext uri="{C183D7F6-B498-43B3-948B-1728B52AA6E4}">
-                <adec:decorative xmlns:adec="http://schemas.microsoft.com/office/drawing/2017/decorative" val="1"/>
-              </a:ext>
-            </a:extLst>
-          </p:cNvPr>
-          <p:cNvPicPr/>
-          <p:nvPr/>
-        </p:nvPicPr>
-        <p:blipFill>
-          <a:blip xmlns:r="http://schemas.openxmlformats.org/officeDocument/2006/relationships" xmlns:a="http://schemas.openxmlformats.org/drawingml/2006/main" r:embed="rIdOfficeKitImageb7d7d39d00e5a7e4_1"/>
-          <a:srcRect xmlns:a="http://schemas.openxmlformats.org/drawingml/2006/main" l="0" t="34170" r="0" b="34170"/>
-          <a:stretch xmlns:a="http://schemas.openxmlformats.org/drawingml/2006/main">
-            <a:fillRect/>
-          </a:stretch>
-        </p:blipFill>
-        <p:spPr>
-          <a:xfrm xmlns:a="http://schemas.openxmlformats.org/drawingml/2006/main">
-            <a:off x="0" y="0"/>
-            <a:ext cx="15240000" cy="8572500"/>
-          </a:xfrm>
-          <a:prstGeom xmlns:a="http://schemas.openxmlformats.org/drawingml/2006/main" prst="rect">
-            <a:avLst/>
-          </a:prstGeom>
-        </p:spPr>
-      </p:pic>
-      <p:sp>
-        <p:nvSpPr>
-          <p:cNvPr id="3" name="argument-paper-scrim"/>
+      <p:sp>
+        <p:nvSpPr>
+          <p:cNvPr id="2" name="argument-paper-scrim"/>
           <p:cNvSpPr/>
           <p:nvPr/>
         </p:nvSpPr>
@@ -1378,7 +1340,7 @@
       </p:sp>
       <p:sp>
         <p:nvSpPr>
-          <p:cNvPr id="4" name="argument-top-rule"/>
+          <p:cNvPr id="3" name="argument-top-rule"/>
           <p:cNvSpPr/>
           <p:nvPr/>
         </p:nvSpPr>
@@ -1412,7 +1374,7 @@
       </p:sp>
       <p:sp>
         <p:nvSpPr>
-          <p:cNvPr id="5" name="VIOLET OPERATIONS · ARGUMENT"/>
+          <p:cNvPr id="4" name="VIOLET OPERATIONS · ARGUMENT"/>
           <p:cNvSpPr txBox="1"/>
           <p:nvPr/>
         </p:nvSpPr>
@@ -1449,7 +1411,7 @@
       </p:sp>
       <p:sp>
         <p:nvSpPr>
-          <p:cNvPr id="6" name="argument-title"/>
+          <p:cNvPr id="5" name="argument-title"/>
           <p:cNvSpPr txBox="1"/>
           <p:nvPr/>
         </p:nvSpPr>
@@ -1486,7 +1448,7 @@
       </p:sp>
       <p:sp>
         <p:nvSpPr>
-          <p:cNvPr id="7" name="argument-basis"/>
+          <p:cNvPr id="6" name="argument-basis"/>
           <p:cNvSpPr txBox="1"/>
           <p:nvPr/>
         </p:nvSpPr>
@@ -1523,7 +1485,7 @@
       </p:sp>
       <p:sp>
         <p:nvSpPr>
-          <p:cNvPr id="8" name="argument-rule"/>
+          <p:cNvPr id="7" name="argument-rule"/>
           <p:cNvSpPr/>
           <p:nvPr/>
         </p:nvSpPr>
@@ -1557,7 +1519,7 @@
       </p:sp>
       <p:sp>
         <p:nvSpPr>
-          <p:cNvPr id="9" name="work-status"/>
+          <p:cNvPr id="8" name="work-status"/>
           <p:cNvSpPr txBox="1"/>
           <p:nvPr/>
         </p:nvSpPr>
@@ -1594,7 +1556,7 @@
       </p:sp>
       <p:sp>
         <p:nvSpPr>
-          <p:cNvPr id="10" name="work-headline"/>
+          <p:cNvPr id="9" name="work-headline"/>
           <p:cNvSpPr txBox="1"/>
           <p:nvPr/>
         </p:nvSpPr>
@@ -1631,7 +1593,7 @@
       </p:sp>
       <p:sp>
         <p:nvSpPr>
-          <p:cNvPr id="11" name="work-body"/>
+          <p:cNvPr id="10" name="work-body"/>
           <p:cNvSpPr txBox="1"/>
           <p:nvPr/>
         </p:nvSpPr>
@@ -1668,7 +1630,7 @@
       </p:sp>
       <p:sp>
         <p:nvSpPr>
-          <p:cNvPr id="12" name="work-rail"/>
+          <p:cNvPr id="11" name="work-rail"/>
           <p:cNvSpPr/>
           <p:nvPr/>
         </p:nvSpPr>
@@ -1702,7 +1664,7 @@
       </p:sp>
       <p:sp>
         <p:nvSpPr>
-          <p:cNvPr id="13" name="work-num-0"/>
+          <p:cNvPr id="12" name="work-num-0"/>
           <p:cNvSpPr txBox="1"/>
           <p:nvPr/>
         </p:nvSpPr>
@@ -1739,7 +1701,7 @@
       </p:sp>
       <p:sp>
         <p:nvSpPr>
-          <p:cNvPr id="14" name="work-label-0"/>
+          <p:cNvPr id="13" name="work-label-0"/>
           <p:cNvSpPr txBox="1"/>
           <p:nvPr/>
         </p:nvSpPr>
@@ -1776,7 +1738,7 @@
       </p:sp>
       <p:sp>
         <p:nvSpPr>
-          <p:cNvPr id="15" name="work-text-0"/>
+          <p:cNvPr id="14" name="work-text-0"/>
           <p:cNvSpPr txBox="1"/>
           <p:nvPr/>
         </p:nvSpPr>
@@ -1813,7 +1775,7 @@
       </p:sp>
       <p:sp>
         <p:nvSpPr>
-          <p:cNvPr id="16" name="work-num-1"/>
+          <p:cNvPr id="15" name="work-num-1"/>
           <p:cNvSpPr txBox="1"/>
           <p:nvPr/>
         </p:nvSpPr>
@@ -1850,7 +1812,7 @@
       </p:sp>
       <p:sp>
         <p:nvSpPr>
-          <p:cNvPr id="17" name="work-label-1"/>
+          <p:cNvPr id="16" name="work-label-1"/>
           <p:cNvSpPr txBox="1"/>
           <p:nvPr/>
         </p:nvSpPr>
@@ -1887,7 +1849,7 @@
       </p:sp>
       <p:sp>
         <p:nvSpPr>
-          <p:cNvPr id="18" name="work-text-1"/>
+          <p:cNvPr id="17" name="work-text-1"/>
           <p:cNvSpPr txBox="1"/>
           <p:nvPr/>
         </p:nvSpPr>
@@ -1924,7 +1886,7 @@
       </p:sp>
       <p:sp>
         <p:nvSpPr>
-          <p:cNvPr id="19" name="work-num-2"/>
+          <p:cNvPr id="18" name="work-num-2"/>
           <p:cNvSpPr txBox="1"/>
           <p:nvPr/>
         </p:nvSpPr>
@@ -1961,7 +1923,7 @@
       </p:sp>
       <p:sp>
         <p:nvSpPr>
-          <p:cNvPr id="20" name="work-label-2"/>
+          <p:cNvPr id="19" name="work-label-2"/>
           <p:cNvSpPr txBox="1"/>
           <p:nvPr/>
         </p:nvSpPr>
@@ -1998,7 +1960,7 @@
       </p:sp>
       <p:sp>
         <p:nvSpPr>
-          <p:cNvPr id="21" name="work-text-2"/>
+          <p:cNvPr id="20" name="work-text-2"/>
           <p:cNvSpPr txBox="1"/>
           <p:nvPr/>
         </p:nvSpPr>
@@ -2035,7 +1997,7 @@
       </p:sp>
       <p:sp>
         <p:nvSpPr>
-          <p:cNvPr id="22" name="source"/>
+          <p:cNvPr id="21" name="source"/>
           <p:cNvSpPr txBox="1"/>
           <p:nvPr/>
         </p:nvSpPr>
@@ -2072,7 +2034,7 @@
       </p:sp>
       <p:sp>
         <p:nvSpPr>
-          <p:cNvPr id="23" name="page-number"/>
+          <p:cNvPr id="22" name="page-number"/>
           <p:cNvSpPr txBox="1"/>
           <p:nvPr/>
         </p:nvSpPr>
@@ -2119,6 +2081,16 @@
 <file path=ppt/slides/slide3.xml><?xml version="1.0" encoding="utf-8"?>
 <p:sld xmlns:p="http://schemas.openxmlformats.org/presentationml/2006/main">
   <p:cSld name="Evidence">
+    <p:bg>
+      <p:bgPr>
+        <a:blipFill xmlns:a="http://schemas.openxmlformats.org/drawingml/2006/main">
+          <a:blip xmlns:r="http://schemas.openxmlformats.org/officeDocument/2006/relationships" r:embed="rIdOfficeKitImage7650495d0c3b8602_1"/>
+          <a:stretch>
+            <a:fillRect/>
+          </a:stretch>
+        </a:blipFill>
+      </p:bgPr>
+    </p:bg>
     <p:spTree>
       <p:nvGrpSpPr>
         <p:cNvPr id="1" name=""/>
@@ -2133,38 +2105,9 @@
           <a:chExt cx="0" cy="0"/>
         </a:xfrm>
       </p:grpSpPr>
-      <p:pic>
-        <p:nvPicPr>
-          <p:cNvPr id="2" name="evidence-visual-field">
-            <a:extLst xmlns:a="http://schemas.openxmlformats.org/drawingml/2006/main">
-              <a:ext uri="{C183D7F6-B498-43B3-948B-1728B52AA6E4}">
-                <adec:decorative xmlns:adec="http://schemas.microsoft.com/office/drawing/2017/decorative" val="1"/>
-              </a:ext>
-            </a:extLst>
-          </p:cNvPr>
-          <p:cNvPicPr/>
-          <p:nvPr/>
-        </p:nvPicPr>
-        <p:blipFill>
-          <a:blip xmlns:r="http://schemas.openxmlformats.org/officeDocument/2006/relationships" xmlns:a="http://schemas.openxmlformats.org/drawingml/2006/main" r:embed="rIdOfficeKitImage7650495d0c3b8602_1"/>
-          <a:srcRect xmlns:a="http://schemas.openxmlformats.org/drawingml/2006/main" l="0" t="34180" r="0" b="34180"/>
-          <a:stretch xmlns:a="http://schemas.openxmlformats.org/drawingml/2006/main">
-            <a:fillRect/>
-          </a:stretch>
-        </p:blipFill>
-        <p:spPr>
-          <a:xfrm xmlns:a="http://schemas.openxmlformats.org/drawingml/2006/main">
-            <a:off x="0" y="0"/>
-            <a:ext cx="15240000" cy="8572500"/>
-          </a:xfrm>
-          <a:prstGeom xmlns:a="http://schemas.openxmlformats.org/drawingml/2006/main" prst="rect">
-            <a:avLst/>
-          </a:prstGeom>
-        </p:spPr>
-      </p:pic>
-      <p:sp>
-        <p:nvSpPr>
-          <p:cNvPr id="3" name="evidence-paper-scrim"/>
+      <p:sp>
+        <p:nvSpPr>
+          <p:cNvPr id="2" name="evidence-paper-scrim"/>
           <p:cNvSpPr/>
           <p:nvPr/>
         </p:nvSpPr>
@@ -2202,7 +2145,7 @@
       </p:sp>
       <p:sp>
         <p:nvSpPr>
-          <p:cNvPr id="4" name="evidence-top-rule"/>
+          <p:cNvPr id="3" name="evidence-top-rule"/>
           <p:cNvSpPr/>
           <p:nvPr/>
         </p:nvSpPr>
@@ -2236,7 +2179,7 @@
       </p:sp>
       <p:sp>
         <p:nvSpPr>
-          <p:cNvPr id="5" name="VIOLET OPERATIONS · EVIDENCE"/>
+          <p:cNvPr id="4" name="VIOLET OPERATIONS · EVIDENCE"/>
           <p:cNvSpPr txBox="1"/>
           <p:nvPr/>
         </p:nvSpPr>
@@ -2273,7 +2216,7 @@
       </p:sp>
       <p:sp>
         <p:nvSpPr>
-          <p:cNvPr id="6" name="evidence-title"/>
+          <p:cNvPr id="5" name="evidence-title"/>
           <p:cNvSpPr txBox="1"/>
           <p:nvPr/>
         </p:nvSpPr>
@@ -2310,7 +2253,7 @@
       </p:sp>
       <p:sp>
         <p:nvSpPr>
-          <p:cNvPr id="7" name="evidence-basis"/>
+          <p:cNvPr id="6" name="evidence-basis"/>
           <p:cNvSpPr txBox="1"/>
           <p:nvPr/>
         </p:nvSpPr>
@@ -2347,7 +2290,7 @@
       </p:sp>
       <p:sp>
         <p:nvSpPr>
-          <p:cNvPr id="8" name="evidence-rule"/>
+          <p:cNvPr id="7" name="evidence-rule"/>
           <p:cNvSpPr/>
           <p:nvPr/>
         </p:nvSpPr>
@@ -2381,7 +2324,7 @@
       </p:sp>
       <p:sp>
         <p:nvSpPr>
-          <p:cNvPr id="9" name="evidence-read-scrim"/>
+          <p:cNvPr id="8" name="evidence-read-scrim"/>
           <p:cNvSpPr/>
           <p:nvPr/>
         </p:nvSpPr>
@@ -2419,7 +2362,7 @@
       </p:sp>
       <p:graphicFrame>
         <p:nvGraphicFramePr>
-          <p:cNvPr id="10" name="dense-primary-chart"/>
+          <p:cNvPr id="9" name="dense-primary-chart"/>
           <p:cNvGraphicFramePr>
             <a:graphicFrameLocks xmlns:a="http://schemas.openxmlformats.org/drawingml/2006/main" noGrp="1"/>
           </p:cNvGraphicFramePr>
@@ -2431,13 +2374,13 @@
         </p:xfrm>
         <a:graphic xmlns:a="http://schemas.openxmlformats.org/drawingml/2006/main">
           <a:graphicData uri="http://schemas.openxmlformats.org/drawingml/2006/chart">
-            <c:chart xmlns:r="http://schemas.openxmlformats.org/officeDocument/2006/relationships" xmlns:c="http://schemas.openxmlformats.org/drawingml/2006/chart" r:id="Ra070ced91c624346"/>
+            <c:chart xmlns:r="http://schemas.openxmlformats.org/officeDocument/2006/relationships" xmlns:c="http://schemas.openxmlformats.org/drawingml/2006/chart" r:id="Ra5a3344c69fc44da"/>
           </a:graphicData>
         </a:graphic>
       </p:graphicFrame>
       <p:graphicFrame>
         <p:nvGraphicFramePr>
-          <p:cNvPr id="11" name="dense-secondary-chart"/>
+          <p:cNvPr id="10" name="dense-secondary-chart"/>
           <p:cNvGraphicFramePr>
             <a:graphicFrameLocks xmlns:a="http://schemas.openxmlformats.org/drawingml/2006/main" noGrp="1"/>
           </p:cNvGraphicFramePr>
@@ -2449,13 +2392,13 @@
         </p:xfrm>
         <a:graphic xmlns:a="http://schemas.openxmlformats.org/drawingml/2006/main">
           <a:graphicData uri="http://schemas.openxmlformats.org/drawingml/2006/chart">
-            <c:chart xmlns:r="http://schemas.openxmlformats.org/officeDocument/2006/relationships" xmlns:c="http://schemas.openxmlformats.org/drawingml/2006/chart" r:id="R9289b5b25137421a"/>
+            <c:chart xmlns:r="http://schemas.openxmlformats.org/officeDocument/2006/relationships" xmlns:c="http://schemas.openxmlformats.org/drawingml/2006/chart" r:id="Rffc35de571254104"/>
           </a:graphicData>
         </a:graphic>
       </p:graphicFrame>
       <p:sp>
         <p:nvSpPr>
-          <p:cNvPr id="12" name="dense-read-rule"/>
+          <p:cNvPr id="11" name="dense-read-rule"/>
           <p:cNvSpPr/>
           <p:nvPr/>
         </p:nvSpPr>
@@ -2489,7 +2432,7 @@
       </p:sp>
       <p:sp>
         <p:nvSpPr>
-          <p:cNvPr id="13" name="dense-read-label"/>
+          <p:cNvPr id="12" name="dense-read-label"/>
           <p:cNvSpPr txBox="1"/>
           <p:nvPr/>
         </p:nvSpPr>
@@ -2526,7 +2469,7 @@
       </p:sp>
       <p:sp>
         <p:nvSpPr>
-          <p:cNvPr id="14" name="dense-read-title"/>
+          <p:cNvPr id="13" name="dense-read-title"/>
           <p:cNvSpPr txBox="1"/>
           <p:nvPr/>
         </p:nvSpPr>
@@ -2563,7 +2506,7 @@
       </p:sp>
       <p:sp>
         <p:nvSpPr>
-          <p:cNvPr id="15" name="dense-read-body"/>
+          <p:cNvPr id="14" name="dense-read-body"/>
           <p:cNvSpPr txBox="1"/>
           <p:nvPr/>
         </p:nvSpPr>
@@ -2600,7 +2543,7 @@
       </p:sp>
       <p:sp>
         <p:nvSpPr>
-          <p:cNvPr id="16" name="evidence-band"/>
+          <p:cNvPr id="15" name="evidence-band"/>
           <p:cNvSpPr/>
           <p:nvPr/>
         </p:nvSpPr>
@@ -2636,7 +2579,7 @@
       </p:sp>
       <p:sp>
         <p:nvSpPr>
-          <p:cNvPr id="17" name="evidence-band-text"/>
+          <p:cNvPr id="16" name="evidence-band-text"/>
           <p:cNvSpPr txBox="1"/>
           <p:nvPr/>
         </p:nvSpPr>
@@ -2673,7 +2616,7 @@
       </p:sp>
       <p:sp>
         <p:nvSpPr>
-          <p:cNvPr id="18" name="source"/>
+          <p:cNvPr id="17" name="source"/>
           <p:cNvSpPr txBox="1"/>
           <p:nvPr/>
         </p:nvSpPr>
@@ -2710,7 +2653,7 @@
       </p:sp>
       <p:sp>
         <p:nvSpPr>
-          <p:cNvPr id="19" name="page-number"/>
+          <p:cNvPr id="18" name="page-number"/>
           <p:cNvSpPr txBox="1"/>
           <p:nvPr/>
         </p:nvSpPr>
@@ -3911,6 +3854,16 @@
 <file path=ppt/slides/slide5.xml><?xml version="1.0" encoding="utf-8"?>
 <p:sld xmlns:p="http://schemas.openxmlformats.org/presentationml/2006/main">
   <p:cSld name="Visual carrier">
+    <p:bg>
+      <p:bgPr>
+        <a:blipFill xmlns:a="http://schemas.openxmlformats.org/drawingml/2006/main">
+          <a:blip xmlns:r="http://schemas.openxmlformats.org/officeDocument/2006/relationships" r:embed="rIdOfficeKitImagee4bd683f73b7a543_1"/>
+          <a:stretch>
+            <a:fillRect/>
+          </a:stretch>
+        </a:blipFill>
+      </p:bgPr>
+    </p:bg>
     <p:spTree>
       <p:nvGrpSpPr>
         <p:cNvPr id="1" name=""/>
@@ -3925,38 +3878,9 @@
           <a:chExt cx="0" cy="0"/>
         </a:xfrm>
       </p:grpSpPr>
-      <p:pic>
-        <p:nvPicPr>
-          <p:cNvPr id="2" name="visual-field">
-            <a:extLst xmlns:a="http://schemas.openxmlformats.org/drawingml/2006/main">
-              <a:ext uri="{C183D7F6-B498-43B3-948B-1728B52AA6E4}">
-                <adec:decorative xmlns:adec="http://schemas.microsoft.com/office/drawing/2017/decorative" val="1"/>
-              </a:ext>
-            </a:extLst>
-          </p:cNvPr>
-          <p:cNvPicPr/>
-          <p:nvPr/>
-        </p:nvPicPr>
-        <p:blipFill>
-          <a:blip xmlns:r="http://schemas.openxmlformats.org/officeDocument/2006/relationships" xmlns:a="http://schemas.openxmlformats.org/drawingml/2006/main" r:embed="rIdOfficeKitImagee4bd683f73b7a543_1"/>
-          <a:srcRect xmlns:a="http://schemas.openxmlformats.org/drawingml/2006/main" l="0" t="34171" r="0" b="34171"/>
-          <a:stretch xmlns:a="http://schemas.openxmlformats.org/drawingml/2006/main">
-            <a:fillRect/>
-          </a:stretch>
-        </p:blipFill>
-        <p:spPr>
-          <a:xfrm xmlns:a="http://schemas.openxmlformats.org/drawingml/2006/main">
-            <a:off x="0" y="0"/>
-            <a:ext cx="15240000" cy="8572500"/>
-          </a:xfrm>
-          <a:prstGeom xmlns:a="http://schemas.openxmlformats.org/drawingml/2006/main" prst="rect">
-            <a:avLst/>
-          </a:prstGeom>
-        </p:spPr>
-      </p:pic>
-      <p:sp>
-        <p:nvSpPr>
-          <p:cNvPr id="3" name="visual-scrim"/>
+      <p:sp>
+        <p:nvSpPr>
+          <p:cNvPr id="2" name="visual-scrim"/>
           <p:cNvSpPr/>
           <p:nvPr/>
         </p:nvSpPr>
@@ -3994,7 +3918,7 @@
       </p:sp>
       <p:sp>
         <p:nvSpPr>
-          <p:cNvPr id="4" name="visual-eyebrow"/>
+          <p:cNvPr id="3" name="visual-eyebrow"/>
           <p:cNvSpPr txBox="1"/>
           <p:nvPr/>
         </p:nvSpPr>
@@ -4031,7 +3955,7 @@
       </p:sp>
       <p:sp>
         <p:nvSpPr>
-          <p:cNvPr id="5" name="visual-title"/>
+          <p:cNvPr id="4" name="visual-title"/>
           <p:cNvSpPr txBox="1"/>
           <p:nvPr/>
         </p:nvSpPr>
@@ -4068,7 +3992,7 @@
       </p:sp>
       <p:sp>
         <p:nvSpPr>
-          <p:cNvPr id="6" name="visual-body"/>
+          <p:cNvPr id="5" name="visual-body"/>
           <p:cNvSpPr txBox="1"/>
           <p:nvPr/>
         </p:nvSpPr>
@@ -4105,7 +4029,7 @@
       </p:sp>
       <p:sp>
         <p:nvSpPr>
-          <p:cNvPr id="7" name="visual-rule"/>
+          <p:cNvPr id="6" name="visual-rule"/>
           <p:cNvSpPr/>
           <p:nvPr/>
         </p:nvSpPr>
@@ -4139,7 +4063,7 @@
       </p:sp>
       <p:sp>
         <p:nvSpPr>
-          <p:cNvPr id="8" name="visual-label"/>
+          <p:cNvPr id="7" name="visual-label"/>
           <p:cNvSpPr txBox="1"/>
           <p:nvPr/>
         </p:nvSpPr>
@@ -4176,7 +4100,7 @@
       </p:sp>
       <p:sp>
         <p:nvSpPr>
-          <p:cNvPr id="9" name="source"/>
+          <p:cNvPr id="8" name="source"/>
           <p:cNvSpPr txBox="1"/>
           <p:nvPr/>
         </p:nvSpPr>
@@ -4213,7 +4137,7 @@
       </p:sp>
       <p:sp>
         <p:nvSpPr>
-          <p:cNvPr id="10" name="page-number"/>
+          <p:cNvPr id="9" name="page-number"/>
           <p:cNvSpPr txBox="1"/>
           <p:nvPr/>
         </p:nvSpPr>
@@ -4260,6 +4184,16 @@
 <file path=ppt/slides/slide6.xml><?xml version="1.0" encoding="utf-8"?>
 <p:sld xmlns:p="http://schemas.openxmlformats.org/presentationml/2006/main">
   <p:cSld name="Decision close">
+    <p:bg>
+      <p:bgPr>
+        <a:blipFill xmlns:a="http://schemas.openxmlformats.org/drawingml/2006/main">
+          <a:blip xmlns:r="http://schemas.openxmlformats.org/officeDocument/2006/relationships" r:embed="rIdOfficeKitImage59ee3aa5202fd02f_1"/>
+          <a:stretch>
+            <a:fillRect/>
+          </a:stretch>
+        </a:blipFill>
+      </p:bgPr>
+    </p:bg>
     <p:spTree>
       <p:nvGrpSpPr>
         <p:cNvPr id="1" name=""/>
@@ -4274,38 +4208,9 @@
           <a:chExt cx="0" cy="0"/>
         </a:xfrm>
       </p:grpSpPr>
-      <p:pic>
-        <p:nvPicPr>
-          <p:cNvPr id="2" name="close-visual-field">
-            <a:extLst xmlns:a="http://schemas.openxmlformats.org/drawingml/2006/main">
-              <a:ext uri="{C183D7F6-B498-43B3-948B-1728B52AA6E4}">
-                <adec:decorative xmlns:adec="http://schemas.microsoft.com/office/drawing/2017/decorative" val="1"/>
-              </a:ext>
-            </a:extLst>
-          </p:cNvPr>
-          <p:cNvPicPr/>
-          <p:nvPr/>
-        </p:nvPicPr>
-        <p:blipFill>
-          <a:blip xmlns:r="http://schemas.openxmlformats.org/officeDocument/2006/relationships" xmlns:a="http://schemas.openxmlformats.org/drawingml/2006/main" r:embed="rIdOfficeKitImage59ee3aa5202fd02f_1"/>
-          <a:srcRect xmlns:a="http://schemas.openxmlformats.org/drawingml/2006/main" l="0" t="34180" r="0" b="34180"/>
-          <a:stretch xmlns:a="http://schemas.openxmlformats.org/drawingml/2006/main">
-            <a:fillRect/>
-          </a:stretch>
-        </p:blipFill>
-        <p:spPr>
-          <a:xfrm xmlns:a="http://schemas.openxmlformats.org/drawingml/2006/main">
-            <a:off x="0" y="0"/>
-            <a:ext cx="15240000" cy="8572500"/>
-          </a:xfrm>
-          <a:prstGeom xmlns:a="http://schemas.openxmlformats.org/drawingml/2006/main" prst="rect">
-            <a:avLst/>
-          </a:prstGeom>
-        </p:spPr>
-      </p:pic>
-      <p:sp>
-        <p:nvSpPr>
-          <p:cNvPr id="3" name="close-paper-scrim"/>
+      <p:sp>
+        <p:nvSpPr>
+          <p:cNvPr id="2" name="close-paper-scrim"/>
           <p:cNvSpPr/>
           <p:nvPr/>
         </p:nvSpPr>
@@ -4343,7 +4248,7 @@
       </p:sp>
       <p:sp>
         <p:nvSpPr>
-          <p:cNvPr id="4" name="close-top-rule"/>
+          <p:cNvPr id="3" name="close-top-rule"/>
           <p:cNvSpPr/>
           <p:nvPr/>
         </p:nvSpPr>
@@ -4377,7 +4282,7 @@
       </p:sp>
       <p:sp>
         <p:nvSpPr>
-          <p:cNvPr id="5" name="VIOLET OPERATIONS · CLOSE"/>
+          <p:cNvPr id="4" name="VIOLET OPERATIONS · CLOSE"/>
           <p:cNvSpPr txBox="1"/>
           <p:nvPr/>
         </p:nvSpPr>
@@ -4414,7 +4319,7 @@
       </p:sp>
       <p:sp>
         <p:nvSpPr>
-          <p:cNvPr id="6" name="close-title"/>
+          <p:cNvPr id="5" name="close-title"/>
           <p:cNvSpPr txBox="1"/>
           <p:nvPr/>
         </p:nvSpPr>
@@ -4451,7 +4356,7 @@
       </p:sp>
       <p:sp>
         <p:nvSpPr>
-          <p:cNvPr id="7" name="close-basis"/>
+          <p:cNvPr id="6" name="close-basis"/>
           <p:cNvSpPr txBox="1"/>
           <p:nvPr/>
         </p:nvSpPr>
@@ -4488,7 +4393,7 @@
       </p:sp>
       <p:sp>
         <p:nvSpPr>
-          <p:cNvPr id="8" name="close-rule"/>
+          <p:cNvPr id="7" name="close-rule"/>
           <p:cNvSpPr/>
           <p:nvPr/>
         </p:nvSpPr>
@@ -4522,7 +4427,7 @@
       </p:sp>
       <p:sp>
         <p:nvSpPr>
-          <p:cNvPr id="9" name="close-number-0"/>
+          <p:cNvPr id="8" name="close-number-0"/>
           <p:cNvSpPr txBox="1"/>
           <p:nvPr/>
         </p:nvSpPr>
@@ -4559,7 +4464,7 @@
       </p:sp>
       <p:sp>
         <p:nvSpPr>
-          <p:cNvPr id="10" name="close-row-rule-0"/>
+          <p:cNvPr id="9" name="close-row-rule-0"/>
           <p:cNvSpPr/>
           <p:nvPr/>
         </p:nvSpPr>
@@ -4593,7 +4498,7 @@
       </p:sp>
       <p:sp>
         <p:nvSpPr>
-          <p:cNvPr id="11" name="close-label-0"/>
+          <p:cNvPr id="10" name="close-label-0"/>
           <p:cNvSpPr txBox="1"/>
           <p:nvPr/>
         </p:nvSpPr>
@@ -4630,7 +4535,7 @@
       </p:sp>
       <p:sp>
         <p:nvSpPr>
-          <p:cNvPr id="12" name="close-text-0"/>
+          <p:cNvPr id="11" name="close-text-0"/>
           <p:cNvSpPr txBox="1"/>
           <p:nvPr/>
         </p:nvSpPr>
@@ -4667,7 +4572,7 @@
       </p:sp>
       <p:sp>
         <p:nvSpPr>
-          <p:cNvPr id="13" name="close-number-1"/>
+          <p:cNvPr id="12" name="close-number-1"/>
           <p:cNvSpPr txBox="1"/>
           <p:nvPr/>
         </p:nvSpPr>
@@ -4704,7 +4609,7 @@
       </p:sp>
       <p:sp>
         <p:nvSpPr>
-          <p:cNvPr id="14" name="close-row-rule-1"/>
+          <p:cNvPr id="13" name="close-row-rule-1"/>
           <p:cNvSpPr/>
           <p:nvPr/>
         </p:nvSpPr>
@@ -4738,7 +4643,7 @@
       </p:sp>
       <p:sp>
         <p:nvSpPr>
-          <p:cNvPr id="15" name="close-label-1"/>
+          <p:cNvPr id="14" name="close-label-1"/>
           <p:cNvSpPr txBox="1"/>
           <p:nvPr/>
         </p:nvSpPr>
@@ -4775,7 +4680,7 @@
       </p:sp>
       <p:sp>
         <p:nvSpPr>
-          <p:cNvPr id="16" name="close-text-1"/>
+          <p:cNvPr id="15" name="close-text-1"/>
           <p:cNvSpPr txBox="1"/>
           <p:nvPr/>
         </p:nvSpPr>
@@ -4812,7 +4717,7 @@
       </p:sp>
       <p:sp>
         <p:nvSpPr>
-          <p:cNvPr id="17" name="close-number-2"/>
+          <p:cNvPr id="16" name="close-number-2"/>
           <p:cNvSpPr txBox="1"/>
           <p:nvPr/>
         </p:nvSpPr>
@@ -4849,7 +4754,7 @@
       </p:sp>
       <p:sp>
         <p:nvSpPr>
-          <p:cNvPr id="18" name="close-row-rule-2"/>
+          <p:cNvPr id="17" name="close-row-rule-2"/>
           <p:cNvSpPr/>
           <p:nvPr/>
         </p:nvSpPr>
@@ -4883,7 +4788,7 @@
       </p:sp>
       <p:sp>
         <p:nvSpPr>
-          <p:cNvPr id="19" name="close-label-2"/>
+          <p:cNvPr id="18" name="close-label-2"/>
           <p:cNvSpPr txBox="1"/>
           <p:nvPr/>
         </p:nvSpPr>
@@ -4920,7 +4825,7 @@
       </p:sp>
       <p:sp>
         <p:nvSpPr>
-          <p:cNvPr id="20" name="close-text-2"/>
+          <p:cNvPr id="19" name="close-text-2"/>
           <p:cNvSpPr txBox="1"/>
           <p:nvPr/>
         </p:nvSpPr>
@@ -4957,7 +4862,7 @@
       </p:sp>
       <p:sp>
         <p:nvSpPr>
-          <p:cNvPr id="21" name="next-panel"/>
+          <p:cNvPr id="20" name="next-panel"/>
           <p:cNvSpPr/>
           <p:nvPr/>
         </p:nvSpPr>
@@ -4993,7 +4898,7 @@
       </p:sp>
       <p:sp>
         <p:nvSpPr>
-          <p:cNvPr id="22" name="next-label"/>
+          <p:cNvPr id="21" name="next-label"/>
           <p:cNvSpPr txBox="1"/>
           <p:nvPr/>
         </p:nvSpPr>
@@ -5030,7 +4935,7 @@
       </p:sp>
       <p:sp>
         <p:nvSpPr>
-          <p:cNvPr id="23" name="next-text"/>
+          <p:cNvPr id="22" name="next-text"/>
           <p:cNvSpPr txBox="1"/>
           <p:nvPr/>
         </p:nvSpPr>
@@ -5067,7 +4972,7 @@
       </p:sp>
       <p:sp>
         <p:nvSpPr>
-          <p:cNvPr id="24" name="next-foot"/>
+          <p:cNvPr id="23" name="next-foot"/>
           <p:cNvSpPr txBox="1"/>
           <p:nvPr/>
         </p:nvSpPr>
@@ -5104,7 +5009,7 @@
       </p:sp>
       <p:sp>
         <p:nvSpPr>
-          <p:cNvPr id="25" name="source"/>
+          <p:cNvPr id="24" name="source"/>
           <p:cNvSpPr txBox="1"/>
           <p:nvPr/>
         </p:nvSpPr>
@@ -5141,7 +5046,7 @@
       </p:sp>
       <p:sp>
         <p:nvSpPr>
-          <p:cNvPr id="26" name="page-number"/>
+          <p:cNvPr id="25" name="page-number"/>
           <p:cNvSpPr txBox="1"/>
           <p:nvPr/>
         </p:nvSpPr>

--- a/skills/presentation-template-library/skills/artifact-template-violet-operations/assets/reference.pptx
+++ b/skills/presentation-template-library/skills/artifact-template-violet-operations/assets/reference.pptx
@@ -484,801 +484,6 @@
     <p:bg>
       <p:bgPr>
         <a:blipFill xmlns:a="http://schemas.openxmlformats.org/drawingml/2006/main">
-          <a:blip xmlns:r="http://schemas.openxmlformats.org/officeDocument/2006/relationships" r:embed="rIdOfficeKitImage33b8c33a8fc3d613_1"/>
-          <a:stretch>
-            <a:fillRect/>
-          </a:stretch>
-        </a:blipFill>
-      </p:bgPr>
-    </p:bg>
-    <p:spTree>
-      <p:nvGrpSpPr>
-        <p:cNvPr id="1" name=""/>
-        <p:cNvGrpSpPr/>
-        <p:nvPr/>
-      </p:nvGrpSpPr>
-      <p:grpSpPr>
-        <a:xfrm xmlns:a="http://schemas.openxmlformats.org/drawingml/2006/main">
-          <a:off x="0" y="0"/>
-          <a:ext cx="0" cy="0"/>
-          <a:chOff x="0" y="0"/>
-          <a:chExt cx="0" cy="0"/>
-        </a:xfrm>
-      </p:grpSpPr>
-      <p:sp>
-        <p:nvSpPr>
-          <p:cNvPr id="2" name="cover-paper-scrim"/>
-          <p:cNvSpPr/>
-          <p:nvPr/>
-        </p:nvSpPr>
-        <p:spPr>
-          <a:xfrm xmlns:a="http://schemas.openxmlformats.org/drawingml/2006/main">
-            <a:off x="0" y="0"/>
-            <a:ext cx="9525000" cy="8572500"/>
-          </a:xfrm>
-          <a:prstGeom xmlns:a="http://schemas.openxmlformats.org/drawingml/2006/main" prst="rect">
-            <a:avLst/>
-          </a:prstGeom>
-          <a:solidFill xmlns:a="http://schemas.openxmlformats.org/drawingml/2006/main">
-            <a:srgbClr val="101115">
-              <a:alpha val="100000"/>
-            </a:srgbClr>
-          </a:solidFill>
-          <a:ln xmlns:a="http://schemas.openxmlformats.org/drawingml/2006/main" w="0">
-            <a:solidFill>
-              <a:srgbClr val="101115"/>
-            </a:solidFill>
-            <a:prstDash val="solid"/>
-          </a:ln>
-        </p:spPr>
-        <p:txBody>
-          <a:bodyPr xmlns:a="http://schemas.openxmlformats.org/drawingml/2006/main" wrap="square" lIns="0" tIns="0" rIns="0" bIns="0" anchor="t"/>
-          <a:lstStyle xmlns:a="http://schemas.openxmlformats.org/drawingml/2006/main"/>
-          <a:p xmlns:a="http://schemas.openxmlformats.org/drawingml/2006/main">
-            <a:r>
-              <a:rPr lang="en-US"/>
-              <a:t/>
-            </a:r>
-            <a:endParaRPr lang="en-US"/>
-          </a:p>
-        </p:txBody>
-      </p:sp>
-      <p:sp>
-        <p:nvSpPr>
-          <p:cNvPr id="3" name="top-rule"/>
-          <p:cNvSpPr/>
-          <p:nvPr/>
-        </p:nvSpPr>
-        <p:spPr>
-          <a:xfrm xmlns:a="http://schemas.openxmlformats.org/drawingml/2006/main">
-            <a:off x="838200" y="666750"/>
-            <a:ext cx="13563600" cy="0"/>
-          </a:xfrm>
-          <a:prstGeom xmlns:a="http://schemas.openxmlformats.org/drawingml/2006/main" prst="line">
-            <a:avLst/>
-          </a:prstGeom>
-          <a:noFill xmlns:a="http://schemas.openxmlformats.org/drawingml/2006/main"/>
-          <a:ln xmlns:a="http://schemas.openxmlformats.org/drawingml/2006/main" w="38100">
-            <a:solidFill>
-              <a:srgbClr val="7047FF"/>
-            </a:solidFill>
-            <a:prstDash val="solid"/>
-          </a:ln>
-        </p:spPr>
-        <p:txBody>
-          <a:bodyPr xmlns:a="http://schemas.openxmlformats.org/drawingml/2006/main" wrap="square" lIns="0" tIns="0" rIns="0" bIns="0" anchor="t"/>
-          <a:lstStyle xmlns:a="http://schemas.openxmlformats.org/drawingml/2006/main"/>
-          <a:p xmlns:a="http://schemas.openxmlformats.org/drawingml/2006/main">
-            <a:r>
-              <a:rPr lang="en-US"/>
-              <a:t/>
-            </a:r>
-            <a:endParaRPr lang="en-US"/>
-          </a:p>
-        </p:txBody>
-      </p:sp>
-      <p:sp>
-        <p:nvSpPr>
-          <p:cNvPr id="4" name="eyebrow"/>
-          <p:cNvSpPr txBox="1"/>
-          <p:nvPr/>
-        </p:nvSpPr>
-        <p:spPr>
-          <a:xfrm xmlns:a="http://schemas.openxmlformats.org/drawingml/2006/main">
-            <a:off x="914400" y="895350"/>
-            <a:ext cx="7239000" cy="228600"/>
-          </a:xfrm>
-          <a:prstGeom xmlns:a="http://schemas.openxmlformats.org/drawingml/2006/main" prst="rect">
-            <a:avLst/>
-          </a:prstGeom>
-          <a:noFill xmlns:a="http://schemas.openxmlformats.org/drawingml/2006/main"/>
-          <a:ln xmlns:a="http://schemas.openxmlformats.org/drawingml/2006/main" w="0">
-            <a:noFill/>
-          </a:ln>
-        </p:spPr>
-        <p:txBody>
-          <a:bodyPr xmlns:a="http://schemas.openxmlformats.org/drawingml/2006/main" wrap="square" lIns="0" tIns="0" rIns="0" bIns="0" anchor="t"/>
-          <a:lstStyle xmlns:a="http://schemas.openxmlformats.org/drawingml/2006/main"/>
-          <a:p xmlns:a="http://schemas.openxmlformats.org/drawingml/2006/main">
-            <a:r>
-              <a:rPr lang="en-US" sz="1200" b="1">
-                <a:solidFill>
-                  <a:srgbClr val="7047FF"/>
-                </a:solidFill>
-                <a:latin typeface="Tahoma"/>
-                <a:ea typeface="Tahoma"/>
-              </a:rPr>
-              <a:t>WORK · OFFICEKIT CALIBRATION</a:t>
-            </a:r>
-            <a:endParaRPr lang="en-US"/>
-          </a:p>
-        </p:txBody>
-      </p:sp>
-      <p:sp>
-        <p:nvSpPr>
-          <p:cNvPr id="5" name="cover-title"/>
-          <p:cNvSpPr txBox="1"/>
-          <p:nvPr/>
-        </p:nvSpPr>
-        <p:spPr>
-          <a:xfrm xmlns:a="http://schemas.openxmlformats.org/drawingml/2006/main">
-            <a:off x="914400" y="1571625"/>
-            <a:ext cx="8382000" cy="1066800"/>
-          </a:xfrm>
-          <a:prstGeom xmlns:a="http://schemas.openxmlformats.org/drawingml/2006/main" prst="rect">
-            <a:avLst/>
-          </a:prstGeom>
-          <a:noFill xmlns:a="http://schemas.openxmlformats.org/drawingml/2006/main"/>
-          <a:ln xmlns:a="http://schemas.openxmlformats.org/drawingml/2006/main" w="0">
-            <a:noFill/>
-          </a:ln>
-        </p:spPr>
-        <p:txBody>
-          <a:bodyPr xmlns:a="http://schemas.openxmlformats.org/drawingml/2006/main" wrap="square" lIns="0" tIns="0" rIns="0" bIns="0" anchor="t"/>
-          <a:lstStyle xmlns:a="http://schemas.openxmlformats.org/drawingml/2006/main"/>
-          <a:p xmlns:a="http://schemas.openxmlformats.org/drawingml/2006/main">
-            <a:r>
-              <a:rPr lang="en-US" sz="3600" b="1">
-                <a:solidFill>
-                  <a:srgbClr val="F8F8F7"/>
-                </a:solidFill>
-                <a:latin typeface="Tahoma"/>
-                <a:ea typeface="Tahoma"/>
-              </a:rPr>
-              <a:t>Violet Operations: a claim worth testing</a:t>
-            </a:r>
-            <a:endParaRPr lang="en-US"/>
-          </a:p>
-        </p:txBody>
-      </p:sp>
-      <p:sp>
-        <p:nvSpPr>
-          <p:cNvPr id="6" name="cover-subtitle"/>
-          <p:cNvSpPr txBox="1"/>
-          <p:nvPr/>
-        </p:nvSpPr>
-        <p:spPr>
-          <a:xfrm xmlns:a="http://schemas.openxmlformats.org/drawingml/2006/main">
-            <a:off x="952500" y="2857500"/>
-            <a:ext cx="6858000" cy="323850"/>
-          </a:xfrm>
-          <a:prstGeom xmlns:a="http://schemas.openxmlformats.org/drawingml/2006/main" prst="rect">
-            <a:avLst/>
-          </a:prstGeom>
-          <a:noFill xmlns:a="http://schemas.openxmlformats.org/drawingml/2006/main"/>
-          <a:ln xmlns:a="http://schemas.openxmlformats.org/drawingml/2006/main" w="0">
-            <a:noFill/>
-          </a:ln>
-        </p:spPr>
-        <p:txBody>
-          <a:bodyPr xmlns:a="http://schemas.openxmlformats.org/drawingml/2006/main" wrap="square" lIns="0" tIns="0" rIns="0" bIns="0" anchor="t"/>
-          <a:lstStyle xmlns:a="http://schemas.openxmlformats.org/drawingml/2006/main"/>
-          <a:p xmlns:a="http://schemas.openxmlformats.org/drawingml/2006/main">
-            <a:r>
-              <a:rPr lang="en-US" sz="1725">
-                <a:solidFill>
-                  <a:srgbClr val="7047FF"/>
-                </a:solidFill>
-                <a:latin typeface="Tahoma"/>
-                <a:ea typeface="Tahoma"/>
-              </a:rPr>
-              <a:t>A clean-room reference for evidence, direction, and a decision.</a:t>
-            </a:r>
-            <a:endParaRPr lang="en-US"/>
-          </a:p>
-        </p:txBody>
-      </p:sp>
-      <p:sp>
-        <p:nvSpPr>
-          <p:cNvPr id="7" name="cover-rule"/>
-          <p:cNvSpPr/>
-          <p:nvPr/>
-        </p:nvSpPr>
-        <p:spPr>
-          <a:xfrm xmlns:a="http://schemas.openxmlformats.org/drawingml/2006/main">
-            <a:off x="914400" y="3524250"/>
-            <a:ext cx="7658100" cy="0"/>
-          </a:xfrm>
-          <a:prstGeom xmlns:a="http://schemas.openxmlformats.org/drawingml/2006/main" prst="line">
-            <a:avLst/>
-          </a:prstGeom>
-          <a:noFill xmlns:a="http://schemas.openxmlformats.org/drawingml/2006/main"/>
-          <a:ln xmlns:a="http://schemas.openxmlformats.org/drawingml/2006/main" w="25400">
-            <a:solidFill>
-              <a:srgbClr val="7F8081"/>
-            </a:solidFill>
-            <a:prstDash val="solid"/>
-          </a:ln>
-        </p:spPr>
-        <p:txBody>
-          <a:bodyPr xmlns:a="http://schemas.openxmlformats.org/drawingml/2006/main" wrap="square" lIns="0" tIns="0" rIns="0" bIns="0" anchor="t"/>
-          <a:lstStyle xmlns:a="http://schemas.openxmlformats.org/drawingml/2006/main"/>
-          <a:p xmlns:a="http://schemas.openxmlformats.org/drawingml/2006/main">
-            <a:r>
-              <a:rPr lang="en-US"/>
-              <a:t/>
-            </a:r>
-            <a:endParaRPr lang="en-US"/>
-          </a:p>
-        </p:txBody>
-      </p:sp>
-      <p:sp>
-        <p:nvSpPr>
-          <p:cNvPr id="8" name="cover-basis"/>
-          <p:cNvSpPr txBox="1"/>
-          <p:nvPr/>
-        </p:nvSpPr>
-        <p:spPr>
-          <a:xfrm xmlns:a="http://schemas.openxmlformats.org/drawingml/2006/main">
-            <a:off x="952500" y="3762375"/>
-            <a:ext cx="7810500" cy="266700"/>
-          </a:xfrm>
-          <a:prstGeom xmlns:a="http://schemas.openxmlformats.org/drawingml/2006/main" prst="rect">
-            <a:avLst/>
-          </a:prstGeom>
-          <a:noFill xmlns:a="http://schemas.openxmlformats.org/drawingml/2006/main"/>
-          <a:ln xmlns:a="http://schemas.openxmlformats.org/drawingml/2006/main" w="0">
-            <a:noFill/>
-          </a:ln>
-        </p:spPr>
-        <p:txBody>
-          <a:bodyPr xmlns:a="http://schemas.openxmlformats.org/drawingml/2006/main" wrap="square" lIns="0" tIns="0" rIns="0" bIns="0" anchor="t"/>
-          <a:lstStyle xmlns:a="http://schemas.openxmlformats.org/drawingml/2006/main"/>
-          <a:p xmlns:a="http://schemas.openxmlformats.org/drawingml/2006/main">
-            <a:r>
-              <a:rPr lang="en-US" sz="1350">
-                <a:solidFill>
-                  <a:srgbClr val="F8F8F7"/>
-                </a:solidFill>
-                <a:latin typeface="Tahoma"/>
-                <a:ea typeface="Tahoma"/>
-              </a:rPr>
-              <a:t>One visual language · four page roles · native editable objects</a:t>
-            </a:r>
-            <a:endParaRPr lang="en-US"/>
-          </a:p>
-        </p:txBody>
-      </p:sp>
-      <p:sp>
-        <p:nvSpPr>
-          <p:cNvPr id="9" name="cover-thesis"/>
-          <p:cNvSpPr txBox="1"/>
-          <p:nvPr/>
-        </p:nvSpPr>
-        <p:spPr>
-          <a:xfrm xmlns:a="http://schemas.openxmlformats.org/drawingml/2006/main">
-            <a:off x="952500" y="4810125"/>
-            <a:ext cx="6667500" cy="628650"/>
-          </a:xfrm>
-          <a:prstGeom xmlns:a="http://schemas.openxmlformats.org/drawingml/2006/main" prst="rect">
-            <a:avLst/>
-          </a:prstGeom>
-          <a:noFill xmlns:a="http://schemas.openxmlformats.org/drawingml/2006/main"/>
-          <a:ln xmlns:a="http://schemas.openxmlformats.org/drawingml/2006/main" w="0">
-            <a:noFill/>
-          </a:ln>
-        </p:spPr>
-        <p:txBody>
-          <a:bodyPr xmlns:a="http://schemas.openxmlformats.org/drawingml/2006/main" wrap="square" lIns="0" tIns="0" rIns="0" bIns="0" anchor="t"/>
-          <a:lstStyle xmlns:a="http://schemas.openxmlformats.org/drawingml/2006/main"/>
-          <a:p xmlns:a="http://schemas.openxmlformats.org/drawingml/2006/main">
-            <a:r>
-              <a:rPr lang="en-US" sz="1875" b="1">
-                <a:solidFill>
-                  <a:srgbClr val="F8F8F7"/>
-                </a:solidFill>
-                <a:latin typeface="Tahoma"/>
-                <a:ea typeface="Tahoma"/>
-              </a:rPr>
-              <a:t>A visible operating signal creates a shared next action.</a:t>
-            </a:r>
-            <a:endParaRPr lang="en-US"/>
-          </a:p>
-        </p:txBody>
-      </p:sp>
-      <p:sp>
-        <p:nvSpPr>
-          <p:cNvPr id="10" name="cover-source"/>
-          <p:cNvSpPr txBox="1"/>
-          <p:nvPr/>
-        </p:nvSpPr>
-        <p:spPr>
-          <a:xfrm xmlns:a="http://schemas.openxmlformats.org/drawingml/2006/main">
-            <a:off x="952500" y="7315200"/>
-            <a:ext cx="9048750" cy="228600"/>
-          </a:xfrm>
-          <a:prstGeom xmlns:a="http://schemas.openxmlformats.org/drawingml/2006/main" prst="rect">
-            <a:avLst/>
-          </a:prstGeom>
-          <a:noFill xmlns:a="http://schemas.openxmlformats.org/drawingml/2006/main"/>
-          <a:ln xmlns:a="http://schemas.openxmlformats.org/drawingml/2006/main" w="0">
-            <a:noFill/>
-          </a:ln>
-        </p:spPr>
-        <p:txBody>
-          <a:bodyPr xmlns:a="http://schemas.openxmlformats.org/drawingml/2006/main" wrap="square" lIns="0" tIns="0" rIns="0" bIns="0" anchor="t"/>
-          <a:lstStyle xmlns:a="http://schemas.openxmlformats.org/drawingml/2006/main"/>
-          <a:p xmlns:a="http://schemas.openxmlformats.org/drawingml/2006/main">
-            <a:r>
-              <a:rPr lang="en-US" sz="1050">
-                <a:solidFill>
-                  <a:srgbClr val="7F8081"/>
-                </a:solidFill>
-                <a:latin typeface="Tahoma"/>
-                <a:ea typeface="Tahoma"/>
-              </a:rPr>
-              <a:t>OfficeKit original clean-room calibration · fictional content · 2026-08-29</a:t>
-            </a:r>
-            <a:endParaRPr lang="en-US"/>
-          </a:p>
-        </p:txBody>
-      </p:sp>
-      <p:sp>
-        <p:nvSpPr>
-          <p:cNvPr id="11" name="page-number"/>
-          <p:cNvSpPr txBox="1"/>
-          <p:nvPr/>
-        </p:nvSpPr>
-        <p:spPr>
-          <a:xfrm xmlns:a="http://schemas.openxmlformats.org/drawingml/2006/main">
-            <a:off x="13335000" y="7810500"/>
-            <a:ext cx="952500" cy="209550"/>
-          </a:xfrm>
-          <a:prstGeom xmlns:a="http://schemas.openxmlformats.org/drawingml/2006/main" prst="rect">
-            <a:avLst/>
-          </a:prstGeom>
-          <a:noFill xmlns:a="http://schemas.openxmlformats.org/drawingml/2006/main"/>
-          <a:ln xmlns:a="http://schemas.openxmlformats.org/drawingml/2006/main" w="0">
-            <a:noFill/>
-          </a:ln>
-        </p:spPr>
-        <p:txBody>
-          <a:bodyPr xmlns:a="http://schemas.openxmlformats.org/drawingml/2006/main" wrap="square" lIns="0" tIns="0" rIns="0" bIns="0" anchor="t"/>
-          <a:lstStyle xmlns:a="http://schemas.openxmlformats.org/drawingml/2006/main"/>
-          <a:p xmlns:a="http://schemas.openxmlformats.org/drawingml/2006/main">
-            <a:pPr algn="r"/>
-            <a:r>
-              <a:rPr lang="en-US" sz="1050">
-                <a:solidFill>
-                  <a:srgbClr val="7F8081"/>
-                </a:solidFill>
-                <a:latin typeface="Tahoma"/>
-                <a:ea typeface="Tahoma"/>
-              </a:rPr>
-              <a:t>1 / 6</a:t>
-            </a:r>
-            <a:endParaRPr lang="en-US"/>
-          </a:p>
-        </p:txBody>
-      </p:sp>
-      <p:sp>
-        <p:nvSpPr>
-          <p:cNvPr id="12" name="anchor-field"/>
-          <p:cNvSpPr/>
-          <p:nvPr/>
-        </p:nvSpPr>
-        <p:spPr>
-          <a:xfrm xmlns:a="http://schemas.openxmlformats.org/drawingml/2006/main">
-            <a:off x="11620500" y="1790700"/>
-            <a:ext cx="2095500" cy="2286000"/>
-          </a:xfrm>
-          <a:prstGeom xmlns:a="http://schemas.openxmlformats.org/drawingml/2006/main" prst="rect">
-            <a:avLst/>
-          </a:prstGeom>
-          <a:solidFill xmlns:a="http://schemas.openxmlformats.org/drawingml/2006/main">
-            <a:srgbClr val="F3F5F8"/>
-          </a:solidFill>
-          <a:ln xmlns:a="http://schemas.openxmlformats.org/drawingml/2006/main" w="25400">
-            <a:solidFill>
-              <a:srgbClr val="7047FF"/>
-            </a:solidFill>
-            <a:prstDash val="solid"/>
-          </a:ln>
-        </p:spPr>
-        <p:txBody>
-          <a:bodyPr xmlns:a="http://schemas.openxmlformats.org/drawingml/2006/main" wrap="square" lIns="0" tIns="0" rIns="0" bIns="0" anchor="t"/>
-          <a:lstStyle xmlns:a="http://schemas.openxmlformats.org/drawingml/2006/main"/>
-          <a:p xmlns:a="http://schemas.openxmlformats.org/drawingml/2006/main">
-            <a:r>
-              <a:rPr lang="en-US"/>
-              <a:t/>
-            </a:r>
-            <a:endParaRPr lang="en-US"/>
-          </a:p>
-        </p:txBody>
-      </p:sp>
-      <p:sp>
-        <p:nvSpPr>
-          <p:cNvPr id="13" name="anchor-grid-0-0"/>
-          <p:cNvSpPr/>
-          <p:nvPr/>
-        </p:nvSpPr>
-        <p:spPr>
-          <a:xfrm xmlns:a="http://schemas.openxmlformats.org/drawingml/2006/main">
-            <a:off x="11925300" y="2152650"/>
-            <a:ext cx="266700" cy="285750"/>
-          </a:xfrm>
-          <a:prstGeom xmlns:a="http://schemas.openxmlformats.org/drawingml/2006/main" prst="rect">
-            <a:avLst/>
-          </a:prstGeom>
-          <a:solidFill xmlns:a="http://schemas.openxmlformats.org/drawingml/2006/main">
-            <a:srgbClr val="7047FF"/>
-          </a:solidFill>
-          <a:ln xmlns:a="http://schemas.openxmlformats.org/drawingml/2006/main" w="12700">
-            <a:solidFill>
-              <a:srgbClr val="7047FF"/>
-            </a:solidFill>
-            <a:prstDash val="solid"/>
-          </a:ln>
-        </p:spPr>
-        <p:txBody>
-          <a:bodyPr xmlns:a="http://schemas.openxmlformats.org/drawingml/2006/main" wrap="square" lIns="0" tIns="0" rIns="0" bIns="0" anchor="t"/>
-          <a:lstStyle xmlns:a="http://schemas.openxmlformats.org/drawingml/2006/main"/>
-          <a:p xmlns:a="http://schemas.openxmlformats.org/drawingml/2006/main">
-            <a:r>
-              <a:rPr lang="en-US"/>
-              <a:t/>
-            </a:r>
-            <a:endParaRPr lang="en-US"/>
-          </a:p>
-        </p:txBody>
-      </p:sp>
-      <p:sp>
-        <p:nvSpPr>
-          <p:cNvPr id="14" name="anchor-grid-0-1"/>
-          <p:cNvSpPr/>
-          <p:nvPr/>
-        </p:nvSpPr>
-        <p:spPr>
-          <a:xfrm xmlns:a="http://schemas.openxmlformats.org/drawingml/2006/main">
-            <a:off x="12420600" y="2152650"/>
-            <a:ext cx="266700" cy="285750"/>
-          </a:xfrm>
-          <a:prstGeom xmlns:a="http://schemas.openxmlformats.org/drawingml/2006/main" prst="rect">
-            <a:avLst/>
-          </a:prstGeom>
-          <a:solidFill xmlns:a="http://schemas.openxmlformats.org/drawingml/2006/main">
-            <a:srgbClr val="7047FF"/>
-          </a:solidFill>
-          <a:ln xmlns:a="http://schemas.openxmlformats.org/drawingml/2006/main" w="12700">
-            <a:solidFill>
-              <a:srgbClr val="7047FF"/>
-            </a:solidFill>
-            <a:prstDash val="solid"/>
-          </a:ln>
-        </p:spPr>
-        <p:txBody>
-          <a:bodyPr xmlns:a="http://schemas.openxmlformats.org/drawingml/2006/main" wrap="square" lIns="0" tIns="0" rIns="0" bIns="0" anchor="t"/>
-          <a:lstStyle xmlns:a="http://schemas.openxmlformats.org/drawingml/2006/main"/>
-          <a:p xmlns:a="http://schemas.openxmlformats.org/drawingml/2006/main">
-            <a:r>
-              <a:rPr lang="en-US"/>
-              <a:t/>
-            </a:r>
-            <a:endParaRPr lang="en-US"/>
-          </a:p>
-        </p:txBody>
-      </p:sp>
-      <p:sp>
-        <p:nvSpPr>
-          <p:cNvPr id="15" name="anchor-grid-0-2"/>
-          <p:cNvSpPr/>
-          <p:nvPr/>
-        </p:nvSpPr>
-        <p:spPr>
-          <a:xfrm xmlns:a="http://schemas.openxmlformats.org/drawingml/2006/main">
-            <a:off x="12915900" y="2152650"/>
-            <a:ext cx="266700" cy="285750"/>
-          </a:xfrm>
-          <a:prstGeom xmlns:a="http://schemas.openxmlformats.org/drawingml/2006/main" prst="rect">
-            <a:avLst/>
-          </a:prstGeom>
-          <a:solidFill xmlns:a="http://schemas.openxmlformats.org/drawingml/2006/main">
-            <a:srgbClr val="101115"/>
-          </a:solidFill>
-          <a:ln xmlns:a="http://schemas.openxmlformats.org/drawingml/2006/main" w="12700">
-            <a:solidFill>
-              <a:srgbClr val="7047FF"/>
-            </a:solidFill>
-            <a:prstDash val="solid"/>
-          </a:ln>
-        </p:spPr>
-        <p:txBody>
-          <a:bodyPr xmlns:a="http://schemas.openxmlformats.org/drawingml/2006/main" wrap="square" lIns="0" tIns="0" rIns="0" bIns="0" anchor="t"/>
-          <a:lstStyle xmlns:a="http://schemas.openxmlformats.org/drawingml/2006/main"/>
-          <a:p xmlns:a="http://schemas.openxmlformats.org/drawingml/2006/main">
-            <a:r>
-              <a:rPr lang="en-US"/>
-              <a:t/>
-            </a:r>
-            <a:endParaRPr lang="en-US"/>
-          </a:p>
-        </p:txBody>
-      </p:sp>
-      <p:sp>
-        <p:nvSpPr>
-          <p:cNvPr id="16" name="anchor-grid-1-0"/>
-          <p:cNvSpPr/>
-          <p:nvPr/>
-        </p:nvSpPr>
-        <p:spPr>
-          <a:xfrm xmlns:a="http://schemas.openxmlformats.org/drawingml/2006/main">
-            <a:off x="11925300" y="2686050"/>
-            <a:ext cx="266700" cy="285750"/>
-          </a:xfrm>
-          <a:prstGeom xmlns:a="http://schemas.openxmlformats.org/drawingml/2006/main" prst="rect">
-            <a:avLst/>
-          </a:prstGeom>
-          <a:solidFill xmlns:a="http://schemas.openxmlformats.org/drawingml/2006/main">
-            <a:srgbClr val="7047FF"/>
-          </a:solidFill>
-          <a:ln xmlns:a="http://schemas.openxmlformats.org/drawingml/2006/main" w="12700">
-            <a:solidFill>
-              <a:srgbClr val="7047FF"/>
-            </a:solidFill>
-            <a:prstDash val="solid"/>
-          </a:ln>
-        </p:spPr>
-        <p:txBody>
-          <a:bodyPr xmlns:a="http://schemas.openxmlformats.org/drawingml/2006/main" wrap="square" lIns="0" tIns="0" rIns="0" bIns="0" anchor="t"/>
-          <a:lstStyle xmlns:a="http://schemas.openxmlformats.org/drawingml/2006/main"/>
-          <a:p xmlns:a="http://schemas.openxmlformats.org/drawingml/2006/main">
-            <a:r>
-              <a:rPr lang="en-US"/>
-              <a:t/>
-            </a:r>
-            <a:endParaRPr lang="en-US"/>
-          </a:p>
-        </p:txBody>
-      </p:sp>
-      <p:sp>
-        <p:nvSpPr>
-          <p:cNvPr id="17" name="anchor-grid-1-1"/>
-          <p:cNvSpPr/>
-          <p:nvPr/>
-        </p:nvSpPr>
-        <p:spPr>
-          <a:xfrm xmlns:a="http://schemas.openxmlformats.org/drawingml/2006/main">
-            <a:off x="12420600" y="2686050"/>
-            <a:ext cx="266700" cy="285750"/>
-          </a:xfrm>
-          <a:prstGeom xmlns:a="http://schemas.openxmlformats.org/drawingml/2006/main" prst="rect">
-            <a:avLst/>
-          </a:prstGeom>
-          <a:solidFill xmlns:a="http://schemas.openxmlformats.org/drawingml/2006/main">
-            <a:srgbClr val="7047FF"/>
-          </a:solidFill>
-          <a:ln xmlns:a="http://schemas.openxmlformats.org/drawingml/2006/main" w="12700">
-            <a:solidFill>
-              <a:srgbClr val="7047FF"/>
-            </a:solidFill>
-            <a:prstDash val="solid"/>
-          </a:ln>
-        </p:spPr>
-        <p:txBody>
-          <a:bodyPr xmlns:a="http://schemas.openxmlformats.org/drawingml/2006/main" wrap="square" lIns="0" tIns="0" rIns="0" bIns="0" anchor="t"/>
-          <a:lstStyle xmlns:a="http://schemas.openxmlformats.org/drawingml/2006/main"/>
-          <a:p xmlns:a="http://schemas.openxmlformats.org/drawingml/2006/main">
-            <a:r>
-              <a:rPr lang="en-US"/>
-              <a:t/>
-            </a:r>
-            <a:endParaRPr lang="en-US"/>
-          </a:p>
-        </p:txBody>
-      </p:sp>
-      <p:sp>
-        <p:nvSpPr>
-          <p:cNvPr id="18" name="anchor-grid-1-2"/>
-          <p:cNvSpPr/>
-          <p:nvPr/>
-        </p:nvSpPr>
-        <p:spPr>
-          <a:xfrm xmlns:a="http://schemas.openxmlformats.org/drawingml/2006/main">
-            <a:off x="12915900" y="2686050"/>
-            <a:ext cx="266700" cy="285750"/>
-          </a:xfrm>
-          <a:prstGeom xmlns:a="http://schemas.openxmlformats.org/drawingml/2006/main" prst="rect">
-            <a:avLst/>
-          </a:prstGeom>
-          <a:solidFill xmlns:a="http://schemas.openxmlformats.org/drawingml/2006/main">
-            <a:srgbClr val="101115"/>
-          </a:solidFill>
-          <a:ln xmlns:a="http://schemas.openxmlformats.org/drawingml/2006/main" w="12700">
-            <a:solidFill>
-              <a:srgbClr val="7047FF"/>
-            </a:solidFill>
-            <a:prstDash val="solid"/>
-          </a:ln>
-        </p:spPr>
-        <p:txBody>
-          <a:bodyPr xmlns:a="http://schemas.openxmlformats.org/drawingml/2006/main" wrap="square" lIns="0" tIns="0" rIns="0" bIns="0" anchor="t"/>
-          <a:lstStyle xmlns:a="http://schemas.openxmlformats.org/drawingml/2006/main"/>
-          <a:p xmlns:a="http://schemas.openxmlformats.org/drawingml/2006/main">
-            <a:r>
-              <a:rPr lang="en-US"/>
-              <a:t/>
-            </a:r>
-            <a:endParaRPr lang="en-US"/>
-          </a:p>
-        </p:txBody>
-      </p:sp>
-      <p:sp>
-        <p:nvSpPr>
-          <p:cNvPr id="19" name="anchor-grid-2-0"/>
-          <p:cNvSpPr/>
-          <p:nvPr/>
-        </p:nvSpPr>
-        <p:spPr>
-          <a:xfrm xmlns:a="http://schemas.openxmlformats.org/drawingml/2006/main">
-            <a:off x="11925300" y="3219450"/>
-            <a:ext cx="266700" cy="285750"/>
-          </a:xfrm>
-          <a:prstGeom xmlns:a="http://schemas.openxmlformats.org/drawingml/2006/main" prst="rect">
-            <a:avLst/>
-          </a:prstGeom>
-          <a:solidFill xmlns:a="http://schemas.openxmlformats.org/drawingml/2006/main">
-            <a:srgbClr val="7047FF"/>
-          </a:solidFill>
-          <a:ln xmlns:a="http://schemas.openxmlformats.org/drawingml/2006/main" w="12700">
-            <a:solidFill>
-              <a:srgbClr val="7047FF"/>
-            </a:solidFill>
-            <a:prstDash val="solid"/>
-          </a:ln>
-        </p:spPr>
-        <p:txBody>
-          <a:bodyPr xmlns:a="http://schemas.openxmlformats.org/drawingml/2006/main" wrap="square" lIns="0" tIns="0" rIns="0" bIns="0" anchor="t"/>
-          <a:lstStyle xmlns:a="http://schemas.openxmlformats.org/drawingml/2006/main"/>
-          <a:p xmlns:a="http://schemas.openxmlformats.org/drawingml/2006/main">
-            <a:r>
-              <a:rPr lang="en-US"/>
-              <a:t/>
-            </a:r>
-            <a:endParaRPr lang="en-US"/>
-          </a:p>
-        </p:txBody>
-      </p:sp>
-      <p:sp>
-        <p:nvSpPr>
-          <p:cNvPr id="20" name="anchor-grid-2-1"/>
-          <p:cNvSpPr/>
-          <p:nvPr/>
-        </p:nvSpPr>
-        <p:spPr>
-          <a:xfrm xmlns:a="http://schemas.openxmlformats.org/drawingml/2006/main">
-            <a:off x="12420600" y="3219450"/>
-            <a:ext cx="266700" cy="285750"/>
-          </a:xfrm>
-          <a:prstGeom xmlns:a="http://schemas.openxmlformats.org/drawingml/2006/main" prst="rect">
-            <a:avLst/>
-          </a:prstGeom>
-          <a:solidFill xmlns:a="http://schemas.openxmlformats.org/drawingml/2006/main">
-            <a:srgbClr val="7047FF"/>
-          </a:solidFill>
-          <a:ln xmlns:a="http://schemas.openxmlformats.org/drawingml/2006/main" w="12700">
-            <a:solidFill>
-              <a:srgbClr val="7047FF"/>
-            </a:solidFill>
-            <a:prstDash val="solid"/>
-          </a:ln>
-        </p:spPr>
-        <p:txBody>
-          <a:bodyPr xmlns:a="http://schemas.openxmlformats.org/drawingml/2006/main" wrap="square" lIns="0" tIns="0" rIns="0" bIns="0" anchor="t"/>
-          <a:lstStyle xmlns:a="http://schemas.openxmlformats.org/drawingml/2006/main"/>
-          <a:p xmlns:a="http://schemas.openxmlformats.org/drawingml/2006/main">
-            <a:r>
-              <a:rPr lang="en-US"/>
-              <a:t/>
-            </a:r>
-            <a:endParaRPr lang="en-US"/>
-          </a:p>
-        </p:txBody>
-      </p:sp>
-      <p:sp>
-        <p:nvSpPr>
-          <p:cNvPr id="21" name="anchor-grid-2-2"/>
-          <p:cNvSpPr/>
-          <p:nvPr/>
-        </p:nvSpPr>
-        <p:spPr>
-          <a:xfrm xmlns:a="http://schemas.openxmlformats.org/drawingml/2006/main">
-            <a:off x="12915900" y="3219450"/>
-            <a:ext cx="266700" cy="285750"/>
-          </a:xfrm>
-          <a:prstGeom xmlns:a="http://schemas.openxmlformats.org/drawingml/2006/main" prst="rect">
-            <a:avLst/>
-          </a:prstGeom>
-          <a:solidFill xmlns:a="http://schemas.openxmlformats.org/drawingml/2006/main">
-            <a:srgbClr val="101115"/>
-          </a:solidFill>
-          <a:ln xmlns:a="http://schemas.openxmlformats.org/drawingml/2006/main" w="12700">
-            <a:solidFill>
-              <a:srgbClr val="7047FF"/>
-            </a:solidFill>
-            <a:prstDash val="solid"/>
-          </a:ln>
-        </p:spPr>
-        <p:txBody>
-          <a:bodyPr xmlns:a="http://schemas.openxmlformats.org/drawingml/2006/main" wrap="square" lIns="0" tIns="0" rIns="0" bIns="0" anchor="t"/>
-          <a:lstStyle xmlns:a="http://schemas.openxmlformats.org/drawingml/2006/main"/>
-          <a:p xmlns:a="http://schemas.openxmlformats.org/drawingml/2006/main">
-            <a:r>
-              <a:rPr lang="en-US"/>
-              <a:t/>
-            </a:r>
-            <a:endParaRPr lang="en-US"/>
-          </a:p>
-        </p:txBody>
-      </p:sp>
-      <p:sp>
-        <p:nvSpPr>
-          <p:cNvPr id="22" name="anchor-axis"/>
-          <p:cNvSpPr/>
-          <p:nvPr/>
-        </p:nvSpPr>
-        <p:spPr>
-          <a:xfrm xmlns:a="http://schemas.openxmlformats.org/drawingml/2006/main">
-            <a:off x="12668250" y="1638300"/>
-            <a:ext cx="0" cy="2743200"/>
-          </a:xfrm>
-          <a:prstGeom xmlns:a="http://schemas.openxmlformats.org/drawingml/2006/main" prst="line">
-            <a:avLst/>
-          </a:prstGeom>
-          <a:noFill xmlns:a="http://schemas.openxmlformats.org/drawingml/2006/main"/>
-          <a:ln xmlns:a="http://schemas.openxmlformats.org/drawingml/2006/main" w="50800">
-            <a:solidFill>
-              <a:srgbClr val="F8F8F7"/>
-            </a:solidFill>
-            <a:prstDash val="solid"/>
-          </a:ln>
-        </p:spPr>
-        <p:txBody>
-          <a:bodyPr xmlns:a="http://schemas.openxmlformats.org/drawingml/2006/main" wrap="square" lIns="0" tIns="0" rIns="0" bIns="0" anchor="t"/>
-          <a:lstStyle xmlns:a="http://schemas.openxmlformats.org/drawingml/2006/main"/>
-          <a:p xmlns:a="http://schemas.openxmlformats.org/drawingml/2006/main">
-            <a:r>
-              <a:rPr lang="en-US"/>
-              <a:t/>
-            </a:r>
-            <a:endParaRPr lang="en-US"/>
-          </a:p>
-        </p:txBody>
-      </p:sp>
-    </p:spTree>
-  </p:cSld>
-  <p:clrMapOvr>
-    <a:masterClrMapping xmlns:a="http://schemas.openxmlformats.org/drawingml/2006/main"/>
-  </p:clrMapOvr>
-</p:sld>
-</file>
-
-<file path=ppt/slides/slide2.xml><?xml version="1.0" encoding="utf-8"?>
-<p:sld xmlns:p="http://schemas.openxmlformats.org/presentationml/2006/main">
-  <p:cSld name="Argument">
-    <p:bg>
-      <p:bgPr>
-        <a:blipFill xmlns:a="http://schemas.openxmlformats.org/drawingml/2006/main">
           <a:blip xmlns:r="http://schemas.openxmlformats.org/officeDocument/2006/relationships" r:embed="rIdOfficeKitImageb7d7d39d00e5a7e4_1"/>
           <a:stretch>
             <a:fillRect/>
@@ -1302,21 +507,21 @@
       </p:grpSpPr>
       <p:sp>
         <p:nvSpPr>
-          <p:cNvPr id="2" name="argument-paper-scrim"/>
+          <p:cNvPr id="2" name="cover-paper-scrim"/>
           <p:cNvSpPr/>
           <p:nvPr/>
         </p:nvSpPr>
         <p:spPr>
           <a:xfrm xmlns:a="http://schemas.openxmlformats.org/drawingml/2006/main">
             <a:off x="0" y="0"/>
-            <a:ext cx="7429500" cy="8572500"/>
+            <a:ext cx="9525000" cy="8572500"/>
           </a:xfrm>
           <a:prstGeom xmlns:a="http://schemas.openxmlformats.org/drawingml/2006/main" prst="rect">
             <a:avLst/>
           </a:prstGeom>
           <a:solidFill xmlns:a="http://schemas.openxmlformats.org/drawingml/2006/main">
             <a:srgbClr val="101115">
-              <a:alpha val="96000"/>
+              <a:alpha val="100000"/>
             </a:srgbClr>
           </a:solidFill>
           <a:ln xmlns:a="http://schemas.openxmlformats.org/drawingml/2006/main" w="0">
@@ -1340,7 +545,7 @@
       </p:sp>
       <p:sp>
         <p:nvSpPr>
-          <p:cNvPr id="3" name="argument-top-rule"/>
+          <p:cNvPr id="3" name="top-rule"/>
           <p:cNvSpPr/>
           <p:nvPr/>
         </p:nvSpPr>
@@ -1374,7 +579,7 @@
       </p:sp>
       <p:sp>
         <p:nvSpPr>
-          <p:cNvPr id="4" name="VIOLET OPERATIONS · ARGUMENT"/>
+          <p:cNvPr id="4" name="eyebrow"/>
           <p:cNvSpPr txBox="1"/>
           <p:nvPr/>
         </p:nvSpPr>
@@ -1403,96 +608,96 @@
                 <a:latin typeface="Tahoma"/>
                 <a:ea typeface="Tahoma"/>
               </a:rPr>
-              <a:t>VIOLET OPERATIONS · ARGUMENT</a:t>
-            </a:r>
-            <a:endParaRPr lang="en-US"/>
-          </a:p>
-        </p:txBody>
-      </p:sp>
-      <p:sp>
-        <p:nvSpPr>
-          <p:cNvPr id="5" name="argument-title"/>
-          <p:cNvSpPr txBox="1"/>
-          <p:nvPr/>
-        </p:nvSpPr>
-        <p:spPr>
-          <a:xfrm xmlns:a="http://schemas.openxmlformats.org/drawingml/2006/main">
-            <a:off x="914400" y="1314450"/>
-            <a:ext cx="6286500" cy="552450"/>
-          </a:xfrm>
-          <a:prstGeom xmlns:a="http://schemas.openxmlformats.org/drawingml/2006/main" prst="rect">
-            <a:avLst/>
-          </a:prstGeom>
-          <a:noFill xmlns:a="http://schemas.openxmlformats.org/drawingml/2006/main"/>
-          <a:ln xmlns:a="http://schemas.openxmlformats.org/drawingml/2006/main" w="0">
-            <a:noFill/>
-          </a:ln>
-        </p:spPr>
-        <p:txBody>
-          <a:bodyPr xmlns:a="http://schemas.openxmlformats.org/drawingml/2006/main" wrap="square" lIns="0" tIns="0" rIns="0" bIns="0" anchor="t"/>
-          <a:lstStyle xmlns:a="http://schemas.openxmlformats.org/drawingml/2006/main"/>
-          <a:p xmlns:a="http://schemas.openxmlformats.org/drawingml/2006/main">
-            <a:r>
-              <a:rPr lang="en-US" sz="2850" b="1">
+              <a:t>WORK · OFFICEKIT CALIBRATION</a:t>
+            </a:r>
+            <a:endParaRPr lang="en-US"/>
+          </a:p>
+        </p:txBody>
+      </p:sp>
+      <p:sp>
+        <p:nvSpPr>
+          <p:cNvPr id="5" name="cover-title"/>
+          <p:cNvSpPr txBox="1"/>
+          <p:nvPr/>
+        </p:nvSpPr>
+        <p:spPr>
+          <a:xfrm xmlns:a="http://schemas.openxmlformats.org/drawingml/2006/main">
+            <a:off x="914400" y="1571625"/>
+            <a:ext cx="8382000" cy="1066800"/>
+          </a:xfrm>
+          <a:prstGeom xmlns:a="http://schemas.openxmlformats.org/drawingml/2006/main" prst="rect">
+            <a:avLst/>
+          </a:prstGeom>
+          <a:noFill xmlns:a="http://schemas.openxmlformats.org/drawingml/2006/main"/>
+          <a:ln xmlns:a="http://schemas.openxmlformats.org/drawingml/2006/main" w="0">
+            <a:noFill/>
+          </a:ln>
+        </p:spPr>
+        <p:txBody>
+          <a:bodyPr xmlns:a="http://schemas.openxmlformats.org/drawingml/2006/main" wrap="square" lIns="0" tIns="0" rIns="0" bIns="0" anchor="t"/>
+          <a:lstStyle xmlns:a="http://schemas.openxmlformats.org/drawingml/2006/main"/>
+          <a:p xmlns:a="http://schemas.openxmlformats.org/drawingml/2006/main">
+            <a:r>
+              <a:rPr lang="en-US" sz="3600" b="1">
                 <a:solidFill>
                   <a:srgbClr val="F8F8F7"/>
                 </a:solidFill>
                 <a:latin typeface="Tahoma"/>
                 <a:ea typeface="Tahoma"/>
               </a:rPr>
-              <a:t>The constraint owns the page</a:t>
-            </a:r>
-            <a:endParaRPr lang="en-US"/>
-          </a:p>
-        </p:txBody>
-      </p:sp>
-      <p:sp>
-        <p:nvSpPr>
-          <p:cNvPr id="6" name="argument-basis"/>
-          <p:cNvSpPr txBox="1"/>
-          <p:nvPr/>
-        </p:nvSpPr>
-        <p:spPr>
-          <a:xfrm xmlns:a="http://schemas.openxmlformats.org/drawingml/2006/main">
-            <a:off x="952500" y="1981200"/>
-            <a:ext cx="6096000" cy="266700"/>
-          </a:xfrm>
-          <a:prstGeom xmlns:a="http://schemas.openxmlformats.org/drawingml/2006/main" prst="rect">
-            <a:avLst/>
-          </a:prstGeom>
-          <a:noFill xmlns:a="http://schemas.openxmlformats.org/drawingml/2006/main"/>
-          <a:ln xmlns:a="http://schemas.openxmlformats.org/drawingml/2006/main" w="0">
-            <a:noFill/>
-          </a:ln>
-        </p:spPr>
-        <p:txBody>
-          <a:bodyPr xmlns:a="http://schemas.openxmlformats.org/drawingml/2006/main" wrap="square" lIns="0" tIns="0" rIns="0" bIns="0" anchor="t"/>
-          <a:lstStyle xmlns:a="http://schemas.openxmlformats.org/drawingml/2006/main"/>
-          <a:p xmlns:a="http://schemas.openxmlformats.org/drawingml/2006/main">
-            <a:r>
-              <a:rPr lang="en-US" sz="1350">
-                <a:solidFill>
-                  <a:srgbClr val="7F8081"/>
-                </a:solidFill>
-                <a:latin typeface="Tahoma"/>
-                <a:ea typeface="Tahoma"/>
-              </a:rPr>
-              <a:t>Status, cause, owner and date stay together.</a:t>
-            </a:r>
-            <a:endParaRPr lang="en-US"/>
-          </a:p>
-        </p:txBody>
-      </p:sp>
-      <p:sp>
-        <p:nvSpPr>
-          <p:cNvPr id="7" name="argument-rule"/>
+              <a:t>Violet Operations: a claim worth testing</a:t>
+            </a:r>
+            <a:endParaRPr lang="en-US"/>
+          </a:p>
+        </p:txBody>
+      </p:sp>
+      <p:sp>
+        <p:nvSpPr>
+          <p:cNvPr id="6" name="cover-subtitle"/>
+          <p:cNvSpPr txBox="1"/>
+          <p:nvPr/>
+        </p:nvSpPr>
+        <p:spPr>
+          <a:xfrm xmlns:a="http://schemas.openxmlformats.org/drawingml/2006/main">
+            <a:off x="952500" y="2857500"/>
+            <a:ext cx="6858000" cy="323850"/>
+          </a:xfrm>
+          <a:prstGeom xmlns:a="http://schemas.openxmlformats.org/drawingml/2006/main" prst="rect">
+            <a:avLst/>
+          </a:prstGeom>
+          <a:noFill xmlns:a="http://schemas.openxmlformats.org/drawingml/2006/main"/>
+          <a:ln xmlns:a="http://schemas.openxmlformats.org/drawingml/2006/main" w="0">
+            <a:noFill/>
+          </a:ln>
+        </p:spPr>
+        <p:txBody>
+          <a:bodyPr xmlns:a="http://schemas.openxmlformats.org/drawingml/2006/main" wrap="square" lIns="0" tIns="0" rIns="0" bIns="0" anchor="t"/>
+          <a:lstStyle xmlns:a="http://schemas.openxmlformats.org/drawingml/2006/main"/>
+          <a:p xmlns:a="http://schemas.openxmlformats.org/drawingml/2006/main">
+            <a:r>
+              <a:rPr lang="en-US" sz="1725">
+                <a:solidFill>
+                  <a:srgbClr val="7047FF"/>
+                </a:solidFill>
+                <a:latin typeface="Tahoma"/>
+                <a:ea typeface="Tahoma"/>
+              </a:rPr>
+              <a:t>A clean-room reference for evidence, direction, and a decision.</a:t>
+            </a:r>
+            <a:endParaRPr lang="en-US"/>
+          </a:p>
+        </p:txBody>
+      </p:sp>
+      <p:sp>
+        <p:nvSpPr>
+          <p:cNvPr id="7" name="cover-rule"/>
           <p:cNvSpPr/>
           <p:nvPr/>
         </p:nvSpPr>
         <p:spPr>
           <a:xfrm xmlns:a="http://schemas.openxmlformats.org/drawingml/2006/main">
-            <a:off x="914400" y="2457450"/>
-            <a:ext cx="13411200" cy="0"/>
+            <a:off x="914400" y="3524250"/>
+            <a:ext cx="7658100" cy="0"/>
           </a:xfrm>
           <a:prstGeom xmlns:a="http://schemas.openxmlformats.org/drawingml/2006/main" prst="line">
             <a:avLst/>
@@ -1519,133 +724,173 @@
       </p:sp>
       <p:sp>
         <p:nvSpPr>
-          <p:cNvPr id="8" name="work-status"/>
-          <p:cNvSpPr txBox="1"/>
-          <p:nvPr/>
-        </p:nvSpPr>
-        <p:spPr>
-          <a:xfrm xmlns:a="http://schemas.openxmlformats.org/drawingml/2006/main">
-            <a:off x="1104900" y="3352800"/>
-            <a:ext cx="2857500" cy="228600"/>
-          </a:xfrm>
-          <a:prstGeom xmlns:a="http://schemas.openxmlformats.org/drawingml/2006/main" prst="rect">
-            <a:avLst/>
-          </a:prstGeom>
-          <a:noFill xmlns:a="http://schemas.openxmlformats.org/drawingml/2006/main"/>
-          <a:ln xmlns:a="http://schemas.openxmlformats.org/drawingml/2006/main" w="0">
-            <a:noFill/>
-          </a:ln>
-        </p:spPr>
-        <p:txBody>
-          <a:bodyPr xmlns:a="http://schemas.openxmlformats.org/drawingml/2006/main" wrap="square" lIns="0" tIns="0" rIns="0" bIns="0" anchor="t"/>
-          <a:lstStyle xmlns:a="http://schemas.openxmlformats.org/drawingml/2006/main"/>
-          <a:p xmlns:a="http://schemas.openxmlformats.org/drawingml/2006/main">
-            <a:r>
-              <a:rPr lang="en-US" sz="1125" b="1">
-                <a:solidFill>
-                  <a:srgbClr val="7047FF"/>
-                </a:solidFill>
-                <a:latin typeface="Tahoma"/>
-                <a:ea typeface="Tahoma"/>
-              </a:rPr>
-              <a:t>OPERATING SIGNAL</a:t>
-            </a:r>
-            <a:endParaRPr lang="en-US"/>
-          </a:p>
-        </p:txBody>
-      </p:sp>
-      <p:sp>
-        <p:nvSpPr>
-          <p:cNvPr id="9" name="work-headline"/>
-          <p:cNvSpPr txBox="1"/>
-          <p:nvPr/>
-        </p:nvSpPr>
-        <p:spPr>
-          <a:xfrm xmlns:a="http://schemas.openxmlformats.org/drawingml/2006/main">
-            <a:off x="1104900" y="3790950"/>
-            <a:ext cx="6667500" cy="723900"/>
-          </a:xfrm>
-          <a:prstGeom xmlns:a="http://schemas.openxmlformats.org/drawingml/2006/main" prst="rect">
-            <a:avLst/>
-          </a:prstGeom>
-          <a:noFill xmlns:a="http://schemas.openxmlformats.org/drawingml/2006/main"/>
-          <a:ln xmlns:a="http://schemas.openxmlformats.org/drawingml/2006/main" w="0">
-            <a:noFill/>
-          </a:ln>
-        </p:spPr>
-        <p:txBody>
-          <a:bodyPr xmlns:a="http://schemas.openxmlformats.org/drawingml/2006/main" wrap="square" lIns="0" tIns="0" rIns="0" bIns="0" anchor="t"/>
-          <a:lstStyle xmlns:a="http://schemas.openxmlformats.org/drawingml/2006/main"/>
-          <a:p xmlns:a="http://schemas.openxmlformats.org/drawingml/2006/main">
-            <a:r>
-              <a:rPr lang="en-US" sz="2550" b="1">
+          <p:cNvPr id="8" name="cover-basis"/>
+          <p:cNvSpPr txBox="1"/>
+          <p:nvPr/>
+        </p:nvSpPr>
+        <p:spPr>
+          <a:xfrm xmlns:a="http://schemas.openxmlformats.org/drawingml/2006/main">
+            <a:off x="952500" y="3762375"/>
+            <a:ext cx="7810500" cy="266700"/>
+          </a:xfrm>
+          <a:prstGeom xmlns:a="http://schemas.openxmlformats.org/drawingml/2006/main" prst="rect">
+            <a:avLst/>
+          </a:prstGeom>
+          <a:noFill xmlns:a="http://schemas.openxmlformats.org/drawingml/2006/main"/>
+          <a:ln xmlns:a="http://schemas.openxmlformats.org/drawingml/2006/main" w="0">
+            <a:noFill/>
+          </a:ln>
+        </p:spPr>
+        <p:txBody>
+          <a:bodyPr xmlns:a="http://schemas.openxmlformats.org/drawingml/2006/main" wrap="square" lIns="0" tIns="0" rIns="0" bIns="0" anchor="t"/>
+          <a:lstStyle xmlns:a="http://schemas.openxmlformats.org/drawingml/2006/main"/>
+          <a:p xmlns:a="http://schemas.openxmlformats.org/drawingml/2006/main">
+            <a:r>
+              <a:rPr lang="en-US" sz="1350">
                 <a:solidFill>
                   <a:srgbClr val="F8F8F7"/>
                 </a:solidFill>
                 <a:latin typeface="Tahoma"/>
                 <a:ea typeface="Tahoma"/>
               </a:rPr>
-              <a:t>The queue is healthy; the handoff is not.</a:t>
-            </a:r>
-            <a:endParaRPr lang="en-US"/>
-          </a:p>
-        </p:txBody>
-      </p:sp>
-      <p:sp>
-        <p:nvSpPr>
-          <p:cNvPr id="10" name="work-body"/>
-          <p:cNvSpPr txBox="1"/>
-          <p:nvPr/>
-        </p:nvSpPr>
-        <p:spPr>
-          <a:xfrm xmlns:a="http://schemas.openxmlformats.org/drawingml/2006/main">
-            <a:off x="1104900" y="4762500"/>
-            <a:ext cx="6191250" cy="400050"/>
-          </a:xfrm>
-          <a:prstGeom xmlns:a="http://schemas.openxmlformats.org/drawingml/2006/main" prst="rect">
-            <a:avLst/>
-          </a:prstGeom>
-          <a:noFill xmlns:a="http://schemas.openxmlformats.org/drawingml/2006/main"/>
-          <a:ln xmlns:a="http://schemas.openxmlformats.org/drawingml/2006/main" w="0">
-            <a:noFill/>
-          </a:ln>
-        </p:spPr>
-        <p:txBody>
-          <a:bodyPr xmlns:a="http://schemas.openxmlformats.org/drawingml/2006/main" wrap="square" lIns="0" tIns="0" rIns="0" bIns="0" anchor="t"/>
-          <a:lstStyle xmlns:a="http://schemas.openxmlformats.org/drawingml/2006/main"/>
-          <a:p xmlns:a="http://schemas.openxmlformats.org/drawingml/2006/main">
-            <a:r>
-              <a:rPr lang="en-US" sz="1575">
+              <a:t>One visual language · four page roles · native editable objects</a:t>
+            </a:r>
+            <a:endParaRPr lang="en-US"/>
+          </a:p>
+        </p:txBody>
+      </p:sp>
+      <p:sp>
+        <p:nvSpPr>
+          <p:cNvPr id="9" name="cover-thesis"/>
+          <p:cNvSpPr txBox="1"/>
+          <p:nvPr/>
+        </p:nvSpPr>
+        <p:spPr>
+          <a:xfrm xmlns:a="http://schemas.openxmlformats.org/drawingml/2006/main">
+            <a:off x="952500" y="4810125"/>
+            <a:ext cx="6667500" cy="628650"/>
+          </a:xfrm>
+          <a:prstGeom xmlns:a="http://schemas.openxmlformats.org/drawingml/2006/main" prst="rect">
+            <a:avLst/>
+          </a:prstGeom>
+          <a:noFill xmlns:a="http://schemas.openxmlformats.org/drawingml/2006/main"/>
+          <a:ln xmlns:a="http://schemas.openxmlformats.org/drawingml/2006/main" w="0">
+            <a:noFill/>
+          </a:ln>
+        </p:spPr>
+        <p:txBody>
+          <a:bodyPr xmlns:a="http://schemas.openxmlformats.org/drawingml/2006/main" wrap="square" lIns="0" tIns="0" rIns="0" bIns="0" anchor="t"/>
+          <a:lstStyle xmlns:a="http://schemas.openxmlformats.org/drawingml/2006/main"/>
+          <a:p xmlns:a="http://schemas.openxmlformats.org/drawingml/2006/main">
+            <a:r>
+              <a:rPr lang="en-US" sz="1875" b="1">
                 <a:solidFill>
                   <a:srgbClr val="F8F8F7"/>
                 </a:solidFill>
                 <a:latin typeface="Tahoma"/>
                 <a:ea typeface="Tahoma"/>
               </a:rPr>
-              <a:t>Three visible signals point to one owner and one date.</a:t>
-            </a:r>
-            <a:endParaRPr lang="en-US"/>
-          </a:p>
-        </p:txBody>
-      </p:sp>
-      <p:sp>
-        <p:nvSpPr>
-          <p:cNvPr id="11" name="work-rail"/>
+              <a:t>A visible operating signal creates a shared next action.</a:t>
+            </a:r>
+            <a:endParaRPr lang="en-US"/>
+          </a:p>
+        </p:txBody>
+      </p:sp>
+      <p:sp>
+        <p:nvSpPr>
+          <p:cNvPr id="10" name="cover-source"/>
+          <p:cNvSpPr txBox="1"/>
+          <p:nvPr/>
+        </p:nvSpPr>
+        <p:spPr>
+          <a:xfrm xmlns:a="http://schemas.openxmlformats.org/drawingml/2006/main">
+            <a:off x="952500" y="7315200"/>
+            <a:ext cx="9048750" cy="228600"/>
+          </a:xfrm>
+          <a:prstGeom xmlns:a="http://schemas.openxmlformats.org/drawingml/2006/main" prst="rect">
+            <a:avLst/>
+          </a:prstGeom>
+          <a:noFill xmlns:a="http://schemas.openxmlformats.org/drawingml/2006/main"/>
+          <a:ln xmlns:a="http://schemas.openxmlformats.org/drawingml/2006/main" w="0">
+            <a:noFill/>
+          </a:ln>
+        </p:spPr>
+        <p:txBody>
+          <a:bodyPr xmlns:a="http://schemas.openxmlformats.org/drawingml/2006/main" wrap="square" lIns="0" tIns="0" rIns="0" bIns="0" anchor="t"/>
+          <a:lstStyle xmlns:a="http://schemas.openxmlformats.org/drawingml/2006/main"/>
+          <a:p xmlns:a="http://schemas.openxmlformats.org/drawingml/2006/main">
+            <a:r>
+              <a:rPr lang="en-US" sz="1050">
+                <a:solidFill>
+                  <a:srgbClr val="7F8081"/>
+                </a:solidFill>
+                <a:latin typeface="Tahoma"/>
+                <a:ea typeface="Tahoma"/>
+              </a:rPr>
+              <a:t>OfficeKit original clean-room calibration · fictional content · 2026-08-29</a:t>
+            </a:r>
+            <a:endParaRPr lang="en-US"/>
+          </a:p>
+        </p:txBody>
+      </p:sp>
+      <p:sp>
+        <p:nvSpPr>
+          <p:cNvPr id="11" name="page-number"/>
+          <p:cNvSpPr txBox="1"/>
+          <p:nvPr/>
+        </p:nvSpPr>
+        <p:spPr>
+          <a:xfrm xmlns:a="http://schemas.openxmlformats.org/drawingml/2006/main">
+            <a:off x="13335000" y="7810500"/>
+            <a:ext cx="952500" cy="209550"/>
+          </a:xfrm>
+          <a:prstGeom xmlns:a="http://schemas.openxmlformats.org/drawingml/2006/main" prst="rect">
+            <a:avLst/>
+          </a:prstGeom>
+          <a:noFill xmlns:a="http://schemas.openxmlformats.org/drawingml/2006/main"/>
+          <a:ln xmlns:a="http://schemas.openxmlformats.org/drawingml/2006/main" w="0">
+            <a:noFill/>
+          </a:ln>
+        </p:spPr>
+        <p:txBody>
+          <a:bodyPr xmlns:a="http://schemas.openxmlformats.org/drawingml/2006/main" wrap="square" lIns="0" tIns="0" rIns="0" bIns="0" anchor="t"/>
+          <a:lstStyle xmlns:a="http://schemas.openxmlformats.org/drawingml/2006/main"/>
+          <a:p xmlns:a="http://schemas.openxmlformats.org/drawingml/2006/main">
+            <a:pPr algn="r"/>
+            <a:r>
+              <a:rPr lang="en-US" sz="1050">
+                <a:solidFill>
+                  <a:srgbClr val="7F8081"/>
+                </a:solidFill>
+                <a:latin typeface="Tahoma"/>
+                <a:ea typeface="Tahoma"/>
+              </a:rPr>
+              <a:t>1 / 6</a:t>
+            </a:r>
+            <a:endParaRPr lang="en-US"/>
+          </a:p>
+        </p:txBody>
+      </p:sp>
+      <p:sp>
+        <p:nvSpPr>
+          <p:cNvPr id="12" name="anchor-field"/>
           <p:cNvSpPr/>
           <p:nvPr/>
         </p:nvSpPr>
         <p:spPr>
           <a:xfrm xmlns:a="http://schemas.openxmlformats.org/drawingml/2006/main">
-            <a:off x="10001250" y="3333750"/>
-            <a:ext cx="0" cy="2381250"/>
-          </a:xfrm>
-          <a:prstGeom xmlns:a="http://schemas.openxmlformats.org/drawingml/2006/main" prst="line">
-            <a:avLst/>
-          </a:prstGeom>
-          <a:noFill xmlns:a="http://schemas.openxmlformats.org/drawingml/2006/main"/>
+            <a:off x="11620500" y="1790700"/>
+            <a:ext cx="2095500" cy="2286000"/>
+          </a:xfrm>
+          <a:prstGeom xmlns:a="http://schemas.openxmlformats.org/drawingml/2006/main" prst="rect">
+            <a:avLst/>
+          </a:prstGeom>
+          <a:solidFill xmlns:a="http://schemas.openxmlformats.org/drawingml/2006/main">
+            <a:srgbClr val="F3F5F8"/>
+          </a:solidFill>
           <a:ln xmlns:a="http://schemas.openxmlformats.org/drawingml/2006/main" w="25400">
             <a:solidFill>
-              <a:srgbClr val="7F8081"/>
+              <a:srgbClr val="7047FF"/>
             </a:solidFill>
             <a:prstDash val="solid"/>
           </a:ln>
@@ -1664,407 +909,357 @@
       </p:sp>
       <p:sp>
         <p:nvSpPr>
-          <p:cNvPr id="12" name="work-num-0"/>
-          <p:cNvSpPr txBox="1"/>
-          <p:nvPr/>
-        </p:nvSpPr>
-        <p:spPr>
-          <a:xfrm xmlns:a="http://schemas.openxmlformats.org/drawingml/2006/main">
-            <a:off x="10477500" y="3448050"/>
-            <a:ext cx="571500" cy="228600"/>
-          </a:xfrm>
-          <a:prstGeom xmlns:a="http://schemas.openxmlformats.org/drawingml/2006/main" prst="rect">
-            <a:avLst/>
-          </a:prstGeom>
-          <a:noFill xmlns:a="http://schemas.openxmlformats.org/drawingml/2006/main"/>
-          <a:ln xmlns:a="http://schemas.openxmlformats.org/drawingml/2006/main" w="0">
-            <a:noFill/>
-          </a:ln>
-        </p:spPr>
-        <p:txBody>
-          <a:bodyPr xmlns:a="http://schemas.openxmlformats.org/drawingml/2006/main" wrap="square" lIns="0" tIns="0" rIns="0" bIns="0" anchor="t"/>
-          <a:lstStyle xmlns:a="http://schemas.openxmlformats.org/drawingml/2006/main"/>
-          <a:p xmlns:a="http://schemas.openxmlformats.org/drawingml/2006/main">
-            <a:r>
-              <a:rPr lang="en-US" sz="1350" b="1">
-                <a:solidFill>
-                  <a:srgbClr val="7047FF"/>
-                </a:solidFill>
-                <a:latin typeface="Tahoma"/>
-                <a:ea typeface="Tahoma"/>
-              </a:rPr>
-              <a:t>01</a:t>
-            </a:r>
-            <a:endParaRPr lang="en-US"/>
-          </a:p>
-        </p:txBody>
-      </p:sp>
-      <p:sp>
-        <p:nvSpPr>
-          <p:cNvPr id="13" name="work-label-0"/>
-          <p:cNvSpPr txBox="1"/>
-          <p:nvPr/>
-        </p:nvSpPr>
-        <p:spPr>
-          <a:xfrm xmlns:a="http://schemas.openxmlformats.org/drawingml/2006/main">
-            <a:off x="11144250" y="3448050"/>
-            <a:ext cx="1428750" cy="228600"/>
-          </a:xfrm>
-          <a:prstGeom xmlns:a="http://schemas.openxmlformats.org/drawingml/2006/main" prst="rect">
-            <a:avLst/>
-          </a:prstGeom>
-          <a:noFill xmlns:a="http://schemas.openxmlformats.org/drawingml/2006/main"/>
-          <a:ln xmlns:a="http://schemas.openxmlformats.org/drawingml/2006/main" w="0">
-            <a:noFill/>
-          </a:ln>
-        </p:spPr>
-        <p:txBody>
-          <a:bodyPr xmlns:a="http://schemas.openxmlformats.org/drawingml/2006/main" wrap="square" lIns="0" tIns="0" rIns="0" bIns="0" anchor="t"/>
-          <a:lstStyle xmlns:a="http://schemas.openxmlformats.org/drawingml/2006/main"/>
-          <a:p xmlns:a="http://schemas.openxmlformats.org/drawingml/2006/main">
-            <a:r>
-              <a:rPr lang="en-US" sz="1350" b="1">
-                <a:solidFill>
-                  <a:srgbClr val="F8F8F7"/>
-                </a:solidFill>
-                <a:latin typeface="Tahoma"/>
-                <a:ea typeface="Tahoma"/>
-              </a:rPr>
-              <a:t>Queue</a:t>
-            </a:r>
-            <a:endParaRPr lang="en-US"/>
-          </a:p>
-        </p:txBody>
-      </p:sp>
-      <p:sp>
-        <p:nvSpPr>
-          <p:cNvPr id="14" name="work-text-0"/>
-          <p:cNvSpPr txBox="1"/>
-          <p:nvPr/>
-        </p:nvSpPr>
-        <p:spPr>
-          <a:xfrm xmlns:a="http://schemas.openxmlformats.org/drawingml/2006/main">
-            <a:off x="12668250" y="3448050"/>
-            <a:ext cx="1143000" cy="228600"/>
-          </a:xfrm>
-          <a:prstGeom xmlns:a="http://schemas.openxmlformats.org/drawingml/2006/main" prst="rect">
-            <a:avLst/>
-          </a:prstGeom>
-          <a:noFill xmlns:a="http://schemas.openxmlformats.org/drawingml/2006/main"/>
-          <a:ln xmlns:a="http://schemas.openxmlformats.org/drawingml/2006/main" w="0">
-            <a:noFill/>
-          </a:ln>
-        </p:spPr>
-        <p:txBody>
-          <a:bodyPr xmlns:a="http://schemas.openxmlformats.org/drawingml/2006/main" wrap="square" lIns="0" tIns="0" rIns="0" bIns="0" anchor="t"/>
-          <a:lstStyle xmlns:a="http://schemas.openxmlformats.org/drawingml/2006/main"/>
-          <a:p xmlns:a="http://schemas.openxmlformats.org/drawingml/2006/main">
-            <a:r>
-              <a:rPr lang="en-US" sz="1200">
-                <a:solidFill>
-                  <a:srgbClr val="7F8081"/>
-                </a:solidFill>
-                <a:latin typeface="Tahoma"/>
-                <a:ea typeface="Tahoma"/>
-              </a:rPr>
-              <a:t>On target</a:t>
-            </a:r>
-            <a:endParaRPr lang="en-US"/>
-          </a:p>
-        </p:txBody>
-      </p:sp>
-      <p:sp>
-        <p:nvSpPr>
-          <p:cNvPr id="15" name="work-num-1"/>
-          <p:cNvSpPr txBox="1"/>
-          <p:nvPr/>
-        </p:nvSpPr>
-        <p:spPr>
-          <a:xfrm xmlns:a="http://schemas.openxmlformats.org/drawingml/2006/main">
-            <a:off x="10477500" y="4229100"/>
-            <a:ext cx="571500" cy="228600"/>
-          </a:xfrm>
-          <a:prstGeom xmlns:a="http://schemas.openxmlformats.org/drawingml/2006/main" prst="rect">
-            <a:avLst/>
-          </a:prstGeom>
-          <a:noFill xmlns:a="http://schemas.openxmlformats.org/drawingml/2006/main"/>
-          <a:ln xmlns:a="http://schemas.openxmlformats.org/drawingml/2006/main" w="0">
-            <a:noFill/>
-          </a:ln>
-        </p:spPr>
-        <p:txBody>
-          <a:bodyPr xmlns:a="http://schemas.openxmlformats.org/drawingml/2006/main" wrap="square" lIns="0" tIns="0" rIns="0" bIns="0" anchor="t"/>
-          <a:lstStyle xmlns:a="http://schemas.openxmlformats.org/drawingml/2006/main"/>
-          <a:p xmlns:a="http://schemas.openxmlformats.org/drawingml/2006/main">
-            <a:r>
-              <a:rPr lang="en-US" sz="1350" b="1">
-                <a:solidFill>
-                  <a:srgbClr val="7047FF"/>
-                </a:solidFill>
-                <a:latin typeface="Tahoma"/>
-                <a:ea typeface="Tahoma"/>
-              </a:rPr>
-              <a:t>02</a:t>
-            </a:r>
-            <a:endParaRPr lang="en-US"/>
-          </a:p>
-        </p:txBody>
-      </p:sp>
-      <p:sp>
-        <p:nvSpPr>
-          <p:cNvPr id="16" name="work-label-1"/>
-          <p:cNvSpPr txBox="1"/>
-          <p:nvPr/>
-        </p:nvSpPr>
-        <p:spPr>
-          <a:xfrm xmlns:a="http://schemas.openxmlformats.org/drawingml/2006/main">
-            <a:off x="11144250" y="4229100"/>
-            <a:ext cx="1428750" cy="228600"/>
-          </a:xfrm>
-          <a:prstGeom xmlns:a="http://schemas.openxmlformats.org/drawingml/2006/main" prst="rect">
-            <a:avLst/>
-          </a:prstGeom>
-          <a:noFill xmlns:a="http://schemas.openxmlformats.org/drawingml/2006/main"/>
-          <a:ln xmlns:a="http://schemas.openxmlformats.org/drawingml/2006/main" w="0">
-            <a:noFill/>
-          </a:ln>
-        </p:spPr>
-        <p:txBody>
-          <a:bodyPr xmlns:a="http://schemas.openxmlformats.org/drawingml/2006/main" wrap="square" lIns="0" tIns="0" rIns="0" bIns="0" anchor="t"/>
-          <a:lstStyle xmlns:a="http://schemas.openxmlformats.org/drawingml/2006/main"/>
-          <a:p xmlns:a="http://schemas.openxmlformats.org/drawingml/2006/main">
-            <a:r>
-              <a:rPr lang="en-US" sz="1350" b="1">
-                <a:solidFill>
-                  <a:srgbClr val="F8F8F7"/>
-                </a:solidFill>
-                <a:latin typeface="Tahoma"/>
-                <a:ea typeface="Tahoma"/>
-              </a:rPr>
-              <a:t>Handoff</a:t>
-            </a:r>
-            <a:endParaRPr lang="en-US"/>
-          </a:p>
-        </p:txBody>
-      </p:sp>
-      <p:sp>
-        <p:nvSpPr>
-          <p:cNvPr id="17" name="work-text-1"/>
-          <p:cNvSpPr txBox="1"/>
-          <p:nvPr/>
-        </p:nvSpPr>
-        <p:spPr>
-          <a:xfrm xmlns:a="http://schemas.openxmlformats.org/drawingml/2006/main">
-            <a:off x="12668250" y="4229100"/>
-            <a:ext cx="1143000" cy="228600"/>
-          </a:xfrm>
-          <a:prstGeom xmlns:a="http://schemas.openxmlformats.org/drawingml/2006/main" prst="rect">
-            <a:avLst/>
-          </a:prstGeom>
-          <a:noFill xmlns:a="http://schemas.openxmlformats.org/drawingml/2006/main"/>
-          <a:ln xmlns:a="http://schemas.openxmlformats.org/drawingml/2006/main" w="0">
-            <a:noFill/>
-          </a:ln>
-        </p:spPr>
-        <p:txBody>
-          <a:bodyPr xmlns:a="http://schemas.openxmlformats.org/drawingml/2006/main" wrap="square" lIns="0" tIns="0" rIns="0" bIns="0" anchor="t"/>
-          <a:lstStyle xmlns:a="http://schemas.openxmlformats.org/drawingml/2006/main"/>
-          <a:p xmlns:a="http://schemas.openxmlformats.org/drawingml/2006/main">
-            <a:r>
-              <a:rPr lang="en-US" sz="1200">
-                <a:solidFill>
-                  <a:srgbClr val="7047FF"/>
-                </a:solidFill>
-                <a:latin typeface="Tahoma"/>
-                <a:ea typeface="Tahoma"/>
-              </a:rPr>
-              <a:t>At risk</a:t>
-            </a:r>
-            <a:endParaRPr lang="en-US"/>
-          </a:p>
-        </p:txBody>
-      </p:sp>
-      <p:sp>
-        <p:nvSpPr>
-          <p:cNvPr id="18" name="work-num-2"/>
-          <p:cNvSpPr txBox="1"/>
-          <p:nvPr/>
-        </p:nvSpPr>
-        <p:spPr>
-          <a:xfrm xmlns:a="http://schemas.openxmlformats.org/drawingml/2006/main">
-            <a:off x="10477500" y="5010150"/>
-            <a:ext cx="571500" cy="228600"/>
-          </a:xfrm>
-          <a:prstGeom xmlns:a="http://schemas.openxmlformats.org/drawingml/2006/main" prst="rect">
-            <a:avLst/>
-          </a:prstGeom>
-          <a:noFill xmlns:a="http://schemas.openxmlformats.org/drawingml/2006/main"/>
-          <a:ln xmlns:a="http://schemas.openxmlformats.org/drawingml/2006/main" w="0">
-            <a:noFill/>
-          </a:ln>
-        </p:spPr>
-        <p:txBody>
-          <a:bodyPr xmlns:a="http://schemas.openxmlformats.org/drawingml/2006/main" wrap="square" lIns="0" tIns="0" rIns="0" bIns="0" anchor="t"/>
-          <a:lstStyle xmlns:a="http://schemas.openxmlformats.org/drawingml/2006/main"/>
-          <a:p xmlns:a="http://schemas.openxmlformats.org/drawingml/2006/main">
-            <a:r>
-              <a:rPr lang="en-US" sz="1350" b="1">
-                <a:solidFill>
-                  <a:srgbClr val="7047FF"/>
-                </a:solidFill>
-                <a:latin typeface="Tahoma"/>
-                <a:ea typeface="Tahoma"/>
-              </a:rPr>
-              <a:t>03</a:t>
-            </a:r>
-            <a:endParaRPr lang="en-US"/>
-          </a:p>
-        </p:txBody>
-      </p:sp>
-      <p:sp>
-        <p:nvSpPr>
-          <p:cNvPr id="19" name="work-label-2"/>
-          <p:cNvSpPr txBox="1"/>
-          <p:nvPr/>
-        </p:nvSpPr>
-        <p:spPr>
-          <a:xfrm xmlns:a="http://schemas.openxmlformats.org/drawingml/2006/main">
-            <a:off x="11144250" y="5010150"/>
-            <a:ext cx="1428750" cy="228600"/>
-          </a:xfrm>
-          <a:prstGeom xmlns:a="http://schemas.openxmlformats.org/drawingml/2006/main" prst="rect">
-            <a:avLst/>
-          </a:prstGeom>
-          <a:noFill xmlns:a="http://schemas.openxmlformats.org/drawingml/2006/main"/>
-          <a:ln xmlns:a="http://schemas.openxmlformats.org/drawingml/2006/main" w="0">
-            <a:noFill/>
-          </a:ln>
-        </p:spPr>
-        <p:txBody>
-          <a:bodyPr xmlns:a="http://schemas.openxmlformats.org/drawingml/2006/main" wrap="square" lIns="0" tIns="0" rIns="0" bIns="0" anchor="t"/>
-          <a:lstStyle xmlns:a="http://schemas.openxmlformats.org/drawingml/2006/main"/>
-          <a:p xmlns:a="http://schemas.openxmlformats.org/drawingml/2006/main">
-            <a:r>
-              <a:rPr lang="en-US" sz="1350" b="1">
-                <a:solidFill>
-                  <a:srgbClr val="F8F8F7"/>
-                </a:solidFill>
-                <a:latin typeface="Tahoma"/>
-                <a:ea typeface="Tahoma"/>
-              </a:rPr>
-              <a:t>Owner</a:t>
-            </a:r>
-            <a:endParaRPr lang="en-US"/>
-          </a:p>
-        </p:txBody>
-      </p:sp>
-      <p:sp>
-        <p:nvSpPr>
-          <p:cNvPr id="20" name="work-text-2"/>
-          <p:cNvSpPr txBox="1"/>
-          <p:nvPr/>
-        </p:nvSpPr>
-        <p:spPr>
-          <a:xfrm xmlns:a="http://schemas.openxmlformats.org/drawingml/2006/main">
-            <a:off x="12668250" y="5010150"/>
-            <a:ext cx="1143000" cy="228600"/>
-          </a:xfrm>
-          <a:prstGeom xmlns:a="http://schemas.openxmlformats.org/drawingml/2006/main" prst="rect">
-            <a:avLst/>
-          </a:prstGeom>
-          <a:noFill xmlns:a="http://schemas.openxmlformats.org/drawingml/2006/main"/>
-          <a:ln xmlns:a="http://schemas.openxmlformats.org/drawingml/2006/main" w="0">
-            <a:noFill/>
-          </a:ln>
-        </p:spPr>
-        <p:txBody>
-          <a:bodyPr xmlns:a="http://schemas.openxmlformats.org/drawingml/2006/main" wrap="square" lIns="0" tIns="0" rIns="0" bIns="0" anchor="t"/>
-          <a:lstStyle xmlns:a="http://schemas.openxmlformats.org/drawingml/2006/main"/>
-          <a:p xmlns:a="http://schemas.openxmlformats.org/drawingml/2006/main">
-            <a:r>
-              <a:rPr lang="en-US" sz="1200">
-                <a:solidFill>
-                  <a:srgbClr val="7F8081"/>
-                </a:solidFill>
-                <a:latin typeface="Tahoma"/>
-                <a:ea typeface="Tahoma"/>
-              </a:rPr>
-              <a:t>Named</a:t>
-            </a:r>
-            <a:endParaRPr lang="en-US"/>
-          </a:p>
-        </p:txBody>
-      </p:sp>
-      <p:sp>
-        <p:nvSpPr>
-          <p:cNvPr id="21" name="source"/>
-          <p:cNvSpPr txBox="1"/>
-          <p:nvPr/>
-        </p:nvSpPr>
-        <p:spPr>
-          <a:xfrm xmlns:a="http://schemas.openxmlformats.org/drawingml/2006/main">
-            <a:off x="914400" y="7810500"/>
-            <a:ext cx="10953750" cy="209550"/>
-          </a:xfrm>
-          <a:prstGeom xmlns:a="http://schemas.openxmlformats.org/drawingml/2006/main" prst="rect">
-            <a:avLst/>
-          </a:prstGeom>
-          <a:noFill xmlns:a="http://schemas.openxmlformats.org/drawingml/2006/main"/>
-          <a:ln xmlns:a="http://schemas.openxmlformats.org/drawingml/2006/main" w="0">
-            <a:noFill/>
-          </a:ln>
-        </p:spPr>
-        <p:txBody>
-          <a:bodyPr xmlns:a="http://schemas.openxmlformats.org/drawingml/2006/main" wrap="square" lIns="0" tIns="0" rIns="0" bIns="0" anchor="t"/>
-          <a:lstStyle xmlns:a="http://schemas.openxmlformats.org/drawingml/2006/main"/>
-          <a:p xmlns:a="http://schemas.openxmlformats.org/drawingml/2006/main">
-            <a:r>
-              <a:rPr lang="en-US" sz="1050">
-                <a:solidFill>
-                  <a:srgbClr val="7F8081"/>
-                </a:solidFill>
-                <a:latin typeface="Tahoma"/>
-                <a:ea typeface="Tahoma"/>
-              </a:rPr>
-              <a:t>Source: illustrative calibration brief · every claim is fictional and bounded</a:t>
-            </a:r>
-            <a:endParaRPr lang="en-US"/>
-          </a:p>
-        </p:txBody>
-      </p:sp>
-      <p:sp>
-        <p:nvSpPr>
-          <p:cNvPr id="22" name="page-number"/>
-          <p:cNvSpPr txBox="1"/>
-          <p:nvPr/>
-        </p:nvSpPr>
-        <p:spPr>
-          <a:xfrm xmlns:a="http://schemas.openxmlformats.org/drawingml/2006/main">
-            <a:off x="13335000" y="7810500"/>
-            <a:ext cx="952500" cy="209550"/>
-          </a:xfrm>
-          <a:prstGeom xmlns:a="http://schemas.openxmlformats.org/drawingml/2006/main" prst="rect">
-            <a:avLst/>
-          </a:prstGeom>
-          <a:noFill xmlns:a="http://schemas.openxmlformats.org/drawingml/2006/main"/>
-          <a:ln xmlns:a="http://schemas.openxmlformats.org/drawingml/2006/main" w="0">
-            <a:noFill/>
-          </a:ln>
-        </p:spPr>
-        <p:txBody>
-          <a:bodyPr xmlns:a="http://schemas.openxmlformats.org/drawingml/2006/main" wrap="square" lIns="0" tIns="0" rIns="0" bIns="0" anchor="t"/>
-          <a:lstStyle xmlns:a="http://schemas.openxmlformats.org/drawingml/2006/main"/>
-          <a:p xmlns:a="http://schemas.openxmlformats.org/drawingml/2006/main">
-            <a:pPr algn="r"/>
-            <a:r>
-              <a:rPr lang="en-US" sz="1050">
-                <a:solidFill>
-                  <a:srgbClr val="7F8081"/>
-                </a:solidFill>
-                <a:latin typeface="Tahoma"/>
-                <a:ea typeface="Tahoma"/>
-              </a:rPr>
-              <a:t>2 / 6</a:t>
+          <p:cNvPr id="13" name="anchor-grid-0-0"/>
+          <p:cNvSpPr/>
+          <p:nvPr/>
+        </p:nvSpPr>
+        <p:spPr>
+          <a:xfrm xmlns:a="http://schemas.openxmlformats.org/drawingml/2006/main">
+            <a:off x="11925300" y="2152650"/>
+            <a:ext cx="266700" cy="285750"/>
+          </a:xfrm>
+          <a:prstGeom xmlns:a="http://schemas.openxmlformats.org/drawingml/2006/main" prst="rect">
+            <a:avLst/>
+          </a:prstGeom>
+          <a:solidFill xmlns:a="http://schemas.openxmlformats.org/drawingml/2006/main">
+            <a:srgbClr val="7047FF"/>
+          </a:solidFill>
+          <a:ln xmlns:a="http://schemas.openxmlformats.org/drawingml/2006/main" w="12700">
+            <a:solidFill>
+              <a:srgbClr val="7047FF"/>
+            </a:solidFill>
+            <a:prstDash val="solid"/>
+          </a:ln>
+        </p:spPr>
+        <p:txBody>
+          <a:bodyPr xmlns:a="http://schemas.openxmlformats.org/drawingml/2006/main" wrap="square" lIns="0" tIns="0" rIns="0" bIns="0" anchor="t"/>
+          <a:lstStyle xmlns:a="http://schemas.openxmlformats.org/drawingml/2006/main"/>
+          <a:p xmlns:a="http://schemas.openxmlformats.org/drawingml/2006/main">
+            <a:r>
+              <a:rPr lang="en-US"/>
+              <a:t/>
+            </a:r>
+            <a:endParaRPr lang="en-US"/>
+          </a:p>
+        </p:txBody>
+      </p:sp>
+      <p:sp>
+        <p:nvSpPr>
+          <p:cNvPr id="14" name="anchor-grid-0-1"/>
+          <p:cNvSpPr/>
+          <p:nvPr/>
+        </p:nvSpPr>
+        <p:spPr>
+          <a:xfrm xmlns:a="http://schemas.openxmlformats.org/drawingml/2006/main">
+            <a:off x="12420600" y="2152650"/>
+            <a:ext cx="266700" cy="285750"/>
+          </a:xfrm>
+          <a:prstGeom xmlns:a="http://schemas.openxmlformats.org/drawingml/2006/main" prst="rect">
+            <a:avLst/>
+          </a:prstGeom>
+          <a:solidFill xmlns:a="http://schemas.openxmlformats.org/drawingml/2006/main">
+            <a:srgbClr val="7047FF"/>
+          </a:solidFill>
+          <a:ln xmlns:a="http://schemas.openxmlformats.org/drawingml/2006/main" w="12700">
+            <a:solidFill>
+              <a:srgbClr val="7047FF"/>
+            </a:solidFill>
+            <a:prstDash val="solid"/>
+          </a:ln>
+        </p:spPr>
+        <p:txBody>
+          <a:bodyPr xmlns:a="http://schemas.openxmlformats.org/drawingml/2006/main" wrap="square" lIns="0" tIns="0" rIns="0" bIns="0" anchor="t"/>
+          <a:lstStyle xmlns:a="http://schemas.openxmlformats.org/drawingml/2006/main"/>
+          <a:p xmlns:a="http://schemas.openxmlformats.org/drawingml/2006/main">
+            <a:r>
+              <a:rPr lang="en-US"/>
+              <a:t/>
+            </a:r>
+            <a:endParaRPr lang="en-US"/>
+          </a:p>
+        </p:txBody>
+      </p:sp>
+      <p:sp>
+        <p:nvSpPr>
+          <p:cNvPr id="15" name="anchor-grid-0-2"/>
+          <p:cNvSpPr/>
+          <p:nvPr/>
+        </p:nvSpPr>
+        <p:spPr>
+          <a:xfrm xmlns:a="http://schemas.openxmlformats.org/drawingml/2006/main">
+            <a:off x="12915900" y="2152650"/>
+            <a:ext cx="266700" cy="285750"/>
+          </a:xfrm>
+          <a:prstGeom xmlns:a="http://schemas.openxmlformats.org/drawingml/2006/main" prst="rect">
+            <a:avLst/>
+          </a:prstGeom>
+          <a:solidFill xmlns:a="http://schemas.openxmlformats.org/drawingml/2006/main">
+            <a:srgbClr val="101115"/>
+          </a:solidFill>
+          <a:ln xmlns:a="http://schemas.openxmlformats.org/drawingml/2006/main" w="12700">
+            <a:solidFill>
+              <a:srgbClr val="7047FF"/>
+            </a:solidFill>
+            <a:prstDash val="solid"/>
+          </a:ln>
+        </p:spPr>
+        <p:txBody>
+          <a:bodyPr xmlns:a="http://schemas.openxmlformats.org/drawingml/2006/main" wrap="square" lIns="0" tIns="0" rIns="0" bIns="0" anchor="t"/>
+          <a:lstStyle xmlns:a="http://schemas.openxmlformats.org/drawingml/2006/main"/>
+          <a:p xmlns:a="http://schemas.openxmlformats.org/drawingml/2006/main">
+            <a:r>
+              <a:rPr lang="en-US"/>
+              <a:t/>
+            </a:r>
+            <a:endParaRPr lang="en-US"/>
+          </a:p>
+        </p:txBody>
+      </p:sp>
+      <p:sp>
+        <p:nvSpPr>
+          <p:cNvPr id="16" name="anchor-grid-1-0"/>
+          <p:cNvSpPr/>
+          <p:nvPr/>
+        </p:nvSpPr>
+        <p:spPr>
+          <a:xfrm xmlns:a="http://schemas.openxmlformats.org/drawingml/2006/main">
+            <a:off x="11925300" y="2686050"/>
+            <a:ext cx="266700" cy="285750"/>
+          </a:xfrm>
+          <a:prstGeom xmlns:a="http://schemas.openxmlformats.org/drawingml/2006/main" prst="rect">
+            <a:avLst/>
+          </a:prstGeom>
+          <a:solidFill xmlns:a="http://schemas.openxmlformats.org/drawingml/2006/main">
+            <a:srgbClr val="7047FF"/>
+          </a:solidFill>
+          <a:ln xmlns:a="http://schemas.openxmlformats.org/drawingml/2006/main" w="12700">
+            <a:solidFill>
+              <a:srgbClr val="7047FF"/>
+            </a:solidFill>
+            <a:prstDash val="solid"/>
+          </a:ln>
+        </p:spPr>
+        <p:txBody>
+          <a:bodyPr xmlns:a="http://schemas.openxmlformats.org/drawingml/2006/main" wrap="square" lIns="0" tIns="0" rIns="0" bIns="0" anchor="t"/>
+          <a:lstStyle xmlns:a="http://schemas.openxmlformats.org/drawingml/2006/main"/>
+          <a:p xmlns:a="http://schemas.openxmlformats.org/drawingml/2006/main">
+            <a:r>
+              <a:rPr lang="en-US"/>
+              <a:t/>
+            </a:r>
+            <a:endParaRPr lang="en-US"/>
+          </a:p>
+        </p:txBody>
+      </p:sp>
+      <p:sp>
+        <p:nvSpPr>
+          <p:cNvPr id="17" name="anchor-grid-1-1"/>
+          <p:cNvSpPr/>
+          <p:nvPr/>
+        </p:nvSpPr>
+        <p:spPr>
+          <a:xfrm xmlns:a="http://schemas.openxmlformats.org/drawingml/2006/main">
+            <a:off x="12420600" y="2686050"/>
+            <a:ext cx="266700" cy="285750"/>
+          </a:xfrm>
+          <a:prstGeom xmlns:a="http://schemas.openxmlformats.org/drawingml/2006/main" prst="rect">
+            <a:avLst/>
+          </a:prstGeom>
+          <a:solidFill xmlns:a="http://schemas.openxmlformats.org/drawingml/2006/main">
+            <a:srgbClr val="7047FF"/>
+          </a:solidFill>
+          <a:ln xmlns:a="http://schemas.openxmlformats.org/drawingml/2006/main" w="12700">
+            <a:solidFill>
+              <a:srgbClr val="7047FF"/>
+            </a:solidFill>
+            <a:prstDash val="solid"/>
+          </a:ln>
+        </p:spPr>
+        <p:txBody>
+          <a:bodyPr xmlns:a="http://schemas.openxmlformats.org/drawingml/2006/main" wrap="square" lIns="0" tIns="0" rIns="0" bIns="0" anchor="t"/>
+          <a:lstStyle xmlns:a="http://schemas.openxmlformats.org/drawingml/2006/main"/>
+          <a:p xmlns:a="http://schemas.openxmlformats.org/drawingml/2006/main">
+            <a:r>
+              <a:rPr lang="en-US"/>
+              <a:t/>
+            </a:r>
+            <a:endParaRPr lang="en-US"/>
+          </a:p>
+        </p:txBody>
+      </p:sp>
+      <p:sp>
+        <p:nvSpPr>
+          <p:cNvPr id="18" name="anchor-grid-1-2"/>
+          <p:cNvSpPr/>
+          <p:nvPr/>
+        </p:nvSpPr>
+        <p:spPr>
+          <a:xfrm xmlns:a="http://schemas.openxmlformats.org/drawingml/2006/main">
+            <a:off x="12915900" y="2686050"/>
+            <a:ext cx="266700" cy="285750"/>
+          </a:xfrm>
+          <a:prstGeom xmlns:a="http://schemas.openxmlformats.org/drawingml/2006/main" prst="rect">
+            <a:avLst/>
+          </a:prstGeom>
+          <a:solidFill xmlns:a="http://schemas.openxmlformats.org/drawingml/2006/main">
+            <a:srgbClr val="101115"/>
+          </a:solidFill>
+          <a:ln xmlns:a="http://schemas.openxmlformats.org/drawingml/2006/main" w="12700">
+            <a:solidFill>
+              <a:srgbClr val="7047FF"/>
+            </a:solidFill>
+            <a:prstDash val="solid"/>
+          </a:ln>
+        </p:spPr>
+        <p:txBody>
+          <a:bodyPr xmlns:a="http://schemas.openxmlformats.org/drawingml/2006/main" wrap="square" lIns="0" tIns="0" rIns="0" bIns="0" anchor="t"/>
+          <a:lstStyle xmlns:a="http://schemas.openxmlformats.org/drawingml/2006/main"/>
+          <a:p xmlns:a="http://schemas.openxmlformats.org/drawingml/2006/main">
+            <a:r>
+              <a:rPr lang="en-US"/>
+              <a:t/>
+            </a:r>
+            <a:endParaRPr lang="en-US"/>
+          </a:p>
+        </p:txBody>
+      </p:sp>
+      <p:sp>
+        <p:nvSpPr>
+          <p:cNvPr id="19" name="anchor-grid-2-0"/>
+          <p:cNvSpPr/>
+          <p:nvPr/>
+        </p:nvSpPr>
+        <p:spPr>
+          <a:xfrm xmlns:a="http://schemas.openxmlformats.org/drawingml/2006/main">
+            <a:off x="11925300" y="3219450"/>
+            <a:ext cx="266700" cy="285750"/>
+          </a:xfrm>
+          <a:prstGeom xmlns:a="http://schemas.openxmlformats.org/drawingml/2006/main" prst="rect">
+            <a:avLst/>
+          </a:prstGeom>
+          <a:solidFill xmlns:a="http://schemas.openxmlformats.org/drawingml/2006/main">
+            <a:srgbClr val="7047FF"/>
+          </a:solidFill>
+          <a:ln xmlns:a="http://schemas.openxmlformats.org/drawingml/2006/main" w="12700">
+            <a:solidFill>
+              <a:srgbClr val="7047FF"/>
+            </a:solidFill>
+            <a:prstDash val="solid"/>
+          </a:ln>
+        </p:spPr>
+        <p:txBody>
+          <a:bodyPr xmlns:a="http://schemas.openxmlformats.org/drawingml/2006/main" wrap="square" lIns="0" tIns="0" rIns="0" bIns="0" anchor="t"/>
+          <a:lstStyle xmlns:a="http://schemas.openxmlformats.org/drawingml/2006/main"/>
+          <a:p xmlns:a="http://schemas.openxmlformats.org/drawingml/2006/main">
+            <a:r>
+              <a:rPr lang="en-US"/>
+              <a:t/>
+            </a:r>
+            <a:endParaRPr lang="en-US"/>
+          </a:p>
+        </p:txBody>
+      </p:sp>
+      <p:sp>
+        <p:nvSpPr>
+          <p:cNvPr id="20" name="anchor-grid-2-1"/>
+          <p:cNvSpPr/>
+          <p:nvPr/>
+        </p:nvSpPr>
+        <p:spPr>
+          <a:xfrm xmlns:a="http://schemas.openxmlformats.org/drawingml/2006/main">
+            <a:off x="12420600" y="3219450"/>
+            <a:ext cx="266700" cy="285750"/>
+          </a:xfrm>
+          <a:prstGeom xmlns:a="http://schemas.openxmlformats.org/drawingml/2006/main" prst="rect">
+            <a:avLst/>
+          </a:prstGeom>
+          <a:solidFill xmlns:a="http://schemas.openxmlformats.org/drawingml/2006/main">
+            <a:srgbClr val="7047FF"/>
+          </a:solidFill>
+          <a:ln xmlns:a="http://schemas.openxmlformats.org/drawingml/2006/main" w="12700">
+            <a:solidFill>
+              <a:srgbClr val="7047FF"/>
+            </a:solidFill>
+            <a:prstDash val="solid"/>
+          </a:ln>
+        </p:spPr>
+        <p:txBody>
+          <a:bodyPr xmlns:a="http://schemas.openxmlformats.org/drawingml/2006/main" wrap="square" lIns="0" tIns="0" rIns="0" bIns="0" anchor="t"/>
+          <a:lstStyle xmlns:a="http://schemas.openxmlformats.org/drawingml/2006/main"/>
+          <a:p xmlns:a="http://schemas.openxmlformats.org/drawingml/2006/main">
+            <a:r>
+              <a:rPr lang="en-US"/>
+              <a:t/>
+            </a:r>
+            <a:endParaRPr lang="en-US"/>
+          </a:p>
+        </p:txBody>
+      </p:sp>
+      <p:sp>
+        <p:nvSpPr>
+          <p:cNvPr id="21" name="anchor-grid-2-2"/>
+          <p:cNvSpPr/>
+          <p:nvPr/>
+        </p:nvSpPr>
+        <p:spPr>
+          <a:xfrm xmlns:a="http://schemas.openxmlformats.org/drawingml/2006/main">
+            <a:off x="12915900" y="3219450"/>
+            <a:ext cx="266700" cy="285750"/>
+          </a:xfrm>
+          <a:prstGeom xmlns:a="http://schemas.openxmlformats.org/drawingml/2006/main" prst="rect">
+            <a:avLst/>
+          </a:prstGeom>
+          <a:solidFill xmlns:a="http://schemas.openxmlformats.org/drawingml/2006/main">
+            <a:srgbClr val="101115"/>
+          </a:solidFill>
+          <a:ln xmlns:a="http://schemas.openxmlformats.org/drawingml/2006/main" w="12700">
+            <a:solidFill>
+              <a:srgbClr val="7047FF"/>
+            </a:solidFill>
+            <a:prstDash val="solid"/>
+          </a:ln>
+        </p:spPr>
+        <p:txBody>
+          <a:bodyPr xmlns:a="http://schemas.openxmlformats.org/drawingml/2006/main" wrap="square" lIns="0" tIns="0" rIns="0" bIns="0" anchor="t"/>
+          <a:lstStyle xmlns:a="http://schemas.openxmlformats.org/drawingml/2006/main"/>
+          <a:p xmlns:a="http://schemas.openxmlformats.org/drawingml/2006/main">
+            <a:r>
+              <a:rPr lang="en-US"/>
+              <a:t/>
+            </a:r>
+            <a:endParaRPr lang="en-US"/>
+          </a:p>
+        </p:txBody>
+      </p:sp>
+      <p:sp>
+        <p:nvSpPr>
+          <p:cNvPr id="22" name="anchor-axis"/>
+          <p:cNvSpPr/>
+          <p:nvPr/>
+        </p:nvSpPr>
+        <p:spPr>
+          <a:xfrm xmlns:a="http://schemas.openxmlformats.org/drawingml/2006/main">
+            <a:off x="12668250" y="1638300"/>
+            <a:ext cx="0" cy="2743200"/>
+          </a:xfrm>
+          <a:prstGeom xmlns:a="http://schemas.openxmlformats.org/drawingml/2006/main" prst="line">
+            <a:avLst/>
+          </a:prstGeom>
+          <a:noFill xmlns:a="http://schemas.openxmlformats.org/drawingml/2006/main"/>
+          <a:ln xmlns:a="http://schemas.openxmlformats.org/drawingml/2006/main" w="50800">
+            <a:solidFill>
+              <a:srgbClr val="F8F8F7"/>
+            </a:solidFill>
+            <a:prstDash val="solid"/>
+          </a:ln>
+        </p:spPr>
+        <p:txBody>
+          <a:bodyPr xmlns:a="http://schemas.openxmlformats.org/drawingml/2006/main" wrap="square" lIns="0" tIns="0" rIns="0" bIns="0" anchor="t"/>
+          <a:lstStyle xmlns:a="http://schemas.openxmlformats.org/drawingml/2006/main"/>
+          <a:p xmlns:a="http://schemas.openxmlformats.org/drawingml/2006/main">
+            <a:r>
+              <a:rPr lang="en-US"/>
+              <a:t/>
             </a:r>
             <a:endParaRPr lang="en-US"/>
           </a:p>
@@ -2078,13 +1273,13 @@
 </p:sld>
 </file>
 
-<file path=ppt/slides/slide3.xml><?xml version="1.0" encoding="utf-8"?>
+<file path=ppt/slides/slide2.xml><?xml version="1.0" encoding="utf-8"?>
 <p:sld xmlns:p="http://schemas.openxmlformats.org/presentationml/2006/main">
-  <p:cSld name="Evidence">
+  <p:cSld name="Argument">
     <p:bg>
       <p:bgPr>
         <a:blipFill xmlns:a="http://schemas.openxmlformats.org/drawingml/2006/main">
-          <a:blip xmlns:r="http://schemas.openxmlformats.org/officeDocument/2006/relationships" r:embed="rIdOfficeKitImage7650495d0c3b8602_1"/>
+          <a:blip xmlns:r="http://schemas.openxmlformats.org/officeDocument/2006/relationships" r:embed="rIdOfficeKitImageaeb6f74d36d260d0_1"/>
           <a:stretch>
             <a:fillRect/>
           </a:stretch>
@@ -2107,7 +1302,7 @@
       </p:grpSpPr>
       <p:sp>
         <p:nvSpPr>
-          <p:cNvPr id="2" name="evidence-paper-scrim"/>
+          <p:cNvPr id="2" name="argument-paper-scrim"/>
           <p:cNvSpPr/>
           <p:nvPr/>
         </p:nvSpPr>
@@ -2145,7 +1340,7 @@
       </p:sp>
       <p:sp>
         <p:nvSpPr>
-          <p:cNvPr id="3" name="evidence-top-rule"/>
+          <p:cNvPr id="3" name="argument-top-rule"/>
           <p:cNvSpPr/>
           <p:nvPr/>
         </p:nvSpPr>
@@ -2179,7 +1374,7 @@
       </p:sp>
       <p:sp>
         <p:nvSpPr>
-          <p:cNvPr id="4" name="VIOLET OPERATIONS · EVIDENCE"/>
+          <p:cNvPr id="4" name="VIOLET OPERATIONS · ARGUMENT"/>
           <p:cNvSpPr txBox="1"/>
           <p:nvPr/>
         </p:nvSpPr>
@@ -2208,15 +1403,15 @@
                 <a:latin typeface="Tahoma"/>
                 <a:ea typeface="Tahoma"/>
               </a:rPr>
-              <a:t>VIOLET OPERATIONS · EVIDENCE</a:t>
-            </a:r>
-            <a:endParaRPr lang="en-US"/>
-          </a:p>
-        </p:txBody>
-      </p:sp>
-      <p:sp>
-        <p:nvSpPr>
-          <p:cNvPr id="5" name="evidence-title"/>
+              <a:t>VIOLET OPERATIONS · ARGUMENT</a:t>
+            </a:r>
+            <a:endParaRPr lang="en-US"/>
+          </a:p>
+        </p:txBody>
+      </p:sp>
+      <p:sp>
+        <p:nvSpPr>
+          <p:cNvPr id="5" name="argument-title"/>
           <p:cNvSpPr txBox="1"/>
           <p:nvPr/>
         </p:nvSpPr>
@@ -2238,7 +1433,812 @@
           <a:lstStyle xmlns:a="http://schemas.openxmlformats.org/drawingml/2006/main"/>
           <a:p xmlns:a="http://schemas.openxmlformats.org/drawingml/2006/main">
             <a:r>
-              <a:rPr lang="en-US" sz="2850" b="1">
+              <a:rPr lang="en-US" sz="2550" b="1">
+                <a:solidFill>
+                  <a:srgbClr val="F8F8F7"/>
+                </a:solidFill>
+                <a:latin typeface="Tahoma"/>
+                <a:ea typeface="Tahoma"/>
+              </a:rPr>
+              <a:t>The constraint owns the page</a:t>
+            </a:r>
+            <a:endParaRPr lang="en-US"/>
+          </a:p>
+        </p:txBody>
+      </p:sp>
+      <p:sp>
+        <p:nvSpPr>
+          <p:cNvPr id="6" name="argument-basis"/>
+          <p:cNvSpPr txBox="1"/>
+          <p:nvPr/>
+        </p:nvSpPr>
+        <p:spPr>
+          <a:xfrm xmlns:a="http://schemas.openxmlformats.org/drawingml/2006/main">
+            <a:off x="952500" y="1981200"/>
+            <a:ext cx="6096000" cy="266700"/>
+          </a:xfrm>
+          <a:prstGeom xmlns:a="http://schemas.openxmlformats.org/drawingml/2006/main" prst="rect">
+            <a:avLst/>
+          </a:prstGeom>
+          <a:noFill xmlns:a="http://schemas.openxmlformats.org/drawingml/2006/main"/>
+          <a:ln xmlns:a="http://schemas.openxmlformats.org/drawingml/2006/main" w="0">
+            <a:noFill/>
+          </a:ln>
+        </p:spPr>
+        <p:txBody>
+          <a:bodyPr xmlns:a="http://schemas.openxmlformats.org/drawingml/2006/main" wrap="square" lIns="0" tIns="0" rIns="0" bIns="0" anchor="t"/>
+          <a:lstStyle xmlns:a="http://schemas.openxmlformats.org/drawingml/2006/main"/>
+          <a:p xmlns:a="http://schemas.openxmlformats.org/drawingml/2006/main">
+            <a:r>
+              <a:rPr lang="en-US" sz="1350">
+                <a:solidFill>
+                  <a:srgbClr val="7F8081"/>
+                </a:solidFill>
+                <a:latin typeface="Tahoma"/>
+                <a:ea typeface="Tahoma"/>
+              </a:rPr>
+              <a:t>Status, cause, owner and date stay together.</a:t>
+            </a:r>
+            <a:endParaRPr lang="en-US"/>
+          </a:p>
+        </p:txBody>
+      </p:sp>
+      <p:sp>
+        <p:nvSpPr>
+          <p:cNvPr id="7" name="argument-rule"/>
+          <p:cNvSpPr/>
+          <p:nvPr/>
+        </p:nvSpPr>
+        <p:spPr>
+          <a:xfrm xmlns:a="http://schemas.openxmlformats.org/drawingml/2006/main">
+            <a:off x="914400" y="2457450"/>
+            <a:ext cx="13411200" cy="0"/>
+          </a:xfrm>
+          <a:prstGeom xmlns:a="http://schemas.openxmlformats.org/drawingml/2006/main" prst="line">
+            <a:avLst/>
+          </a:prstGeom>
+          <a:noFill xmlns:a="http://schemas.openxmlformats.org/drawingml/2006/main"/>
+          <a:ln xmlns:a="http://schemas.openxmlformats.org/drawingml/2006/main" w="25400">
+            <a:solidFill>
+              <a:srgbClr val="7F8081"/>
+            </a:solidFill>
+            <a:prstDash val="solid"/>
+          </a:ln>
+        </p:spPr>
+        <p:txBody>
+          <a:bodyPr xmlns:a="http://schemas.openxmlformats.org/drawingml/2006/main" wrap="square" lIns="0" tIns="0" rIns="0" bIns="0" anchor="t"/>
+          <a:lstStyle xmlns:a="http://schemas.openxmlformats.org/drawingml/2006/main"/>
+          <a:p xmlns:a="http://schemas.openxmlformats.org/drawingml/2006/main">
+            <a:r>
+              <a:rPr lang="en-US"/>
+              <a:t/>
+            </a:r>
+            <a:endParaRPr lang="en-US"/>
+          </a:p>
+        </p:txBody>
+      </p:sp>
+      <p:sp>
+        <p:nvSpPr>
+          <p:cNvPr id="8" name="work-status"/>
+          <p:cNvSpPr txBox="1"/>
+          <p:nvPr/>
+        </p:nvSpPr>
+        <p:spPr>
+          <a:xfrm xmlns:a="http://schemas.openxmlformats.org/drawingml/2006/main">
+            <a:off x="1104900" y="3352800"/>
+            <a:ext cx="2857500" cy="228600"/>
+          </a:xfrm>
+          <a:prstGeom xmlns:a="http://schemas.openxmlformats.org/drawingml/2006/main" prst="rect">
+            <a:avLst/>
+          </a:prstGeom>
+          <a:noFill xmlns:a="http://schemas.openxmlformats.org/drawingml/2006/main"/>
+          <a:ln xmlns:a="http://schemas.openxmlformats.org/drawingml/2006/main" w="0">
+            <a:noFill/>
+          </a:ln>
+        </p:spPr>
+        <p:txBody>
+          <a:bodyPr xmlns:a="http://schemas.openxmlformats.org/drawingml/2006/main" wrap="square" lIns="0" tIns="0" rIns="0" bIns="0" anchor="t"/>
+          <a:lstStyle xmlns:a="http://schemas.openxmlformats.org/drawingml/2006/main"/>
+          <a:p xmlns:a="http://schemas.openxmlformats.org/drawingml/2006/main">
+            <a:r>
+              <a:rPr lang="en-US" sz="1125" b="1">
+                <a:solidFill>
+                  <a:srgbClr val="7047FF"/>
+                </a:solidFill>
+                <a:latin typeface="Tahoma"/>
+                <a:ea typeface="Tahoma"/>
+              </a:rPr>
+              <a:t>OPERATING SIGNAL</a:t>
+            </a:r>
+            <a:endParaRPr lang="en-US"/>
+          </a:p>
+        </p:txBody>
+      </p:sp>
+      <p:sp>
+        <p:nvSpPr>
+          <p:cNvPr id="9" name="work-headline"/>
+          <p:cNvSpPr txBox="1"/>
+          <p:nvPr/>
+        </p:nvSpPr>
+        <p:spPr>
+          <a:xfrm xmlns:a="http://schemas.openxmlformats.org/drawingml/2006/main">
+            <a:off x="1104900" y="3790950"/>
+            <a:ext cx="6667500" cy="723900"/>
+          </a:xfrm>
+          <a:prstGeom xmlns:a="http://schemas.openxmlformats.org/drawingml/2006/main" prst="rect">
+            <a:avLst/>
+          </a:prstGeom>
+          <a:noFill xmlns:a="http://schemas.openxmlformats.org/drawingml/2006/main"/>
+          <a:ln xmlns:a="http://schemas.openxmlformats.org/drawingml/2006/main" w="0">
+            <a:noFill/>
+          </a:ln>
+        </p:spPr>
+        <p:txBody>
+          <a:bodyPr xmlns:a="http://schemas.openxmlformats.org/drawingml/2006/main" wrap="square" lIns="0" tIns="0" rIns="0" bIns="0" anchor="t"/>
+          <a:lstStyle xmlns:a="http://schemas.openxmlformats.org/drawingml/2006/main"/>
+          <a:p xmlns:a="http://schemas.openxmlformats.org/drawingml/2006/main">
+            <a:r>
+              <a:rPr lang="en-US" sz="2550" b="1">
+                <a:solidFill>
+                  <a:srgbClr val="F8F8F7"/>
+                </a:solidFill>
+                <a:latin typeface="Tahoma"/>
+                <a:ea typeface="Tahoma"/>
+              </a:rPr>
+              <a:t>The queue is healthy; the handoff is not.</a:t>
+            </a:r>
+            <a:endParaRPr lang="en-US"/>
+          </a:p>
+        </p:txBody>
+      </p:sp>
+      <p:sp>
+        <p:nvSpPr>
+          <p:cNvPr id="10" name="work-body"/>
+          <p:cNvSpPr txBox="1"/>
+          <p:nvPr/>
+        </p:nvSpPr>
+        <p:spPr>
+          <a:xfrm xmlns:a="http://schemas.openxmlformats.org/drawingml/2006/main">
+            <a:off x="1104900" y="4762500"/>
+            <a:ext cx="6191250" cy="400050"/>
+          </a:xfrm>
+          <a:prstGeom xmlns:a="http://schemas.openxmlformats.org/drawingml/2006/main" prst="rect">
+            <a:avLst/>
+          </a:prstGeom>
+          <a:noFill xmlns:a="http://schemas.openxmlformats.org/drawingml/2006/main"/>
+          <a:ln xmlns:a="http://schemas.openxmlformats.org/drawingml/2006/main" w="0">
+            <a:noFill/>
+          </a:ln>
+        </p:spPr>
+        <p:txBody>
+          <a:bodyPr xmlns:a="http://schemas.openxmlformats.org/drawingml/2006/main" wrap="square" lIns="0" tIns="0" rIns="0" bIns="0" anchor="t"/>
+          <a:lstStyle xmlns:a="http://schemas.openxmlformats.org/drawingml/2006/main"/>
+          <a:p xmlns:a="http://schemas.openxmlformats.org/drawingml/2006/main">
+            <a:r>
+              <a:rPr lang="en-US" sz="1575">
+                <a:solidFill>
+                  <a:srgbClr val="F8F8F7"/>
+                </a:solidFill>
+                <a:latin typeface="Tahoma"/>
+                <a:ea typeface="Tahoma"/>
+              </a:rPr>
+              <a:t>Three visible signals point to one owner and one date.</a:t>
+            </a:r>
+            <a:endParaRPr lang="en-US"/>
+          </a:p>
+        </p:txBody>
+      </p:sp>
+      <p:sp>
+        <p:nvSpPr>
+          <p:cNvPr id="11" name="work-rail"/>
+          <p:cNvSpPr/>
+          <p:nvPr/>
+        </p:nvSpPr>
+        <p:spPr>
+          <a:xfrm xmlns:a="http://schemas.openxmlformats.org/drawingml/2006/main">
+            <a:off x="10001250" y="3333750"/>
+            <a:ext cx="0" cy="2381250"/>
+          </a:xfrm>
+          <a:prstGeom xmlns:a="http://schemas.openxmlformats.org/drawingml/2006/main" prst="line">
+            <a:avLst/>
+          </a:prstGeom>
+          <a:noFill xmlns:a="http://schemas.openxmlformats.org/drawingml/2006/main"/>
+          <a:ln xmlns:a="http://schemas.openxmlformats.org/drawingml/2006/main" w="25400">
+            <a:solidFill>
+              <a:srgbClr val="7F8081"/>
+            </a:solidFill>
+            <a:prstDash val="solid"/>
+          </a:ln>
+        </p:spPr>
+        <p:txBody>
+          <a:bodyPr xmlns:a="http://schemas.openxmlformats.org/drawingml/2006/main" wrap="square" lIns="0" tIns="0" rIns="0" bIns="0" anchor="t"/>
+          <a:lstStyle xmlns:a="http://schemas.openxmlformats.org/drawingml/2006/main"/>
+          <a:p xmlns:a="http://schemas.openxmlformats.org/drawingml/2006/main">
+            <a:r>
+              <a:rPr lang="en-US"/>
+              <a:t/>
+            </a:r>
+            <a:endParaRPr lang="en-US"/>
+          </a:p>
+        </p:txBody>
+      </p:sp>
+      <p:sp>
+        <p:nvSpPr>
+          <p:cNvPr id="12" name="work-num-0"/>
+          <p:cNvSpPr txBox="1"/>
+          <p:nvPr/>
+        </p:nvSpPr>
+        <p:spPr>
+          <a:xfrm xmlns:a="http://schemas.openxmlformats.org/drawingml/2006/main">
+            <a:off x="10477500" y="3448050"/>
+            <a:ext cx="571500" cy="228600"/>
+          </a:xfrm>
+          <a:prstGeom xmlns:a="http://schemas.openxmlformats.org/drawingml/2006/main" prst="rect">
+            <a:avLst/>
+          </a:prstGeom>
+          <a:noFill xmlns:a="http://schemas.openxmlformats.org/drawingml/2006/main"/>
+          <a:ln xmlns:a="http://schemas.openxmlformats.org/drawingml/2006/main" w="0">
+            <a:noFill/>
+          </a:ln>
+        </p:spPr>
+        <p:txBody>
+          <a:bodyPr xmlns:a="http://schemas.openxmlformats.org/drawingml/2006/main" wrap="square" lIns="0" tIns="0" rIns="0" bIns="0" anchor="t"/>
+          <a:lstStyle xmlns:a="http://schemas.openxmlformats.org/drawingml/2006/main"/>
+          <a:p xmlns:a="http://schemas.openxmlformats.org/drawingml/2006/main">
+            <a:r>
+              <a:rPr lang="en-US" sz="1350" b="1">
+                <a:solidFill>
+                  <a:srgbClr val="7047FF"/>
+                </a:solidFill>
+                <a:latin typeface="Tahoma"/>
+                <a:ea typeface="Tahoma"/>
+              </a:rPr>
+              <a:t>01</a:t>
+            </a:r>
+            <a:endParaRPr lang="en-US"/>
+          </a:p>
+        </p:txBody>
+      </p:sp>
+      <p:sp>
+        <p:nvSpPr>
+          <p:cNvPr id="13" name="work-label-0"/>
+          <p:cNvSpPr txBox="1"/>
+          <p:nvPr/>
+        </p:nvSpPr>
+        <p:spPr>
+          <a:xfrm xmlns:a="http://schemas.openxmlformats.org/drawingml/2006/main">
+            <a:off x="11144250" y="3448050"/>
+            <a:ext cx="1428750" cy="228600"/>
+          </a:xfrm>
+          <a:prstGeom xmlns:a="http://schemas.openxmlformats.org/drawingml/2006/main" prst="rect">
+            <a:avLst/>
+          </a:prstGeom>
+          <a:noFill xmlns:a="http://schemas.openxmlformats.org/drawingml/2006/main"/>
+          <a:ln xmlns:a="http://schemas.openxmlformats.org/drawingml/2006/main" w="0">
+            <a:noFill/>
+          </a:ln>
+        </p:spPr>
+        <p:txBody>
+          <a:bodyPr xmlns:a="http://schemas.openxmlformats.org/drawingml/2006/main" wrap="square" lIns="0" tIns="0" rIns="0" bIns="0" anchor="t"/>
+          <a:lstStyle xmlns:a="http://schemas.openxmlformats.org/drawingml/2006/main"/>
+          <a:p xmlns:a="http://schemas.openxmlformats.org/drawingml/2006/main">
+            <a:r>
+              <a:rPr lang="en-US" sz="1350" b="1">
+                <a:solidFill>
+                  <a:srgbClr val="F8F8F7"/>
+                </a:solidFill>
+                <a:latin typeface="Tahoma"/>
+                <a:ea typeface="Tahoma"/>
+              </a:rPr>
+              <a:t>Queue</a:t>
+            </a:r>
+            <a:endParaRPr lang="en-US"/>
+          </a:p>
+        </p:txBody>
+      </p:sp>
+      <p:sp>
+        <p:nvSpPr>
+          <p:cNvPr id="14" name="work-text-0"/>
+          <p:cNvSpPr txBox="1"/>
+          <p:nvPr/>
+        </p:nvSpPr>
+        <p:spPr>
+          <a:xfrm xmlns:a="http://schemas.openxmlformats.org/drawingml/2006/main">
+            <a:off x="12668250" y="3448050"/>
+            <a:ext cx="1143000" cy="228600"/>
+          </a:xfrm>
+          <a:prstGeom xmlns:a="http://schemas.openxmlformats.org/drawingml/2006/main" prst="rect">
+            <a:avLst/>
+          </a:prstGeom>
+          <a:noFill xmlns:a="http://schemas.openxmlformats.org/drawingml/2006/main"/>
+          <a:ln xmlns:a="http://schemas.openxmlformats.org/drawingml/2006/main" w="0">
+            <a:noFill/>
+          </a:ln>
+        </p:spPr>
+        <p:txBody>
+          <a:bodyPr xmlns:a="http://schemas.openxmlformats.org/drawingml/2006/main" wrap="square" lIns="0" tIns="0" rIns="0" bIns="0" anchor="t"/>
+          <a:lstStyle xmlns:a="http://schemas.openxmlformats.org/drawingml/2006/main"/>
+          <a:p xmlns:a="http://schemas.openxmlformats.org/drawingml/2006/main">
+            <a:r>
+              <a:rPr lang="en-US" sz="1200">
+                <a:solidFill>
+                  <a:srgbClr val="7F8081"/>
+                </a:solidFill>
+                <a:latin typeface="Tahoma"/>
+                <a:ea typeface="Tahoma"/>
+              </a:rPr>
+              <a:t>On target</a:t>
+            </a:r>
+            <a:endParaRPr lang="en-US"/>
+          </a:p>
+        </p:txBody>
+      </p:sp>
+      <p:sp>
+        <p:nvSpPr>
+          <p:cNvPr id="15" name="work-num-1"/>
+          <p:cNvSpPr txBox="1"/>
+          <p:nvPr/>
+        </p:nvSpPr>
+        <p:spPr>
+          <a:xfrm xmlns:a="http://schemas.openxmlformats.org/drawingml/2006/main">
+            <a:off x="10477500" y="4229100"/>
+            <a:ext cx="571500" cy="228600"/>
+          </a:xfrm>
+          <a:prstGeom xmlns:a="http://schemas.openxmlformats.org/drawingml/2006/main" prst="rect">
+            <a:avLst/>
+          </a:prstGeom>
+          <a:noFill xmlns:a="http://schemas.openxmlformats.org/drawingml/2006/main"/>
+          <a:ln xmlns:a="http://schemas.openxmlformats.org/drawingml/2006/main" w="0">
+            <a:noFill/>
+          </a:ln>
+        </p:spPr>
+        <p:txBody>
+          <a:bodyPr xmlns:a="http://schemas.openxmlformats.org/drawingml/2006/main" wrap="square" lIns="0" tIns="0" rIns="0" bIns="0" anchor="t"/>
+          <a:lstStyle xmlns:a="http://schemas.openxmlformats.org/drawingml/2006/main"/>
+          <a:p xmlns:a="http://schemas.openxmlformats.org/drawingml/2006/main">
+            <a:r>
+              <a:rPr lang="en-US" sz="1350" b="1">
+                <a:solidFill>
+                  <a:srgbClr val="7047FF"/>
+                </a:solidFill>
+                <a:latin typeface="Tahoma"/>
+                <a:ea typeface="Tahoma"/>
+              </a:rPr>
+              <a:t>02</a:t>
+            </a:r>
+            <a:endParaRPr lang="en-US"/>
+          </a:p>
+        </p:txBody>
+      </p:sp>
+      <p:sp>
+        <p:nvSpPr>
+          <p:cNvPr id="16" name="work-label-1"/>
+          <p:cNvSpPr txBox="1"/>
+          <p:nvPr/>
+        </p:nvSpPr>
+        <p:spPr>
+          <a:xfrm xmlns:a="http://schemas.openxmlformats.org/drawingml/2006/main">
+            <a:off x="11144250" y="4229100"/>
+            <a:ext cx="1428750" cy="228600"/>
+          </a:xfrm>
+          <a:prstGeom xmlns:a="http://schemas.openxmlformats.org/drawingml/2006/main" prst="rect">
+            <a:avLst/>
+          </a:prstGeom>
+          <a:noFill xmlns:a="http://schemas.openxmlformats.org/drawingml/2006/main"/>
+          <a:ln xmlns:a="http://schemas.openxmlformats.org/drawingml/2006/main" w="0">
+            <a:noFill/>
+          </a:ln>
+        </p:spPr>
+        <p:txBody>
+          <a:bodyPr xmlns:a="http://schemas.openxmlformats.org/drawingml/2006/main" wrap="square" lIns="0" tIns="0" rIns="0" bIns="0" anchor="t"/>
+          <a:lstStyle xmlns:a="http://schemas.openxmlformats.org/drawingml/2006/main"/>
+          <a:p xmlns:a="http://schemas.openxmlformats.org/drawingml/2006/main">
+            <a:r>
+              <a:rPr lang="en-US" sz="1350" b="1">
+                <a:solidFill>
+                  <a:srgbClr val="F8F8F7"/>
+                </a:solidFill>
+                <a:latin typeface="Tahoma"/>
+                <a:ea typeface="Tahoma"/>
+              </a:rPr>
+              <a:t>Handoff</a:t>
+            </a:r>
+            <a:endParaRPr lang="en-US"/>
+          </a:p>
+        </p:txBody>
+      </p:sp>
+      <p:sp>
+        <p:nvSpPr>
+          <p:cNvPr id="17" name="work-text-1"/>
+          <p:cNvSpPr txBox="1"/>
+          <p:nvPr/>
+        </p:nvSpPr>
+        <p:spPr>
+          <a:xfrm xmlns:a="http://schemas.openxmlformats.org/drawingml/2006/main">
+            <a:off x="12668250" y="4229100"/>
+            <a:ext cx="1143000" cy="228600"/>
+          </a:xfrm>
+          <a:prstGeom xmlns:a="http://schemas.openxmlformats.org/drawingml/2006/main" prst="rect">
+            <a:avLst/>
+          </a:prstGeom>
+          <a:noFill xmlns:a="http://schemas.openxmlformats.org/drawingml/2006/main"/>
+          <a:ln xmlns:a="http://schemas.openxmlformats.org/drawingml/2006/main" w="0">
+            <a:noFill/>
+          </a:ln>
+        </p:spPr>
+        <p:txBody>
+          <a:bodyPr xmlns:a="http://schemas.openxmlformats.org/drawingml/2006/main" wrap="square" lIns="0" tIns="0" rIns="0" bIns="0" anchor="t"/>
+          <a:lstStyle xmlns:a="http://schemas.openxmlformats.org/drawingml/2006/main"/>
+          <a:p xmlns:a="http://schemas.openxmlformats.org/drawingml/2006/main">
+            <a:r>
+              <a:rPr lang="en-US" sz="1200">
+                <a:solidFill>
+                  <a:srgbClr val="7047FF"/>
+                </a:solidFill>
+                <a:latin typeface="Tahoma"/>
+                <a:ea typeface="Tahoma"/>
+              </a:rPr>
+              <a:t>At risk</a:t>
+            </a:r>
+            <a:endParaRPr lang="en-US"/>
+          </a:p>
+        </p:txBody>
+      </p:sp>
+      <p:sp>
+        <p:nvSpPr>
+          <p:cNvPr id="18" name="work-num-2"/>
+          <p:cNvSpPr txBox="1"/>
+          <p:nvPr/>
+        </p:nvSpPr>
+        <p:spPr>
+          <a:xfrm xmlns:a="http://schemas.openxmlformats.org/drawingml/2006/main">
+            <a:off x="10477500" y="5010150"/>
+            <a:ext cx="571500" cy="228600"/>
+          </a:xfrm>
+          <a:prstGeom xmlns:a="http://schemas.openxmlformats.org/drawingml/2006/main" prst="rect">
+            <a:avLst/>
+          </a:prstGeom>
+          <a:noFill xmlns:a="http://schemas.openxmlformats.org/drawingml/2006/main"/>
+          <a:ln xmlns:a="http://schemas.openxmlformats.org/drawingml/2006/main" w="0">
+            <a:noFill/>
+          </a:ln>
+        </p:spPr>
+        <p:txBody>
+          <a:bodyPr xmlns:a="http://schemas.openxmlformats.org/drawingml/2006/main" wrap="square" lIns="0" tIns="0" rIns="0" bIns="0" anchor="t"/>
+          <a:lstStyle xmlns:a="http://schemas.openxmlformats.org/drawingml/2006/main"/>
+          <a:p xmlns:a="http://schemas.openxmlformats.org/drawingml/2006/main">
+            <a:r>
+              <a:rPr lang="en-US" sz="1350" b="1">
+                <a:solidFill>
+                  <a:srgbClr val="7047FF"/>
+                </a:solidFill>
+                <a:latin typeface="Tahoma"/>
+                <a:ea typeface="Tahoma"/>
+              </a:rPr>
+              <a:t>03</a:t>
+            </a:r>
+            <a:endParaRPr lang="en-US"/>
+          </a:p>
+        </p:txBody>
+      </p:sp>
+      <p:sp>
+        <p:nvSpPr>
+          <p:cNvPr id="19" name="work-label-2"/>
+          <p:cNvSpPr txBox="1"/>
+          <p:nvPr/>
+        </p:nvSpPr>
+        <p:spPr>
+          <a:xfrm xmlns:a="http://schemas.openxmlformats.org/drawingml/2006/main">
+            <a:off x="11144250" y="5010150"/>
+            <a:ext cx="1428750" cy="228600"/>
+          </a:xfrm>
+          <a:prstGeom xmlns:a="http://schemas.openxmlformats.org/drawingml/2006/main" prst="rect">
+            <a:avLst/>
+          </a:prstGeom>
+          <a:noFill xmlns:a="http://schemas.openxmlformats.org/drawingml/2006/main"/>
+          <a:ln xmlns:a="http://schemas.openxmlformats.org/drawingml/2006/main" w="0">
+            <a:noFill/>
+          </a:ln>
+        </p:spPr>
+        <p:txBody>
+          <a:bodyPr xmlns:a="http://schemas.openxmlformats.org/drawingml/2006/main" wrap="square" lIns="0" tIns="0" rIns="0" bIns="0" anchor="t"/>
+          <a:lstStyle xmlns:a="http://schemas.openxmlformats.org/drawingml/2006/main"/>
+          <a:p xmlns:a="http://schemas.openxmlformats.org/drawingml/2006/main">
+            <a:r>
+              <a:rPr lang="en-US" sz="1350" b="1">
+                <a:solidFill>
+                  <a:srgbClr val="F8F8F7"/>
+                </a:solidFill>
+                <a:latin typeface="Tahoma"/>
+                <a:ea typeface="Tahoma"/>
+              </a:rPr>
+              <a:t>Owner</a:t>
+            </a:r>
+            <a:endParaRPr lang="en-US"/>
+          </a:p>
+        </p:txBody>
+      </p:sp>
+      <p:sp>
+        <p:nvSpPr>
+          <p:cNvPr id="20" name="work-text-2"/>
+          <p:cNvSpPr txBox="1"/>
+          <p:nvPr/>
+        </p:nvSpPr>
+        <p:spPr>
+          <a:xfrm xmlns:a="http://schemas.openxmlformats.org/drawingml/2006/main">
+            <a:off x="12668250" y="5010150"/>
+            <a:ext cx="1143000" cy="228600"/>
+          </a:xfrm>
+          <a:prstGeom xmlns:a="http://schemas.openxmlformats.org/drawingml/2006/main" prst="rect">
+            <a:avLst/>
+          </a:prstGeom>
+          <a:noFill xmlns:a="http://schemas.openxmlformats.org/drawingml/2006/main"/>
+          <a:ln xmlns:a="http://schemas.openxmlformats.org/drawingml/2006/main" w="0">
+            <a:noFill/>
+          </a:ln>
+        </p:spPr>
+        <p:txBody>
+          <a:bodyPr xmlns:a="http://schemas.openxmlformats.org/drawingml/2006/main" wrap="square" lIns="0" tIns="0" rIns="0" bIns="0" anchor="t"/>
+          <a:lstStyle xmlns:a="http://schemas.openxmlformats.org/drawingml/2006/main"/>
+          <a:p xmlns:a="http://schemas.openxmlformats.org/drawingml/2006/main">
+            <a:r>
+              <a:rPr lang="en-US" sz="1200">
+                <a:solidFill>
+                  <a:srgbClr val="7F8081"/>
+                </a:solidFill>
+                <a:latin typeface="Tahoma"/>
+                <a:ea typeface="Tahoma"/>
+              </a:rPr>
+              <a:t>Named</a:t>
+            </a:r>
+            <a:endParaRPr lang="en-US"/>
+          </a:p>
+        </p:txBody>
+      </p:sp>
+      <p:sp>
+        <p:nvSpPr>
+          <p:cNvPr id="21" name="source"/>
+          <p:cNvSpPr txBox="1"/>
+          <p:nvPr/>
+        </p:nvSpPr>
+        <p:spPr>
+          <a:xfrm xmlns:a="http://schemas.openxmlformats.org/drawingml/2006/main">
+            <a:off x="914400" y="7810500"/>
+            <a:ext cx="10953750" cy="209550"/>
+          </a:xfrm>
+          <a:prstGeom xmlns:a="http://schemas.openxmlformats.org/drawingml/2006/main" prst="rect">
+            <a:avLst/>
+          </a:prstGeom>
+          <a:noFill xmlns:a="http://schemas.openxmlformats.org/drawingml/2006/main"/>
+          <a:ln xmlns:a="http://schemas.openxmlformats.org/drawingml/2006/main" w="0">
+            <a:noFill/>
+          </a:ln>
+        </p:spPr>
+        <p:txBody>
+          <a:bodyPr xmlns:a="http://schemas.openxmlformats.org/drawingml/2006/main" wrap="square" lIns="0" tIns="0" rIns="0" bIns="0" anchor="t"/>
+          <a:lstStyle xmlns:a="http://schemas.openxmlformats.org/drawingml/2006/main"/>
+          <a:p xmlns:a="http://schemas.openxmlformats.org/drawingml/2006/main">
+            <a:r>
+              <a:rPr lang="en-US" sz="1050">
+                <a:solidFill>
+                  <a:srgbClr val="7F8081"/>
+                </a:solidFill>
+                <a:latin typeface="Tahoma"/>
+                <a:ea typeface="Tahoma"/>
+              </a:rPr>
+              <a:t>Source: illustrative calibration brief · every claim is fictional and bounded</a:t>
+            </a:r>
+            <a:endParaRPr lang="en-US"/>
+          </a:p>
+        </p:txBody>
+      </p:sp>
+      <p:sp>
+        <p:nvSpPr>
+          <p:cNvPr id="22" name="page-number"/>
+          <p:cNvSpPr txBox="1"/>
+          <p:nvPr/>
+        </p:nvSpPr>
+        <p:spPr>
+          <a:xfrm xmlns:a="http://schemas.openxmlformats.org/drawingml/2006/main">
+            <a:off x="13335000" y="7810500"/>
+            <a:ext cx="952500" cy="209550"/>
+          </a:xfrm>
+          <a:prstGeom xmlns:a="http://schemas.openxmlformats.org/drawingml/2006/main" prst="rect">
+            <a:avLst/>
+          </a:prstGeom>
+          <a:noFill xmlns:a="http://schemas.openxmlformats.org/drawingml/2006/main"/>
+          <a:ln xmlns:a="http://schemas.openxmlformats.org/drawingml/2006/main" w="0">
+            <a:noFill/>
+          </a:ln>
+        </p:spPr>
+        <p:txBody>
+          <a:bodyPr xmlns:a="http://schemas.openxmlformats.org/drawingml/2006/main" wrap="square" lIns="0" tIns="0" rIns="0" bIns="0" anchor="t"/>
+          <a:lstStyle xmlns:a="http://schemas.openxmlformats.org/drawingml/2006/main"/>
+          <a:p xmlns:a="http://schemas.openxmlformats.org/drawingml/2006/main">
+            <a:pPr algn="r"/>
+            <a:r>
+              <a:rPr lang="en-US" sz="1050">
+                <a:solidFill>
+                  <a:srgbClr val="7F8081"/>
+                </a:solidFill>
+                <a:latin typeface="Tahoma"/>
+                <a:ea typeface="Tahoma"/>
+              </a:rPr>
+              <a:t>2 / 6</a:t>
+            </a:r>
+            <a:endParaRPr lang="en-US"/>
+          </a:p>
+        </p:txBody>
+      </p:sp>
+    </p:spTree>
+  </p:cSld>
+  <p:clrMapOvr>
+    <a:masterClrMapping xmlns:a="http://schemas.openxmlformats.org/drawingml/2006/main"/>
+  </p:clrMapOvr>
+</p:sld>
+</file>
+
+<file path=ppt/slides/slide3.xml><?xml version="1.0" encoding="utf-8"?>
+<p:sld xmlns:p="http://schemas.openxmlformats.org/presentationml/2006/main">
+  <p:cSld name="Evidence">
+    <p:bg>
+      <p:bgPr>
+        <a:blipFill xmlns:a="http://schemas.openxmlformats.org/drawingml/2006/main">
+          <a:blip xmlns:r="http://schemas.openxmlformats.org/officeDocument/2006/relationships" r:embed="rIdOfficeKitImage8fbc298f8d1b7a3c_1"/>
+          <a:stretch>
+            <a:fillRect/>
+          </a:stretch>
+        </a:blipFill>
+      </p:bgPr>
+    </p:bg>
+    <p:spTree>
+      <p:nvGrpSpPr>
+        <p:cNvPr id="1" name=""/>
+        <p:cNvGrpSpPr/>
+        <p:nvPr/>
+      </p:nvGrpSpPr>
+      <p:grpSpPr>
+        <a:xfrm xmlns:a="http://schemas.openxmlformats.org/drawingml/2006/main">
+          <a:off x="0" y="0"/>
+          <a:ext cx="0" cy="0"/>
+          <a:chOff x="0" y="0"/>
+          <a:chExt cx="0" cy="0"/>
+        </a:xfrm>
+      </p:grpSpPr>
+      <p:sp>
+        <p:nvSpPr>
+          <p:cNvPr id="2" name="evidence-paper-scrim"/>
+          <p:cNvSpPr/>
+          <p:nvPr/>
+        </p:nvSpPr>
+        <p:spPr>
+          <a:xfrm xmlns:a="http://schemas.openxmlformats.org/drawingml/2006/main">
+            <a:off x="0" y="0"/>
+            <a:ext cx="7429500" cy="8572500"/>
+          </a:xfrm>
+          <a:prstGeom xmlns:a="http://schemas.openxmlformats.org/drawingml/2006/main" prst="rect">
+            <a:avLst/>
+          </a:prstGeom>
+          <a:solidFill xmlns:a="http://schemas.openxmlformats.org/drawingml/2006/main">
+            <a:srgbClr val="101115">
+              <a:alpha val="96000"/>
+            </a:srgbClr>
+          </a:solidFill>
+          <a:ln xmlns:a="http://schemas.openxmlformats.org/drawingml/2006/main" w="0">
+            <a:solidFill>
+              <a:srgbClr val="101115"/>
+            </a:solidFill>
+            <a:prstDash val="solid"/>
+          </a:ln>
+        </p:spPr>
+        <p:txBody>
+          <a:bodyPr xmlns:a="http://schemas.openxmlformats.org/drawingml/2006/main" wrap="square" lIns="0" tIns="0" rIns="0" bIns="0" anchor="t"/>
+          <a:lstStyle xmlns:a="http://schemas.openxmlformats.org/drawingml/2006/main"/>
+          <a:p xmlns:a="http://schemas.openxmlformats.org/drawingml/2006/main">
+            <a:r>
+              <a:rPr lang="en-US"/>
+              <a:t/>
+            </a:r>
+            <a:endParaRPr lang="en-US"/>
+          </a:p>
+        </p:txBody>
+      </p:sp>
+      <p:sp>
+        <p:nvSpPr>
+          <p:cNvPr id="3" name="evidence-top-rule"/>
+          <p:cNvSpPr/>
+          <p:nvPr/>
+        </p:nvSpPr>
+        <p:spPr>
+          <a:xfrm xmlns:a="http://schemas.openxmlformats.org/drawingml/2006/main">
+            <a:off x="838200" y="666750"/>
+            <a:ext cx="13563600" cy="0"/>
+          </a:xfrm>
+          <a:prstGeom xmlns:a="http://schemas.openxmlformats.org/drawingml/2006/main" prst="line">
+            <a:avLst/>
+          </a:prstGeom>
+          <a:noFill xmlns:a="http://schemas.openxmlformats.org/drawingml/2006/main"/>
+          <a:ln xmlns:a="http://schemas.openxmlformats.org/drawingml/2006/main" w="38100">
+            <a:solidFill>
+              <a:srgbClr val="7047FF"/>
+            </a:solidFill>
+            <a:prstDash val="solid"/>
+          </a:ln>
+        </p:spPr>
+        <p:txBody>
+          <a:bodyPr xmlns:a="http://schemas.openxmlformats.org/drawingml/2006/main" wrap="square" lIns="0" tIns="0" rIns="0" bIns="0" anchor="t"/>
+          <a:lstStyle xmlns:a="http://schemas.openxmlformats.org/drawingml/2006/main"/>
+          <a:p xmlns:a="http://schemas.openxmlformats.org/drawingml/2006/main">
+            <a:r>
+              <a:rPr lang="en-US"/>
+              <a:t/>
+            </a:r>
+            <a:endParaRPr lang="en-US"/>
+          </a:p>
+        </p:txBody>
+      </p:sp>
+      <p:sp>
+        <p:nvSpPr>
+          <p:cNvPr id="4" name="VIOLET OPERATIONS · EVIDENCE"/>
+          <p:cNvSpPr txBox="1"/>
+          <p:nvPr/>
+        </p:nvSpPr>
+        <p:spPr>
+          <a:xfrm xmlns:a="http://schemas.openxmlformats.org/drawingml/2006/main">
+            <a:off x="914400" y="895350"/>
+            <a:ext cx="7239000" cy="228600"/>
+          </a:xfrm>
+          <a:prstGeom xmlns:a="http://schemas.openxmlformats.org/drawingml/2006/main" prst="rect">
+            <a:avLst/>
+          </a:prstGeom>
+          <a:noFill xmlns:a="http://schemas.openxmlformats.org/drawingml/2006/main"/>
+          <a:ln xmlns:a="http://schemas.openxmlformats.org/drawingml/2006/main" w="0">
+            <a:noFill/>
+          </a:ln>
+        </p:spPr>
+        <p:txBody>
+          <a:bodyPr xmlns:a="http://schemas.openxmlformats.org/drawingml/2006/main" wrap="square" lIns="0" tIns="0" rIns="0" bIns="0" anchor="t"/>
+          <a:lstStyle xmlns:a="http://schemas.openxmlformats.org/drawingml/2006/main"/>
+          <a:p xmlns:a="http://schemas.openxmlformats.org/drawingml/2006/main">
+            <a:r>
+              <a:rPr lang="en-US" sz="1200" b="1">
+                <a:solidFill>
+                  <a:srgbClr val="7047FF"/>
+                </a:solidFill>
+                <a:latin typeface="Tahoma"/>
+                <a:ea typeface="Tahoma"/>
+              </a:rPr>
+              <a:t>VIOLET OPERATIONS · EVIDENCE</a:t>
+            </a:r>
+            <a:endParaRPr lang="en-US"/>
+          </a:p>
+        </p:txBody>
+      </p:sp>
+      <p:sp>
+        <p:nvSpPr>
+          <p:cNvPr id="5" name="evidence-title"/>
+          <p:cNvSpPr txBox="1"/>
+          <p:nvPr/>
+        </p:nvSpPr>
+        <p:spPr>
+          <a:xfrm xmlns:a="http://schemas.openxmlformats.org/drawingml/2006/main">
+            <a:off x="914400" y="1314450"/>
+            <a:ext cx="6286500" cy="552450"/>
+          </a:xfrm>
+          <a:prstGeom xmlns:a="http://schemas.openxmlformats.org/drawingml/2006/main" prst="rect">
+            <a:avLst/>
+          </a:prstGeom>
+          <a:noFill xmlns:a="http://schemas.openxmlformats.org/drawingml/2006/main"/>
+          <a:ln xmlns:a="http://schemas.openxmlformats.org/drawingml/2006/main" w="0">
+            <a:noFill/>
+          </a:ln>
+        </p:spPr>
+        <p:txBody>
+          <a:bodyPr xmlns:a="http://schemas.openxmlformats.org/drawingml/2006/main" wrap="square" lIns="0" tIns="0" rIns="0" bIns="0" anchor="t"/>
+          <a:lstStyle xmlns:a="http://schemas.openxmlformats.org/drawingml/2006/main"/>
+          <a:p xmlns:a="http://schemas.openxmlformats.org/drawingml/2006/main">
+            <a:r>
+              <a:rPr lang="en-US" sz="2550" b="1">
                 <a:solidFill>
                   <a:srgbClr val="F8F8F7"/>
                 </a:solidFill>
@@ -2374,7 +2374,7 @@
         </p:xfrm>
         <a:graphic xmlns:a="http://schemas.openxmlformats.org/drawingml/2006/main">
           <a:graphicData uri="http://schemas.openxmlformats.org/drawingml/2006/chart">
-            <c:chart xmlns:r="http://schemas.openxmlformats.org/officeDocument/2006/relationships" xmlns:c="http://schemas.openxmlformats.org/drawingml/2006/chart" r:id="Ra5a3344c69fc44da"/>
+            <c:chart xmlns:r="http://schemas.openxmlformats.org/officeDocument/2006/relationships" xmlns:c="http://schemas.openxmlformats.org/drawingml/2006/chart" r:id="R566612555dc5421c"/>
           </a:graphicData>
         </a:graphic>
       </p:graphicFrame>
@@ -2392,7 +2392,7 @@
         </p:xfrm>
         <a:graphic xmlns:a="http://schemas.openxmlformats.org/drawingml/2006/main">
           <a:graphicData uri="http://schemas.openxmlformats.org/drawingml/2006/chart">
-            <c:chart xmlns:r="http://schemas.openxmlformats.org/officeDocument/2006/relationships" xmlns:c="http://schemas.openxmlformats.org/drawingml/2006/chart" r:id="Rffc35de571254104"/>
+            <c:chart xmlns:r="http://schemas.openxmlformats.org/officeDocument/2006/relationships" xmlns:c="http://schemas.openxmlformats.org/drawingml/2006/chart" r:id="R6a9bfaf9beb74388"/>
           </a:graphicData>
         </a:graphic>
       </p:graphicFrame>
@@ -2830,29 +2830,42 @@
         <p:spPr>
           <a:xfrm xmlns:a="http://schemas.openxmlformats.org/drawingml/2006/main">
             <a:off x="914400" y="1314450"/>
-            <a:ext cx="6286500" cy="552450"/>
-          </a:xfrm>
-          <a:prstGeom xmlns:a="http://schemas.openxmlformats.org/drawingml/2006/main" prst="rect">
-            <a:avLst/>
-          </a:prstGeom>
-          <a:noFill xmlns:a="http://schemas.openxmlformats.org/drawingml/2006/main"/>
-          <a:ln xmlns:a="http://schemas.openxmlformats.org/drawingml/2006/main" w="0">
-            <a:noFill/>
-          </a:ln>
-        </p:spPr>
-        <p:txBody>
-          <a:bodyPr xmlns:a="http://schemas.openxmlformats.org/drawingml/2006/main" wrap="square" lIns="0" tIns="0" rIns="0" bIns="0" anchor="t"/>
-          <a:lstStyle xmlns:a="http://schemas.openxmlformats.org/drawingml/2006/main"/>
-          <a:p xmlns:a="http://schemas.openxmlformats.org/drawingml/2006/main">
-            <a:r>
-              <a:rPr lang="en-US" sz="2850" b="1">
+            <a:ext cx="6286500" cy="914400"/>
+          </a:xfrm>
+          <a:prstGeom xmlns:a="http://schemas.openxmlformats.org/drawingml/2006/main" prst="rect">
+            <a:avLst/>
+          </a:prstGeom>
+          <a:noFill xmlns:a="http://schemas.openxmlformats.org/drawingml/2006/main"/>
+          <a:ln xmlns:a="http://schemas.openxmlformats.org/drawingml/2006/main" w="0">
+            <a:noFill/>
+          </a:ln>
+        </p:spPr>
+        <p:txBody>
+          <a:bodyPr xmlns:a="http://schemas.openxmlformats.org/drawingml/2006/main" wrap="square" lIns="0" tIns="0" rIns="0" bIns="0" anchor="t"/>
+          <a:lstStyle xmlns:a="http://schemas.openxmlformats.org/drawingml/2006/main"/>
+          <a:p xmlns:a="http://schemas.openxmlformats.org/drawingml/2006/main">
+            <a:r>
+              <a:rPr lang="en-US" sz="2550" b="1">
                 <a:solidFill>
                   <a:srgbClr val="F8F8F7"/>
                 </a:solidFill>
                 <a:latin typeface="Tahoma"/>
                 <a:ea typeface="Tahoma"/>
               </a:rPr>
-              <a:t>The gap becomes useful when it has an owner</a:t>
+              <a:t>The gap becomes useful when it has an</a:t>
+            </a:r>
+            <a:endParaRPr lang="en-US"/>
+          </a:p>
+          <a:p xmlns:a="http://schemas.openxmlformats.org/drawingml/2006/main">
+            <a:r>
+              <a:rPr lang="en-US" sz="2550" b="1">
+                <a:solidFill>
+                  <a:srgbClr val="F8F8F7"/>
+                </a:solidFill>
+                <a:latin typeface="Tahoma"/>
+                <a:ea typeface="Tahoma"/>
+              </a:rPr>
+              <a:t>owner</a:t>
             </a:r>
             <a:endParaRPr lang="en-US"/>
           </a:p>
@@ -2866,7 +2879,7 @@
         </p:nvSpPr>
         <p:spPr>
           <a:xfrm xmlns:a="http://schemas.openxmlformats.org/drawingml/2006/main">
-            <a:off x="952500" y="1981200"/>
+            <a:off x="952500" y="2190750"/>
             <a:ext cx="6096000" cy="266700"/>
           </a:xfrm>
           <a:prstGeom xmlns:a="http://schemas.openxmlformats.org/drawingml/2006/main" prst="rect">
@@ -3857,7 +3870,7 @@
     <p:bg>
       <p:bgPr>
         <a:blipFill xmlns:a="http://schemas.openxmlformats.org/drawingml/2006/main">
-          <a:blip xmlns:r="http://schemas.openxmlformats.org/officeDocument/2006/relationships" r:embed="rIdOfficeKitImagee4bd683f73b7a543_1"/>
+          <a:blip xmlns:r="http://schemas.openxmlformats.org/officeDocument/2006/relationships" r:embed="rIdOfficeKitImagec237998db8bee20d_1"/>
           <a:stretch>
             <a:fillRect/>
           </a:stretch>
@@ -4187,7 +4200,7 @@
     <p:bg>
       <p:bgPr>
         <a:blipFill xmlns:a="http://schemas.openxmlformats.org/drawingml/2006/main">
-          <a:blip xmlns:r="http://schemas.openxmlformats.org/officeDocument/2006/relationships" r:embed="rIdOfficeKitImage59ee3aa5202fd02f_1"/>
+          <a:blip xmlns:r="http://schemas.openxmlformats.org/officeDocument/2006/relationships" r:embed="rIdOfficeKitImage2930549abca3ae00_1"/>
           <a:stretch>
             <a:fillRect/>
           </a:stretch>
@@ -4341,7 +4354,7 @@
           <a:lstStyle xmlns:a="http://schemas.openxmlformats.org/drawingml/2006/main"/>
           <a:p xmlns:a="http://schemas.openxmlformats.org/drawingml/2006/main">
             <a:r>
-              <a:rPr lang="en-US" sz="2850" b="1">
+              <a:rPr lang="en-US" sz="2550" b="1">
                 <a:solidFill>
                   <a:srgbClr val="F8F8F7"/>
                 </a:solidFill>

--- a/skills/presentation-template-library/skills/artifact-template-violet-operations/assets/reference.pptx
+++ b/skills/presentation-template-library/skills/artifact-template-violet-operations/assets/reference.pptx
@@ -484,7 +484,7 @@
     <p:bg>
       <p:bgPr>
         <a:blipFill xmlns:a="http://schemas.openxmlformats.org/drawingml/2006/main">
-          <a:blip xmlns:r="http://schemas.openxmlformats.org/officeDocument/2006/relationships" r:embed="rIdOfficeKitImageb7d7d39d00e5a7e4_1"/>
+          <a:blip xmlns:r="http://schemas.openxmlformats.org/officeDocument/2006/relationships" r:embed="rIdOfficeKitImage56df3e49f11f0ff0_1"/>
           <a:stretch>
             <a:fillRect/>
           </a:stretch>
@@ -1279,7 +1279,7 @@
     <p:bg>
       <p:bgPr>
         <a:blipFill xmlns:a="http://schemas.openxmlformats.org/drawingml/2006/main">
-          <a:blip xmlns:r="http://schemas.openxmlformats.org/officeDocument/2006/relationships" r:embed="rIdOfficeKitImageaeb6f74d36d260d0_1"/>
+          <a:blip xmlns:r="http://schemas.openxmlformats.org/officeDocument/2006/relationships" r:embed="rIdOfficeKitImage2930549abca3ae00_1"/>
           <a:stretch>
             <a:fillRect/>
           </a:stretch>
@@ -2084,7 +2084,7 @@
     <p:bg>
       <p:bgPr>
         <a:blipFill xmlns:a="http://schemas.openxmlformats.org/drawingml/2006/main">
-          <a:blip xmlns:r="http://schemas.openxmlformats.org/officeDocument/2006/relationships" r:embed="rIdOfficeKitImage8fbc298f8d1b7a3c_1"/>
+          <a:blip xmlns:r="http://schemas.openxmlformats.org/officeDocument/2006/relationships" r:embed="rIdOfficeKitImage283e3eeb8530a9d2_1"/>
           <a:stretch>
             <a:fillRect/>
           </a:stretch>
@@ -2374,7 +2374,7 @@
         </p:xfrm>
         <a:graphic xmlns:a="http://schemas.openxmlformats.org/drawingml/2006/main">
           <a:graphicData uri="http://schemas.openxmlformats.org/drawingml/2006/chart">
-            <c:chart xmlns:r="http://schemas.openxmlformats.org/officeDocument/2006/relationships" xmlns:c="http://schemas.openxmlformats.org/drawingml/2006/chart" r:id="R566612555dc5421c"/>
+            <c:chart xmlns:r="http://schemas.openxmlformats.org/officeDocument/2006/relationships" xmlns:c="http://schemas.openxmlformats.org/drawingml/2006/chart" r:id="R4481e28646404396"/>
           </a:graphicData>
         </a:graphic>
       </p:graphicFrame>
@@ -2392,7 +2392,7 @@
         </p:xfrm>
         <a:graphic xmlns:a="http://schemas.openxmlformats.org/drawingml/2006/main">
           <a:graphicData uri="http://schemas.openxmlformats.org/drawingml/2006/chart">
-            <c:chart xmlns:r="http://schemas.openxmlformats.org/officeDocument/2006/relationships" xmlns:c="http://schemas.openxmlformats.org/drawingml/2006/chart" r:id="R6a9bfaf9beb74388"/>
+            <c:chart xmlns:r="http://schemas.openxmlformats.org/officeDocument/2006/relationships" xmlns:c="http://schemas.openxmlformats.org/drawingml/2006/chart" r:id="R05eb0d627afc47b6"/>
           </a:graphicData>
         </a:graphic>
       </p:graphicFrame>
@@ -3870,7 +3870,7 @@
     <p:bg>
       <p:bgPr>
         <a:blipFill xmlns:a="http://schemas.openxmlformats.org/drawingml/2006/main">
-          <a:blip xmlns:r="http://schemas.openxmlformats.org/officeDocument/2006/relationships" r:embed="rIdOfficeKitImagec237998db8bee20d_1"/>
+          <a:blip xmlns:r="http://schemas.openxmlformats.org/officeDocument/2006/relationships" r:embed="rIdOfficeKitImage7650495d0c3b8602_1"/>
           <a:stretch>
             <a:fillRect/>
           </a:stretch>
@@ -4200,7 +4200,7 @@
     <p:bg>
       <p:bgPr>
         <a:blipFill xmlns:a="http://schemas.openxmlformats.org/drawingml/2006/main">
-          <a:blip xmlns:r="http://schemas.openxmlformats.org/officeDocument/2006/relationships" r:embed="rIdOfficeKitImage2930549abca3ae00_1"/>
+          <a:blip xmlns:r="http://schemas.openxmlformats.org/officeDocument/2006/relationships" r:embed="rIdOfficeKitImage9df32179333a9f35_1"/>
           <a:stretch>
             <a:fillRect/>
           </a:stretch>

--- a/skills/presentation-template-library/skills/artifact-template-violet-operations/assets/reference.pptx
+++ b/skills/presentation-template-library/skills/artifact-template-violet-operations/assets/reference.pptx
@@ -484,7 +484,7 @@
     <p:bg>
       <p:bgPr>
         <a:blipFill xmlns:a="http://schemas.openxmlformats.org/drawingml/2006/main">
-          <a:blip xmlns:r="http://schemas.openxmlformats.org/officeDocument/2006/relationships" r:embed="rIdOfficeKitImage56df3e49f11f0ff0_1"/>
+          <a:blip xmlns:r="http://schemas.openxmlformats.org/officeDocument/2006/relationships" r:embed="rIdOfficeKitImage7650495d0c3b8602_1"/>
           <a:stretch>
             <a:fillRect/>
           </a:stretch>
@@ -1276,811 +1276,6 @@
 <file path=ppt/slides/slide2.xml><?xml version="1.0" encoding="utf-8"?>
 <p:sld xmlns:p="http://schemas.openxmlformats.org/presentationml/2006/main">
   <p:cSld name="Argument">
-    <p:bg>
-      <p:bgPr>
-        <a:blipFill xmlns:a="http://schemas.openxmlformats.org/drawingml/2006/main">
-          <a:blip xmlns:r="http://schemas.openxmlformats.org/officeDocument/2006/relationships" r:embed="rIdOfficeKitImage2930549abca3ae00_1"/>
-          <a:stretch>
-            <a:fillRect/>
-          </a:stretch>
-        </a:blipFill>
-      </p:bgPr>
-    </p:bg>
-    <p:spTree>
-      <p:nvGrpSpPr>
-        <p:cNvPr id="1" name=""/>
-        <p:cNvGrpSpPr/>
-        <p:nvPr/>
-      </p:nvGrpSpPr>
-      <p:grpSpPr>
-        <a:xfrm xmlns:a="http://schemas.openxmlformats.org/drawingml/2006/main">
-          <a:off x="0" y="0"/>
-          <a:ext cx="0" cy="0"/>
-          <a:chOff x="0" y="0"/>
-          <a:chExt cx="0" cy="0"/>
-        </a:xfrm>
-      </p:grpSpPr>
-      <p:sp>
-        <p:nvSpPr>
-          <p:cNvPr id="2" name="argument-paper-scrim"/>
-          <p:cNvSpPr/>
-          <p:nvPr/>
-        </p:nvSpPr>
-        <p:spPr>
-          <a:xfrm xmlns:a="http://schemas.openxmlformats.org/drawingml/2006/main">
-            <a:off x="0" y="0"/>
-            <a:ext cx="7429500" cy="8572500"/>
-          </a:xfrm>
-          <a:prstGeom xmlns:a="http://schemas.openxmlformats.org/drawingml/2006/main" prst="rect">
-            <a:avLst/>
-          </a:prstGeom>
-          <a:solidFill xmlns:a="http://schemas.openxmlformats.org/drawingml/2006/main">
-            <a:srgbClr val="101115">
-              <a:alpha val="96000"/>
-            </a:srgbClr>
-          </a:solidFill>
-          <a:ln xmlns:a="http://schemas.openxmlformats.org/drawingml/2006/main" w="0">
-            <a:solidFill>
-              <a:srgbClr val="101115"/>
-            </a:solidFill>
-            <a:prstDash val="solid"/>
-          </a:ln>
-        </p:spPr>
-        <p:txBody>
-          <a:bodyPr xmlns:a="http://schemas.openxmlformats.org/drawingml/2006/main" wrap="square" lIns="0" tIns="0" rIns="0" bIns="0" anchor="t"/>
-          <a:lstStyle xmlns:a="http://schemas.openxmlformats.org/drawingml/2006/main"/>
-          <a:p xmlns:a="http://schemas.openxmlformats.org/drawingml/2006/main">
-            <a:r>
-              <a:rPr lang="en-US"/>
-              <a:t/>
-            </a:r>
-            <a:endParaRPr lang="en-US"/>
-          </a:p>
-        </p:txBody>
-      </p:sp>
-      <p:sp>
-        <p:nvSpPr>
-          <p:cNvPr id="3" name="argument-top-rule"/>
-          <p:cNvSpPr/>
-          <p:nvPr/>
-        </p:nvSpPr>
-        <p:spPr>
-          <a:xfrm xmlns:a="http://schemas.openxmlformats.org/drawingml/2006/main">
-            <a:off x="838200" y="666750"/>
-            <a:ext cx="13563600" cy="0"/>
-          </a:xfrm>
-          <a:prstGeom xmlns:a="http://schemas.openxmlformats.org/drawingml/2006/main" prst="line">
-            <a:avLst/>
-          </a:prstGeom>
-          <a:noFill xmlns:a="http://schemas.openxmlformats.org/drawingml/2006/main"/>
-          <a:ln xmlns:a="http://schemas.openxmlformats.org/drawingml/2006/main" w="38100">
-            <a:solidFill>
-              <a:srgbClr val="7047FF"/>
-            </a:solidFill>
-            <a:prstDash val="solid"/>
-          </a:ln>
-        </p:spPr>
-        <p:txBody>
-          <a:bodyPr xmlns:a="http://schemas.openxmlformats.org/drawingml/2006/main" wrap="square" lIns="0" tIns="0" rIns="0" bIns="0" anchor="t"/>
-          <a:lstStyle xmlns:a="http://schemas.openxmlformats.org/drawingml/2006/main"/>
-          <a:p xmlns:a="http://schemas.openxmlformats.org/drawingml/2006/main">
-            <a:r>
-              <a:rPr lang="en-US"/>
-              <a:t/>
-            </a:r>
-            <a:endParaRPr lang="en-US"/>
-          </a:p>
-        </p:txBody>
-      </p:sp>
-      <p:sp>
-        <p:nvSpPr>
-          <p:cNvPr id="4" name="VIOLET OPERATIONS · ARGUMENT"/>
-          <p:cNvSpPr txBox="1"/>
-          <p:nvPr/>
-        </p:nvSpPr>
-        <p:spPr>
-          <a:xfrm xmlns:a="http://schemas.openxmlformats.org/drawingml/2006/main">
-            <a:off x="914400" y="895350"/>
-            <a:ext cx="7239000" cy="228600"/>
-          </a:xfrm>
-          <a:prstGeom xmlns:a="http://schemas.openxmlformats.org/drawingml/2006/main" prst="rect">
-            <a:avLst/>
-          </a:prstGeom>
-          <a:noFill xmlns:a="http://schemas.openxmlformats.org/drawingml/2006/main"/>
-          <a:ln xmlns:a="http://schemas.openxmlformats.org/drawingml/2006/main" w="0">
-            <a:noFill/>
-          </a:ln>
-        </p:spPr>
-        <p:txBody>
-          <a:bodyPr xmlns:a="http://schemas.openxmlformats.org/drawingml/2006/main" wrap="square" lIns="0" tIns="0" rIns="0" bIns="0" anchor="t"/>
-          <a:lstStyle xmlns:a="http://schemas.openxmlformats.org/drawingml/2006/main"/>
-          <a:p xmlns:a="http://schemas.openxmlformats.org/drawingml/2006/main">
-            <a:r>
-              <a:rPr lang="en-US" sz="1200" b="1">
-                <a:solidFill>
-                  <a:srgbClr val="7047FF"/>
-                </a:solidFill>
-                <a:latin typeface="Tahoma"/>
-                <a:ea typeface="Tahoma"/>
-              </a:rPr>
-              <a:t>VIOLET OPERATIONS · ARGUMENT</a:t>
-            </a:r>
-            <a:endParaRPr lang="en-US"/>
-          </a:p>
-        </p:txBody>
-      </p:sp>
-      <p:sp>
-        <p:nvSpPr>
-          <p:cNvPr id="5" name="argument-title"/>
-          <p:cNvSpPr txBox="1"/>
-          <p:nvPr/>
-        </p:nvSpPr>
-        <p:spPr>
-          <a:xfrm xmlns:a="http://schemas.openxmlformats.org/drawingml/2006/main">
-            <a:off x="914400" y="1314450"/>
-            <a:ext cx="6286500" cy="552450"/>
-          </a:xfrm>
-          <a:prstGeom xmlns:a="http://schemas.openxmlformats.org/drawingml/2006/main" prst="rect">
-            <a:avLst/>
-          </a:prstGeom>
-          <a:noFill xmlns:a="http://schemas.openxmlformats.org/drawingml/2006/main"/>
-          <a:ln xmlns:a="http://schemas.openxmlformats.org/drawingml/2006/main" w="0">
-            <a:noFill/>
-          </a:ln>
-        </p:spPr>
-        <p:txBody>
-          <a:bodyPr xmlns:a="http://schemas.openxmlformats.org/drawingml/2006/main" wrap="square" lIns="0" tIns="0" rIns="0" bIns="0" anchor="t"/>
-          <a:lstStyle xmlns:a="http://schemas.openxmlformats.org/drawingml/2006/main"/>
-          <a:p xmlns:a="http://schemas.openxmlformats.org/drawingml/2006/main">
-            <a:r>
-              <a:rPr lang="en-US" sz="2550" b="1">
-                <a:solidFill>
-                  <a:srgbClr val="F8F8F7"/>
-                </a:solidFill>
-                <a:latin typeface="Tahoma"/>
-                <a:ea typeface="Tahoma"/>
-              </a:rPr>
-              <a:t>The constraint owns the page</a:t>
-            </a:r>
-            <a:endParaRPr lang="en-US"/>
-          </a:p>
-        </p:txBody>
-      </p:sp>
-      <p:sp>
-        <p:nvSpPr>
-          <p:cNvPr id="6" name="argument-basis"/>
-          <p:cNvSpPr txBox="1"/>
-          <p:nvPr/>
-        </p:nvSpPr>
-        <p:spPr>
-          <a:xfrm xmlns:a="http://schemas.openxmlformats.org/drawingml/2006/main">
-            <a:off x="952500" y="1981200"/>
-            <a:ext cx="6096000" cy="266700"/>
-          </a:xfrm>
-          <a:prstGeom xmlns:a="http://schemas.openxmlformats.org/drawingml/2006/main" prst="rect">
-            <a:avLst/>
-          </a:prstGeom>
-          <a:noFill xmlns:a="http://schemas.openxmlformats.org/drawingml/2006/main"/>
-          <a:ln xmlns:a="http://schemas.openxmlformats.org/drawingml/2006/main" w="0">
-            <a:noFill/>
-          </a:ln>
-        </p:spPr>
-        <p:txBody>
-          <a:bodyPr xmlns:a="http://schemas.openxmlformats.org/drawingml/2006/main" wrap="square" lIns="0" tIns="0" rIns="0" bIns="0" anchor="t"/>
-          <a:lstStyle xmlns:a="http://schemas.openxmlformats.org/drawingml/2006/main"/>
-          <a:p xmlns:a="http://schemas.openxmlformats.org/drawingml/2006/main">
-            <a:r>
-              <a:rPr lang="en-US" sz="1350">
-                <a:solidFill>
-                  <a:srgbClr val="7F8081"/>
-                </a:solidFill>
-                <a:latin typeface="Tahoma"/>
-                <a:ea typeface="Tahoma"/>
-              </a:rPr>
-              <a:t>Status, cause, owner and date stay together.</a:t>
-            </a:r>
-            <a:endParaRPr lang="en-US"/>
-          </a:p>
-        </p:txBody>
-      </p:sp>
-      <p:sp>
-        <p:nvSpPr>
-          <p:cNvPr id="7" name="argument-rule"/>
-          <p:cNvSpPr/>
-          <p:nvPr/>
-        </p:nvSpPr>
-        <p:spPr>
-          <a:xfrm xmlns:a="http://schemas.openxmlformats.org/drawingml/2006/main">
-            <a:off x="914400" y="2457450"/>
-            <a:ext cx="13411200" cy="0"/>
-          </a:xfrm>
-          <a:prstGeom xmlns:a="http://schemas.openxmlformats.org/drawingml/2006/main" prst="line">
-            <a:avLst/>
-          </a:prstGeom>
-          <a:noFill xmlns:a="http://schemas.openxmlformats.org/drawingml/2006/main"/>
-          <a:ln xmlns:a="http://schemas.openxmlformats.org/drawingml/2006/main" w="25400">
-            <a:solidFill>
-              <a:srgbClr val="7F8081"/>
-            </a:solidFill>
-            <a:prstDash val="solid"/>
-          </a:ln>
-        </p:spPr>
-        <p:txBody>
-          <a:bodyPr xmlns:a="http://schemas.openxmlformats.org/drawingml/2006/main" wrap="square" lIns="0" tIns="0" rIns="0" bIns="0" anchor="t"/>
-          <a:lstStyle xmlns:a="http://schemas.openxmlformats.org/drawingml/2006/main"/>
-          <a:p xmlns:a="http://schemas.openxmlformats.org/drawingml/2006/main">
-            <a:r>
-              <a:rPr lang="en-US"/>
-              <a:t/>
-            </a:r>
-            <a:endParaRPr lang="en-US"/>
-          </a:p>
-        </p:txBody>
-      </p:sp>
-      <p:sp>
-        <p:nvSpPr>
-          <p:cNvPr id="8" name="work-status"/>
-          <p:cNvSpPr txBox="1"/>
-          <p:nvPr/>
-        </p:nvSpPr>
-        <p:spPr>
-          <a:xfrm xmlns:a="http://schemas.openxmlformats.org/drawingml/2006/main">
-            <a:off x="1104900" y="3352800"/>
-            <a:ext cx="2857500" cy="228600"/>
-          </a:xfrm>
-          <a:prstGeom xmlns:a="http://schemas.openxmlformats.org/drawingml/2006/main" prst="rect">
-            <a:avLst/>
-          </a:prstGeom>
-          <a:noFill xmlns:a="http://schemas.openxmlformats.org/drawingml/2006/main"/>
-          <a:ln xmlns:a="http://schemas.openxmlformats.org/drawingml/2006/main" w="0">
-            <a:noFill/>
-          </a:ln>
-        </p:spPr>
-        <p:txBody>
-          <a:bodyPr xmlns:a="http://schemas.openxmlformats.org/drawingml/2006/main" wrap="square" lIns="0" tIns="0" rIns="0" bIns="0" anchor="t"/>
-          <a:lstStyle xmlns:a="http://schemas.openxmlformats.org/drawingml/2006/main"/>
-          <a:p xmlns:a="http://schemas.openxmlformats.org/drawingml/2006/main">
-            <a:r>
-              <a:rPr lang="en-US" sz="1125" b="1">
-                <a:solidFill>
-                  <a:srgbClr val="7047FF"/>
-                </a:solidFill>
-                <a:latin typeface="Tahoma"/>
-                <a:ea typeface="Tahoma"/>
-              </a:rPr>
-              <a:t>OPERATING SIGNAL</a:t>
-            </a:r>
-            <a:endParaRPr lang="en-US"/>
-          </a:p>
-        </p:txBody>
-      </p:sp>
-      <p:sp>
-        <p:nvSpPr>
-          <p:cNvPr id="9" name="work-headline"/>
-          <p:cNvSpPr txBox="1"/>
-          <p:nvPr/>
-        </p:nvSpPr>
-        <p:spPr>
-          <a:xfrm xmlns:a="http://schemas.openxmlformats.org/drawingml/2006/main">
-            <a:off x="1104900" y="3790950"/>
-            <a:ext cx="6667500" cy="723900"/>
-          </a:xfrm>
-          <a:prstGeom xmlns:a="http://schemas.openxmlformats.org/drawingml/2006/main" prst="rect">
-            <a:avLst/>
-          </a:prstGeom>
-          <a:noFill xmlns:a="http://schemas.openxmlformats.org/drawingml/2006/main"/>
-          <a:ln xmlns:a="http://schemas.openxmlformats.org/drawingml/2006/main" w="0">
-            <a:noFill/>
-          </a:ln>
-        </p:spPr>
-        <p:txBody>
-          <a:bodyPr xmlns:a="http://schemas.openxmlformats.org/drawingml/2006/main" wrap="square" lIns="0" tIns="0" rIns="0" bIns="0" anchor="t"/>
-          <a:lstStyle xmlns:a="http://schemas.openxmlformats.org/drawingml/2006/main"/>
-          <a:p xmlns:a="http://schemas.openxmlformats.org/drawingml/2006/main">
-            <a:r>
-              <a:rPr lang="en-US" sz="2550" b="1">
-                <a:solidFill>
-                  <a:srgbClr val="F8F8F7"/>
-                </a:solidFill>
-                <a:latin typeface="Tahoma"/>
-                <a:ea typeface="Tahoma"/>
-              </a:rPr>
-              <a:t>The queue is healthy; the handoff is not.</a:t>
-            </a:r>
-            <a:endParaRPr lang="en-US"/>
-          </a:p>
-        </p:txBody>
-      </p:sp>
-      <p:sp>
-        <p:nvSpPr>
-          <p:cNvPr id="10" name="work-body"/>
-          <p:cNvSpPr txBox="1"/>
-          <p:nvPr/>
-        </p:nvSpPr>
-        <p:spPr>
-          <a:xfrm xmlns:a="http://schemas.openxmlformats.org/drawingml/2006/main">
-            <a:off x="1104900" y="4762500"/>
-            <a:ext cx="6191250" cy="400050"/>
-          </a:xfrm>
-          <a:prstGeom xmlns:a="http://schemas.openxmlformats.org/drawingml/2006/main" prst="rect">
-            <a:avLst/>
-          </a:prstGeom>
-          <a:noFill xmlns:a="http://schemas.openxmlformats.org/drawingml/2006/main"/>
-          <a:ln xmlns:a="http://schemas.openxmlformats.org/drawingml/2006/main" w="0">
-            <a:noFill/>
-          </a:ln>
-        </p:spPr>
-        <p:txBody>
-          <a:bodyPr xmlns:a="http://schemas.openxmlformats.org/drawingml/2006/main" wrap="square" lIns="0" tIns="0" rIns="0" bIns="0" anchor="t"/>
-          <a:lstStyle xmlns:a="http://schemas.openxmlformats.org/drawingml/2006/main"/>
-          <a:p xmlns:a="http://schemas.openxmlformats.org/drawingml/2006/main">
-            <a:r>
-              <a:rPr lang="en-US" sz="1575">
-                <a:solidFill>
-                  <a:srgbClr val="F8F8F7"/>
-                </a:solidFill>
-                <a:latin typeface="Tahoma"/>
-                <a:ea typeface="Tahoma"/>
-              </a:rPr>
-              <a:t>Three visible signals point to one owner and one date.</a:t>
-            </a:r>
-            <a:endParaRPr lang="en-US"/>
-          </a:p>
-        </p:txBody>
-      </p:sp>
-      <p:sp>
-        <p:nvSpPr>
-          <p:cNvPr id="11" name="work-rail"/>
-          <p:cNvSpPr/>
-          <p:nvPr/>
-        </p:nvSpPr>
-        <p:spPr>
-          <a:xfrm xmlns:a="http://schemas.openxmlformats.org/drawingml/2006/main">
-            <a:off x="10001250" y="3333750"/>
-            <a:ext cx="0" cy="2381250"/>
-          </a:xfrm>
-          <a:prstGeom xmlns:a="http://schemas.openxmlformats.org/drawingml/2006/main" prst="line">
-            <a:avLst/>
-          </a:prstGeom>
-          <a:noFill xmlns:a="http://schemas.openxmlformats.org/drawingml/2006/main"/>
-          <a:ln xmlns:a="http://schemas.openxmlformats.org/drawingml/2006/main" w="25400">
-            <a:solidFill>
-              <a:srgbClr val="7F8081"/>
-            </a:solidFill>
-            <a:prstDash val="solid"/>
-          </a:ln>
-        </p:spPr>
-        <p:txBody>
-          <a:bodyPr xmlns:a="http://schemas.openxmlformats.org/drawingml/2006/main" wrap="square" lIns="0" tIns="0" rIns="0" bIns="0" anchor="t"/>
-          <a:lstStyle xmlns:a="http://schemas.openxmlformats.org/drawingml/2006/main"/>
-          <a:p xmlns:a="http://schemas.openxmlformats.org/drawingml/2006/main">
-            <a:r>
-              <a:rPr lang="en-US"/>
-              <a:t/>
-            </a:r>
-            <a:endParaRPr lang="en-US"/>
-          </a:p>
-        </p:txBody>
-      </p:sp>
-      <p:sp>
-        <p:nvSpPr>
-          <p:cNvPr id="12" name="work-num-0"/>
-          <p:cNvSpPr txBox="1"/>
-          <p:nvPr/>
-        </p:nvSpPr>
-        <p:spPr>
-          <a:xfrm xmlns:a="http://schemas.openxmlformats.org/drawingml/2006/main">
-            <a:off x="10477500" y="3448050"/>
-            <a:ext cx="571500" cy="228600"/>
-          </a:xfrm>
-          <a:prstGeom xmlns:a="http://schemas.openxmlformats.org/drawingml/2006/main" prst="rect">
-            <a:avLst/>
-          </a:prstGeom>
-          <a:noFill xmlns:a="http://schemas.openxmlformats.org/drawingml/2006/main"/>
-          <a:ln xmlns:a="http://schemas.openxmlformats.org/drawingml/2006/main" w="0">
-            <a:noFill/>
-          </a:ln>
-        </p:spPr>
-        <p:txBody>
-          <a:bodyPr xmlns:a="http://schemas.openxmlformats.org/drawingml/2006/main" wrap="square" lIns="0" tIns="0" rIns="0" bIns="0" anchor="t"/>
-          <a:lstStyle xmlns:a="http://schemas.openxmlformats.org/drawingml/2006/main"/>
-          <a:p xmlns:a="http://schemas.openxmlformats.org/drawingml/2006/main">
-            <a:r>
-              <a:rPr lang="en-US" sz="1350" b="1">
-                <a:solidFill>
-                  <a:srgbClr val="7047FF"/>
-                </a:solidFill>
-                <a:latin typeface="Tahoma"/>
-                <a:ea typeface="Tahoma"/>
-              </a:rPr>
-              <a:t>01</a:t>
-            </a:r>
-            <a:endParaRPr lang="en-US"/>
-          </a:p>
-        </p:txBody>
-      </p:sp>
-      <p:sp>
-        <p:nvSpPr>
-          <p:cNvPr id="13" name="work-label-0"/>
-          <p:cNvSpPr txBox="1"/>
-          <p:nvPr/>
-        </p:nvSpPr>
-        <p:spPr>
-          <a:xfrm xmlns:a="http://schemas.openxmlformats.org/drawingml/2006/main">
-            <a:off x="11144250" y="3448050"/>
-            <a:ext cx="1428750" cy="228600"/>
-          </a:xfrm>
-          <a:prstGeom xmlns:a="http://schemas.openxmlformats.org/drawingml/2006/main" prst="rect">
-            <a:avLst/>
-          </a:prstGeom>
-          <a:noFill xmlns:a="http://schemas.openxmlformats.org/drawingml/2006/main"/>
-          <a:ln xmlns:a="http://schemas.openxmlformats.org/drawingml/2006/main" w="0">
-            <a:noFill/>
-          </a:ln>
-        </p:spPr>
-        <p:txBody>
-          <a:bodyPr xmlns:a="http://schemas.openxmlformats.org/drawingml/2006/main" wrap="square" lIns="0" tIns="0" rIns="0" bIns="0" anchor="t"/>
-          <a:lstStyle xmlns:a="http://schemas.openxmlformats.org/drawingml/2006/main"/>
-          <a:p xmlns:a="http://schemas.openxmlformats.org/drawingml/2006/main">
-            <a:r>
-              <a:rPr lang="en-US" sz="1350" b="1">
-                <a:solidFill>
-                  <a:srgbClr val="F8F8F7"/>
-                </a:solidFill>
-                <a:latin typeface="Tahoma"/>
-                <a:ea typeface="Tahoma"/>
-              </a:rPr>
-              <a:t>Queue</a:t>
-            </a:r>
-            <a:endParaRPr lang="en-US"/>
-          </a:p>
-        </p:txBody>
-      </p:sp>
-      <p:sp>
-        <p:nvSpPr>
-          <p:cNvPr id="14" name="work-text-0"/>
-          <p:cNvSpPr txBox="1"/>
-          <p:nvPr/>
-        </p:nvSpPr>
-        <p:spPr>
-          <a:xfrm xmlns:a="http://schemas.openxmlformats.org/drawingml/2006/main">
-            <a:off x="12668250" y="3448050"/>
-            <a:ext cx="1143000" cy="228600"/>
-          </a:xfrm>
-          <a:prstGeom xmlns:a="http://schemas.openxmlformats.org/drawingml/2006/main" prst="rect">
-            <a:avLst/>
-          </a:prstGeom>
-          <a:noFill xmlns:a="http://schemas.openxmlformats.org/drawingml/2006/main"/>
-          <a:ln xmlns:a="http://schemas.openxmlformats.org/drawingml/2006/main" w="0">
-            <a:noFill/>
-          </a:ln>
-        </p:spPr>
-        <p:txBody>
-          <a:bodyPr xmlns:a="http://schemas.openxmlformats.org/drawingml/2006/main" wrap="square" lIns="0" tIns="0" rIns="0" bIns="0" anchor="t"/>
-          <a:lstStyle xmlns:a="http://schemas.openxmlformats.org/drawingml/2006/main"/>
-          <a:p xmlns:a="http://schemas.openxmlformats.org/drawingml/2006/main">
-            <a:r>
-              <a:rPr lang="en-US" sz="1200">
-                <a:solidFill>
-                  <a:srgbClr val="7F8081"/>
-                </a:solidFill>
-                <a:latin typeface="Tahoma"/>
-                <a:ea typeface="Tahoma"/>
-              </a:rPr>
-              <a:t>On target</a:t>
-            </a:r>
-            <a:endParaRPr lang="en-US"/>
-          </a:p>
-        </p:txBody>
-      </p:sp>
-      <p:sp>
-        <p:nvSpPr>
-          <p:cNvPr id="15" name="work-num-1"/>
-          <p:cNvSpPr txBox="1"/>
-          <p:nvPr/>
-        </p:nvSpPr>
-        <p:spPr>
-          <a:xfrm xmlns:a="http://schemas.openxmlformats.org/drawingml/2006/main">
-            <a:off x="10477500" y="4229100"/>
-            <a:ext cx="571500" cy="228600"/>
-          </a:xfrm>
-          <a:prstGeom xmlns:a="http://schemas.openxmlformats.org/drawingml/2006/main" prst="rect">
-            <a:avLst/>
-          </a:prstGeom>
-          <a:noFill xmlns:a="http://schemas.openxmlformats.org/drawingml/2006/main"/>
-          <a:ln xmlns:a="http://schemas.openxmlformats.org/drawingml/2006/main" w="0">
-            <a:noFill/>
-          </a:ln>
-        </p:spPr>
-        <p:txBody>
-          <a:bodyPr xmlns:a="http://schemas.openxmlformats.org/drawingml/2006/main" wrap="square" lIns="0" tIns="0" rIns="0" bIns="0" anchor="t"/>
-          <a:lstStyle xmlns:a="http://schemas.openxmlformats.org/drawingml/2006/main"/>
-          <a:p xmlns:a="http://schemas.openxmlformats.org/drawingml/2006/main">
-            <a:r>
-              <a:rPr lang="en-US" sz="1350" b="1">
-                <a:solidFill>
-                  <a:srgbClr val="7047FF"/>
-                </a:solidFill>
-                <a:latin typeface="Tahoma"/>
-                <a:ea typeface="Tahoma"/>
-              </a:rPr>
-              <a:t>02</a:t>
-            </a:r>
-            <a:endParaRPr lang="en-US"/>
-          </a:p>
-        </p:txBody>
-      </p:sp>
-      <p:sp>
-        <p:nvSpPr>
-          <p:cNvPr id="16" name="work-label-1"/>
-          <p:cNvSpPr txBox="1"/>
-          <p:nvPr/>
-        </p:nvSpPr>
-        <p:spPr>
-          <a:xfrm xmlns:a="http://schemas.openxmlformats.org/drawingml/2006/main">
-            <a:off x="11144250" y="4229100"/>
-            <a:ext cx="1428750" cy="228600"/>
-          </a:xfrm>
-          <a:prstGeom xmlns:a="http://schemas.openxmlformats.org/drawingml/2006/main" prst="rect">
-            <a:avLst/>
-          </a:prstGeom>
-          <a:noFill xmlns:a="http://schemas.openxmlformats.org/drawingml/2006/main"/>
-          <a:ln xmlns:a="http://schemas.openxmlformats.org/drawingml/2006/main" w="0">
-            <a:noFill/>
-          </a:ln>
-        </p:spPr>
-        <p:txBody>
-          <a:bodyPr xmlns:a="http://schemas.openxmlformats.org/drawingml/2006/main" wrap="square" lIns="0" tIns="0" rIns="0" bIns="0" anchor="t"/>
-          <a:lstStyle xmlns:a="http://schemas.openxmlformats.org/drawingml/2006/main"/>
-          <a:p xmlns:a="http://schemas.openxmlformats.org/drawingml/2006/main">
-            <a:r>
-              <a:rPr lang="en-US" sz="1350" b="1">
-                <a:solidFill>
-                  <a:srgbClr val="F8F8F7"/>
-                </a:solidFill>
-                <a:latin typeface="Tahoma"/>
-                <a:ea typeface="Tahoma"/>
-              </a:rPr>
-              <a:t>Handoff</a:t>
-            </a:r>
-            <a:endParaRPr lang="en-US"/>
-          </a:p>
-        </p:txBody>
-      </p:sp>
-      <p:sp>
-        <p:nvSpPr>
-          <p:cNvPr id="17" name="work-text-1"/>
-          <p:cNvSpPr txBox="1"/>
-          <p:nvPr/>
-        </p:nvSpPr>
-        <p:spPr>
-          <a:xfrm xmlns:a="http://schemas.openxmlformats.org/drawingml/2006/main">
-            <a:off x="12668250" y="4229100"/>
-            <a:ext cx="1143000" cy="228600"/>
-          </a:xfrm>
-          <a:prstGeom xmlns:a="http://schemas.openxmlformats.org/drawingml/2006/main" prst="rect">
-            <a:avLst/>
-          </a:prstGeom>
-          <a:noFill xmlns:a="http://schemas.openxmlformats.org/drawingml/2006/main"/>
-          <a:ln xmlns:a="http://schemas.openxmlformats.org/drawingml/2006/main" w="0">
-            <a:noFill/>
-          </a:ln>
-        </p:spPr>
-        <p:txBody>
-          <a:bodyPr xmlns:a="http://schemas.openxmlformats.org/drawingml/2006/main" wrap="square" lIns="0" tIns="0" rIns="0" bIns="0" anchor="t"/>
-          <a:lstStyle xmlns:a="http://schemas.openxmlformats.org/drawingml/2006/main"/>
-          <a:p xmlns:a="http://schemas.openxmlformats.org/drawingml/2006/main">
-            <a:r>
-              <a:rPr lang="en-US" sz="1200">
-                <a:solidFill>
-                  <a:srgbClr val="7047FF"/>
-                </a:solidFill>
-                <a:latin typeface="Tahoma"/>
-                <a:ea typeface="Tahoma"/>
-              </a:rPr>
-              <a:t>At risk</a:t>
-            </a:r>
-            <a:endParaRPr lang="en-US"/>
-          </a:p>
-        </p:txBody>
-      </p:sp>
-      <p:sp>
-        <p:nvSpPr>
-          <p:cNvPr id="18" name="work-num-2"/>
-          <p:cNvSpPr txBox="1"/>
-          <p:nvPr/>
-        </p:nvSpPr>
-        <p:spPr>
-          <a:xfrm xmlns:a="http://schemas.openxmlformats.org/drawingml/2006/main">
-            <a:off x="10477500" y="5010150"/>
-            <a:ext cx="571500" cy="228600"/>
-          </a:xfrm>
-          <a:prstGeom xmlns:a="http://schemas.openxmlformats.org/drawingml/2006/main" prst="rect">
-            <a:avLst/>
-          </a:prstGeom>
-          <a:noFill xmlns:a="http://schemas.openxmlformats.org/drawingml/2006/main"/>
-          <a:ln xmlns:a="http://schemas.openxmlformats.org/drawingml/2006/main" w="0">
-            <a:noFill/>
-          </a:ln>
-        </p:spPr>
-        <p:txBody>
-          <a:bodyPr xmlns:a="http://schemas.openxmlformats.org/drawingml/2006/main" wrap="square" lIns="0" tIns="0" rIns="0" bIns="0" anchor="t"/>
-          <a:lstStyle xmlns:a="http://schemas.openxmlformats.org/drawingml/2006/main"/>
-          <a:p xmlns:a="http://schemas.openxmlformats.org/drawingml/2006/main">
-            <a:r>
-              <a:rPr lang="en-US" sz="1350" b="1">
-                <a:solidFill>
-                  <a:srgbClr val="7047FF"/>
-                </a:solidFill>
-                <a:latin typeface="Tahoma"/>
-                <a:ea typeface="Tahoma"/>
-              </a:rPr>
-              <a:t>03</a:t>
-            </a:r>
-            <a:endParaRPr lang="en-US"/>
-          </a:p>
-        </p:txBody>
-      </p:sp>
-      <p:sp>
-        <p:nvSpPr>
-          <p:cNvPr id="19" name="work-label-2"/>
-          <p:cNvSpPr txBox="1"/>
-          <p:nvPr/>
-        </p:nvSpPr>
-        <p:spPr>
-          <a:xfrm xmlns:a="http://schemas.openxmlformats.org/drawingml/2006/main">
-            <a:off x="11144250" y="5010150"/>
-            <a:ext cx="1428750" cy="228600"/>
-          </a:xfrm>
-          <a:prstGeom xmlns:a="http://schemas.openxmlformats.org/drawingml/2006/main" prst="rect">
-            <a:avLst/>
-          </a:prstGeom>
-          <a:noFill xmlns:a="http://schemas.openxmlformats.org/drawingml/2006/main"/>
-          <a:ln xmlns:a="http://schemas.openxmlformats.org/drawingml/2006/main" w="0">
-            <a:noFill/>
-          </a:ln>
-        </p:spPr>
-        <p:txBody>
-          <a:bodyPr xmlns:a="http://schemas.openxmlformats.org/drawingml/2006/main" wrap="square" lIns="0" tIns="0" rIns="0" bIns="0" anchor="t"/>
-          <a:lstStyle xmlns:a="http://schemas.openxmlformats.org/drawingml/2006/main"/>
-          <a:p xmlns:a="http://schemas.openxmlformats.org/drawingml/2006/main">
-            <a:r>
-              <a:rPr lang="en-US" sz="1350" b="1">
-                <a:solidFill>
-                  <a:srgbClr val="F8F8F7"/>
-                </a:solidFill>
-                <a:latin typeface="Tahoma"/>
-                <a:ea typeface="Tahoma"/>
-              </a:rPr>
-              <a:t>Owner</a:t>
-            </a:r>
-            <a:endParaRPr lang="en-US"/>
-          </a:p>
-        </p:txBody>
-      </p:sp>
-      <p:sp>
-        <p:nvSpPr>
-          <p:cNvPr id="20" name="work-text-2"/>
-          <p:cNvSpPr txBox="1"/>
-          <p:nvPr/>
-        </p:nvSpPr>
-        <p:spPr>
-          <a:xfrm xmlns:a="http://schemas.openxmlformats.org/drawingml/2006/main">
-            <a:off x="12668250" y="5010150"/>
-            <a:ext cx="1143000" cy="228600"/>
-          </a:xfrm>
-          <a:prstGeom xmlns:a="http://schemas.openxmlformats.org/drawingml/2006/main" prst="rect">
-            <a:avLst/>
-          </a:prstGeom>
-          <a:noFill xmlns:a="http://schemas.openxmlformats.org/drawingml/2006/main"/>
-          <a:ln xmlns:a="http://schemas.openxmlformats.org/drawingml/2006/main" w="0">
-            <a:noFill/>
-          </a:ln>
-        </p:spPr>
-        <p:txBody>
-          <a:bodyPr xmlns:a="http://schemas.openxmlformats.org/drawingml/2006/main" wrap="square" lIns="0" tIns="0" rIns="0" bIns="0" anchor="t"/>
-          <a:lstStyle xmlns:a="http://schemas.openxmlformats.org/drawingml/2006/main"/>
-          <a:p xmlns:a="http://schemas.openxmlformats.org/drawingml/2006/main">
-            <a:r>
-              <a:rPr lang="en-US" sz="1200">
-                <a:solidFill>
-                  <a:srgbClr val="7F8081"/>
-                </a:solidFill>
-                <a:latin typeface="Tahoma"/>
-                <a:ea typeface="Tahoma"/>
-              </a:rPr>
-              <a:t>Named</a:t>
-            </a:r>
-            <a:endParaRPr lang="en-US"/>
-          </a:p>
-        </p:txBody>
-      </p:sp>
-      <p:sp>
-        <p:nvSpPr>
-          <p:cNvPr id="21" name="source"/>
-          <p:cNvSpPr txBox="1"/>
-          <p:nvPr/>
-        </p:nvSpPr>
-        <p:spPr>
-          <a:xfrm xmlns:a="http://schemas.openxmlformats.org/drawingml/2006/main">
-            <a:off x="914400" y="7810500"/>
-            <a:ext cx="10953750" cy="209550"/>
-          </a:xfrm>
-          <a:prstGeom xmlns:a="http://schemas.openxmlformats.org/drawingml/2006/main" prst="rect">
-            <a:avLst/>
-          </a:prstGeom>
-          <a:noFill xmlns:a="http://schemas.openxmlformats.org/drawingml/2006/main"/>
-          <a:ln xmlns:a="http://schemas.openxmlformats.org/drawingml/2006/main" w="0">
-            <a:noFill/>
-          </a:ln>
-        </p:spPr>
-        <p:txBody>
-          <a:bodyPr xmlns:a="http://schemas.openxmlformats.org/drawingml/2006/main" wrap="square" lIns="0" tIns="0" rIns="0" bIns="0" anchor="t"/>
-          <a:lstStyle xmlns:a="http://schemas.openxmlformats.org/drawingml/2006/main"/>
-          <a:p xmlns:a="http://schemas.openxmlformats.org/drawingml/2006/main">
-            <a:r>
-              <a:rPr lang="en-US" sz="1050">
-                <a:solidFill>
-                  <a:srgbClr val="7F8081"/>
-                </a:solidFill>
-                <a:latin typeface="Tahoma"/>
-                <a:ea typeface="Tahoma"/>
-              </a:rPr>
-              <a:t>Source: illustrative calibration brief · every claim is fictional and bounded</a:t>
-            </a:r>
-            <a:endParaRPr lang="en-US"/>
-          </a:p>
-        </p:txBody>
-      </p:sp>
-      <p:sp>
-        <p:nvSpPr>
-          <p:cNvPr id="22" name="page-number"/>
-          <p:cNvSpPr txBox="1"/>
-          <p:nvPr/>
-        </p:nvSpPr>
-        <p:spPr>
-          <a:xfrm xmlns:a="http://schemas.openxmlformats.org/drawingml/2006/main">
-            <a:off x="13335000" y="7810500"/>
-            <a:ext cx="952500" cy="209550"/>
-          </a:xfrm>
-          <a:prstGeom xmlns:a="http://schemas.openxmlformats.org/drawingml/2006/main" prst="rect">
-            <a:avLst/>
-          </a:prstGeom>
-          <a:noFill xmlns:a="http://schemas.openxmlformats.org/drawingml/2006/main"/>
-          <a:ln xmlns:a="http://schemas.openxmlformats.org/drawingml/2006/main" w="0">
-            <a:noFill/>
-          </a:ln>
-        </p:spPr>
-        <p:txBody>
-          <a:bodyPr xmlns:a="http://schemas.openxmlformats.org/drawingml/2006/main" wrap="square" lIns="0" tIns="0" rIns="0" bIns="0" anchor="t"/>
-          <a:lstStyle xmlns:a="http://schemas.openxmlformats.org/drawingml/2006/main"/>
-          <a:p xmlns:a="http://schemas.openxmlformats.org/drawingml/2006/main">
-            <a:pPr algn="r"/>
-            <a:r>
-              <a:rPr lang="en-US" sz="1050">
-                <a:solidFill>
-                  <a:srgbClr val="7F8081"/>
-                </a:solidFill>
-                <a:latin typeface="Tahoma"/>
-                <a:ea typeface="Tahoma"/>
-              </a:rPr>
-              <a:t>2 / 6</a:t>
-            </a:r>
-            <a:endParaRPr lang="en-US"/>
-          </a:p>
-        </p:txBody>
-      </p:sp>
-    </p:spTree>
-  </p:cSld>
-  <p:clrMapOvr>
-    <a:masterClrMapping xmlns:a="http://schemas.openxmlformats.org/drawingml/2006/main"/>
-  </p:clrMapOvr>
-</p:sld>
-</file>
-
-<file path=ppt/slides/slide3.xml><?xml version="1.0" encoding="utf-8"?>
-<p:sld xmlns:p="http://schemas.openxmlformats.org/presentationml/2006/main">
-  <p:cSld name="Evidence">
     <p:bg>
       <p:bgPr>
         <a:blipFill xmlns:a="http://schemas.openxmlformats.org/drawingml/2006/main">
@@ -2107,6 +1302,811 @@
       </p:grpSpPr>
       <p:sp>
         <p:nvSpPr>
+          <p:cNvPr id="2" name="argument-paper-scrim"/>
+          <p:cNvSpPr/>
+          <p:nvPr/>
+        </p:nvSpPr>
+        <p:spPr>
+          <a:xfrm xmlns:a="http://schemas.openxmlformats.org/drawingml/2006/main">
+            <a:off x="0" y="0"/>
+            <a:ext cx="7429500" cy="8572500"/>
+          </a:xfrm>
+          <a:prstGeom xmlns:a="http://schemas.openxmlformats.org/drawingml/2006/main" prst="rect">
+            <a:avLst/>
+          </a:prstGeom>
+          <a:solidFill xmlns:a="http://schemas.openxmlformats.org/drawingml/2006/main">
+            <a:srgbClr val="101115">
+              <a:alpha val="96000"/>
+            </a:srgbClr>
+          </a:solidFill>
+          <a:ln xmlns:a="http://schemas.openxmlformats.org/drawingml/2006/main" w="0">
+            <a:solidFill>
+              <a:srgbClr val="101115"/>
+            </a:solidFill>
+            <a:prstDash val="solid"/>
+          </a:ln>
+        </p:spPr>
+        <p:txBody>
+          <a:bodyPr xmlns:a="http://schemas.openxmlformats.org/drawingml/2006/main" wrap="square" lIns="0" tIns="0" rIns="0" bIns="0" anchor="t"/>
+          <a:lstStyle xmlns:a="http://schemas.openxmlformats.org/drawingml/2006/main"/>
+          <a:p xmlns:a="http://schemas.openxmlformats.org/drawingml/2006/main">
+            <a:r>
+              <a:rPr lang="en-US"/>
+              <a:t/>
+            </a:r>
+            <a:endParaRPr lang="en-US"/>
+          </a:p>
+        </p:txBody>
+      </p:sp>
+      <p:sp>
+        <p:nvSpPr>
+          <p:cNvPr id="3" name="argument-top-rule"/>
+          <p:cNvSpPr/>
+          <p:nvPr/>
+        </p:nvSpPr>
+        <p:spPr>
+          <a:xfrm xmlns:a="http://schemas.openxmlformats.org/drawingml/2006/main">
+            <a:off x="838200" y="666750"/>
+            <a:ext cx="13563600" cy="0"/>
+          </a:xfrm>
+          <a:prstGeom xmlns:a="http://schemas.openxmlformats.org/drawingml/2006/main" prst="line">
+            <a:avLst/>
+          </a:prstGeom>
+          <a:noFill xmlns:a="http://schemas.openxmlformats.org/drawingml/2006/main"/>
+          <a:ln xmlns:a="http://schemas.openxmlformats.org/drawingml/2006/main" w="38100">
+            <a:solidFill>
+              <a:srgbClr val="7047FF"/>
+            </a:solidFill>
+            <a:prstDash val="solid"/>
+          </a:ln>
+        </p:spPr>
+        <p:txBody>
+          <a:bodyPr xmlns:a="http://schemas.openxmlformats.org/drawingml/2006/main" wrap="square" lIns="0" tIns="0" rIns="0" bIns="0" anchor="t"/>
+          <a:lstStyle xmlns:a="http://schemas.openxmlformats.org/drawingml/2006/main"/>
+          <a:p xmlns:a="http://schemas.openxmlformats.org/drawingml/2006/main">
+            <a:r>
+              <a:rPr lang="en-US"/>
+              <a:t/>
+            </a:r>
+            <a:endParaRPr lang="en-US"/>
+          </a:p>
+        </p:txBody>
+      </p:sp>
+      <p:sp>
+        <p:nvSpPr>
+          <p:cNvPr id="4" name="VIOLET OPERATIONS · ARGUMENT"/>
+          <p:cNvSpPr txBox="1"/>
+          <p:nvPr/>
+        </p:nvSpPr>
+        <p:spPr>
+          <a:xfrm xmlns:a="http://schemas.openxmlformats.org/drawingml/2006/main">
+            <a:off x="914400" y="895350"/>
+            <a:ext cx="7239000" cy="228600"/>
+          </a:xfrm>
+          <a:prstGeom xmlns:a="http://schemas.openxmlformats.org/drawingml/2006/main" prst="rect">
+            <a:avLst/>
+          </a:prstGeom>
+          <a:noFill xmlns:a="http://schemas.openxmlformats.org/drawingml/2006/main"/>
+          <a:ln xmlns:a="http://schemas.openxmlformats.org/drawingml/2006/main" w="0">
+            <a:noFill/>
+          </a:ln>
+        </p:spPr>
+        <p:txBody>
+          <a:bodyPr xmlns:a="http://schemas.openxmlformats.org/drawingml/2006/main" wrap="square" lIns="0" tIns="0" rIns="0" bIns="0" anchor="t"/>
+          <a:lstStyle xmlns:a="http://schemas.openxmlformats.org/drawingml/2006/main"/>
+          <a:p xmlns:a="http://schemas.openxmlformats.org/drawingml/2006/main">
+            <a:r>
+              <a:rPr lang="en-US" sz="1200" b="1">
+                <a:solidFill>
+                  <a:srgbClr val="7047FF"/>
+                </a:solidFill>
+                <a:latin typeface="Tahoma"/>
+                <a:ea typeface="Tahoma"/>
+              </a:rPr>
+              <a:t>VIOLET OPERATIONS · ARGUMENT</a:t>
+            </a:r>
+            <a:endParaRPr lang="en-US"/>
+          </a:p>
+        </p:txBody>
+      </p:sp>
+      <p:sp>
+        <p:nvSpPr>
+          <p:cNvPr id="5" name="argument-title"/>
+          <p:cNvSpPr txBox="1"/>
+          <p:nvPr/>
+        </p:nvSpPr>
+        <p:spPr>
+          <a:xfrm xmlns:a="http://schemas.openxmlformats.org/drawingml/2006/main">
+            <a:off x="914400" y="1314450"/>
+            <a:ext cx="6286500" cy="552450"/>
+          </a:xfrm>
+          <a:prstGeom xmlns:a="http://schemas.openxmlformats.org/drawingml/2006/main" prst="rect">
+            <a:avLst/>
+          </a:prstGeom>
+          <a:noFill xmlns:a="http://schemas.openxmlformats.org/drawingml/2006/main"/>
+          <a:ln xmlns:a="http://schemas.openxmlformats.org/drawingml/2006/main" w="0">
+            <a:noFill/>
+          </a:ln>
+        </p:spPr>
+        <p:txBody>
+          <a:bodyPr xmlns:a="http://schemas.openxmlformats.org/drawingml/2006/main" wrap="square" lIns="0" tIns="0" rIns="0" bIns="0" anchor="t"/>
+          <a:lstStyle xmlns:a="http://schemas.openxmlformats.org/drawingml/2006/main"/>
+          <a:p xmlns:a="http://schemas.openxmlformats.org/drawingml/2006/main">
+            <a:r>
+              <a:rPr lang="en-US" sz="2550" b="1">
+                <a:solidFill>
+                  <a:srgbClr val="F8F8F7"/>
+                </a:solidFill>
+                <a:latin typeface="Tahoma"/>
+                <a:ea typeface="Tahoma"/>
+              </a:rPr>
+              <a:t>The constraint owns the page</a:t>
+            </a:r>
+            <a:endParaRPr lang="en-US"/>
+          </a:p>
+        </p:txBody>
+      </p:sp>
+      <p:sp>
+        <p:nvSpPr>
+          <p:cNvPr id="6" name="argument-basis"/>
+          <p:cNvSpPr txBox="1"/>
+          <p:nvPr/>
+        </p:nvSpPr>
+        <p:spPr>
+          <a:xfrm xmlns:a="http://schemas.openxmlformats.org/drawingml/2006/main">
+            <a:off x="952500" y="1981200"/>
+            <a:ext cx="6096000" cy="266700"/>
+          </a:xfrm>
+          <a:prstGeom xmlns:a="http://schemas.openxmlformats.org/drawingml/2006/main" prst="rect">
+            <a:avLst/>
+          </a:prstGeom>
+          <a:noFill xmlns:a="http://schemas.openxmlformats.org/drawingml/2006/main"/>
+          <a:ln xmlns:a="http://schemas.openxmlformats.org/drawingml/2006/main" w="0">
+            <a:noFill/>
+          </a:ln>
+        </p:spPr>
+        <p:txBody>
+          <a:bodyPr xmlns:a="http://schemas.openxmlformats.org/drawingml/2006/main" wrap="square" lIns="0" tIns="0" rIns="0" bIns="0" anchor="t"/>
+          <a:lstStyle xmlns:a="http://schemas.openxmlformats.org/drawingml/2006/main"/>
+          <a:p xmlns:a="http://schemas.openxmlformats.org/drawingml/2006/main">
+            <a:r>
+              <a:rPr lang="en-US" sz="1350">
+                <a:solidFill>
+                  <a:srgbClr val="7F8081"/>
+                </a:solidFill>
+                <a:latin typeface="Tahoma"/>
+                <a:ea typeface="Tahoma"/>
+              </a:rPr>
+              <a:t>Status, cause, owner and date stay together.</a:t>
+            </a:r>
+            <a:endParaRPr lang="en-US"/>
+          </a:p>
+        </p:txBody>
+      </p:sp>
+      <p:sp>
+        <p:nvSpPr>
+          <p:cNvPr id="7" name="argument-rule"/>
+          <p:cNvSpPr/>
+          <p:nvPr/>
+        </p:nvSpPr>
+        <p:spPr>
+          <a:xfrm xmlns:a="http://schemas.openxmlformats.org/drawingml/2006/main">
+            <a:off x="914400" y="2457450"/>
+            <a:ext cx="13411200" cy="0"/>
+          </a:xfrm>
+          <a:prstGeom xmlns:a="http://schemas.openxmlformats.org/drawingml/2006/main" prst="line">
+            <a:avLst/>
+          </a:prstGeom>
+          <a:noFill xmlns:a="http://schemas.openxmlformats.org/drawingml/2006/main"/>
+          <a:ln xmlns:a="http://schemas.openxmlformats.org/drawingml/2006/main" w="25400">
+            <a:solidFill>
+              <a:srgbClr val="7F8081"/>
+            </a:solidFill>
+            <a:prstDash val="solid"/>
+          </a:ln>
+        </p:spPr>
+        <p:txBody>
+          <a:bodyPr xmlns:a="http://schemas.openxmlformats.org/drawingml/2006/main" wrap="square" lIns="0" tIns="0" rIns="0" bIns="0" anchor="t"/>
+          <a:lstStyle xmlns:a="http://schemas.openxmlformats.org/drawingml/2006/main"/>
+          <a:p xmlns:a="http://schemas.openxmlformats.org/drawingml/2006/main">
+            <a:r>
+              <a:rPr lang="en-US"/>
+              <a:t/>
+            </a:r>
+            <a:endParaRPr lang="en-US"/>
+          </a:p>
+        </p:txBody>
+      </p:sp>
+      <p:sp>
+        <p:nvSpPr>
+          <p:cNvPr id="8" name="work-status"/>
+          <p:cNvSpPr txBox="1"/>
+          <p:nvPr/>
+        </p:nvSpPr>
+        <p:spPr>
+          <a:xfrm xmlns:a="http://schemas.openxmlformats.org/drawingml/2006/main">
+            <a:off x="1104900" y="3352800"/>
+            <a:ext cx="2857500" cy="228600"/>
+          </a:xfrm>
+          <a:prstGeom xmlns:a="http://schemas.openxmlformats.org/drawingml/2006/main" prst="rect">
+            <a:avLst/>
+          </a:prstGeom>
+          <a:noFill xmlns:a="http://schemas.openxmlformats.org/drawingml/2006/main"/>
+          <a:ln xmlns:a="http://schemas.openxmlformats.org/drawingml/2006/main" w="0">
+            <a:noFill/>
+          </a:ln>
+        </p:spPr>
+        <p:txBody>
+          <a:bodyPr xmlns:a="http://schemas.openxmlformats.org/drawingml/2006/main" wrap="square" lIns="0" tIns="0" rIns="0" bIns="0" anchor="t"/>
+          <a:lstStyle xmlns:a="http://schemas.openxmlformats.org/drawingml/2006/main"/>
+          <a:p xmlns:a="http://schemas.openxmlformats.org/drawingml/2006/main">
+            <a:r>
+              <a:rPr lang="en-US" sz="1125" b="1">
+                <a:solidFill>
+                  <a:srgbClr val="7047FF"/>
+                </a:solidFill>
+                <a:latin typeface="Tahoma"/>
+                <a:ea typeface="Tahoma"/>
+              </a:rPr>
+              <a:t>OPERATING SIGNAL</a:t>
+            </a:r>
+            <a:endParaRPr lang="en-US"/>
+          </a:p>
+        </p:txBody>
+      </p:sp>
+      <p:sp>
+        <p:nvSpPr>
+          <p:cNvPr id="9" name="work-headline"/>
+          <p:cNvSpPr txBox="1"/>
+          <p:nvPr/>
+        </p:nvSpPr>
+        <p:spPr>
+          <a:xfrm xmlns:a="http://schemas.openxmlformats.org/drawingml/2006/main">
+            <a:off x="1104900" y="3790950"/>
+            <a:ext cx="6667500" cy="723900"/>
+          </a:xfrm>
+          <a:prstGeom xmlns:a="http://schemas.openxmlformats.org/drawingml/2006/main" prst="rect">
+            <a:avLst/>
+          </a:prstGeom>
+          <a:noFill xmlns:a="http://schemas.openxmlformats.org/drawingml/2006/main"/>
+          <a:ln xmlns:a="http://schemas.openxmlformats.org/drawingml/2006/main" w="0">
+            <a:noFill/>
+          </a:ln>
+        </p:spPr>
+        <p:txBody>
+          <a:bodyPr xmlns:a="http://schemas.openxmlformats.org/drawingml/2006/main" wrap="square" lIns="0" tIns="0" rIns="0" bIns="0" anchor="t"/>
+          <a:lstStyle xmlns:a="http://schemas.openxmlformats.org/drawingml/2006/main"/>
+          <a:p xmlns:a="http://schemas.openxmlformats.org/drawingml/2006/main">
+            <a:r>
+              <a:rPr lang="en-US" sz="2550" b="1">
+                <a:solidFill>
+                  <a:srgbClr val="F8F8F7"/>
+                </a:solidFill>
+                <a:latin typeface="Tahoma"/>
+                <a:ea typeface="Tahoma"/>
+              </a:rPr>
+              <a:t>The queue is healthy; the handoff is not.</a:t>
+            </a:r>
+            <a:endParaRPr lang="en-US"/>
+          </a:p>
+        </p:txBody>
+      </p:sp>
+      <p:sp>
+        <p:nvSpPr>
+          <p:cNvPr id="10" name="work-body"/>
+          <p:cNvSpPr txBox="1"/>
+          <p:nvPr/>
+        </p:nvSpPr>
+        <p:spPr>
+          <a:xfrm xmlns:a="http://schemas.openxmlformats.org/drawingml/2006/main">
+            <a:off x="1104900" y="4762500"/>
+            <a:ext cx="6191250" cy="400050"/>
+          </a:xfrm>
+          <a:prstGeom xmlns:a="http://schemas.openxmlformats.org/drawingml/2006/main" prst="rect">
+            <a:avLst/>
+          </a:prstGeom>
+          <a:noFill xmlns:a="http://schemas.openxmlformats.org/drawingml/2006/main"/>
+          <a:ln xmlns:a="http://schemas.openxmlformats.org/drawingml/2006/main" w="0">
+            <a:noFill/>
+          </a:ln>
+        </p:spPr>
+        <p:txBody>
+          <a:bodyPr xmlns:a="http://schemas.openxmlformats.org/drawingml/2006/main" wrap="square" lIns="0" tIns="0" rIns="0" bIns="0" anchor="t"/>
+          <a:lstStyle xmlns:a="http://schemas.openxmlformats.org/drawingml/2006/main"/>
+          <a:p xmlns:a="http://schemas.openxmlformats.org/drawingml/2006/main">
+            <a:r>
+              <a:rPr lang="en-US" sz="1575">
+                <a:solidFill>
+                  <a:srgbClr val="F8F8F7"/>
+                </a:solidFill>
+                <a:latin typeface="Tahoma"/>
+                <a:ea typeface="Tahoma"/>
+              </a:rPr>
+              <a:t>Three visible signals point to one owner and one date.</a:t>
+            </a:r>
+            <a:endParaRPr lang="en-US"/>
+          </a:p>
+        </p:txBody>
+      </p:sp>
+      <p:sp>
+        <p:nvSpPr>
+          <p:cNvPr id="11" name="work-rail"/>
+          <p:cNvSpPr/>
+          <p:nvPr/>
+        </p:nvSpPr>
+        <p:spPr>
+          <a:xfrm xmlns:a="http://schemas.openxmlformats.org/drawingml/2006/main">
+            <a:off x="10001250" y="3333750"/>
+            <a:ext cx="0" cy="2381250"/>
+          </a:xfrm>
+          <a:prstGeom xmlns:a="http://schemas.openxmlformats.org/drawingml/2006/main" prst="line">
+            <a:avLst/>
+          </a:prstGeom>
+          <a:noFill xmlns:a="http://schemas.openxmlformats.org/drawingml/2006/main"/>
+          <a:ln xmlns:a="http://schemas.openxmlformats.org/drawingml/2006/main" w="25400">
+            <a:solidFill>
+              <a:srgbClr val="7F8081"/>
+            </a:solidFill>
+            <a:prstDash val="solid"/>
+          </a:ln>
+        </p:spPr>
+        <p:txBody>
+          <a:bodyPr xmlns:a="http://schemas.openxmlformats.org/drawingml/2006/main" wrap="square" lIns="0" tIns="0" rIns="0" bIns="0" anchor="t"/>
+          <a:lstStyle xmlns:a="http://schemas.openxmlformats.org/drawingml/2006/main"/>
+          <a:p xmlns:a="http://schemas.openxmlformats.org/drawingml/2006/main">
+            <a:r>
+              <a:rPr lang="en-US"/>
+              <a:t/>
+            </a:r>
+            <a:endParaRPr lang="en-US"/>
+          </a:p>
+        </p:txBody>
+      </p:sp>
+      <p:sp>
+        <p:nvSpPr>
+          <p:cNvPr id="12" name="work-num-0"/>
+          <p:cNvSpPr txBox="1"/>
+          <p:nvPr/>
+        </p:nvSpPr>
+        <p:spPr>
+          <a:xfrm xmlns:a="http://schemas.openxmlformats.org/drawingml/2006/main">
+            <a:off x="10477500" y="3448050"/>
+            <a:ext cx="571500" cy="228600"/>
+          </a:xfrm>
+          <a:prstGeom xmlns:a="http://schemas.openxmlformats.org/drawingml/2006/main" prst="rect">
+            <a:avLst/>
+          </a:prstGeom>
+          <a:noFill xmlns:a="http://schemas.openxmlformats.org/drawingml/2006/main"/>
+          <a:ln xmlns:a="http://schemas.openxmlformats.org/drawingml/2006/main" w="0">
+            <a:noFill/>
+          </a:ln>
+        </p:spPr>
+        <p:txBody>
+          <a:bodyPr xmlns:a="http://schemas.openxmlformats.org/drawingml/2006/main" wrap="square" lIns="0" tIns="0" rIns="0" bIns="0" anchor="t"/>
+          <a:lstStyle xmlns:a="http://schemas.openxmlformats.org/drawingml/2006/main"/>
+          <a:p xmlns:a="http://schemas.openxmlformats.org/drawingml/2006/main">
+            <a:r>
+              <a:rPr lang="en-US" sz="1350" b="1">
+                <a:solidFill>
+                  <a:srgbClr val="7047FF"/>
+                </a:solidFill>
+                <a:latin typeface="Tahoma"/>
+                <a:ea typeface="Tahoma"/>
+              </a:rPr>
+              <a:t>01</a:t>
+            </a:r>
+            <a:endParaRPr lang="en-US"/>
+          </a:p>
+        </p:txBody>
+      </p:sp>
+      <p:sp>
+        <p:nvSpPr>
+          <p:cNvPr id="13" name="work-label-0"/>
+          <p:cNvSpPr txBox="1"/>
+          <p:nvPr/>
+        </p:nvSpPr>
+        <p:spPr>
+          <a:xfrm xmlns:a="http://schemas.openxmlformats.org/drawingml/2006/main">
+            <a:off x="11144250" y="3448050"/>
+            <a:ext cx="1428750" cy="228600"/>
+          </a:xfrm>
+          <a:prstGeom xmlns:a="http://schemas.openxmlformats.org/drawingml/2006/main" prst="rect">
+            <a:avLst/>
+          </a:prstGeom>
+          <a:noFill xmlns:a="http://schemas.openxmlformats.org/drawingml/2006/main"/>
+          <a:ln xmlns:a="http://schemas.openxmlformats.org/drawingml/2006/main" w="0">
+            <a:noFill/>
+          </a:ln>
+        </p:spPr>
+        <p:txBody>
+          <a:bodyPr xmlns:a="http://schemas.openxmlformats.org/drawingml/2006/main" wrap="square" lIns="0" tIns="0" rIns="0" bIns="0" anchor="t"/>
+          <a:lstStyle xmlns:a="http://schemas.openxmlformats.org/drawingml/2006/main"/>
+          <a:p xmlns:a="http://schemas.openxmlformats.org/drawingml/2006/main">
+            <a:r>
+              <a:rPr lang="en-US" sz="1350" b="1">
+                <a:solidFill>
+                  <a:srgbClr val="F8F8F7"/>
+                </a:solidFill>
+                <a:latin typeface="Tahoma"/>
+                <a:ea typeface="Tahoma"/>
+              </a:rPr>
+              <a:t>Queue</a:t>
+            </a:r>
+            <a:endParaRPr lang="en-US"/>
+          </a:p>
+        </p:txBody>
+      </p:sp>
+      <p:sp>
+        <p:nvSpPr>
+          <p:cNvPr id="14" name="work-text-0"/>
+          <p:cNvSpPr txBox="1"/>
+          <p:nvPr/>
+        </p:nvSpPr>
+        <p:spPr>
+          <a:xfrm xmlns:a="http://schemas.openxmlformats.org/drawingml/2006/main">
+            <a:off x="12668250" y="3448050"/>
+            <a:ext cx="1143000" cy="228600"/>
+          </a:xfrm>
+          <a:prstGeom xmlns:a="http://schemas.openxmlformats.org/drawingml/2006/main" prst="rect">
+            <a:avLst/>
+          </a:prstGeom>
+          <a:noFill xmlns:a="http://schemas.openxmlformats.org/drawingml/2006/main"/>
+          <a:ln xmlns:a="http://schemas.openxmlformats.org/drawingml/2006/main" w="0">
+            <a:noFill/>
+          </a:ln>
+        </p:spPr>
+        <p:txBody>
+          <a:bodyPr xmlns:a="http://schemas.openxmlformats.org/drawingml/2006/main" wrap="square" lIns="0" tIns="0" rIns="0" bIns="0" anchor="t"/>
+          <a:lstStyle xmlns:a="http://schemas.openxmlformats.org/drawingml/2006/main"/>
+          <a:p xmlns:a="http://schemas.openxmlformats.org/drawingml/2006/main">
+            <a:r>
+              <a:rPr lang="en-US" sz="1200">
+                <a:solidFill>
+                  <a:srgbClr val="7F8081"/>
+                </a:solidFill>
+                <a:latin typeface="Tahoma"/>
+                <a:ea typeface="Tahoma"/>
+              </a:rPr>
+              <a:t>On target</a:t>
+            </a:r>
+            <a:endParaRPr lang="en-US"/>
+          </a:p>
+        </p:txBody>
+      </p:sp>
+      <p:sp>
+        <p:nvSpPr>
+          <p:cNvPr id="15" name="work-num-1"/>
+          <p:cNvSpPr txBox="1"/>
+          <p:nvPr/>
+        </p:nvSpPr>
+        <p:spPr>
+          <a:xfrm xmlns:a="http://schemas.openxmlformats.org/drawingml/2006/main">
+            <a:off x="10477500" y="4229100"/>
+            <a:ext cx="571500" cy="228600"/>
+          </a:xfrm>
+          <a:prstGeom xmlns:a="http://schemas.openxmlformats.org/drawingml/2006/main" prst="rect">
+            <a:avLst/>
+          </a:prstGeom>
+          <a:noFill xmlns:a="http://schemas.openxmlformats.org/drawingml/2006/main"/>
+          <a:ln xmlns:a="http://schemas.openxmlformats.org/drawingml/2006/main" w="0">
+            <a:noFill/>
+          </a:ln>
+        </p:spPr>
+        <p:txBody>
+          <a:bodyPr xmlns:a="http://schemas.openxmlformats.org/drawingml/2006/main" wrap="square" lIns="0" tIns="0" rIns="0" bIns="0" anchor="t"/>
+          <a:lstStyle xmlns:a="http://schemas.openxmlformats.org/drawingml/2006/main"/>
+          <a:p xmlns:a="http://schemas.openxmlformats.org/drawingml/2006/main">
+            <a:r>
+              <a:rPr lang="en-US" sz="1350" b="1">
+                <a:solidFill>
+                  <a:srgbClr val="7047FF"/>
+                </a:solidFill>
+                <a:latin typeface="Tahoma"/>
+                <a:ea typeface="Tahoma"/>
+              </a:rPr>
+              <a:t>02</a:t>
+            </a:r>
+            <a:endParaRPr lang="en-US"/>
+          </a:p>
+        </p:txBody>
+      </p:sp>
+      <p:sp>
+        <p:nvSpPr>
+          <p:cNvPr id="16" name="work-label-1"/>
+          <p:cNvSpPr txBox="1"/>
+          <p:nvPr/>
+        </p:nvSpPr>
+        <p:spPr>
+          <a:xfrm xmlns:a="http://schemas.openxmlformats.org/drawingml/2006/main">
+            <a:off x="11144250" y="4229100"/>
+            <a:ext cx="1428750" cy="228600"/>
+          </a:xfrm>
+          <a:prstGeom xmlns:a="http://schemas.openxmlformats.org/drawingml/2006/main" prst="rect">
+            <a:avLst/>
+          </a:prstGeom>
+          <a:noFill xmlns:a="http://schemas.openxmlformats.org/drawingml/2006/main"/>
+          <a:ln xmlns:a="http://schemas.openxmlformats.org/drawingml/2006/main" w="0">
+            <a:noFill/>
+          </a:ln>
+        </p:spPr>
+        <p:txBody>
+          <a:bodyPr xmlns:a="http://schemas.openxmlformats.org/drawingml/2006/main" wrap="square" lIns="0" tIns="0" rIns="0" bIns="0" anchor="t"/>
+          <a:lstStyle xmlns:a="http://schemas.openxmlformats.org/drawingml/2006/main"/>
+          <a:p xmlns:a="http://schemas.openxmlformats.org/drawingml/2006/main">
+            <a:r>
+              <a:rPr lang="en-US" sz="1350" b="1">
+                <a:solidFill>
+                  <a:srgbClr val="F8F8F7"/>
+                </a:solidFill>
+                <a:latin typeface="Tahoma"/>
+                <a:ea typeface="Tahoma"/>
+              </a:rPr>
+              <a:t>Handoff</a:t>
+            </a:r>
+            <a:endParaRPr lang="en-US"/>
+          </a:p>
+        </p:txBody>
+      </p:sp>
+      <p:sp>
+        <p:nvSpPr>
+          <p:cNvPr id="17" name="work-text-1"/>
+          <p:cNvSpPr txBox="1"/>
+          <p:nvPr/>
+        </p:nvSpPr>
+        <p:spPr>
+          <a:xfrm xmlns:a="http://schemas.openxmlformats.org/drawingml/2006/main">
+            <a:off x="12668250" y="4229100"/>
+            <a:ext cx="1143000" cy="228600"/>
+          </a:xfrm>
+          <a:prstGeom xmlns:a="http://schemas.openxmlformats.org/drawingml/2006/main" prst="rect">
+            <a:avLst/>
+          </a:prstGeom>
+          <a:noFill xmlns:a="http://schemas.openxmlformats.org/drawingml/2006/main"/>
+          <a:ln xmlns:a="http://schemas.openxmlformats.org/drawingml/2006/main" w="0">
+            <a:noFill/>
+          </a:ln>
+        </p:spPr>
+        <p:txBody>
+          <a:bodyPr xmlns:a="http://schemas.openxmlformats.org/drawingml/2006/main" wrap="square" lIns="0" tIns="0" rIns="0" bIns="0" anchor="t"/>
+          <a:lstStyle xmlns:a="http://schemas.openxmlformats.org/drawingml/2006/main"/>
+          <a:p xmlns:a="http://schemas.openxmlformats.org/drawingml/2006/main">
+            <a:r>
+              <a:rPr lang="en-US" sz="1200">
+                <a:solidFill>
+                  <a:srgbClr val="7047FF"/>
+                </a:solidFill>
+                <a:latin typeface="Tahoma"/>
+                <a:ea typeface="Tahoma"/>
+              </a:rPr>
+              <a:t>At risk</a:t>
+            </a:r>
+            <a:endParaRPr lang="en-US"/>
+          </a:p>
+        </p:txBody>
+      </p:sp>
+      <p:sp>
+        <p:nvSpPr>
+          <p:cNvPr id="18" name="work-num-2"/>
+          <p:cNvSpPr txBox="1"/>
+          <p:nvPr/>
+        </p:nvSpPr>
+        <p:spPr>
+          <a:xfrm xmlns:a="http://schemas.openxmlformats.org/drawingml/2006/main">
+            <a:off x="10477500" y="5010150"/>
+            <a:ext cx="571500" cy="228600"/>
+          </a:xfrm>
+          <a:prstGeom xmlns:a="http://schemas.openxmlformats.org/drawingml/2006/main" prst="rect">
+            <a:avLst/>
+          </a:prstGeom>
+          <a:noFill xmlns:a="http://schemas.openxmlformats.org/drawingml/2006/main"/>
+          <a:ln xmlns:a="http://schemas.openxmlformats.org/drawingml/2006/main" w="0">
+            <a:noFill/>
+          </a:ln>
+        </p:spPr>
+        <p:txBody>
+          <a:bodyPr xmlns:a="http://schemas.openxmlformats.org/drawingml/2006/main" wrap="square" lIns="0" tIns="0" rIns="0" bIns="0" anchor="t"/>
+          <a:lstStyle xmlns:a="http://schemas.openxmlformats.org/drawingml/2006/main"/>
+          <a:p xmlns:a="http://schemas.openxmlformats.org/drawingml/2006/main">
+            <a:r>
+              <a:rPr lang="en-US" sz="1350" b="1">
+                <a:solidFill>
+                  <a:srgbClr val="7047FF"/>
+                </a:solidFill>
+                <a:latin typeface="Tahoma"/>
+                <a:ea typeface="Tahoma"/>
+              </a:rPr>
+              <a:t>03</a:t>
+            </a:r>
+            <a:endParaRPr lang="en-US"/>
+          </a:p>
+        </p:txBody>
+      </p:sp>
+      <p:sp>
+        <p:nvSpPr>
+          <p:cNvPr id="19" name="work-label-2"/>
+          <p:cNvSpPr txBox="1"/>
+          <p:nvPr/>
+        </p:nvSpPr>
+        <p:spPr>
+          <a:xfrm xmlns:a="http://schemas.openxmlformats.org/drawingml/2006/main">
+            <a:off x="11144250" y="5010150"/>
+            <a:ext cx="1428750" cy="228600"/>
+          </a:xfrm>
+          <a:prstGeom xmlns:a="http://schemas.openxmlformats.org/drawingml/2006/main" prst="rect">
+            <a:avLst/>
+          </a:prstGeom>
+          <a:noFill xmlns:a="http://schemas.openxmlformats.org/drawingml/2006/main"/>
+          <a:ln xmlns:a="http://schemas.openxmlformats.org/drawingml/2006/main" w="0">
+            <a:noFill/>
+          </a:ln>
+        </p:spPr>
+        <p:txBody>
+          <a:bodyPr xmlns:a="http://schemas.openxmlformats.org/drawingml/2006/main" wrap="square" lIns="0" tIns="0" rIns="0" bIns="0" anchor="t"/>
+          <a:lstStyle xmlns:a="http://schemas.openxmlformats.org/drawingml/2006/main"/>
+          <a:p xmlns:a="http://schemas.openxmlformats.org/drawingml/2006/main">
+            <a:r>
+              <a:rPr lang="en-US" sz="1350" b="1">
+                <a:solidFill>
+                  <a:srgbClr val="F8F8F7"/>
+                </a:solidFill>
+                <a:latin typeface="Tahoma"/>
+                <a:ea typeface="Tahoma"/>
+              </a:rPr>
+              <a:t>Owner</a:t>
+            </a:r>
+            <a:endParaRPr lang="en-US"/>
+          </a:p>
+        </p:txBody>
+      </p:sp>
+      <p:sp>
+        <p:nvSpPr>
+          <p:cNvPr id="20" name="work-text-2"/>
+          <p:cNvSpPr txBox="1"/>
+          <p:nvPr/>
+        </p:nvSpPr>
+        <p:spPr>
+          <a:xfrm xmlns:a="http://schemas.openxmlformats.org/drawingml/2006/main">
+            <a:off x="12668250" y="5010150"/>
+            <a:ext cx="1143000" cy="228600"/>
+          </a:xfrm>
+          <a:prstGeom xmlns:a="http://schemas.openxmlformats.org/drawingml/2006/main" prst="rect">
+            <a:avLst/>
+          </a:prstGeom>
+          <a:noFill xmlns:a="http://schemas.openxmlformats.org/drawingml/2006/main"/>
+          <a:ln xmlns:a="http://schemas.openxmlformats.org/drawingml/2006/main" w="0">
+            <a:noFill/>
+          </a:ln>
+        </p:spPr>
+        <p:txBody>
+          <a:bodyPr xmlns:a="http://schemas.openxmlformats.org/drawingml/2006/main" wrap="square" lIns="0" tIns="0" rIns="0" bIns="0" anchor="t"/>
+          <a:lstStyle xmlns:a="http://schemas.openxmlformats.org/drawingml/2006/main"/>
+          <a:p xmlns:a="http://schemas.openxmlformats.org/drawingml/2006/main">
+            <a:r>
+              <a:rPr lang="en-US" sz="1200">
+                <a:solidFill>
+                  <a:srgbClr val="7F8081"/>
+                </a:solidFill>
+                <a:latin typeface="Tahoma"/>
+                <a:ea typeface="Tahoma"/>
+              </a:rPr>
+              <a:t>Named</a:t>
+            </a:r>
+            <a:endParaRPr lang="en-US"/>
+          </a:p>
+        </p:txBody>
+      </p:sp>
+      <p:sp>
+        <p:nvSpPr>
+          <p:cNvPr id="21" name="source"/>
+          <p:cNvSpPr txBox="1"/>
+          <p:nvPr/>
+        </p:nvSpPr>
+        <p:spPr>
+          <a:xfrm xmlns:a="http://schemas.openxmlformats.org/drawingml/2006/main">
+            <a:off x="914400" y="7810500"/>
+            <a:ext cx="10953750" cy="209550"/>
+          </a:xfrm>
+          <a:prstGeom xmlns:a="http://schemas.openxmlformats.org/drawingml/2006/main" prst="rect">
+            <a:avLst/>
+          </a:prstGeom>
+          <a:noFill xmlns:a="http://schemas.openxmlformats.org/drawingml/2006/main"/>
+          <a:ln xmlns:a="http://schemas.openxmlformats.org/drawingml/2006/main" w="0">
+            <a:noFill/>
+          </a:ln>
+        </p:spPr>
+        <p:txBody>
+          <a:bodyPr xmlns:a="http://schemas.openxmlformats.org/drawingml/2006/main" wrap="square" lIns="0" tIns="0" rIns="0" bIns="0" anchor="t"/>
+          <a:lstStyle xmlns:a="http://schemas.openxmlformats.org/drawingml/2006/main"/>
+          <a:p xmlns:a="http://schemas.openxmlformats.org/drawingml/2006/main">
+            <a:r>
+              <a:rPr lang="en-US" sz="1050">
+                <a:solidFill>
+                  <a:srgbClr val="7F8081"/>
+                </a:solidFill>
+                <a:latin typeface="Tahoma"/>
+                <a:ea typeface="Tahoma"/>
+              </a:rPr>
+              <a:t>Source: illustrative calibration brief · every claim is fictional and bounded</a:t>
+            </a:r>
+            <a:endParaRPr lang="en-US"/>
+          </a:p>
+        </p:txBody>
+      </p:sp>
+      <p:sp>
+        <p:nvSpPr>
+          <p:cNvPr id="22" name="page-number"/>
+          <p:cNvSpPr txBox="1"/>
+          <p:nvPr/>
+        </p:nvSpPr>
+        <p:spPr>
+          <a:xfrm xmlns:a="http://schemas.openxmlformats.org/drawingml/2006/main">
+            <a:off x="13335000" y="7810500"/>
+            <a:ext cx="952500" cy="209550"/>
+          </a:xfrm>
+          <a:prstGeom xmlns:a="http://schemas.openxmlformats.org/drawingml/2006/main" prst="rect">
+            <a:avLst/>
+          </a:prstGeom>
+          <a:noFill xmlns:a="http://schemas.openxmlformats.org/drawingml/2006/main"/>
+          <a:ln xmlns:a="http://schemas.openxmlformats.org/drawingml/2006/main" w="0">
+            <a:noFill/>
+          </a:ln>
+        </p:spPr>
+        <p:txBody>
+          <a:bodyPr xmlns:a="http://schemas.openxmlformats.org/drawingml/2006/main" wrap="square" lIns="0" tIns="0" rIns="0" bIns="0" anchor="t"/>
+          <a:lstStyle xmlns:a="http://schemas.openxmlformats.org/drawingml/2006/main"/>
+          <a:p xmlns:a="http://schemas.openxmlformats.org/drawingml/2006/main">
+            <a:pPr algn="r"/>
+            <a:r>
+              <a:rPr lang="en-US" sz="1050">
+                <a:solidFill>
+                  <a:srgbClr val="7F8081"/>
+                </a:solidFill>
+                <a:latin typeface="Tahoma"/>
+                <a:ea typeface="Tahoma"/>
+              </a:rPr>
+              <a:t>2 / 6</a:t>
+            </a:r>
+            <a:endParaRPr lang="en-US"/>
+          </a:p>
+        </p:txBody>
+      </p:sp>
+    </p:spTree>
+  </p:cSld>
+  <p:clrMapOvr>
+    <a:masterClrMapping xmlns:a="http://schemas.openxmlformats.org/drawingml/2006/main"/>
+  </p:clrMapOvr>
+</p:sld>
+</file>
+
+<file path=ppt/slides/slide3.xml><?xml version="1.0" encoding="utf-8"?>
+<p:sld xmlns:p="http://schemas.openxmlformats.org/presentationml/2006/main">
+  <p:cSld name="Evidence">
+    <p:bg>
+      <p:bgPr>
+        <a:blipFill xmlns:a="http://schemas.openxmlformats.org/drawingml/2006/main">
+          <a:blip xmlns:r="http://schemas.openxmlformats.org/officeDocument/2006/relationships" r:embed="rIdOfficeKitImage9df32179333a9f35_1"/>
+          <a:stretch>
+            <a:fillRect/>
+          </a:stretch>
+        </a:blipFill>
+      </p:bgPr>
+    </p:bg>
+    <p:spTree>
+      <p:nvGrpSpPr>
+        <p:cNvPr id="1" name=""/>
+        <p:cNvGrpSpPr/>
+        <p:nvPr/>
+      </p:nvGrpSpPr>
+      <p:grpSpPr>
+        <a:xfrm xmlns:a="http://schemas.openxmlformats.org/drawingml/2006/main">
+          <a:off x="0" y="0"/>
+          <a:ext cx="0" cy="0"/>
+          <a:chOff x="0" y="0"/>
+          <a:chExt cx="0" cy="0"/>
+        </a:xfrm>
+      </p:grpSpPr>
+      <p:sp>
+        <p:nvSpPr>
           <p:cNvPr id="2" name="evidence-paper-scrim"/>
           <p:cNvSpPr/>
           <p:nvPr/>
@@ -2374,7 +2374,7 @@
         </p:xfrm>
         <a:graphic xmlns:a="http://schemas.openxmlformats.org/drawingml/2006/main">
           <a:graphicData uri="http://schemas.openxmlformats.org/drawingml/2006/chart">
-            <c:chart xmlns:r="http://schemas.openxmlformats.org/officeDocument/2006/relationships" xmlns:c="http://schemas.openxmlformats.org/drawingml/2006/chart" r:id="R4481e28646404396"/>
+            <c:chart xmlns:r="http://schemas.openxmlformats.org/officeDocument/2006/relationships" xmlns:c="http://schemas.openxmlformats.org/drawingml/2006/chart" r:id="R3bed86e065234fb5"/>
           </a:graphicData>
         </a:graphic>
       </p:graphicFrame>
@@ -2392,7 +2392,7 @@
         </p:xfrm>
         <a:graphic xmlns:a="http://schemas.openxmlformats.org/drawingml/2006/main">
           <a:graphicData uri="http://schemas.openxmlformats.org/drawingml/2006/chart">
-            <c:chart xmlns:r="http://schemas.openxmlformats.org/officeDocument/2006/relationships" xmlns:c="http://schemas.openxmlformats.org/drawingml/2006/chart" r:id="R05eb0d627afc47b6"/>
+            <c:chart xmlns:r="http://schemas.openxmlformats.org/officeDocument/2006/relationships" xmlns:c="http://schemas.openxmlformats.org/drawingml/2006/chart" r:id="R519ece800caa428f"/>
           </a:graphicData>
         </a:graphic>
       </p:graphicFrame>
@@ -3870,7 +3870,7 @@
     <p:bg>
       <p:bgPr>
         <a:blipFill xmlns:a="http://schemas.openxmlformats.org/drawingml/2006/main">
-          <a:blip xmlns:r="http://schemas.openxmlformats.org/officeDocument/2006/relationships" r:embed="rIdOfficeKitImage7650495d0c3b8602_1"/>
+          <a:blip xmlns:r="http://schemas.openxmlformats.org/officeDocument/2006/relationships" r:embed="rIdOfficeKitImage56df3e49f11f0ff0_1"/>
           <a:stretch>
             <a:fillRect/>
           </a:stretch>
@@ -4200,7 +4200,7 @@
     <p:bg>
       <p:bgPr>
         <a:blipFill xmlns:a="http://schemas.openxmlformats.org/drawingml/2006/main">
-          <a:blip xmlns:r="http://schemas.openxmlformats.org/officeDocument/2006/relationships" r:embed="rIdOfficeKitImage9df32179333a9f35_1"/>
+          <a:blip xmlns:r="http://schemas.openxmlformats.org/officeDocument/2006/relationships" r:embed="rIdOfficeKitImage2930549abca3ae00_1"/>
           <a:stretch>
             <a:fillRect/>
           </a:stretch>

--- a/skills/presentation-template-library/skills/artifact-template-violet-operations/assets/reference.pptx
+++ b/skills/presentation-template-library/skills/artifact-template-violet-operations/assets/reference.pptx
@@ -2374,7 +2374,7 @@
         </p:xfrm>
         <a:graphic xmlns:a="http://schemas.openxmlformats.org/drawingml/2006/main">
           <a:graphicData uri="http://schemas.openxmlformats.org/drawingml/2006/chart">
-            <c:chart xmlns:r="http://schemas.openxmlformats.org/officeDocument/2006/relationships" xmlns:c="http://schemas.openxmlformats.org/drawingml/2006/chart" r:id="R3bed86e065234fb5"/>
+            <c:chart xmlns:r="http://schemas.openxmlformats.org/officeDocument/2006/relationships" xmlns:c="http://schemas.openxmlformats.org/drawingml/2006/chart" r:id="R4b137d1717b84d4c"/>
           </a:graphicData>
         </a:graphic>
       </p:graphicFrame>
@@ -2392,7 +2392,7 @@
         </p:xfrm>
         <a:graphic xmlns:a="http://schemas.openxmlformats.org/drawingml/2006/main">
           <a:graphicData uri="http://schemas.openxmlformats.org/drawingml/2006/chart">
-            <c:chart xmlns:r="http://schemas.openxmlformats.org/officeDocument/2006/relationships" xmlns:c="http://schemas.openxmlformats.org/drawingml/2006/chart" r:id="R519ece800caa428f"/>
+            <c:chart xmlns:r="http://schemas.openxmlformats.org/officeDocument/2006/relationships" xmlns:c="http://schemas.openxmlformats.org/drawingml/2006/chart" r:id="R0ea05318731f431d"/>
           </a:graphicData>
         </a:graphic>
       </p:graphicFrame>

--- a/skills/presentation-template-library/skills/artifact-template-violet-operations/assets/reference.pptx
+++ b/skills/presentation-template-library/skills/artifact-template-violet-operations/assets/reference.pptx
@@ -194,297 +194,13 @@
 </a:theme>
 </file>
 
-<file path=ppt/slides/charts/chart1.xml><?xml version="1.0" encoding="utf-8"?>
-<c:chartSpace xmlns:c="http://schemas.openxmlformats.org/drawingml/2006/chart" xmlns:a="http://schemas.openxmlformats.org/drawingml/2006/main">
-  <c:chart>
-    <c:title>
-      <c:tx>
-        <c:rich>
-          <a:bodyPr/>
-          <a:lstStyle/>
-          <a:p>
-            <a:r>
-              <a:t>Primary signal · observed versus reference</a:t>
-            </a:r>
-          </a:p>
-        </c:rich>
-      </c:tx>
-      <c:layout/>
-    </c:title>
-    <c:plotArea>
-      <c:layout/>
-      <c:barChart>
-        <c:barDir val="col"/>
-        <c:grouping val="clustered"/>
-        <c:ser>
-          <c:idx val="0"/>
-          <c:order val="0"/>
-          <c:tx>
-            <c:v>Observed</c:v>
-          </c:tx>
-          <c:spPr>
-            <a:solidFill>
-              <a:srgbClr val="7047FF"/>
-            </a:solidFill>
-          </c:spPr>
-          <c:cat>
-            <c:strLit>
-              <c:ptCount val="6"/>
-              <c:pt idx="0">
-                <c:v>Q1</c:v>
-              </c:pt>
-              <c:pt idx="1">
-                <c:v>Q2</c:v>
-              </c:pt>
-              <c:pt idx="2">
-                <c:v>Q3</c:v>
-              </c:pt>
-              <c:pt idx="3">
-                <c:v>Q4</c:v>
-              </c:pt>
-              <c:pt idx="4">
-                <c:v>Q5</c:v>
-              </c:pt>
-              <c:pt idx="5">
-                <c:v>Q6</c:v>
-              </c:pt>
-            </c:strLit>
-          </c:cat>
-          <c:val>
-            <c:numLit>
-              <c:formatCode>General</c:formatCode>
-              <c:ptCount val="6"/>
-              <c:pt idx="0">
-                <c:v>38</c:v>
-              </c:pt>
-              <c:pt idx="1">
-                <c:v>46</c:v>
-              </c:pt>
-              <c:pt idx="2">
-                <c:v>43</c:v>
-              </c:pt>
-              <c:pt idx="3">
-                <c:v>58</c:v>
-              </c:pt>
-              <c:pt idx="4">
-                <c:v>68</c:v>
-              </c:pt>
-              <c:pt idx="5">
-                <c:v>74</c:v>
-              </c:pt>
-            </c:numLit>
-          </c:val>
-        </c:ser>
-        <c:ser>
-          <c:idx val="1"/>
-          <c:order val="1"/>
-          <c:tx>
-            <c:v>Reference</c:v>
-          </c:tx>
-          <c:spPr>
-            <a:solidFill>
-              <a:srgbClr val="7F8081"/>
-            </a:solidFill>
-          </c:spPr>
-          <c:cat>
-            <c:strLit>
-              <c:ptCount val="6"/>
-              <c:pt idx="0">
-                <c:v>Q1</c:v>
-              </c:pt>
-              <c:pt idx="1">
-                <c:v>Q2</c:v>
-              </c:pt>
-              <c:pt idx="2">
-                <c:v>Q3</c:v>
-              </c:pt>
-              <c:pt idx="3">
-                <c:v>Q4</c:v>
-              </c:pt>
-              <c:pt idx="4">
-                <c:v>Q5</c:v>
-              </c:pt>
-              <c:pt idx="5">
-                <c:v>Q6</c:v>
-              </c:pt>
-            </c:strLit>
-          </c:cat>
-          <c:val>
-            <c:numLit>
-              <c:formatCode>General</c:formatCode>
-              <c:ptCount val="6"/>
-              <c:pt idx="0">
-                <c:v>34</c:v>
-              </c:pt>
-              <c:pt idx="1">
-                <c:v>39</c:v>
-              </c:pt>
-              <c:pt idx="2">
-                <c:v>41</c:v>
-              </c:pt>
-              <c:pt idx="3">
-                <c:v>45</c:v>
-              </c:pt>
-              <c:pt idx="4">
-                <c:v>49</c:v>
-              </c:pt>
-              <c:pt idx="5">
-                <c:v>52</c:v>
-              </c:pt>
-            </c:numLit>
-          </c:val>
-        </c:ser>
-        <c:axId val="1"/>
-        <c:axId val="2"/>
-      </c:barChart>
-      <c:catAx>
-        <c:axId val="1"/>
-        <c:scaling>
-          <c:orientation val="minMax"/>
-        </c:scaling>
-        <c:axPos val="b"/>
-        <c:crossAx val="2"/>
-      </c:catAx>
-      <c:valAx>
-        <c:axId val="2"/>
-        <c:scaling>
-          <c:orientation val="minMax"/>
-        </c:scaling>
-        <c:axPos val="l"/>
-        <c:crossAx val="1"/>
-      </c:valAx>
-    </c:plotArea>
-    <c:legend>
-      <c:legendPos val="r"/>
-      <c:layout/>
-    </c:legend>
-    <c:plotVisOnly val="1"/>
-  </c:chart>
-</c:chartSpace>
-</file>
-
-<file path=ppt/slides/charts/chart2.xml><?xml version="1.0" encoding="utf-8"?>
-<c:chartSpace xmlns:c="http://schemas.openxmlformats.org/drawingml/2006/chart" xmlns:a="http://schemas.openxmlformats.org/drawingml/2006/main">
-  <c:chart>
-    <c:title>
-      <c:tx>
-        <c:rich>
-          <a:bodyPr/>
-          <a:lstStyle/>
-          <a:p>
-            <a:r>
-              <a:t>Driver trend</a:t>
-            </a:r>
-          </a:p>
-        </c:rich>
-      </c:tx>
-      <c:layout/>
-    </c:title>
-    <c:plotArea>
-      <c:layout/>
-      <c:lineChart>
-        <c:grouping val="standard"/>
-        <c:ser>
-          <c:idx val="0"/>
-          <c:order val="0"/>
-          <c:tx>
-            <c:v>Driver</c:v>
-          </c:tx>
-          <c:spPr>
-            <a:solidFill>
-              <a:srgbClr val="E6E8EA"/>
-            </a:solidFill>
-            <a:ln w="38100">
-              <a:solidFill>
-                <a:srgbClr val="E6E8EA"/>
-              </a:solidFill>
-              <a:prstDash val="solid"/>
-            </a:ln>
-          </c:spPr>
-          <c:marker>
-            <c:symbol val="circle"/>
-            <c:size val="6"/>
-          </c:marker>
-          <c:cat>
-            <c:strLit>
-              <c:ptCount val="6"/>
-              <c:pt idx="0">
-                <c:v>Q1</c:v>
-              </c:pt>
-              <c:pt idx="1">
-                <c:v>Q2</c:v>
-              </c:pt>
-              <c:pt idx="2">
-                <c:v>Q3</c:v>
-              </c:pt>
-              <c:pt idx="3">
-                <c:v>Q4</c:v>
-              </c:pt>
-              <c:pt idx="4">
-                <c:v>Q5</c:v>
-              </c:pt>
-              <c:pt idx="5">
-                <c:v>Q6</c:v>
-              </c:pt>
-            </c:strLit>
-          </c:cat>
-          <c:val>
-            <c:numLit>
-              <c:formatCode>General</c:formatCode>
-              <c:ptCount val="6"/>
-              <c:pt idx="0">
-                <c:v>22</c:v>
-              </c:pt>
-              <c:pt idx="1">
-                <c:v>28</c:v>
-              </c:pt>
-              <c:pt idx="2">
-                <c:v>34</c:v>
-              </c:pt>
-              <c:pt idx="3">
-                <c:v>39</c:v>
-              </c:pt>
-              <c:pt idx="4">
-                <c:v>45</c:v>
-              </c:pt>
-              <c:pt idx="5">
-                <c:v>51</c:v>
-              </c:pt>
-            </c:numLit>
-          </c:val>
-        </c:ser>
-        <c:axId val="1"/>
-        <c:axId val="2"/>
-      </c:lineChart>
-      <c:catAx>
-        <c:axId val="1"/>
-        <c:scaling>
-          <c:orientation val="minMax"/>
-        </c:scaling>
-        <c:axPos val="b"/>
-        <c:crossAx val="2"/>
-      </c:catAx>
-      <c:valAx>
-        <c:axId val="2"/>
-        <c:scaling>
-          <c:orientation val="minMax"/>
-        </c:scaling>
-        <c:axPos val="l"/>
-        <c:crossAx val="1"/>
-      </c:valAx>
-    </c:plotArea>
-    <c:plotVisOnly val="1"/>
-  </c:chart>
-</c:chartSpace>
-</file>
-
 <file path=ppt/slides/slide1.xml><?xml version="1.0" encoding="utf-8"?>
 <p:sld xmlns:p="http://schemas.openxmlformats.org/presentationml/2006/main">
   <p:cSld name="Opening claim">
     <p:bg>
       <p:bgPr>
         <a:blipFill xmlns:a="http://schemas.openxmlformats.org/drawingml/2006/main">
-          <a:blip xmlns:r="http://schemas.openxmlformats.org/officeDocument/2006/relationships" r:embed="rIdOfficeKitImage7650495d0c3b8602_1"/>
+          <a:blip xmlns:r="http://schemas.openxmlformats.org/officeDocument/2006/relationships" r:embed="rIdOfficeKitImage4df9c6298f17ef7a_1"/>
           <a:stretch>
             <a:fillRect/>
           </a:stretch>
@@ -1279,7 +995,7 @@
     <p:bg>
       <p:bgPr>
         <a:blipFill xmlns:a="http://schemas.openxmlformats.org/drawingml/2006/main">
-          <a:blip xmlns:r="http://schemas.openxmlformats.org/officeDocument/2006/relationships" r:embed="rIdOfficeKitImage283e3eeb8530a9d2_1"/>
+          <a:blip xmlns:r="http://schemas.openxmlformats.org/officeDocument/2006/relationships" r:embed="rIdOfficeKitImage0d3bd4b5ccdd7cbb_1"/>
           <a:stretch>
             <a:fillRect/>
           </a:stretch>
@@ -2084,7 +1800,7 @@
     <p:bg>
       <p:bgPr>
         <a:blipFill xmlns:a="http://schemas.openxmlformats.org/drawingml/2006/main">
-          <a:blip xmlns:r="http://schemas.openxmlformats.org/officeDocument/2006/relationships" r:embed="rIdOfficeKitImage9df32179333a9f35_1"/>
+          <a:blip xmlns:r="http://schemas.openxmlformats.org/officeDocument/2006/relationships" r:embed="rIdOfficeKitImagea5c00489db854fa2_1"/>
           <a:stretch>
             <a:fillRect/>
           </a:stretch>
@@ -2360,60 +2076,63 @@
           </a:p>
         </p:txBody>
       </p:sp>
-      <p:graphicFrame>
-        <p:nvGraphicFramePr>
-          <p:cNvPr id="9" name="dense-primary-chart"/>
-          <p:cNvGraphicFramePr>
-            <a:graphicFrameLocks xmlns:a="http://schemas.openxmlformats.org/drawingml/2006/main" noGrp="1"/>
-          </p:cNvGraphicFramePr>
-          <p:nvPr/>
-        </p:nvGraphicFramePr>
-        <p:xfrm>
-          <a:off xmlns:a="http://schemas.openxmlformats.org/drawingml/2006/main" x="990600" y="3048000"/>
-          <a:ext xmlns:a="http://schemas.openxmlformats.org/drawingml/2006/main" cx="6286500" cy="2952750"/>
-        </p:xfrm>
-        <a:graphic xmlns:a="http://schemas.openxmlformats.org/drawingml/2006/main">
-          <a:graphicData uri="http://schemas.openxmlformats.org/drawingml/2006/chart">
-            <c:chart xmlns:r="http://schemas.openxmlformats.org/officeDocument/2006/relationships" xmlns:c="http://schemas.openxmlformats.org/drawingml/2006/chart" r:id="R4b137d1717b84d4c"/>
-          </a:graphicData>
-        </a:graphic>
-      </p:graphicFrame>
-      <p:graphicFrame>
-        <p:nvGraphicFramePr>
-          <p:cNvPr id="10" name="dense-secondary-chart"/>
-          <p:cNvGraphicFramePr>
-            <a:graphicFrameLocks xmlns:a="http://schemas.openxmlformats.org/drawingml/2006/main" noGrp="1"/>
-          </p:cNvGraphicFramePr>
-          <p:nvPr/>
-        </p:nvGraphicFramePr>
-        <p:xfrm>
-          <a:off xmlns:a="http://schemas.openxmlformats.org/drawingml/2006/main" x="7658100" y="3048000"/>
-          <a:ext xmlns:a="http://schemas.openxmlformats.org/drawingml/2006/main" cx="3143250" cy="2952750"/>
-        </p:xfrm>
-        <a:graphic xmlns:a="http://schemas.openxmlformats.org/drawingml/2006/main">
-          <a:graphicData uri="http://schemas.openxmlformats.org/drawingml/2006/chart">
-            <c:chart xmlns:r="http://schemas.openxmlformats.org/officeDocument/2006/relationships" xmlns:c="http://schemas.openxmlformats.org/drawingml/2006/chart" r:id="R0ea05318731f431d"/>
-          </a:graphicData>
-        </a:graphic>
-      </p:graphicFrame>
-      <p:sp>
-        <p:nvSpPr>
-          <p:cNvPr id="11" name="dense-read-rule"/>
+      <p:sp>
+        <p:nvSpPr>
+          <p:cNvPr id="9" name="map-label"/>
+          <p:cNvSpPr txBox="1"/>
+          <p:nvPr/>
+        </p:nvSpPr>
+        <p:spPr>
+          <a:xfrm xmlns:a="http://schemas.openxmlformats.org/drawingml/2006/main">
+            <a:off x="1066800" y="3143250"/>
+            <a:ext cx="5143500" cy="209550"/>
+          </a:xfrm>
+          <a:prstGeom xmlns:a="http://schemas.openxmlformats.org/drawingml/2006/main" prst="rect">
+            <a:avLst/>
+          </a:prstGeom>
+          <a:noFill xmlns:a="http://schemas.openxmlformats.org/drawingml/2006/main"/>
+          <a:ln xmlns:a="http://schemas.openxmlformats.org/drawingml/2006/main" w="0">
+            <a:noFill/>
+          </a:ln>
+        </p:spPr>
+        <p:txBody>
+          <a:bodyPr xmlns:a="http://schemas.openxmlformats.org/drawingml/2006/main" wrap="square" lIns="0" tIns="0" rIns="0" bIns="0" anchor="t"/>
+          <a:lstStyle xmlns:a="http://schemas.openxmlformats.org/drawingml/2006/main"/>
+          <a:p xmlns:a="http://schemas.openxmlformats.org/drawingml/2006/main">
+            <a:r>
+              <a:rPr lang="en-US" sz="1050" b="1">
+                <a:solidFill>
+                  <a:srgbClr val="7047FF"/>
+                </a:solidFill>
+                <a:latin typeface="Tahoma"/>
+                <a:ea typeface="Tahoma"/>
+              </a:rPr>
+              <a:t>DIRECT-LABELLED DISTRIBUTION</a:t>
+            </a:r>
+            <a:endParaRPr lang="en-US"/>
+          </a:p>
+        </p:txBody>
+      </p:sp>
+      <p:sp>
+        <p:nvSpPr>
+          <p:cNvPr id="10" name="map-field"/>
           <p:cNvSpPr/>
           <p:nvPr/>
         </p:nvSpPr>
         <p:spPr>
           <a:xfrm xmlns:a="http://schemas.openxmlformats.org/drawingml/2006/main">
-            <a:off x="11315700" y="3314700"/>
-            <a:ext cx="2686050" cy="0"/>
-          </a:xfrm>
-          <a:prstGeom xmlns:a="http://schemas.openxmlformats.org/drawingml/2006/main" prst="line">
-            <a:avLst/>
-          </a:prstGeom>
-          <a:noFill xmlns:a="http://schemas.openxmlformats.org/drawingml/2006/main"/>
-          <a:ln xmlns:a="http://schemas.openxmlformats.org/drawingml/2006/main" w="38100">
+            <a:off x="1066800" y="3524250"/>
+            <a:ext cx="7524750" cy="2647950"/>
+          </a:xfrm>
+          <a:prstGeom xmlns:a="http://schemas.openxmlformats.org/drawingml/2006/main" prst="rect">
+            <a:avLst/>
+          </a:prstGeom>
+          <a:solidFill xmlns:a="http://schemas.openxmlformats.org/drawingml/2006/main">
+            <a:srgbClr val="2E2F33"/>
+          </a:solidFill>
+          <a:ln xmlns:a="http://schemas.openxmlformats.org/drawingml/2006/main" w="12700">
             <a:solidFill>
-              <a:srgbClr val="7047FF"/>
+              <a:srgbClr val="7F8081"/>
             </a:solidFill>
             <a:prstDash val="solid"/>
           </a:ln>
@@ -2432,29 +2151,541 @@
       </p:sp>
       <p:sp>
         <p:nvSpPr>
-          <p:cNvPr id="12" name="dense-read-label"/>
-          <p:cNvSpPr txBox="1"/>
-          <p:nvPr/>
-        </p:nvSpPr>
-        <p:spPr>
-          <a:xfrm xmlns:a="http://schemas.openxmlformats.org/drawingml/2006/main">
-            <a:off x="11315700" y="3543300"/>
-            <a:ext cx="2667000" cy="209550"/>
-          </a:xfrm>
-          <a:prstGeom xmlns:a="http://schemas.openxmlformats.org/drawingml/2006/main" prst="rect">
-            <a:avLst/>
-          </a:prstGeom>
-          <a:noFill xmlns:a="http://schemas.openxmlformats.org/drawingml/2006/main"/>
-          <a:ln xmlns:a="http://schemas.openxmlformats.org/drawingml/2006/main" w="0">
-            <a:noFill/>
-          </a:ln>
-        </p:spPr>
-        <p:txBody>
-          <a:bodyPr xmlns:a="http://schemas.openxmlformats.org/drawingml/2006/main" wrap="square" lIns="0" tIns="0" rIns="0" bIns="0" anchor="t"/>
-          <a:lstStyle xmlns:a="http://schemas.openxmlformats.org/drawingml/2006/main"/>
-          <a:p xmlns:a="http://schemas.openxmlformats.org/drawingml/2006/main">
-            <a:r>
-              <a:rPr lang="en-US" sz="1050" b="1">
+          <p:cNvPr id="11" name="map-region-0"/>
+          <p:cNvSpPr/>
+          <p:nvPr/>
+        </p:nvSpPr>
+        <p:spPr>
+          <a:xfrm xmlns:a="http://schemas.openxmlformats.org/drawingml/2006/main">
+            <a:off x="1619250" y="4324350"/>
+            <a:ext cx="1428750" cy="704850"/>
+          </a:xfrm>
+          <a:prstGeom xmlns:a="http://schemas.openxmlformats.org/drawingml/2006/main" prst="rect">
+            <a:avLst/>
+          </a:prstGeom>
+          <a:solidFill xmlns:a="http://schemas.openxmlformats.org/drawingml/2006/main">
+            <a:srgbClr val="E6E8EA">
+              <a:alpha val="48000"/>
+            </a:srgbClr>
+          </a:solidFill>
+          <a:ln xmlns:a="http://schemas.openxmlformats.org/drawingml/2006/main" w="25400">
+            <a:solidFill>
+              <a:srgbClr val="101115"/>
+            </a:solidFill>
+            <a:prstDash val="solid"/>
+          </a:ln>
+        </p:spPr>
+        <p:txBody>
+          <a:bodyPr xmlns:a="http://schemas.openxmlformats.org/drawingml/2006/main" wrap="square" lIns="0" tIns="0" rIns="0" bIns="0" anchor="t"/>
+          <a:lstStyle xmlns:a="http://schemas.openxmlformats.org/drawingml/2006/main"/>
+          <a:p xmlns:a="http://schemas.openxmlformats.org/drawingml/2006/main">
+            <a:r>
+              <a:rPr lang="en-US"/>
+              <a:t/>
+            </a:r>
+            <a:endParaRPr lang="en-US"/>
+          </a:p>
+        </p:txBody>
+      </p:sp>
+      <p:sp>
+        <p:nvSpPr>
+          <p:cNvPr id="12" name="map-region-1"/>
+          <p:cNvSpPr/>
+          <p:nvPr/>
+        </p:nvSpPr>
+        <p:spPr>
+          <a:xfrm xmlns:a="http://schemas.openxmlformats.org/drawingml/2006/main">
+            <a:off x="3295650" y="3962400"/>
+            <a:ext cx="1790700" cy="876300"/>
+          </a:xfrm>
+          <a:prstGeom xmlns:a="http://schemas.openxmlformats.org/drawingml/2006/main" prst="rect">
+            <a:avLst/>
+          </a:prstGeom>
+          <a:solidFill xmlns:a="http://schemas.openxmlformats.org/drawingml/2006/main">
+            <a:srgbClr val="7047FF">
+              <a:alpha val="76000"/>
+            </a:srgbClr>
+          </a:solidFill>
+          <a:ln xmlns:a="http://schemas.openxmlformats.org/drawingml/2006/main" w="25400">
+            <a:solidFill>
+              <a:srgbClr val="101115"/>
+            </a:solidFill>
+            <a:prstDash val="solid"/>
+          </a:ln>
+        </p:spPr>
+        <p:txBody>
+          <a:bodyPr xmlns:a="http://schemas.openxmlformats.org/drawingml/2006/main" wrap="square" lIns="0" tIns="0" rIns="0" bIns="0" anchor="t"/>
+          <a:lstStyle xmlns:a="http://schemas.openxmlformats.org/drawingml/2006/main"/>
+          <a:p xmlns:a="http://schemas.openxmlformats.org/drawingml/2006/main">
+            <a:r>
+              <a:rPr lang="en-US"/>
+              <a:t/>
+            </a:r>
+            <a:endParaRPr lang="en-US"/>
+          </a:p>
+        </p:txBody>
+      </p:sp>
+      <p:sp>
+        <p:nvSpPr>
+          <p:cNvPr id="13" name="map-region-2"/>
+          <p:cNvSpPr/>
+          <p:nvPr/>
+        </p:nvSpPr>
+        <p:spPr>
+          <a:xfrm xmlns:a="http://schemas.openxmlformats.org/drawingml/2006/main">
+            <a:off x="5295900" y="4457700"/>
+            <a:ext cx="1200150" cy="666750"/>
+          </a:xfrm>
+          <a:prstGeom xmlns:a="http://schemas.openxmlformats.org/drawingml/2006/main" prst="rect">
+            <a:avLst/>
+          </a:prstGeom>
+          <a:solidFill xmlns:a="http://schemas.openxmlformats.org/drawingml/2006/main">
+            <a:srgbClr val="E6E8EA">
+              <a:alpha val="48000"/>
+            </a:srgbClr>
+          </a:solidFill>
+          <a:ln xmlns:a="http://schemas.openxmlformats.org/drawingml/2006/main" w="25400">
+            <a:solidFill>
+              <a:srgbClr val="101115"/>
+            </a:solidFill>
+            <a:prstDash val="solid"/>
+          </a:ln>
+        </p:spPr>
+        <p:txBody>
+          <a:bodyPr xmlns:a="http://schemas.openxmlformats.org/drawingml/2006/main" wrap="square" lIns="0" tIns="0" rIns="0" bIns="0" anchor="t"/>
+          <a:lstStyle xmlns:a="http://schemas.openxmlformats.org/drawingml/2006/main"/>
+          <a:p xmlns:a="http://schemas.openxmlformats.org/drawingml/2006/main">
+            <a:r>
+              <a:rPr lang="en-US"/>
+              <a:t/>
+            </a:r>
+            <a:endParaRPr lang="en-US"/>
+          </a:p>
+        </p:txBody>
+      </p:sp>
+      <p:sp>
+        <p:nvSpPr>
+          <p:cNvPr id="14" name="map-region-3"/>
+          <p:cNvSpPr/>
+          <p:nvPr/>
+        </p:nvSpPr>
+        <p:spPr>
+          <a:xfrm xmlns:a="http://schemas.openxmlformats.org/drawingml/2006/main">
+            <a:off x="6705600" y="3848100"/>
+            <a:ext cx="1238250" cy="952500"/>
+          </a:xfrm>
+          <a:prstGeom xmlns:a="http://schemas.openxmlformats.org/drawingml/2006/main" prst="rect">
+            <a:avLst/>
+          </a:prstGeom>
+          <a:solidFill xmlns:a="http://schemas.openxmlformats.org/drawingml/2006/main">
+            <a:srgbClr val="7047FF">
+              <a:alpha val="76000"/>
+            </a:srgbClr>
+          </a:solidFill>
+          <a:ln xmlns:a="http://schemas.openxmlformats.org/drawingml/2006/main" w="25400">
+            <a:solidFill>
+              <a:srgbClr val="101115"/>
+            </a:solidFill>
+            <a:prstDash val="solid"/>
+          </a:ln>
+        </p:spPr>
+        <p:txBody>
+          <a:bodyPr xmlns:a="http://schemas.openxmlformats.org/drawingml/2006/main" wrap="square" lIns="0" tIns="0" rIns="0" bIns="0" anchor="t"/>
+          <a:lstStyle xmlns:a="http://schemas.openxmlformats.org/drawingml/2006/main"/>
+          <a:p xmlns:a="http://schemas.openxmlformats.org/drawingml/2006/main">
+            <a:r>
+              <a:rPr lang="en-US"/>
+              <a:t/>
+            </a:r>
+            <a:endParaRPr lang="en-US"/>
+          </a:p>
+        </p:txBody>
+      </p:sp>
+      <p:sp>
+        <p:nvSpPr>
+          <p:cNvPr id="15" name="map-region-4"/>
+          <p:cNvSpPr/>
+          <p:nvPr/>
+        </p:nvSpPr>
+        <p:spPr>
+          <a:xfrm xmlns:a="http://schemas.openxmlformats.org/drawingml/2006/main">
+            <a:off x="2590800" y="5219700"/>
+            <a:ext cx="1943100" cy="590550"/>
+          </a:xfrm>
+          <a:prstGeom xmlns:a="http://schemas.openxmlformats.org/drawingml/2006/main" prst="rect">
+            <a:avLst/>
+          </a:prstGeom>
+          <a:solidFill xmlns:a="http://schemas.openxmlformats.org/drawingml/2006/main">
+            <a:srgbClr val="7F8081">
+              <a:alpha val="48000"/>
+            </a:srgbClr>
+          </a:solidFill>
+          <a:ln xmlns:a="http://schemas.openxmlformats.org/drawingml/2006/main" w="25400">
+            <a:solidFill>
+              <a:srgbClr val="101115"/>
+            </a:solidFill>
+            <a:prstDash val="solid"/>
+          </a:ln>
+        </p:spPr>
+        <p:txBody>
+          <a:bodyPr xmlns:a="http://schemas.openxmlformats.org/drawingml/2006/main" wrap="square" lIns="0" tIns="0" rIns="0" bIns="0" anchor="t"/>
+          <a:lstStyle xmlns:a="http://schemas.openxmlformats.org/drawingml/2006/main"/>
+          <a:p xmlns:a="http://schemas.openxmlformats.org/drawingml/2006/main">
+            <a:r>
+              <a:rPr lang="en-US"/>
+              <a:t/>
+            </a:r>
+            <a:endParaRPr lang="en-US"/>
+          </a:p>
+        </p:txBody>
+      </p:sp>
+      <p:sp>
+        <p:nvSpPr>
+          <p:cNvPr id="16" name="map-region-5"/>
+          <p:cNvSpPr/>
+          <p:nvPr/>
+        </p:nvSpPr>
+        <p:spPr>
+          <a:xfrm xmlns:a="http://schemas.openxmlformats.org/drawingml/2006/main">
+            <a:off x="4895850" y="5334000"/>
+            <a:ext cx="1447800" cy="514350"/>
+          </a:xfrm>
+          <a:prstGeom xmlns:a="http://schemas.openxmlformats.org/drawingml/2006/main" prst="rect">
+            <a:avLst/>
+          </a:prstGeom>
+          <a:solidFill xmlns:a="http://schemas.openxmlformats.org/drawingml/2006/main">
+            <a:srgbClr val="E6E8EA">
+              <a:alpha val="76000"/>
+            </a:srgbClr>
+          </a:solidFill>
+          <a:ln xmlns:a="http://schemas.openxmlformats.org/drawingml/2006/main" w="25400">
+            <a:solidFill>
+              <a:srgbClr val="101115"/>
+            </a:solidFill>
+            <a:prstDash val="solid"/>
+          </a:ln>
+        </p:spPr>
+        <p:txBody>
+          <a:bodyPr xmlns:a="http://schemas.openxmlformats.org/drawingml/2006/main" wrap="square" lIns="0" tIns="0" rIns="0" bIns="0" anchor="t"/>
+          <a:lstStyle xmlns:a="http://schemas.openxmlformats.org/drawingml/2006/main"/>
+          <a:p xmlns:a="http://schemas.openxmlformats.org/drawingml/2006/main">
+            <a:r>
+              <a:rPr lang="en-US"/>
+              <a:t/>
+            </a:r>
+            <a:endParaRPr lang="en-US"/>
+          </a:p>
+        </p:txBody>
+      </p:sp>
+      <p:sp>
+        <p:nvSpPr>
+          <p:cNvPr id="17" name="map-leader-0"/>
+          <p:cNvSpPr/>
+          <p:nvPr/>
+        </p:nvSpPr>
+        <p:spPr>
+          <a:xfrm xmlns:a="http://schemas.openxmlformats.org/drawingml/2006/main">
+            <a:off x="1943100" y="4362450"/>
+            <a:ext cx="209550" cy="228600"/>
+          </a:xfrm>
+          <a:prstGeom xmlns:a="http://schemas.openxmlformats.org/drawingml/2006/main" prst="line">
+            <a:avLst/>
+          </a:prstGeom>
+          <a:noFill xmlns:a="http://schemas.openxmlformats.org/drawingml/2006/main"/>
+          <a:ln xmlns:a="http://schemas.openxmlformats.org/drawingml/2006/main" w="12700">
+            <a:solidFill>
+              <a:srgbClr val="F8F8F7"/>
+            </a:solidFill>
+            <a:prstDash val="solid"/>
+          </a:ln>
+        </p:spPr>
+        <p:txBody>
+          <a:bodyPr xmlns:a="http://schemas.openxmlformats.org/drawingml/2006/main" wrap="square" lIns="0" tIns="0" rIns="0" bIns="0" anchor="t"/>
+          <a:lstStyle xmlns:a="http://schemas.openxmlformats.org/drawingml/2006/main"/>
+          <a:p xmlns:a="http://schemas.openxmlformats.org/drawingml/2006/main">
+            <a:r>
+              <a:rPr lang="en-US"/>
+              <a:t/>
+            </a:r>
+            <a:endParaRPr lang="en-US"/>
+          </a:p>
+        </p:txBody>
+      </p:sp>
+      <p:sp>
+        <p:nvSpPr>
+          <p:cNvPr id="18" name="map-label-0"/>
+          <p:cNvSpPr txBox="1"/>
+          <p:nvPr/>
+        </p:nvSpPr>
+        <p:spPr>
+          <a:xfrm xmlns:a="http://schemas.openxmlformats.org/drawingml/2006/main">
+            <a:off x="2190750" y="4095750"/>
+            <a:ext cx="1428750" cy="228600"/>
+          </a:xfrm>
+          <a:prstGeom xmlns:a="http://schemas.openxmlformats.org/drawingml/2006/main" prst="rect">
+            <a:avLst/>
+          </a:prstGeom>
+          <a:noFill xmlns:a="http://schemas.openxmlformats.org/drawingml/2006/main"/>
+          <a:ln xmlns:a="http://schemas.openxmlformats.org/drawingml/2006/main" w="0">
+            <a:noFill/>
+          </a:ln>
+        </p:spPr>
+        <p:txBody>
+          <a:bodyPr xmlns:a="http://schemas.openxmlformats.org/drawingml/2006/main" wrap="square" lIns="0" tIns="0" rIns="0" bIns="0" anchor="t"/>
+          <a:lstStyle xmlns:a="http://schemas.openxmlformats.org/drawingml/2006/main"/>
+          <a:p xmlns:a="http://schemas.openxmlformats.org/drawingml/2006/main">
+            <a:r>
+              <a:rPr lang="en-US" sz="1125" b="1">
+                <a:solidFill>
+                  <a:srgbClr val="F8F8F7"/>
+                </a:solidFill>
+                <a:latin typeface="Tahoma"/>
+                <a:ea typeface="Tahoma"/>
+              </a:rPr>
+              <a:t>North · 42%</a:t>
+            </a:r>
+            <a:endParaRPr lang="en-US"/>
+          </a:p>
+        </p:txBody>
+      </p:sp>
+      <p:sp>
+        <p:nvSpPr>
+          <p:cNvPr id="19" name="map-leader-1"/>
+          <p:cNvSpPr/>
+          <p:nvPr/>
+        </p:nvSpPr>
+        <p:spPr>
+          <a:xfrm xmlns:a="http://schemas.openxmlformats.org/drawingml/2006/main">
+            <a:off x="3676650" y="3981450"/>
+            <a:ext cx="209550" cy="228600"/>
+          </a:xfrm>
+          <a:prstGeom xmlns:a="http://schemas.openxmlformats.org/drawingml/2006/main" prst="line">
+            <a:avLst/>
+          </a:prstGeom>
+          <a:noFill xmlns:a="http://schemas.openxmlformats.org/drawingml/2006/main"/>
+          <a:ln xmlns:a="http://schemas.openxmlformats.org/drawingml/2006/main" w="12700">
+            <a:solidFill>
+              <a:srgbClr val="F8F8F7"/>
+            </a:solidFill>
+            <a:prstDash val="solid"/>
+          </a:ln>
+        </p:spPr>
+        <p:txBody>
+          <a:bodyPr xmlns:a="http://schemas.openxmlformats.org/drawingml/2006/main" wrap="square" lIns="0" tIns="0" rIns="0" bIns="0" anchor="t"/>
+          <a:lstStyle xmlns:a="http://schemas.openxmlformats.org/drawingml/2006/main"/>
+          <a:p xmlns:a="http://schemas.openxmlformats.org/drawingml/2006/main">
+            <a:r>
+              <a:rPr lang="en-US"/>
+              <a:t/>
+            </a:r>
+            <a:endParaRPr lang="en-US"/>
+          </a:p>
+        </p:txBody>
+      </p:sp>
+      <p:sp>
+        <p:nvSpPr>
+          <p:cNvPr id="20" name="map-label-1"/>
+          <p:cNvSpPr txBox="1"/>
+          <p:nvPr/>
+        </p:nvSpPr>
+        <p:spPr>
+          <a:xfrm xmlns:a="http://schemas.openxmlformats.org/drawingml/2006/main">
+            <a:off x="3924300" y="3714750"/>
+            <a:ext cx="1428750" cy="228600"/>
+          </a:xfrm>
+          <a:prstGeom xmlns:a="http://schemas.openxmlformats.org/drawingml/2006/main" prst="rect">
+            <a:avLst/>
+          </a:prstGeom>
+          <a:noFill xmlns:a="http://schemas.openxmlformats.org/drawingml/2006/main"/>
+          <a:ln xmlns:a="http://schemas.openxmlformats.org/drawingml/2006/main" w="0">
+            <a:noFill/>
+          </a:ln>
+        </p:spPr>
+        <p:txBody>
+          <a:bodyPr xmlns:a="http://schemas.openxmlformats.org/drawingml/2006/main" wrap="square" lIns="0" tIns="0" rIns="0" bIns="0" anchor="t"/>
+          <a:lstStyle xmlns:a="http://schemas.openxmlformats.org/drawingml/2006/main"/>
+          <a:p xmlns:a="http://schemas.openxmlformats.org/drawingml/2006/main">
+            <a:r>
+              <a:rPr lang="en-US" sz="1125" b="1">
+                <a:solidFill>
+                  <a:srgbClr val="F8F8F7"/>
+                </a:solidFill>
+                <a:latin typeface="Tahoma"/>
+                <a:ea typeface="Tahoma"/>
+              </a:rPr>
+              <a:t>Central · 68%</a:t>
+            </a:r>
+            <a:endParaRPr lang="en-US"/>
+          </a:p>
+        </p:txBody>
+      </p:sp>
+      <p:sp>
+        <p:nvSpPr>
+          <p:cNvPr id="21" name="map-leader-2"/>
+          <p:cNvSpPr/>
+          <p:nvPr/>
+        </p:nvSpPr>
+        <p:spPr>
+          <a:xfrm xmlns:a="http://schemas.openxmlformats.org/drawingml/2006/main">
+            <a:off x="6934200" y="3886200"/>
+            <a:ext cx="209550" cy="228600"/>
+          </a:xfrm>
+          <a:prstGeom xmlns:a="http://schemas.openxmlformats.org/drawingml/2006/main" prst="line">
+            <a:avLst/>
+          </a:prstGeom>
+          <a:noFill xmlns:a="http://schemas.openxmlformats.org/drawingml/2006/main"/>
+          <a:ln xmlns:a="http://schemas.openxmlformats.org/drawingml/2006/main" w="12700">
+            <a:solidFill>
+              <a:srgbClr val="F8F8F7"/>
+            </a:solidFill>
+            <a:prstDash val="solid"/>
+          </a:ln>
+        </p:spPr>
+        <p:txBody>
+          <a:bodyPr xmlns:a="http://schemas.openxmlformats.org/drawingml/2006/main" wrap="square" lIns="0" tIns="0" rIns="0" bIns="0" anchor="t"/>
+          <a:lstStyle xmlns:a="http://schemas.openxmlformats.org/drawingml/2006/main"/>
+          <a:p xmlns:a="http://schemas.openxmlformats.org/drawingml/2006/main">
+            <a:r>
+              <a:rPr lang="en-US"/>
+              <a:t/>
+            </a:r>
+            <a:endParaRPr lang="en-US"/>
+          </a:p>
+        </p:txBody>
+      </p:sp>
+      <p:sp>
+        <p:nvSpPr>
+          <p:cNvPr id="22" name="map-label-2"/>
+          <p:cNvSpPr txBox="1"/>
+          <p:nvPr/>
+        </p:nvSpPr>
+        <p:spPr>
+          <a:xfrm xmlns:a="http://schemas.openxmlformats.org/drawingml/2006/main">
+            <a:off x="7181850" y="3619500"/>
+            <a:ext cx="1428750" cy="228600"/>
+          </a:xfrm>
+          <a:prstGeom xmlns:a="http://schemas.openxmlformats.org/drawingml/2006/main" prst="rect">
+            <a:avLst/>
+          </a:prstGeom>
+          <a:noFill xmlns:a="http://schemas.openxmlformats.org/drawingml/2006/main"/>
+          <a:ln xmlns:a="http://schemas.openxmlformats.org/drawingml/2006/main" w="0">
+            <a:noFill/>
+          </a:ln>
+        </p:spPr>
+        <p:txBody>
+          <a:bodyPr xmlns:a="http://schemas.openxmlformats.org/drawingml/2006/main" wrap="square" lIns="0" tIns="0" rIns="0" bIns="0" anchor="t"/>
+          <a:lstStyle xmlns:a="http://schemas.openxmlformats.org/drawingml/2006/main"/>
+          <a:p xmlns:a="http://schemas.openxmlformats.org/drawingml/2006/main">
+            <a:r>
+              <a:rPr lang="en-US" sz="1125" b="1">
+                <a:solidFill>
+                  <a:srgbClr val="F8F8F7"/>
+                </a:solidFill>
+                <a:latin typeface="Tahoma"/>
+                <a:ea typeface="Tahoma"/>
+              </a:rPr>
+              <a:t>East · 55%</a:t>
+            </a:r>
+            <a:endParaRPr lang="en-US"/>
+          </a:p>
+        </p:txBody>
+      </p:sp>
+      <p:sp>
+        <p:nvSpPr>
+          <p:cNvPr id="23" name="map-leader-3"/>
+          <p:cNvSpPr/>
+          <p:nvPr/>
+        </p:nvSpPr>
+        <p:spPr>
+          <a:xfrm xmlns:a="http://schemas.openxmlformats.org/drawingml/2006/main">
+            <a:off x="2952750" y="6343650"/>
+            <a:ext cx="209550" cy="228600"/>
+          </a:xfrm>
+          <a:prstGeom xmlns:a="http://schemas.openxmlformats.org/drawingml/2006/main" prst="line">
+            <a:avLst/>
+          </a:prstGeom>
+          <a:noFill xmlns:a="http://schemas.openxmlformats.org/drawingml/2006/main"/>
+          <a:ln xmlns:a="http://schemas.openxmlformats.org/drawingml/2006/main" w="12700">
+            <a:solidFill>
+              <a:srgbClr val="F8F8F7"/>
+            </a:solidFill>
+            <a:prstDash val="solid"/>
+          </a:ln>
+        </p:spPr>
+        <p:txBody>
+          <a:bodyPr xmlns:a="http://schemas.openxmlformats.org/drawingml/2006/main" wrap="square" lIns="0" tIns="0" rIns="0" bIns="0" anchor="t"/>
+          <a:lstStyle xmlns:a="http://schemas.openxmlformats.org/drawingml/2006/main"/>
+          <a:p xmlns:a="http://schemas.openxmlformats.org/drawingml/2006/main">
+            <a:r>
+              <a:rPr lang="en-US"/>
+              <a:t/>
+            </a:r>
+            <a:endParaRPr lang="en-US"/>
+          </a:p>
+        </p:txBody>
+      </p:sp>
+      <p:sp>
+        <p:nvSpPr>
+          <p:cNvPr id="24" name="map-label-3"/>
+          <p:cNvSpPr txBox="1"/>
+          <p:nvPr/>
+        </p:nvSpPr>
+        <p:spPr>
+          <a:xfrm xmlns:a="http://schemas.openxmlformats.org/drawingml/2006/main">
+            <a:off x="3200400" y="6076950"/>
+            <a:ext cx="1428750" cy="228600"/>
+          </a:xfrm>
+          <a:prstGeom xmlns:a="http://schemas.openxmlformats.org/drawingml/2006/main" prst="rect">
+            <a:avLst/>
+          </a:prstGeom>
+          <a:noFill xmlns:a="http://schemas.openxmlformats.org/drawingml/2006/main"/>
+          <a:ln xmlns:a="http://schemas.openxmlformats.org/drawingml/2006/main" w="0">
+            <a:noFill/>
+          </a:ln>
+        </p:spPr>
+        <p:txBody>
+          <a:bodyPr xmlns:a="http://schemas.openxmlformats.org/drawingml/2006/main" wrap="square" lIns="0" tIns="0" rIns="0" bIns="0" anchor="t"/>
+          <a:lstStyle xmlns:a="http://schemas.openxmlformats.org/drawingml/2006/main"/>
+          <a:p xmlns:a="http://schemas.openxmlformats.org/drawingml/2006/main">
+            <a:r>
+              <a:rPr lang="en-US" sz="1125" b="1">
+                <a:solidFill>
+                  <a:srgbClr val="F8F8F7"/>
+                </a:solidFill>
+                <a:latin typeface="Tahoma"/>
+                <a:ea typeface="Tahoma"/>
+              </a:rPr>
+              <a:t>South · 31%</a:t>
+            </a:r>
+            <a:endParaRPr lang="en-US"/>
+          </a:p>
+        </p:txBody>
+      </p:sp>
+      <p:sp>
+        <p:nvSpPr>
+          <p:cNvPr id="25" name="map-read-label"/>
+          <p:cNvSpPr txBox="1"/>
+          <p:nvPr/>
+        </p:nvSpPr>
+        <p:spPr>
+          <a:xfrm xmlns:a="http://schemas.openxmlformats.org/drawingml/2006/main">
+            <a:off x="9906000" y="3333750"/>
+            <a:ext cx="3048000" cy="228600"/>
+          </a:xfrm>
+          <a:prstGeom xmlns:a="http://schemas.openxmlformats.org/drawingml/2006/main" prst="rect">
+            <a:avLst/>
+          </a:prstGeom>
+          <a:noFill xmlns:a="http://schemas.openxmlformats.org/drawingml/2006/main"/>
+          <a:ln xmlns:a="http://schemas.openxmlformats.org/drawingml/2006/main" w="0">
+            <a:noFill/>
+          </a:ln>
+        </p:spPr>
+        <p:txBody>
+          <a:bodyPr xmlns:a="http://schemas.openxmlformats.org/drawingml/2006/main" wrap="square" lIns="0" tIns="0" rIns="0" bIns="0" anchor="t"/>
+          <a:lstStyle xmlns:a="http://schemas.openxmlformats.org/drawingml/2006/main"/>
+          <a:p xmlns:a="http://schemas.openxmlformats.org/drawingml/2006/main">
+            <a:r>
+              <a:rPr lang="en-US" sz="1125" b="1">
                 <a:solidFill>
                   <a:srgbClr val="7047FF"/>
                 </a:solidFill>
@@ -2469,81 +2700,81 @@
       </p:sp>
       <p:sp>
         <p:nvSpPr>
-          <p:cNvPr id="13" name="dense-read-title"/>
-          <p:cNvSpPr txBox="1"/>
-          <p:nvPr/>
-        </p:nvSpPr>
-        <p:spPr>
-          <a:xfrm xmlns:a="http://schemas.openxmlformats.org/drawingml/2006/main">
-            <a:off x="11315700" y="4000500"/>
-            <a:ext cx="2667000" cy="685800"/>
-          </a:xfrm>
-          <a:prstGeom xmlns:a="http://schemas.openxmlformats.org/drawingml/2006/main" prst="rect">
-            <a:avLst/>
-          </a:prstGeom>
-          <a:noFill xmlns:a="http://schemas.openxmlformats.org/drawingml/2006/main"/>
-          <a:ln xmlns:a="http://schemas.openxmlformats.org/drawingml/2006/main" w="0">
-            <a:noFill/>
-          </a:ln>
-        </p:spPr>
-        <p:txBody>
-          <a:bodyPr xmlns:a="http://schemas.openxmlformats.org/drawingml/2006/main" wrap="square" lIns="0" tIns="0" rIns="0" bIns="0" anchor="t"/>
-          <a:lstStyle xmlns:a="http://schemas.openxmlformats.org/drawingml/2006/main"/>
-          <a:p xmlns:a="http://schemas.openxmlformats.org/drawingml/2006/main">
-            <a:r>
-              <a:rPr lang="en-US" sz="1725" b="1">
+          <p:cNvPr id="26" name="map-read-title"/>
+          <p:cNvSpPr txBox="1"/>
+          <p:nvPr/>
+        </p:nvSpPr>
+        <p:spPr>
+          <a:xfrm xmlns:a="http://schemas.openxmlformats.org/drawingml/2006/main">
+            <a:off x="9906000" y="3829050"/>
+            <a:ext cx="3429000" cy="723900"/>
+          </a:xfrm>
+          <a:prstGeom xmlns:a="http://schemas.openxmlformats.org/drawingml/2006/main" prst="rect">
+            <a:avLst/>
+          </a:prstGeom>
+          <a:noFill xmlns:a="http://schemas.openxmlformats.org/drawingml/2006/main"/>
+          <a:ln xmlns:a="http://schemas.openxmlformats.org/drawingml/2006/main" w="0">
+            <a:noFill/>
+          </a:ln>
+        </p:spPr>
+        <p:txBody>
+          <a:bodyPr xmlns:a="http://schemas.openxmlformats.org/drawingml/2006/main" wrap="square" lIns="0" tIns="0" rIns="0" bIns="0" anchor="t"/>
+          <a:lstStyle xmlns:a="http://schemas.openxmlformats.org/drawingml/2006/main"/>
+          <a:p xmlns:a="http://schemas.openxmlformats.org/drawingml/2006/main">
+            <a:r>
+              <a:rPr lang="en-US" sz="2100" b="1">
                 <a:solidFill>
                   <a:srgbClr val="F8F8F7"/>
                 </a:solidFill>
                 <a:latin typeface="Tahoma"/>
                 <a:ea typeface="Tahoma"/>
               </a:rPr>
-              <a:t>The signal earns its space.</a:t>
-            </a:r>
-            <a:endParaRPr lang="en-US"/>
-          </a:p>
-        </p:txBody>
-      </p:sp>
-      <p:sp>
-        <p:nvSpPr>
-          <p:cNvPr id="14" name="dense-read-body"/>
-          <p:cNvSpPr txBox="1"/>
-          <p:nvPr/>
-        </p:nvSpPr>
-        <p:spPr>
-          <a:xfrm xmlns:a="http://schemas.openxmlformats.org/drawingml/2006/main">
-            <a:off x="11315700" y="4953000"/>
-            <a:ext cx="2667000" cy="819150"/>
-          </a:xfrm>
-          <a:prstGeom xmlns:a="http://schemas.openxmlformats.org/drawingml/2006/main" prst="rect">
-            <a:avLst/>
-          </a:prstGeom>
-          <a:noFill xmlns:a="http://schemas.openxmlformats.org/drawingml/2006/main"/>
-          <a:ln xmlns:a="http://schemas.openxmlformats.org/drawingml/2006/main" w="0">
-            <a:noFill/>
-          </a:ln>
-        </p:spPr>
-        <p:txBody>
-          <a:bodyPr xmlns:a="http://schemas.openxmlformats.org/drawingml/2006/main" wrap="square" lIns="0" tIns="0" rIns="0" bIns="0" anchor="t"/>
-          <a:lstStyle xmlns:a="http://schemas.openxmlformats.org/drawingml/2006/main"/>
-          <a:p xmlns:a="http://schemas.openxmlformats.org/drawingml/2006/main">
-            <a:r>
-              <a:rPr lang="en-US" sz="1200">
+              <a:t>The geography changes the decision.</a:t>
+            </a:r>
+            <a:endParaRPr lang="en-US"/>
+          </a:p>
+        </p:txBody>
+      </p:sp>
+      <p:sp>
+        <p:nvSpPr>
+          <p:cNvPr id="27" name="map-read-body"/>
+          <p:cNvSpPr txBox="1"/>
+          <p:nvPr/>
+        </p:nvSpPr>
+        <p:spPr>
+          <a:xfrm xmlns:a="http://schemas.openxmlformats.org/drawingml/2006/main">
+            <a:off x="9906000" y="4953000"/>
+            <a:ext cx="3429000" cy="895350"/>
+          </a:xfrm>
+          <a:prstGeom xmlns:a="http://schemas.openxmlformats.org/drawingml/2006/main" prst="rect">
+            <a:avLst/>
+          </a:prstGeom>
+          <a:noFill xmlns:a="http://schemas.openxmlformats.org/drawingml/2006/main"/>
+          <a:ln xmlns:a="http://schemas.openxmlformats.org/drawingml/2006/main" w="0">
+            <a:noFill/>
+          </a:ln>
+        </p:spPr>
+        <p:txBody>
+          <a:bodyPr xmlns:a="http://schemas.openxmlformats.org/drawingml/2006/main" wrap="square" lIns="0" tIns="0" rIns="0" bIns="0" anchor="t"/>
+          <a:lstStyle xmlns:a="http://schemas.openxmlformats.org/drawingml/2006/main"/>
+          <a:p xmlns:a="http://schemas.openxmlformats.org/drawingml/2006/main">
+            <a:r>
+              <a:rPr lang="en-US" sz="1275">
                 <a:solidFill>
                   <a:srgbClr val="7F8081"/>
                 </a:solidFill>
                 <a:latin typeface="Tahoma"/>
                 <a:ea typeface="Tahoma"/>
               </a:rPr>
-              <a:t>Every mark answers the page's question; remove anything that does not.</a:t>
-            </a:r>
-            <a:endParaRPr lang="en-US"/>
-          </a:p>
-        </p:txBody>
-      </p:sp>
-      <p:sp>
-        <p:nvSpPr>
-          <p:cNvPr id="15" name="evidence-band"/>
+              <a:t>Use a map only when position, distribution, or concentration carries the argument. Direct labels stay next to the region they qualify.</a:t>
+            </a:r>
+            <a:endParaRPr lang="en-US"/>
+          </a:p>
+        </p:txBody>
+      </p:sp>
+      <p:sp>
+        <p:nvSpPr>
+          <p:cNvPr id="28" name="evidence-band"/>
           <p:cNvSpPr/>
           <p:nvPr/>
         </p:nvSpPr>
@@ -2579,7 +2810,7 @@
       </p:sp>
       <p:sp>
         <p:nvSpPr>
-          <p:cNvPr id="16" name="evidence-band-text"/>
+          <p:cNvPr id="29" name="evidence-band-text"/>
           <p:cNvSpPr txBox="1"/>
           <p:nvPr/>
         </p:nvSpPr>
@@ -2616,7 +2847,7 @@
       </p:sp>
       <p:sp>
         <p:nvSpPr>
-          <p:cNvPr id="17" name="source"/>
+          <p:cNvPr id="30" name="source"/>
           <p:cNvSpPr txBox="1"/>
           <p:nvPr/>
         </p:nvSpPr>
@@ -2653,7 +2884,7 @@
       </p:sp>
       <p:sp>
         <p:nvSpPr>
-          <p:cNvPr id="18" name="page-number"/>
+          <p:cNvPr id="31" name="page-number"/>
           <p:cNvSpPr txBox="1"/>
           <p:nvPr/>
         </p:nvSpPr>
@@ -2942,848 +3173,291 @@
           </a:p>
         </p:txBody>
       </p:sp>
-      <p:sp>
-        <p:nvSpPr>
-          <p:cNvPr id="8" name="process-axis"/>
-          <p:cNvSpPr/>
-          <p:nvPr/>
-        </p:nvSpPr>
-        <p:spPr>
-          <a:xfrm xmlns:a="http://schemas.openxmlformats.org/drawingml/2006/main">
-            <a:off x="1390650" y="4114800"/>
-            <a:ext cx="8839200" cy="0"/>
-          </a:xfrm>
-          <a:prstGeom xmlns:a="http://schemas.openxmlformats.org/drawingml/2006/main" prst="line">
-            <a:avLst/>
-          </a:prstGeom>
-          <a:noFill xmlns:a="http://schemas.openxmlformats.org/drawingml/2006/main"/>
-          <a:ln xmlns:a="http://schemas.openxmlformats.org/drawingml/2006/main" w="25400">
-            <a:solidFill>
-              <a:srgbClr val="7F8081"/>
-            </a:solidFill>
-            <a:prstDash val="solid"/>
-          </a:ln>
-        </p:spPr>
-        <p:txBody>
-          <a:bodyPr xmlns:a="http://schemas.openxmlformats.org/drawingml/2006/main" wrap="square" lIns="0" tIns="0" rIns="0" bIns="0" anchor="t"/>
-          <a:lstStyle xmlns:a="http://schemas.openxmlformats.org/drawingml/2006/main"/>
-          <a:p xmlns:a="http://schemas.openxmlformats.org/drawingml/2006/main">
-            <a:r>
-              <a:rPr lang="en-US"/>
-              <a:t/>
-            </a:r>
-            <a:endParaRPr lang="en-US"/>
-          </a:p>
-        </p:txBody>
-      </p:sp>
-      <p:sp>
-        <p:nvSpPr>
-          <p:cNvPr id="9" name="process-node-0"/>
-          <p:cNvSpPr/>
-          <p:nvPr/>
-        </p:nvSpPr>
-        <p:spPr>
-          <a:xfrm xmlns:a="http://schemas.openxmlformats.org/drawingml/2006/main">
-            <a:off x="1219200" y="3943350"/>
-            <a:ext cx="342900" cy="342900"/>
-          </a:xfrm>
-          <a:prstGeom xmlns:a="http://schemas.openxmlformats.org/drawingml/2006/main" prst="ellipse">
-            <a:avLst/>
-          </a:prstGeom>
-          <a:solidFill xmlns:a="http://schemas.openxmlformats.org/drawingml/2006/main">
-            <a:srgbClr val="101115"/>
-          </a:solidFill>
-          <a:ln xmlns:a="http://schemas.openxmlformats.org/drawingml/2006/main" w="38100">
-            <a:solidFill>
-              <a:srgbClr val="F8F8F7"/>
-            </a:solidFill>
-            <a:prstDash val="solid"/>
-          </a:ln>
-        </p:spPr>
-        <p:txBody>
-          <a:bodyPr xmlns:a="http://schemas.openxmlformats.org/drawingml/2006/main" wrap="square" lIns="0" tIns="0" rIns="0" bIns="0" anchor="t"/>
-          <a:lstStyle xmlns:a="http://schemas.openxmlformats.org/drawingml/2006/main"/>
-          <a:p xmlns:a="http://schemas.openxmlformats.org/drawingml/2006/main">
-            <a:r>
-              <a:rPr lang="en-US"/>
-              <a:t/>
-            </a:r>
-            <a:endParaRPr lang="en-US"/>
-          </a:p>
-        </p:txBody>
-      </p:sp>
-      <p:sp>
-        <p:nvSpPr>
-          <p:cNvPr id="10" name="process-number-0"/>
-          <p:cNvSpPr txBox="1"/>
-          <p:nvPr/>
-        </p:nvSpPr>
-        <p:spPr>
-          <a:xfrm xmlns:a="http://schemas.openxmlformats.org/drawingml/2006/main">
-            <a:off x="1200150" y="3486150"/>
-            <a:ext cx="419100" cy="190500"/>
-          </a:xfrm>
-          <a:prstGeom xmlns:a="http://schemas.openxmlformats.org/drawingml/2006/main" prst="rect">
-            <a:avLst/>
-          </a:prstGeom>
-          <a:noFill xmlns:a="http://schemas.openxmlformats.org/drawingml/2006/main"/>
-          <a:ln xmlns:a="http://schemas.openxmlformats.org/drawingml/2006/main" w="0">
-            <a:noFill/>
-          </a:ln>
-        </p:spPr>
-        <p:txBody>
-          <a:bodyPr xmlns:a="http://schemas.openxmlformats.org/drawingml/2006/main" wrap="square" lIns="0" tIns="0" rIns="0" bIns="0" anchor="t"/>
-          <a:lstStyle xmlns:a="http://schemas.openxmlformats.org/drawingml/2006/main"/>
-          <a:p xmlns:a="http://schemas.openxmlformats.org/drawingml/2006/main">
-            <a:pPr algn="ctr"/>
-            <a:r>
-              <a:rPr lang="en-US" sz="975" b="1">
+      <p:pic>
+        <p:nvPicPr>
+          <p:cNvPr id="8" name="image-evidence-0">
+            <a:extLst xmlns:a="http://schemas.openxmlformats.org/drawingml/2006/main">
+              <a:ext uri="{C183D7F6-B498-43B3-948B-1728B52AA6E4}">
+                <adec:decorative xmlns:adec="http://schemas.microsoft.com/office/drawing/2017/decorative" val="1"/>
+              </a:ext>
+            </a:extLst>
+          </p:cNvPr>
+          <p:cNvPicPr/>
+          <p:nvPr/>
+        </p:nvPicPr>
+        <p:blipFill>
+          <a:blip xmlns:r="http://schemas.openxmlformats.org/officeDocument/2006/relationships" xmlns:a="http://schemas.openxmlformats.org/drawingml/2006/main" r:embed="rIdOfficeKitImage8579b0a87ff097c1_1"/>
+          <a:srcRect xmlns:a="http://schemas.openxmlformats.org/drawingml/2006/main" l="0" t="31971" r="0" b="31971"/>
+          <a:stretch xmlns:a="http://schemas.openxmlformats.org/drawingml/2006/main">
+            <a:fillRect/>
+          </a:stretch>
+        </p:blipFill>
+        <p:spPr>
+          <a:xfrm xmlns:a="http://schemas.openxmlformats.org/drawingml/2006/main">
+            <a:off x="990600" y="3162300"/>
+            <a:ext cx="3714750" cy="2381250"/>
+          </a:xfrm>
+          <a:prstGeom xmlns:a="http://schemas.openxmlformats.org/drawingml/2006/main" prst="rect">
+            <a:avLst/>
+          </a:prstGeom>
+        </p:spPr>
+      </p:pic>
+      <p:pic>
+        <p:nvPicPr>
+          <p:cNvPr id="9" name="image-evidence-1">
+            <a:extLst xmlns:a="http://schemas.openxmlformats.org/drawingml/2006/main">
+              <a:ext uri="{C183D7F6-B498-43B3-948B-1728B52AA6E4}">
+                <adec:decorative xmlns:adec="http://schemas.microsoft.com/office/drawing/2017/decorative" val="1"/>
+              </a:ext>
+            </a:extLst>
+          </p:cNvPr>
+          <p:cNvPicPr/>
+          <p:nvPr/>
+        </p:nvPicPr>
+        <p:blipFill>
+          <a:blip xmlns:r="http://schemas.openxmlformats.org/officeDocument/2006/relationships" xmlns:a="http://schemas.openxmlformats.org/drawingml/2006/main" r:embed="rIdOfficeKitImage7acdacea277813e8_1"/>
+          <a:srcRect xmlns:a="http://schemas.openxmlformats.org/drawingml/2006/main" l="0" t="32333" r="0" b="32333"/>
+          <a:stretch xmlns:a="http://schemas.openxmlformats.org/drawingml/2006/main">
+            <a:fillRect/>
+          </a:stretch>
+        </p:blipFill>
+        <p:spPr>
+          <a:xfrm xmlns:a="http://schemas.openxmlformats.org/drawingml/2006/main">
+            <a:off x="4895850" y="3162300"/>
+            <a:ext cx="1790700" cy="1123950"/>
+          </a:xfrm>
+          <a:prstGeom xmlns:a="http://schemas.openxmlformats.org/drawingml/2006/main" prst="rect">
+            <a:avLst/>
+          </a:prstGeom>
+        </p:spPr>
+      </p:pic>
+      <p:pic>
+        <p:nvPicPr>
+          <p:cNvPr id="10" name="image-evidence-2">
+            <a:extLst xmlns:a="http://schemas.openxmlformats.org/drawingml/2006/main">
+              <a:ext uri="{C183D7F6-B498-43B3-948B-1728B52AA6E4}">
+                <adec:decorative xmlns:adec="http://schemas.microsoft.com/office/drawing/2017/decorative" val="1"/>
+              </a:ext>
+            </a:extLst>
+          </p:cNvPr>
+          <p:cNvPicPr/>
+          <p:nvPr/>
+        </p:nvPicPr>
+        <p:blipFill>
+          <a:blip xmlns:r="http://schemas.openxmlformats.org/officeDocument/2006/relationships" xmlns:a="http://schemas.openxmlformats.org/drawingml/2006/main" r:embed="rIdOfficeKitImage89634c5b24a89a02_1"/>
+          <a:srcRect xmlns:a="http://schemas.openxmlformats.org/drawingml/2006/main" l="0" t="32333" r="0" b="32333"/>
+          <a:stretch xmlns:a="http://schemas.openxmlformats.org/drawingml/2006/main">
+            <a:fillRect/>
+          </a:stretch>
+        </p:blipFill>
+        <p:spPr>
+          <a:xfrm xmlns:a="http://schemas.openxmlformats.org/drawingml/2006/main">
+            <a:off x="6858000" y="3162300"/>
+            <a:ext cx="1790700" cy="1123950"/>
+          </a:xfrm>
+          <a:prstGeom xmlns:a="http://schemas.openxmlformats.org/drawingml/2006/main" prst="rect">
+            <a:avLst/>
+          </a:prstGeom>
+        </p:spPr>
+      </p:pic>
+      <p:pic>
+        <p:nvPicPr>
+          <p:cNvPr id="11" name="image-evidence-3">
+            <a:extLst xmlns:a="http://schemas.openxmlformats.org/drawingml/2006/main">
+              <a:ext uri="{C183D7F6-B498-43B3-948B-1728B52AA6E4}">
+                <adec:decorative xmlns:adec="http://schemas.microsoft.com/office/drawing/2017/decorative" val="1"/>
+              </a:ext>
+            </a:extLst>
+          </p:cNvPr>
+          <p:cNvPicPr/>
+          <p:nvPr/>
+        </p:nvPicPr>
+        <p:blipFill>
+          <a:blip xmlns:r="http://schemas.openxmlformats.org/officeDocument/2006/relationships" xmlns:a="http://schemas.openxmlformats.org/drawingml/2006/main" r:embed="rIdOfficeKitImage6a3db1fe43260f32_1"/>
+          <a:srcRect xmlns:a="http://schemas.openxmlformats.org/drawingml/2006/main" l="0" t="32333" r="0" b="32333"/>
+          <a:stretch xmlns:a="http://schemas.openxmlformats.org/drawingml/2006/main">
+            <a:fillRect/>
+          </a:stretch>
+        </p:blipFill>
+        <p:spPr>
+          <a:xfrm xmlns:a="http://schemas.openxmlformats.org/drawingml/2006/main">
+            <a:off x="4895850" y="4457700"/>
+            <a:ext cx="1790700" cy="1123950"/>
+          </a:xfrm>
+          <a:prstGeom xmlns:a="http://schemas.openxmlformats.org/drawingml/2006/main" prst="rect">
+            <a:avLst/>
+          </a:prstGeom>
+        </p:spPr>
+      </p:pic>
+      <p:pic>
+        <p:nvPicPr>
+          <p:cNvPr id="12" name="image-evidence-4">
+            <a:extLst xmlns:a="http://schemas.openxmlformats.org/drawingml/2006/main">
+              <a:ext uri="{C183D7F6-B498-43B3-948B-1728B52AA6E4}">
+                <adec:decorative xmlns:adec="http://schemas.microsoft.com/office/drawing/2017/decorative" val="1"/>
+              </a:ext>
+            </a:extLst>
+          </p:cNvPr>
+          <p:cNvPicPr/>
+          <p:nvPr/>
+        </p:nvPicPr>
+        <p:blipFill>
+          <a:blip xmlns:r="http://schemas.openxmlformats.org/officeDocument/2006/relationships" xmlns:a="http://schemas.openxmlformats.org/drawingml/2006/main" r:embed="rIdOfficeKitImage6785cc6781fd2511_1"/>
+          <a:srcRect xmlns:a="http://schemas.openxmlformats.org/drawingml/2006/main" l="0" t="32333" r="0" b="32333"/>
+          <a:stretch xmlns:a="http://schemas.openxmlformats.org/drawingml/2006/main">
+            <a:fillRect/>
+          </a:stretch>
+        </p:blipFill>
+        <p:spPr>
+          <a:xfrm xmlns:a="http://schemas.openxmlformats.org/drawingml/2006/main">
+            <a:off x="6858000" y="4457700"/>
+            <a:ext cx="1790700" cy="1123950"/>
+          </a:xfrm>
+          <a:prstGeom xmlns:a="http://schemas.openxmlformats.org/drawingml/2006/main" prst="rect">
+            <a:avLst/>
+          </a:prstGeom>
+        </p:spPr>
+      </p:pic>
+      <p:sp>
+        <p:nvSpPr>
+          <p:cNvPr id="13" name="image-matrix-label"/>
+          <p:cNvSpPr txBox="1"/>
+          <p:nvPr/>
+        </p:nvSpPr>
+        <p:spPr>
+          <a:xfrm xmlns:a="http://schemas.openxmlformats.org/drawingml/2006/main">
+            <a:off x="9620250" y="3314700"/>
+            <a:ext cx="2857500" cy="228600"/>
+          </a:xfrm>
+          <a:prstGeom xmlns:a="http://schemas.openxmlformats.org/drawingml/2006/main" prst="rect">
+            <a:avLst/>
+          </a:prstGeom>
+          <a:noFill xmlns:a="http://schemas.openxmlformats.org/drawingml/2006/main"/>
+          <a:ln xmlns:a="http://schemas.openxmlformats.org/drawingml/2006/main" w="0">
+            <a:noFill/>
+          </a:ln>
+        </p:spPr>
+        <p:txBody>
+          <a:bodyPr xmlns:a="http://schemas.openxmlformats.org/drawingml/2006/main" wrap="square" lIns="0" tIns="0" rIns="0" bIns="0" anchor="t"/>
+          <a:lstStyle xmlns:a="http://schemas.openxmlformats.org/drawingml/2006/main"/>
+          <a:p xmlns:a="http://schemas.openxmlformats.org/drawingml/2006/main">
+            <a:r>
+              <a:rPr lang="en-US" sz="1125" b="1">
                 <a:solidFill>
                   <a:srgbClr val="7047FF"/>
                 </a:solidFill>
                 <a:latin typeface="Tahoma"/>
                 <a:ea typeface="Tahoma"/>
               </a:rPr>
-              <a:t>01</a:t>
-            </a:r>
-            <a:endParaRPr lang="en-US"/>
-          </a:p>
-        </p:txBody>
-      </p:sp>
-      <p:sp>
-        <p:nvSpPr>
-          <p:cNvPr id="11" name="process-label-0"/>
-          <p:cNvSpPr txBox="1"/>
-          <p:nvPr/>
-        </p:nvSpPr>
-        <p:spPr>
-          <a:xfrm xmlns:a="http://schemas.openxmlformats.org/drawingml/2006/main">
-            <a:off x="1714500" y="4000500"/>
-            <a:ext cx="1428750" cy="228600"/>
-          </a:xfrm>
-          <a:prstGeom xmlns:a="http://schemas.openxmlformats.org/drawingml/2006/main" prst="rect">
-            <a:avLst/>
-          </a:prstGeom>
-          <a:noFill xmlns:a="http://schemas.openxmlformats.org/drawingml/2006/main"/>
-          <a:ln xmlns:a="http://schemas.openxmlformats.org/drawingml/2006/main" w="0">
-            <a:noFill/>
-          </a:ln>
-        </p:spPr>
-        <p:txBody>
-          <a:bodyPr xmlns:a="http://schemas.openxmlformats.org/drawingml/2006/main" wrap="square" lIns="0" tIns="0" rIns="0" bIns="0" anchor="t"/>
-          <a:lstStyle xmlns:a="http://schemas.openxmlformats.org/drawingml/2006/main"/>
-          <a:p xmlns:a="http://schemas.openxmlformats.org/drawingml/2006/main">
-            <a:r>
-              <a:rPr lang="en-US" sz="1500" b="1">
+              <a:t>IMAGE MATRIX</a:t>
+            </a:r>
+            <a:endParaRPr lang="en-US"/>
+          </a:p>
+        </p:txBody>
+      </p:sp>
+      <p:sp>
+        <p:nvSpPr>
+          <p:cNvPr id="14" name="image-matrix-title"/>
+          <p:cNvSpPr txBox="1"/>
+          <p:nvPr/>
+        </p:nvSpPr>
+        <p:spPr>
+          <a:xfrm xmlns:a="http://schemas.openxmlformats.org/drawingml/2006/main">
+            <a:off x="9620250" y="3790950"/>
+            <a:ext cx="3714750" cy="723900"/>
+          </a:xfrm>
+          <a:prstGeom xmlns:a="http://schemas.openxmlformats.org/drawingml/2006/main" prst="rect">
+            <a:avLst/>
+          </a:prstGeom>
+          <a:noFill xmlns:a="http://schemas.openxmlformats.org/drawingml/2006/main"/>
+          <a:ln xmlns:a="http://schemas.openxmlformats.org/drawingml/2006/main" w="0">
+            <a:noFill/>
+          </a:ln>
+        </p:spPr>
+        <p:txBody>
+          <a:bodyPr xmlns:a="http://schemas.openxmlformats.org/drawingml/2006/main" wrap="square" lIns="0" tIns="0" rIns="0" bIns="0" anchor="t"/>
+          <a:lstStyle xmlns:a="http://schemas.openxmlformats.org/drawingml/2006/main"/>
+          <a:p xmlns:a="http://schemas.openxmlformats.org/drawingml/2006/main">
+            <a:r>
+              <a:rPr lang="en-US" sz="2100" b="1">
                 <a:solidFill>
                   <a:srgbClr val="F8F8F7"/>
                 </a:solidFill>
                 <a:latin typeface="Tahoma"/>
                 <a:ea typeface="Tahoma"/>
               </a:rPr>
-              <a:t>Frame</a:t>
-            </a:r>
-            <a:endParaRPr lang="en-US"/>
-          </a:p>
-        </p:txBody>
-      </p:sp>
-      <p:sp>
-        <p:nvSpPr>
-          <p:cNvPr id="12" name="process-text-0"/>
-          <p:cNvSpPr txBox="1"/>
-          <p:nvPr/>
-        </p:nvSpPr>
-        <p:spPr>
-          <a:xfrm xmlns:a="http://schemas.openxmlformats.org/drawingml/2006/main">
-            <a:off x="1714500" y="4324350"/>
-            <a:ext cx="1524000" cy="304800"/>
-          </a:xfrm>
-          <a:prstGeom xmlns:a="http://schemas.openxmlformats.org/drawingml/2006/main" prst="rect">
-            <a:avLst/>
-          </a:prstGeom>
-          <a:noFill xmlns:a="http://schemas.openxmlformats.org/drawingml/2006/main"/>
-          <a:ln xmlns:a="http://schemas.openxmlformats.org/drawingml/2006/main" w="0">
-            <a:noFill/>
-          </a:ln>
-        </p:spPr>
-        <p:txBody>
-          <a:bodyPr xmlns:a="http://schemas.openxmlformats.org/drawingml/2006/main" wrap="square" lIns="0" tIns="0" rIns="0" bIns="0" anchor="t"/>
-          <a:lstStyle xmlns:a="http://schemas.openxmlformats.org/drawingml/2006/main"/>
-          <a:p xmlns:a="http://schemas.openxmlformats.org/drawingml/2006/main">
-            <a:r>
-              <a:rPr lang="en-US" sz="1125">
+              <a:t>One subject, five ways to notice it.</a:t>
+            </a:r>
+            <a:endParaRPr lang="en-US"/>
+          </a:p>
+        </p:txBody>
+      </p:sp>
+      <p:sp>
+        <p:nvSpPr>
+          <p:cNvPr id="15" name="image-matrix-body"/>
+          <p:cNvSpPr txBox="1"/>
+          <p:nvPr/>
+        </p:nvSpPr>
+        <p:spPr>
+          <a:xfrm xmlns:a="http://schemas.openxmlformats.org/drawingml/2006/main">
+            <a:off x="9620250" y="4953000"/>
+            <a:ext cx="3524250" cy="781050"/>
+          </a:xfrm>
+          <a:prstGeom xmlns:a="http://schemas.openxmlformats.org/drawingml/2006/main" prst="rect">
+            <a:avLst/>
+          </a:prstGeom>
+          <a:noFill xmlns:a="http://schemas.openxmlformats.org/drawingml/2006/main"/>
+          <a:ln xmlns:a="http://schemas.openxmlformats.org/drawingml/2006/main" w="0">
+            <a:noFill/>
+          </a:ln>
+        </p:spPr>
+        <p:txBody>
+          <a:bodyPr xmlns:a="http://schemas.openxmlformats.org/drawingml/2006/main" wrap="square" lIns="0" tIns="0" rIns="0" bIns="0" anchor="t"/>
+          <a:lstStyle xmlns:a="http://schemas.openxmlformats.org/drawingml/2006/main"/>
+          <a:p xmlns:a="http://schemas.openxmlformats.org/drawingml/2006/main">
+            <a:r>
+              <a:rPr lang="en-US" sz="1200">
                 <a:solidFill>
                   <a:srgbClr val="7F8081"/>
                 </a:solidFill>
                 <a:latin typeface="Tahoma"/>
                 <a:ea typeface="Tahoma"/>
               </a:rPr>
-              <a:t>Name the question</a:t>
-            </a:r>
-            <a:endParaRPr lang="en-US"/>
-          </a:p>
-        </p:txBody>
-      </p:sp>
-      <p:sp>
-        <p:nvSpPr>
-          <p:cNvPr id="13" name="process-separator-0"/>
-          <p:cNvSpPr/>
-          <p:nvPr/>
-        </p:nvSpPr>
-        <p:spPr>
-          <a:xfrm xmlns:a="http://schemas.openxmlformats.org/drawingml/2006/main">
-            <a:off x="1676400" y="4724400"/>
-            <a:ext cx="1676400" cy="0"/>
-          </a:xfrm>
-          <a:prstGeom xmlns:a="http://schemas.openxmlformats.org/drawingml/2006/main" prst="line">
-            <a:avLst/>
-          </a:prstGeom>
-          <a:noFill xmlns:a="http://schemas.openxmlformats.org/drawingml/2006/main"/>
-          <a:ln xmlns:a="http://schemas.openxmlformats.org/drawingml/2006/main" w="12700">
-            <a:solidFill>
-              <a:srgbClr val="7F8081"/>
-            </a:solidFill>
-            <a:prstDash val="solid"/>
-          </a:ln>
-        </p:spPr>
-        <p:txBody>
-          <a:bodyPr xmlns:a="http://schemas.openxmlformats.org/drawingml/2006/main" wrap="square" lIns="0" tIns="0" rIns="0" bIns="0" anchor="t"/>
-          <a:lstStyle xmlns:a="http://schemas.openxmlformats.org/drawingml/2006/main"/>
-          <a:p xmlns:a="http://schemas.openxmlformats.org/drawingml/2006/main">
-            <a:r>
-              <a:rPr lang="en-US"/>
-              <a:t/>
-            </a:r>
-            <a:endParaRPr lang="en-US"/>
-          </a:p>
-        </p:txBody>
-      </p:sp>
-      <p:sp>
-        <p:nvSpPr>
-          <p:cNvPr id="14" name="process-node-1"/>
-          <p:cNvSpPr/>
-          <p:nvPr/>
-        </p:nvSpPr>
-        <p:spPr>
-          <a:xfrm xmlns:a="http://schemas.openxmlformats.org/drawingml/2006/main">
-            <a:off x="3524250" y="3943350"/>
-            <a:ext cx="342900" cy="342900"/>
-          </a:xfrm>
-          <a:prstGeom xmlns:a="http://schemas.openxmlformats.org/drawingml/2006/main" prst="ellipse">
-            <a:avLst/>
-          </a:prstGeom>
-          <a:solidFill xmlns:a="http://schemas.openxmlformats.org/drawingml/2006/main">
-            <a:srgbClr val="101115"/>
-          </a:solidFill>
-          <a:ln xmlns:a="http://schemas.openxmlformats.org/drawingml/2006/main" w="38100">
-            <a:solidFill>
-              <a:srgbClr val="F8F8F7"/>
-            </a:solidFill>
-            <a:prstDash val="solid"/>
-          </a:ln>
-        </p:spPr>
-        <p:txBody>
-          <a:bodyPr xmlns:a="http://schemas.openxmlformats.org/drawingml/2006/main" wrap="square" lIns="0" tIns="0" rIns="0" bIns="0" anchor="t"/>
-          <a:lstStyle xmlns:a="http://schemas.openxmlformats.org/drawingml/2006/main"/>
-          <a:p xmlns:a="http://schemas.openxmlformats.org/drawingml/2006/main">
-            <a:r>
-              <a:rPr lang="en-US"/>
-              <a:t/>
-            </a:r>
-            <a:endParaRPr lang="en-US"/>
-          </a:p>
-        </p:txBody>
-      </p:sp>
-      <p:sp>
-        <p:nvSpPr>
-          <p:cNvPr id="15" name="process-number-1"/>
-          <p:cNvSpPr txBox="1"/>
-          <p:nvPr/>
-        </p:nvSpPr>
-        <p:spPr>
-          <a:xfrm xmlns:a="http://schemas.openxmlformats.org/drawingml/2006/main">
-            <a:off x="3505200" y="3486150"/>
-            <a:ext cx="419100" cy="190500"/>
-          </a:xfrm>
-          <a:prstGeom xmlns:a="http://schemas.openxmlformats.org/drawingml/2006/main" prst="rect">
-            <a:avLst/>
-          </a:prstGeom>
-          <a:noFill xmlns:a="http://schemas.openxmlformats.org/drawingml/2006/main"/>
-          <a:ln xmlns:a="http://schemas.openxmlformats.org/drawingml/2006/main" w="0">
-            <a:noFill/>
-          </a:ln>
-        </p:spPr>
-        <p:txBody>
-          <a:bodyPr xmlns:a="http://schemas.openxmlformats.org/drawingml/2006/main" wrap="square" lIns="0" tIns="0" rIns="0" bIns="0" anchor="t"/>
-          <a:lstStyle xmlns:a="http://schemas.openxmlformats.org/drawingml/2006/main"/>
-          <a:p xmlns:a="http://schemas.openxmlformats.org/drawingml/2006/main">
-            <a:pPr algn="ctr"/>
-            <a:r>
-              <a:rPr lang="en-US" sz="975" b="1">
-                <a:solidFill>
-                  <a:srgbClr val="7047FF"/>
-                </a:solidFill>
-                <a:latin typeface="Tahoma"/>
-                <a:ea typeface="Tahoma"/>
-              </a:rPr>
-              <a:t>02</a:t>
-            </a:r>
-            <a:endParaRPr lang="en-US"/>
-          </a:p>
-        </p:txBody>
-      </p:sp>
-      <p:sp>
-        <p:nvSpPr>
-          <p:cNvPr id="16" name="process-label-1"/>
-          <p:cNvSpPr txBox="1"/>
-          <p:nvPr/>
-        </p:nvSpPr>
-        <p:spPr>
-          <a:xfrm xmlns:a="http://schemas.openxmlformats.org/drawingml/2006/main">
-            <a:off x="4019550" y="4000500"/>
-            <a:ext cx="1428750" cy="228600"/>
-          </a:xfrm>
-          <a:prstGeom xmlns:a="http://schemas.openxmlformats.org/drawingml/2006/main" prst="rect">
-            <a:avLst/>
-          </a:prstGeom>
-          <a:noFill xmlns:a="http://schemas.openxmlformats.org/drawingml/2006/main"/>
-          <a:ln xmlns:a="http://schemas.openxmlformats.org/drawingml/2006/main" w="0">
-            <a:noFill/>
-          </a:ln>
-        </p:spPr>
-        <p:txBody>
-          <a:bodyPr xmlns:a="http://schemas.openxmlformats.org/drawingml/2006/main" wrap="square" lIns="0" tIns="0" rIns="0" bIns="0" anchor="t"/>
-          <a:lstStyle xmlns:a="http://schemas.openxmlformats.org/drawingml/2006/main"/>
-          <a:p xmlns:a="http://schemas.openxmlformats.org/drawingml/2006/main">
-            <a:r>
-              <a:rPr lang="en-US" sz="1500" b="1">
-                <a:solidFill>
-                  <a:srgbClr val="F8F8F7"/>
-                </a:solidFill>
-                <a:latin typeface="Tahoma"/>
-                <a:ea typeface="Tahoma"/>
-              </a:rPr>
-              <a:t>Test</a:t>
-            </a:r>
-            <a:endParaRPr lang="en-US"/>
-          </a:p>
-        </p:txBody>
-      </p:sp>
-      <p:sp>
-        <p:nvSpPr>
-          <p:cNvPr id="17" name="process-text-1"/>
-          <p:cNvSpPr txBox="1"/>
-          <p:nvPr/>
-        </p:nvSpPr>
-        <p:spPr>
-          <a:xfrm xmlns:a="http://schemas.openxmlformats.org/drawingml/2006/main">
-            <a:off x="4019550" y="4324350"/>
-            <a:ext cx="1524000" cy="304800"/>
-          </a:xfrm>
-          <a:prstGeom xmlns:a="http://schemas.openxmlformats.org/drawingml/2006/main" prst="rect">
-            <a:avLst/>
-          </a:prstGeom>
-          <a:noFill xmlns:a="http://schemas.openxmlformats.org/drawingml/2006/main"/>
-          <a:ln xmlns:a="http://schemas.openxmlformats.org/drawingml/2006/main" w="0">
-            <a:noFill/>
-          </a:ln>
-        </p:spPr>
-        <p:txBody>
-          <a:bodyPr xmlns:a="http://schemas.openxmlformats.org/drawingml/2006/main" wrap="square" lIns="0" tIns="0" rIns="0" bIns="0" anchor="t"/>
-          <a:lstStyle xmlns:a="http://schemas.openxmlformats.org/drawingml/2006/main"/>
-          <a:p xmlns:a="http://schemas.openxmlformats.org/drawingml/2006/main">
-            <a:r>
-              <a:rPr lang="en-US" sz="1125">
+              <a:t>One dominant frame plus four</a:t>
+            </a:r>
+            <a:endParaRPr lang="en-US"/>
+          </a:p>
+          <a:p xmlns:a="http://schemas.openxmlformats.org/drawingml/2006/main">
+            <a:r>
+              <a:rPr lang="en-US" sz="1200">
                 <a:solidFill>
                   <a:srgbClr val="7F8081"/>
                 </a:solidFill>
                 <a:latin typeface="Tahoma"/>
                 <a:ea typeface="Tahoma"/>
               </a:rPr>
-              <a:t>Hold the rule</a:t>
-            </a:r>
-            <a:endParaRPr lang="en-US"/>
-          </a:p>
-        </p:txBody>
-      </p:sp>
-      <p:sp>
-        <p:nvSpPr>
-          <p:cNvPr id="18" name="process-separator-1"/>
-          <p:cNvSpPr/>
-          <p:nvPr/>
-        </p:nvSpPr>
-        <p:spPr>
-          <a:xfrm xmlns:a="http://schemas.openxmlformats.org/drawingml/2006/main">
-            <a:off x="3981450" y="4724400"/>
-            <a:ext cx="1676400" cy="0"/>
-          </a:xfrm>
-          <a:prstGeom xmlns:a="http://schemas.openxmlformats.org/drawingml/2006/main" prst="line">
-            <a:avLst/>
-          </a:prstGeom>
-          <a:noFill xmlns:a="http://schemas.openxmlformats.org/drawingml/2006/main"/>
-          <a:ln xmlns:a="http://schemas.openxmlformats.org/drawingml/2006/main" w="12700">
-            <a:solidFill>
-              <a:srgbClr val="7F8081"/>
-            </a:solidFill>
-            <a:prstDash val="solid"/>
-          </a:ln>
-        </p:spPr>
-        <p:txBody>
-          <a:bodyPr xmlns:a="http://schemas.openxmlformats.org/drawingml/2006/main" wrap="square" lIns="0" tIns="0" rIns="0" bIns="0" anchor="t"/>
-          <a:lstStyle xmlns:a="http://schemas.openxmlformats.org/drawingml/2006/main"/>
-          <a:p xmlns:a="http://schemas.openxmlformats.org/drawingml/2006/main">
-            <a:r>
-              <a:rPr lang="en-US"/>
-              <a:t/>
-            </a:r>
-            <a:endParaRPr lang="en-US"/>
-          </a:p>
-        </p:txBody>
-      </p:sp>
-      <p:sp>
-        <p:nvSpPr>
-          <p:cNvPr id="19" name="process-node-2"/>
-          <p:cNvSpPr/>
-          <p:nvPr/>
-        </p:nvSpPr>
-        <p:spPr>
-          <a:xfrm xmlns:a="http://schemas.openxmlformats.org/drawingml/2006/main">
-            <a:off x="5829300" y="3943350"/>
-            <a:ext cx="342900" cy="342900"/>
-          </a:xfrm>
-          <a:prstGeom xmlns:a="http://schemas.openxmlformats.org/drawingml/2006/main" prst="ellipse">
-            <a:avLst/>
-          </a:prstGeom>
-          <a:solidFill xmlns:a="http://schemas.openxmlformats.org/drawingml/2006/main">
-            <a:srgbClr val="101115"/>
-          </a:solidFill>
-          <a:ln xmlns:a="http://schemas.openxmlformats.org/drawingml/2006/main" w="38100">
-            <a:solidFill>
-              <a:srgbClr val="F8F8F7"/>
-            </a:solidFill>
-            <a:prstDash val="solid"/>
-          </a:ln>
-        </p:spPr>
-        <p:txBody>
-          <a:bodyPr xmlns:a="http://schemas.openxmlformats.org/drawingml/2006/main" wrap="square" lIns="0" tIns="0" rIns="0" bIns="0" anchor="t"/>
-          <a:lstStyle xmlns:a="http://schemas.openxmlformats.org/drawingml/2006/main"/>
-          <a:p xmlns:a="http://schemas.openxmlformats.org/drawingml/2006/main">
-            <a:r>
-              <a:rPr lang="en-US"/>
-              <a:t/>
-            </a:r>
-            <a:endParaRPr lang="en-US"/>
-          </a:p>
-        </p:txBody>
-      </p:sp>
-      <p:sp>
-        <p:nvSpPr>
-          <p:cNvPr id="20" name="process-number-2"/>
-          <p:cNvSpPr txBox="1"/>
-          <p:nvPr/>
-        </p:nvSpPr>
-        <p:spPr>
-          <a:xfrm xmlns:a="http://schemas.openxmlformats.org/drawingml/2006/main">
-            <a:off x="5810250" y="3486150"/>
-            <a:ext cx="419100" cy="190500"/>
-          </a:xfrm>
-          <a:prstGeom xmlns:a="http://schemas.openxmlformats.org/drawingml/2006/main" prst="rect">
-            <a:avLst/>
-          </a:prstGeom>
-          <a:noFill xmlns:a="http://schemas.openxmlformats.org/drawingml/2006/main"/>
-          <a:ln xmlns:a="http://schemas.openxmlformats.org/drawingml/2006/main" w="0">
-            <a:noFill/>
-          </a:ln>
-        </p:spPr>
-        <p:txBody>
-          <a:bodyPr xmlns:a="http://schemas.openxmlformats.org/drawingml/2006/main" wrap="square" lIns="0" tIns="0" rIns="0" bIns="0" anchor="t"/>
-          <a:lstStyle xmlns:a="http://schemas.openxmlformats.org/drawingml/2006/main"/>
-          <a:p xmlns:a="http://schemas.openxmlformats.org/drawingml/2006/main">
-            <a:pPr algn="ctr"/>
-            <a:r>
-              <a:rPr lang="en-US" sz="975" b="1">
-                <a:solidFill>
-                  <a:srgbClr val="7047FF"/>
-                </a:solidFill>
-                <a:latin typeface="Tahoma"/>
-                <a:ea typeface="Tahoma"/>
-              </a:rPr>
-              <a:t>03</a:t>
-            </a:r>
-            <a:endParaRPr lang="en-US"/>
-          </a:p>
-        </p:txBody>
-      </p:sp>
-      <p:sp>
-        <p:nvSpPr>
-          <p:cNvPr id="21" name="process-label-2"/>
-          <p:cNvSpPr txBox="1"/>
-          <p:nvPr/>
-        </p:nvSpPr>
-        <p:spPr>
-          <a:xfrm xmlns:a="http://schemas.openxmlformats.org/drawingml/2006/main">
-            <a:off x="6324600" y="4000500"/>
-            <a:ext cx="1428750" cy="228600"/>
-          </a:xfrm>
-          <a:prstGeom xmlns:a="http://schemas.openxmlformats.org/drawingml/2006/main" prst="rect">
-            <a:avLst/>
-          </a:prstGeom>
-          <a:noFill xmlns:a="http://schemas.openxmlformats.org/drawingml/2006/main"/>
-          <a:ln xmlns:a="http://schemas.openxmlformats.org/drawingml/2006/main" w="0">
-            <a:noFill/>
-          </a:ln>
-        </p:spPr>
-        <p:txBody>
-          <a:bodyPr xmlns:a="http://schemas.openxmlformats.org/drawingml/2006/main" wrap="square" lIns="0" tIns="0" rIns="0" bIns="0" anchor="t"/>
-          <a:lstStyle xmlns:a="http://schemas.openxmlformats.org/drawingml/2006/main"/>
-          <a:p xmlns:a="http://schemas.openxmlformats.org/drawingml/2006/main">
-            <a:r>
-              <a:rPr lang="en-US" sz="1500" b="1">
-                <a:solidFill>
-                  <a:srgbClr val="F8F8F7"/>
-                </a:solidFill>
-                <a:latin typeface="Tahoma"/>
-                <a:ea typeface="Tahoma"/>
-              </a:rPr>
-              <a:t>Read</a:t>
-            </a:r>
-            <a:endParaRPr lang="en-US"/>
-          </a:p>
-        </p:txBody>
-      </p:sp>
-      <p:sp>
-        <p:nvSpPr>
-          <p:cNvPr id="22" name="process-text-2"/>
-          <p:cNvSpPr txBox="1"/>
-          <p:nvPr/>
-        </p:nvSpPr>
-        <p:spPr>
-          <a:xfrm xmlns:a="http://schemas.openxmlformats.org/drawingml/2006/main">
-            <a:off x="6324600" y="4324350"/>
-            <a:ext cx="1524000" cy="304800"/>
-          </a:xfrm>
-          <a:prstGeom xmlns:a="http://schemas.openxmlformats.org/drawingml/2006/main" prst="rect">
-            <a:avLst/>
-          </a:prstGeom>
-          <a:noFill xmlns:a="http://schemas.openxmlformats.org/drawingml/2006/main"/>
-          <a:ln xmlns:a="http://schemas.openxmlformats.org/drawingml/2006/main" w="0">
-            <a:noFill/>
-          </a:ln>
-        </p:spPr>
-        <p:txBody>
-          <a:bodyPr xmlns:a="http://schemas.openxmlformats.org/drawingml/2006/main" wrap="square" lIns="0" tIns="0" rIns="0" bIns="0" anchor="t"/>
-          <a:lstStyle xmlns:a="http://schemas.openxmlformats.org/drawingml/2006/main"/>
-          <a:p xmlns:a="http://schemas.openxmlformats.org/drawingml/2006/main">
-            <a:r>
-              <a:rPr lang="en-US" sz="1125">
+              <a:t>supporting crops. Image carries</a:t>
+            </a:r>
+            <a:endParaRPr lang="en-US"/>
+          </a:p>
+          <a:p xmlns:a="http://schemas.openxmlformats.org/drawingml/2006/main">
+            <a:r>
+              <a:rPr lang="en-US" sz="1200">
                 <a:solidFill>
                   <a:srgbClr val="7F8081"/>
                 </a:solidFill>
                 <a:latin typeface="Tahoma"/>
                 <a:ea typeface="Tahoma"/>
               </a:rPr>
-              <a:t>Separate signal</a:t>
-            </a:r>
-            <a:endParaRPr lang="en-US"/>
-          </a:p>
-        </p:txBody>
-      </p:sp>
-      <p:sp>
-        <p:nvSpPr>
-          <p:cNvPr id="23" name="process-separator-2"/>
-          <p:cNvSpPr/>
-          <p:nvPr/>
-        </p:nvSpPr>
-        <p:spPr>
-          <a:xfrm xmlns:a="http://schemas.openxmlformats.org/drawingml/2006/main">
-            <a:off x="6286500" y="4724400"/>
-            <a:ext cx="1676400" cy="0"/>
-          </a:xfrm>
-          <a:prstGeom xmlns:a="http://schemas.openxmlformats.org/drawingml/2006/main" prst="line">
-            <a:avLst/>
-          </a:prstGeom>
-          <a:noFill xmlns:a="http://schemas.openxmlformats.org/drawingml/2006/main"/>
-          <a:ln xmlns:a="http://schemas.openxmlformats.org/drawingml/2006/main" w="12700">
-            <a:solidFill>
-              <a:srgbClr val="7F8081"/>
-            </a:solidFill>
-            <a:prstDash val="solid"/>
-          </a:ln>
-        </p:spPr>
-        <p:txBody>
-          <a:bodyPr xmlns:a="http://schemas.openxmlformats.org/drawingml/2006/main" wrap="square" lIns="0" tIns="0" rIns="0" bIns="0" anchor="t"/>
-          <a:lstStyle xmlns:a="http://schemas.openxmlformats.org/drawingml/2006/main"/>
-          <a:p xmlns:a="http://schemas.openxmlformats.org/drawingml/2006/main">
-            <a:r>
-              <a:rPr lang="en-US"/>
-              <a:t/>
-            </a:r>
-            <a:endParaRPr lang="en-US"/>
-          </a:p>
-        </p:txBody>
-      </p:sp>
-      <p:sp>
-        <p:nvSpPr>
-          <p:cNvPr id="24" name="process-node-3"/>
-          <p:cNvSpPr/>
-          <p:nvPr/>
-        </p:nvSpPr>
-        <p:spPr>
-          <a:xfrm xmlns:a="http://schemas.openxmlformats.org/drawingml/2006/main">
-            <a:off x="8134350" y="3943350"/>
-            <a:ext cx="342900" cy="342900"/>
-          </a:xfrm>
-          <a:prstGeom xmlns:a="http://schemas.openxmlformats.org/drawingml/2006/main" prst="ellipse">
-            <a:avLst/>
-          </a:prstGeom>
-          <a:solidFill xmlns:a="http://schemas.openxmlformats.org/drawingml/2006/main">
-            <a:srgbClr val="7047FF"/>
-          </a:solidFill>
-          <a:ln xmlns:a="http://schemas.openxmlformats.org/drawingml/2006/main" w="38100">
-            <a:solidFill>
-              <a:srgbClr val="7047FF"/>
-            </a:solidFill>
-            <a:prstDash val="solid"/>
-          </a:ln>
-        </p:spPr>
-        <p:txBody>
-          <a:bodyPr xmlns:a="http://schemas.openxmlformats.org/drawingml/2006/main" wrap="square" lIns="0" tIns="0" rIns="0" bIns="0" anchor="t"/>
-          <a:lstStyle xmlns:a="http://schemas.openxmlformats.org/drawingml/2006/main"/>
-          <a:p xmlns:a="http://schemas.openxmlformats.org/drawingml/2006/main">
-            <a:r>
-              <a:rPr lang="en-US"/>
-              <a:t/>
-            </a:r>
-            <a:endParaRPr lang="en-US"/>
-          </a:p>
-        </p:txBody>
-      </p:sp>
-      <p:sp>
-        <p:nvSpPr>
-          <p:cNvPr id="25" name="process-number-3"/>
-          <p:cNvSpPr txBox="1"/>
-          <p:nvPr/>
-        </p:nvSpPr>
-        <p:spPr>
-          <a:xfrm xmlns:a="http://schemas.openxmlformats.org/drawingml/2006/main">
-            <a:off x="8115300" y="3486150"/>
-            <a:ext cx="419100" cy="190500"/>
-          </a:xfrm>
-          <a:prstGeom xmlns:a="http://schemas.openxmlformats.org/drawingml/2006/main" prst="rect">
-            <a:avLst/>
-          </a:prstGeom>
-          <a:noFill xmlns:a="http://schemas.openxmlformats.org/drawingml/2006/main"/>
-          <a:ln xmlns:a="http://schemas.openxmlformats.org/drawingml/2006/main" w="0">
-            <a:noFill/>
-          </a:ln>
-        </p:spPr>
-        <p:txBody>
-          <a:bodyPr xmlns:a="http://schemas.openxmlformats.org/drawingml/2006/main" wrap="square" lIns="0" tIns="0" rIns="0" bIns="0" anchor="t"/>
-          <a:lstStyle xmlns:a="http://schemas.openxmlformats.org/drawingml/2006/main"/>
-          <a:p xmlns:a="http://schemas.openxmlformats.org/drawingml/2006/main">
-            <a:pPr algn="ctr"/>
-            <a:r>
-              <a:rPr lang="en-US" sz="975" b="1">
-                <a:solidFill>
-                  <a:srgbClr val="7047FF"/>
-                </a:solidFill>
-                <a:latin typeface="Tahoma"/>
-                <a:ea typeface="Tahoma"/>
-              </a:rPr>
-              <a:t>04</a:t>
-            </a:r>
-            <a:endParaRPr lang="en-US"/>
-          </a:p>
-        </p:txBody>
-      </p:sp>
-      <p:sp>
-        <p:nvSpPr>
-          <p:cNvPr id="26" name="process-label-3"/>
-          <p:cNvSpPr txBox="1"/>
-          <p:nvPr/>
-        </p:nvSpPr>
-        <p:spPr>
-          <a:xfrm xmlns:a="http://schemas.openxmlformats.org/drawingml/2006/main">
-            <a:off x="8629650" y="4000500"/>
-            <a:ext cx="1428750" cy="228600"/>
-          </a:xfrm>
-          <a:prstGeom xmlns:a="http://schemas.openxmlformats.org/drawingml/2006/main" prst="rect">
-            <a:avLst/>
-          </a:prstGeom>
-          <a:noFill xmlns:a="http://schemas.openxmlformats.org/drawingml/2006/main"/>
-          <a:ln xmlns:a="http://schemas.openxmlformats.org/drawingml/2006/main" w="0">
-            <a:noFill/>
-          </a:ln>
-        </p:spPr>
-        <p:txBody>
-          <a:bodyPr xmlns:a="http://schemas.openxmlformats.org/drawingml/2006/main" wrap="square" lIns="0" tIns="0" rIns="0" bIns="0" anchor="t"/>
-          <a:lstStyle xmlns:a="http://schemas.openxmlformats.org/drawingml/2006/main"/>
-          <a:p xmlns:a="http://schemas.openxmlformats.org/drawingml/2006/main">
-            <a:r>
-              <a:rPr lang="en-US" sz="1500" b="1">
-                <a:solidFill>
-                  <a:srgbClr val="F8F8F7"/>
-                </a:solidFill>
-                <a:latin typeface="Tahoma"/>
-                <a:ea typeface="Tahoma"/>
-              </a:rPr>
-              <a:t>Decide</a:t>
-            </a:r>
-            <a:endParaRPr lang="en-US"/>
-          </a:p>
-        </p:txBody>
-      </p:sp>
-      <p:sp>
-        <p:nvSpPr>
-          <p:cNvPr id="27" name="process-text-3"/>
-          <p:cNvSpPr txBox="1"/>
-          <p:nvPr/>
-        </p:nvSpPr>
-        <p:spPr>
-          <a:xfrm xmlns:a="http://schemas.openxmlformats.org/drawingml/2006/main">
-            <a:off x="8629650" y="4324350"/>
-            <a:ext cx="1524000" cy="304800"/>
-          </a:xfrm>
-          <a:prstGeom xmlns:a="http://schemas.openxmlformats.org/drawingml/2006/main" prst="rect">
-            <a:avLst/>
-          </a:prstGeom>
-          <a:noFill xmlns:a="http://schemas.openxmlformats.org/drawingml/2006/main"/>
-          <a:ln xmlns:a="http://schemas.openxmlformats.org/drawingml/2006/main" w="0">
-            <a:noFill/>
-          </a:ln>
-        </p:spPr>
-        <p:txBody>
-          <a:bodyPr xmlns:a="http://schemas.openxmlformats.org/drawingml/2006/main" wrap="square" lIns="0" tIns="0" rIns="0" bIns="0" anchor="t"/>
-          <a:lstStyle xmlns:a="http://schemas.openxmlformats.org/drawingml/2006/main"/>
-          <a:p xmlns:a="http://schemas.openxmlformats.org/drawingml/2006/main">
-            <a:r>
-              <a:rPr lang="en-US" sz="1125">
-                <a:solidFill>
-                  <a:srgbClr val="7F8081"/>
-                </a:solidFill>
-                <a:latin typeface="Tahoma"/>
-                <a:ea typeface="Tahoma"/>
-              </a:rPr>
-              <a:t>Set the next gate</a:t>
-            </a:r>
-            <a:endParaRPr lang="en-US"/>
-          </a:p>
-        </p:txBody>
-      </p:sp>
-      <p:sp>
-        <p:nvSpPr>
-          <p:cNvPr id="28" name="process-read-label"/>
-          <p:cNvSpPr txBox="1"/>
-          <p:nvPr/>
-        </p:nvSpPr>
-        <p:spPr>
-          <a:xfrm xmlns:a="http://schemas.openxmlformats.org/drawingml/2006/main">
-            <a:off x="10668000" y="3333750"/>
-            <a:ext cx="2857500" cy="228600"/>
-          </a:xfrm>
-          <a:prstGeom xmlns:a="http://schemas.openxmlformats.org/drawingml/2006/main" prst="rect">
-            <a:avLst/>
-          </a:prstGeom>
-          <a:noFill xmlns:a="http://schemas.openxmlformats.org/drawingml/2006/main"/>
-          <a:ln xmlns:a="http://schemas.openxmlformats.org/drawingml/2006/main" w="0">
-            <a:noFill/>
-          </a:ln>
-        </p:spPr>
-        <p:txBody>
-          <a:bodyPr xmlns:a="http://schemas.openxmlformats.org/drawingml/2006/main" wrap="square" lIns="0" tIns="0" rIns="0" bIns="0" anchor="t"/>
-          <a:lstStyle xmlns:a="http://schemas.openxmlformats.org/drawingml/2006/main"/>
-          <a:p xmlns:a="http://schemas.openxmlformats.org/drawingml/2006/main">
-            <a:r>
-              <a:rPr lang="en-US" sz="1125" b="1">
-                <a:solidFill>
-                  <a:srgbClr val="7047FF"/>
-                </a:solidFill>
-                <a:latin typeface="Tahoma"/>
-                <a:ea typeface="Tahoma"/>
-              </a:rPr>
-              <a:t>READ-THROUGH</a:t>
-            </a:r>
-            <a:endParaRPr lang="en-US"/>
-          </a:p>
-        </p:txBody>
-      </p:sp>
-      <p:sp>
-        <p:nvSpPr>
-          <p:cNvPr id="29" name="process-read-title"/>
-          <p:cNvSpPr txBox="1"/>
-          <p:nvPr/>
-        </p:nvSpPr>
-        <p:spPr>
-          <a:xfrm xmlns:a="http://schemas.openxmlformats.org/drawingml/2006/main">
-            <a:off x="10668000" y="3810000"/>
-            <a:ext cx="3048000" cy="666750"/>
-          </a:xfrm>
-          <a:prstGeom xmlns:a="http://schemas.openxmlformats.org/drawingml/2006/main" prst="rect">
-            <a:avLst/>
-          </a:prstGeom>
-          <a:noFill xmlns:a="http://schemas.openxmlformats.org/drawingml/2006/main"/>
-          <a:ln xmlns:a="http://schemas.openxmlformats.org/drawingml/2006/main" w="0">
-            <a:noFill/>
-          </a:ln>
-        </p:spPr>
-        <p:txBody>
-          <a:bodyPr xmlns:a="http://schemas.openxmlformats.org/drawingml/2006/main" wrap="square" lIns="0" tIns="0" rIns="0" bIns="0" anchor="t"/>
-          <a:lstStyle xmlns:a="http://schemas.openxmlformats.org/drawingml/2006/main"/>
-          <a:p xmlns:a="http://schemas.openxmlformats.org/drawingml/2006/main">
-            <a:r>
-              <a:rPr lang="en-US" sz="2175" b="1">
-                <a:solidFill>
-                  <a:srgbClr val="F8F8F7"/>
-                </a:solidFill>
-                <a:latin typeface="Tahoma"/>
-                <a:ea typeface="Tahoma"/>
-              </a:rPr>
-              <a:t>The sequence is the evidence.</a:t>
-            </a:r>
-            <a:endParaRPr lang="en-US"/>
-          </a:p>
-        </p:txBody>
-      </p:sp>
-      <p:sp>
-        <p:nvSpPr>
-          <p:cNvPr id="30" name="process-read-body"/>
-          <p:cNvSpPr txBox="1"/>
-          <p:nvPr/>
-        </p:nvSpPr>
-        <p:spPr>
-          <a:xfrm xmlns:a="http://schemas.openxmlformats.org/drawingml/2006/main">
-            <a:off x="10668000" y="4762500"/>
-            <a:ext cx="3143250" cy="800100"/>
-          </a:xfrm>
-          <a:prstGeom xmlns:a="http://schemas.openxmlformats.org/drawingml/2006/main" prst="rect">
-            <a:avLst/>
-          </a:prstGeom>
-          <a:noFill xmlns:a="http://schemas.openxmlformats.org/drawingml/2006/main"/>
-          <a:ln xmlns:a="http://schemas.openxmlformats.org/drawingml/2006/main" w="0">
-            <a:noFill/>
-          </a:ln>
-        </p:spPr>
-        <p:txBody>
-          <a:bodyPr xmlns:a="http://schemas.openxmlformats.org/drawingml/2006/main" wrap="square" lIns="0" tIns="0" rIns="0" bIns="0" anchor="t"/>
-          <a:lstStyle xmlns:a="http://schemas.openxmlformats.org/drawingml/2006/main"/>
-          <a:p xmlns:a="http://schemas.openxmlformats.org/drawingml/2006/main">
-            <a:r>
-              <a:rPr lang="en-US" sz="1275">
-                <a:solidFill>
-                  <a:srgbClr val="7F8081"/>
-                </a:solidFill>
-                <a:latin typeface="Tahoma"/>
-                <a:ea typeface="Tahoma"/>
-              </a:rPr>
-              <a:t>Keep each handoff adjacent to the condition that unlocks it; do not turn a real dependency into a decorative arrow.</a:t>
-            </a:r>
-            <a:endParaRPr lang="en-US"/>
-          </a:p>
-        </p:txBody>
-      </p:sp>
-      <p:sp>
-        <p:nvSpPr>
-          <p:cNvPr id="31" name="source"/>
+              <a:t>mood; labels carry the claim.</a:t>
+            </a:r>
+            <a:endParaRPr lang="en-US"/>
+          </a:p>
+        </p:txBody>
+      </p:sp>
+      <p:sp>
+        <p:nvSpPr>
+          <p:cNvPr id="16" name="source"/>
           <p:cNvSpPr txBox="1"/>
           <p:nvPr/>
         </p:nvSpPr>
@@ -3820,7 +3494,7 @@
       </p:sp>
       <p:sp>
         <p:nvSpPr>
-          <p:cNvPr id="32" name="page-number"/>
+          <p:cNvPr id="17" name="page-number"/>
           <p:cNvSpPr txBox="1"/>
           <p:nvPr/>
         </p:nvSpPr>
@@ -3870,7 +3544,7 @@
     <p:bg>
       <p:bgPr>
         <a:blipFill xmlns:a="http://schemas.openxmlformats.org/drawingml/2006/main">
-          <a:blip xmlns:r="http://schemas.openxmlformats.org/officeDocument/2006/relationships" r:embed="rIdOfficeKitImage56df3e49f11f0ff0_1"/>
+          <a:blip xmlns:r="http://schemas.openxmlformats.org/officeDocument/2006/relationships" r:embed="rIdOfficeKitImaged96cedd8678b85ac_1"/>
           <a:stretch>
             <a:fillRect/>
           </a:stretch>
@@ -4200,7 +3874,7 @@
     <p:bg>
       <p:bgPr>
         <a:blipFill xmlns:a="http://schemas.openxmlformats.org/drawingml/2006/main">
-          <a:blip xmlns:r="http://schemas.openxmlformats.org/officeDocument/2006/relationships" r:embed="rIdOfficeKitImage2930549abca3ae00_1"/>
+          <a:blip xmlns:r="http://schemas.openxmlformats.org/officeDocument/2006/relationships" r:embed="rIdOfficeKitImage06e55191024fa458_1"/>
           <a:stretch>
             <a:fillRect/>
           </a:stretch>

--- a/skills/presentation-template-library/skills/artifact-template-violet-operations/assets/reference.pptx
+++ b/skills/presentation-template-library/skills/artifact-template-violet-operations/assets/reference.pptx
@@ -197,16 +197,6 @@
 <file path=ppt/slides/slide1.xml><?xml version="1.0" encoding="utf-8"?>
 <p:sld xmlns:p="http://schemas.openxmlformats.org/presentationml/2006/main">
   <p:cSld name="Opening claim">
-    <p:bg>
-      <p:bgPr>
-        <a:blipFill xmlns:a="http://schemas.openxmlformats.org/drawingml/2006/main">
-          <a:blip xmlns:r="http://schemas.openxmlformats.org/officeDocument/2006/relationships" r:embed="rIdOfficeKitImage4df9c6298f17ef7a_1"/>
-          <a:stretch>
-            <a:fillRect/>
-          </a:stretch>
-        </a:blipFill>
-      </p:bgPr>
-    </p:bg>
     <p:spTree>
       <p:nvGrpSpPr>
         <p:cNvPr id="1" name=""/>
@@ -223,26 +213,24 @@
       </p:grpSpPr>
       <p:sp>
         <p:nvSpPr>
-          <p:cNvPr id="2" name="cover-paper-scrim"/>
+          <p:cNvPr id="2" name="electric-violet-cover-field"/>
           <p:cNvSpPr/>
           <p:nvPr/>
         </p:nvSpPr>
         <p:spPr>
           <a:xfrm xmlns:a="http://schemas.openxmlformats.org/drawingml/2006/main">
             <a:off x="0" y="0"/>
-            <a:ext cx="9525000" cy="8572500"/>
+            <a:ext cx="15240000" cy="8572500"/>
           </a:xfrm>
           <a:prstGeom xmlns:a="http://schemas.openxmlformats.org/drawingml/2006/main" prst="rect">
             <a:avLst/>
           </a:prstGeom>
           <a:solidFill xmlns:a="http://schemas.openxmlformats.org/drawingml/2006/main">
-            <a:srgbClr val="101115">
-              <a:alpha val="100000"/>
-            </a:srgbClr>
+            <a:srgbClr val="121212"/>
           </a:solidFill>
           <a:ln xmlns:a="http://schemas.openxmlformats.org/drawingml/2006/main" w="0">
             <a:solidFill>
-              <a:srgbClr val="101115"/>
+              <a:srgbClr val="121212"/>
             </a:solidFill>
             <a:prstDash val="solid"/>
           </a:ln>
@@ -259,16 +247,39 @@
           </a:p>
         </p:txBody>
       </p:sp>
-      <p:sp>
-        <p:nvSpPr>
-          <p:cNvPr id="3" name="top-rule"/>
+      <p:pic>
+        <p:nvPicPr>
+          <p:cNvPr id="3" name="electric-violet-cover-photo" descr="Documentary work scene used as the cover visual"/>
+          <p:cNvPicPr/>
+          <p:nvPr/>
+        </p:nvPicPr>
+        <p:blipFill>
+          <a:blip xmlns:r="http://schemas.openxmlformats.org/officeDocument/2006/relationships" xmlns:a="http://schemas.openxmlformats.org/drawingml/2006/main" r:embed="rIdOfficeKitImage4df9c6298f17ef7a_1"/>
+          <a:srcRect xmlns:a="http://schemas.openxmlformats.org/drawingml/2006/main" l="0" t="41949" r="0" b="41949"/>
+          <a:stretch xmlns:a="http://schemas.openxmlformats.org/drawingml/2006/main">
+            <a:fillRect/>
+          </a:stretch>
+        </p:blipFill>
+        <p:spPr>
+          <a:xfrm xmlns:a="http://schemas.openxmlformats.org/drawingml/2006/main">
+            <a:off x="0" y="4210050"/>
+            <a:ext cx="15240000" cy="4362450"/>
+          </a:xfrm>
+          <a:prstGeom xmlns:a="http://schemas.openxmlformats.org/drawingml/2006/main" prst="rect">
+            <a:avLst/>
+          </a:prstGeom>
+        </p:spPr>
+      </p:pic>
+      <p:sp>
+        <p:nvSpPr>
+          <p:cNvPr id="4" name="electric-violet-cover-rule"/>
           <p:cNvSpPr/>
           <p:nvPr/>
         </p:nvSpPr>
         <p:spPr>
           <a:xfrm xmlns:a="http://schemas.openxmlformats.org/drawingml/2006/main">
-            <a:off x="838200" y="666750"/>
-            <a:ext cx="13563600" cy="0"/>
+            <a:off x="914400" y="514350"/>
+            <a:ext cx="13411200" cy="0"/>
           </a:xfrm>
           <a:prstGeom xmlns:a="http://schemas.openxmlformats.org/drawingml/2006/main" prst="line">
             <a:avLst/>
@@ -295,29 +306,29 @@
       </p:sp>
       <p:sp>
         <p:nvSpPr>
-          <p:cNvPr id="4" name="eyebrow"/>
-          <p:cNvSpPr txBox="1"/>
-          <p:nvPr/>
-        </p:nvSpPr>
-        <p:spPr>
-          <a:xfrm xmlns:a="http://schemas.openxmlformats.org/drawingml/2006/main">
-            <a:off x="914400" y="895350"/>
-            <a:ext cx="7239000" cy="228600"/>
-          </a:xfrm>
-          <a:prstGeom xmlns:a="http://schemas.openxmlformats.org/drawingml/2006/main" prst="rect">
-            <a:avLst/>
-          </a:prstGeom>
-          <a:noFill xmlns:a="http://schemas.openxmlformats.org/drawingml/2006/main"/>
-          <a:ln xmlns:a="http://schemas.openxmlformats.org/drawingml/2006/main" w="0">
-            <a:noFill/>
-          </a:ln>
-        </p:spPr>
-        <p:txBody>
-          <a:bodyPr xmlns:a="http://schemas.openxmlformats.org/drawingml/2006/main" wrap="square" lIns="0" tIns="0" rIns="0" bIns="0" anchor="t"/>
-          <a:lstStyle xmlns:a="http://schemas.openxmlformats.org/drawingml/2006/main"/>
-          <a:p xmlns:a="http://schemas.openxmlformats.org/drawingml/2006/main">
-            <a:r>
-              <a:rPr lang="en-US" sz="1200" b="1">
+          <p:cNvPr id="5" name="electric-violet-cover-eyebrow"/>
+          <p:cNvSpPr txBox="1"/>
+          <p:nvPr/>
+        </p:nvSpPr>
+        <p:spPr>
+          <a:xfrm xmlns:a="http://schemas.openxmlformats.org/drawingml/2006/main">
+            <a:off x="914400" y="781050"/>
+            <a:ext cx="7239000" cy="209550"/>
+          </a:xfrm>
+          <a:prstGeom xmlns:a="http://schemas.openxmlformats.org/drawingml/2006/main" prst="rect">
+            <a:avLst/>
+          </a:prstGeom>
+          <a:noFill xmlns:a="http://schemas.openxmlformats.org/drawingml/2006/main"/>
+          <a:ln xmlns:a="http://schemas.openxmlformats.org/drawingml/2006/main" w="0">
+            <a:noFill/>
+          </a:ln>
+        </p:spPr>
+        <p:txBody>
+          <a:bodyPr xmlns:a="http://schemas.openxmlformats.org/drawingml/2006/main" wrap="square" lIns="0" tIns="0" rIns="0" bIns="0" anchor="t"/>
+          <a:lstStyle xmlns:a="http://schemas.openxmlformats.org/drawingml/2006/main"/>
+          <a:p xmlns:a="http://schemas.openxmlformats.org/drawingml/2006/main">
+            <a:r>
+              <a:rPr lang="en-US" sz="1050" b="1">
                 <a:solidFill>
                   <a:srgbClr val="7047FF"/>
                 </a:solidFill>
@@ -332,31 +343,31 @@
       </p:sp>
       <p:sp>
         <p:nvSpPr>
-          <p:cNvPr id="5" name="cover-title"/>
-          <p:cNvSpPr txBox="1"/>
-          <p:nvPr/>
-        </p:nvSpPr>
-        <p:spPr>
-          <a:xfrm xmlns:a="http://schemas.openxmlformats.org/drawingml/2006/main">
-            <a:off x="914400" y="1571625"/>
-            <a:ext cx="8382000" cy="1066800"/>
-          </a:xfrm>
-          <a:prstGeom xmlns:a="http://schemas.openxmlformats.org/drawingml/2006/main" prst="rect">
-            <a:avLst/>
-          </a:prstGeom>
-          <a:noFill xmlns:a="http://schemas.openxmlformats.org/drawingml/2006/main"/>
-          <a:ln xmlns:a="http://schemas.openxmlformats.org/drawingml/2006/main" w="0">
-            <a:noFill/>
-          </a:ln>
-        </p:spPr>
-        <p:txBody>
-          <a:bodyPr xmlns:a="http://schemas.openxmlformats.org/drawingml/2006/main" wrap="square" lIns="0" tIns="0" rIns="0" bIns="0" anchor="t"/>
-          <a:lstStyle xmlns:a="http://schemas.openxmlformats.org/drawingml/2006/main"/>
-          <a:p xmlns:a="http://schemas.openxmlformats.org/drawingml/2006/main">
-            <a:r>
-              <a:rPr lang="en-US" sz="3600" b="1">
-                <a:solidFill>
-                  <a:srgbClr val="F8F8F7"/>
+          <p:cNvPr id="6" name="cover-title"/>
+          <p:cNvSpPr txBox="1"/>
+          <p:nvPr/>
+        </p:nvSpPr>
+        <p:spPr>
+          <a:xfrm xmlns:a="http://schemas.openxmlformats.org/drawingml/2006/main">
+            <a:off x="914400" y="1314450"/>
+            <a:ext cx="11620500" cy="742950"/>
+          </a:xfrm>
+          <a:prstGeom xmlns:a="http://schemas.openxmlformats.org/drawingml/2006/main" prst="rect">
+            <a:avLst/>
+          </a:prstGeom>
+          <a:noFill xmlns:a="http://schemas.openxmlformats.org/drawingml/2006/main"/>
+          <a:ln xmlns:a="http://schemas.openxmlformats.org/drawingml/2006/main" w="0">
+            <a:noFill/>
+          </a:ln>
+        </p:spPr>
+        <p:txBody>
+          <a:bodyPr xmlns:a="http://schemas.openxmlformats.org/drawingml/2006/main" wrap="square" lIns="0" tIns="0" rIns="0" bIns="0" anchor="t"/>
+          <a:lstStyle xmlns:a="http://schemas.openxmlformats.org/drawingml/2006/main"/>
+          <a:p xmlns:a="http://schemas.openxmlformats.org/drawingml/2006/main">
+            <a:r>
+              <a:rPr lang="en-US" sz="3150" b="1">
+                <a:solidFill>
+                  <a:srgbClr val="FFFFFF"/>
                 </a:solidFill>
                 <a:latin typeface="Tahoma"/>
                 <a:ea typeface="Tahoma"/>
@@ -369,241 +380,56 @@
       </p:sp>
       <p:sp>
         <p:nvSpPr>
-          <p:cNvPr id="6" name="cover-subtitle"/>
-          <p:cNvSpPr txBox="1"/>
-          <p:nvPr/>
-        </p:nvSpPr>
-        <p:spPr>
-          <a:xfrm xmlns:a="http://schemas.openxmlformats.org/drawingml/2006/main">
-            <a:off x="952500" y="2857500"/>
-            <a:ext cx="6858000" cy="323850"/>
-          </a:xfrm>
-          <a:prstGeom xmlns:a="http://schemas.openxmlformats.org/drawingml/2006/main" prst="rect">
-            <a:avLst/>
-          </a:prstGeom>
-          <a:noFill xmlns:a="http://schemas.openxmlformats.org/drawingml/2006/main"/>
-          <a:ln xmlns:a="http://schemas.openxmlformats.org/drawingml/2006/main" w="0">
-            <a:noFill/>
-          </a:ln>
-        </p:spPr>
-        <p:txBody>
-          <a:bodyPr xmlns:a="http://schemas.openxmlformats.org/drawingml/2006/main" wrap="square" lIns="0" tIns="0" rIns="0" bIns="0" anchor="t"/>
-          <a:lstStyle xmlns:a="http://schemas.openxmlformats.org/drawingml/2006/main"/>
-          <a:p xmlns:a="http://schemas.openxmlformats.org/drawingml/2006/main">
-            <a:r>
-              <a:rPr lang="en-US" sz="1725">
-                <a:solidFill>
-                  <a:srgbClr val="7047FF"/>
-                </a:solidFill>
-                <a:latin typeface="Tahoma"/>
-                <a:ea typeface="Tahoma"/>
-              </a:rPr>
-              <a:t>A clean-room reference for evidence, direction, and a decision.</a:t>
-            </a:r>
-            <a:endParaRPr lang="en-US"/>
-          </a:p>
-        </p:txBody>
-      </p:sp>
-      <p:sp>
-        <p:nvSpPr>
-          <p:cNvPr id="7" name="cover-rule"/>
+          <p:cNvPr id="7" name="electric-violet-cover-basis"/>
+          <p:cNvSpPr txBox="1"/>
+          <p:nvPr/>
+        </p:nvSpPr>
+        <p:spPr>
+          <a:xfrm xmlns:a="http://schemas.openxmlformats.org/drawingml/2006/main">
+            <a:off x="952500" y="2457450"/>
+            <a:ext cx="8763000" cy="266700"/>
+          </a:xfrm>
+          <a:prstGeom xmlns:a="http://schemas.openxmlformats.org/drawingml/2006/main" prst="rect">
+            <a:avLst/>
+          </a:prstGeom>
+          <a:noFill xmlns:a="http://schemas.openxmlformats.org/drawingml/2006/main"/>
+          <a:ln xmlns:a="http://schemas.openxmlformats.org/drawingml/2006/main" w="0">
+            <a:noFill/>
+          </a:ln>
+        </p:spPr>
+        <p:txBody>
+          <a:bodyPr xmlns:a="http://schemas.openxmlformats.org/drawingml/2006/main" wrap="square" lIns="0" tIns="0" rIns="0" bIns="0" anchor="t"/>
+          <a:lstStyle xmlns:a="http://schemas.openxmlformats.org/drawingml/2006/main"/>
+          <a:p xmlns:a="http://schemas.openxmlformats.org/drawingml/2006/main">
+            <a:r>
+              <a:rPr lang="en-US" sz="1425">
+                <a:solidFill>
+                  <a:srgbClr val="B9B9B9"/>
+                </a:solidFill>
+                <a:latin typeface="Tahoma"/>
+                <a:ea typeface="Tahoma"/>
+              </a:rPr>
+              <a:t>A documentary operating review turns status into a decision.</a:t>
+            </a:r>
+            <a:endParaRPr lang="en-US"/>
+          </a:p>
+        </p:txBody>
+      </p:sp>
+      <p:sp>
+        <p:nvSpPr>
+          <p:cNvPr id="8" name="electric-violet-cover-photo-rule"/>
           <p:cNvSpPr/>
           <p:nvPr/>
         </p:nvSpPr>
         <p:spPr>
           <a:xfrm xmlns:a="http://schemas.openxmlformats.org/drawingml/2006/main">
-            <a:off x="914400" y="3524250"/>
-            <a:ext cx="7658100" cy="0"/>
+            <a:off x="914400" y="3886200"/>
+            <a:ext cx="13411200" cy="0"/>
           </a:xfrm>
           <a:prstGeom xmlns:a="http://schemas.openxmlformats.org/drawingml/2006/main" prst="line">
             <a:avLst/>
           </a:prstGeom>
           <a:noFill xmlns:a="http://schemas.openxmlformats.org/drawingml/2006/main"/>
-          <a:ln xmlns:a="http://schemas.openxmlformats.org/drawingml/2006/main" w="25400">
-            <a:solidFill>
-              <a:srgbClr val="7F8081"/>
-            </a:solidFill>
-            <a:prstDash val="solid"/>
-          </a:ln>
-        </p:spPr>
-        <p:txBody>
-          <a:bodyPr xmlns:a="http://schemas.openxmlformats.org/drawingml/2006/main" wrap="square" lIns="0" tIns="0" rIns="0" bIns="0" anchor="t"/>
-          <a:lstStyle xmlns:a="http://schemas.openxmlformats.org/drawingml/2006/main"/>
-          <a:p xmlns:a="http://schemas.openxmlformats.org/drawingml/2006/main">
-            <a:r>
-              <a:rPr lang="en-US"/>
-              <a:t/>
-            </a:r>
-            <a:endParaRPr lang="en-US"/>
-          </a:p>
-        </p:txBody>
-      </p:sp>
-      <p:sp>
-        <p:nvSpPr>
-          <p:cNvPr id="8" name="cover-basis"/>
-          <p:cNvSpPr txBox="1"/>
-          <p:nvPr/>
-        </p:nvSpPr>
-        <p:spPr>
-          <a:xfrm xmlns:a="http://schemas.openxmlformats.org/drawingml/2006/main">
-            <a:off x="952500" y="3762375"/>
-            <a:ext cx="7810500" cy="266700"/>
-          </a:xfrm>
-          <a:prstGeom xmlns:a="http://schemas.openxmlformats.org/drawingml/2006/main" prst="rect">
-            <a:avLst/>
-          </a:prstGeom>
-          <a:noFill xmlns:a="http://schemas.openxmlformats.org/drawingml/2006/main"/>
-          <a:ln xmlns:a="http://schemas.openxmlformats.org/drawingml/2006/main" w="0">
-            <a:noFill/>
-          </a:ln>
-        </p:spPr>
-        <p:txBody>
-          <a:bodyPr xmlns:a="http://schemas.openxmlformats.org/drawingml/2006/main" wrap="square" lIns="0" tIns="0" rIns="0" bIns="0" anchor="t"/>
-          <a:lstStyle xmlns:a="http://schemas.openxmlformats.org/drawingml/2006/main"/>
-          <a:p xmlns:a="http://schemas.openxmlformats.org/drawingml/2006/main">
-            <a:r>
-              <a:rPr lang="en-US" sz="1350">
-                <a:solidFill>
-                  <a:srgbClr val="F8F8F7"/>
-                </a:solidFill>
-                <a:latin typeface="Tahoma"/>
-                <a:ea typeface="Tahoma"/>
-              </a:rPr>
-              <a:t>One visual language · four page roles · native editable objects</a:t>
-            </a:r>
-            <a:endParaRPr lang="en-US"/>
-          </a:p>
-        </p:txBody>
-      </p:sp>
-      <p:sp>
-        <p:nvSpPr>
-          <p:cNvPr id="9" name="cover-thesis"/>
-          <p:cNvSpPr txBox="1"/>
-          <p:nvPr/>
-        </p:nvSpPr>
-        <p:spPr>
-          <a:xfrm xmlns:a="http://schemas.openxmlformats.org/drawingml/2006/main">
-            <a:off x="952500" y="4810125"/>
-            <a:ext cx="6667500" cy="628650"/>
-          </a:xfrm>
-          <a:prstGeom xmlns:a="http://schemas.openxmlformats.org/drawingml/2006/main" prst="rect">
-            <a:avLst/>
-          </a:prstGeom>
-          <a:noFill xmlns:a="http://schemas.openxmlformats.org/drawingml/2006/main"/>
-          <a:ln xmlns:a="http://schemas.openxmlformats.org/drawingml/2006/main" w="0">
-            <a:noFill/>
-          </a:ln>
-        </p:spPr>
-        <p:txBody>
-          <a:bodyPr xmlns:a="http://schemas.openxmlformats.org/drawingml/2006/main" wrap="square" lIns="0" tIns="0" rIns="0" bIns="0" anchor="t"/>
-          <a:lstStyle xmlns:a="http://schemas.openxmlformats.org/drawingml/2006/main"/>
-          <a:p xmlns:a="http://schemas.openxmlformats.org/drawingml/2006/main">
-            <a:r>
-              <a:rPr lang="en-US" sz="1875" b="1">
-                <a:solidFill>
-                  <a:srgbClr val="F8F8F7"/>
-                </a:solidFill>
-                <a:latin typeface="Tahoma"/>
-                <a:ea typeface="Tahoma"/>
-              </a:rPr>
-              <a:t>A visible operating signal creates a shared next action.</a:t>
-            </a:r>
-            <a:endParaRPr lang="en-US"/>
-          </a:p>
-        </p:txBody>
-      </p:sp>
-      <p:sp>
-        <p:nvSpPr>
-          <p:cNvPr id="10" name="cover-source"/>
-          <p:cNvSpPr txBox="1"/>
-          <p:nvPr/>
-        </p:nvSpPr>
-        <p:spPr>
-          <a:xfrm xmlns:a="http://schemas.openxmlformats.org/drawingml/2006/main">
-            <a:off x="952500" y="7315200"/>
-            <a:ext cx="9048750" cy="228600"/>
-          </a:xfrm>
-          <a:prstGeom xmlns:a="http://schemas.openxmlformats.org/drawingml/2006/main" prst="rect">
-            <a:avLst/>
-          </a:prstGeom>
-          <a:noFill xmlns:a="http://schemas.openxmlformats.org/drawingml/2006/main"/>
-          <a:ln xmlns:a="http://schemas.openxmlformats.org/drawingml/2006/main" w="0">
-            <a:noFill/>
-          </a:ln>
-        </p:spPr>
-        <p:txBody>
-          <a:bodyPr xmlns:a="http://schemas.openxmlformats.org/drawingml/2006/main" wrap="square" lIns="0" tIns="0" rIns="0" bIns="0" anchor="t"/>
-          <a:lstStyle xmlns:a="http://schemas.openxmlformats.org/drawingml/2006/main"/>
-          <a:p xmlns:a="http://schemas.openxmlformats.org/drawingml/2006/main">
-            <a:r>
-              <a:rPr lang="en-US" sz="1050">
-                <a:solidFill>
-                  <a:srgbClr val="7F8081"/>
-                </a:solidFill>
-                <a:latin typeface="Tahoma"/>
-                <a:ea typeface="Tahoma"/>
-              </a:rPr>
-              <a:t>OfficeKit original clean-room calibration · fictional content · 2026-08-29</a:t>
-            </a:r>
-            <a:endParaRPr lang="en-US"/>
-          </a:p>
-        </p:txBody>
-      </p:sp>
-      <p:sp>
-        <p:nvSpPr>
-          <p:cNvPr id="11" name="page-number"/>
-          <p:cNvSpPr txBox="1"/>
-          <p:nvPr/>
-        </p:nvSpPr>
-        <p:spPr>
-          <a:xfrm xmlns:a="http://schemas.openxmlformats.org/drawingml/2006/main">
-            <a:off x="13335000" y="7810500"/>
-            <a:ext cx="952500" cy="209550"/>
-          </a:xfrm>
-          <a:prstGeom xmlns:a="http://schemas.openxmlformats.org/drawingml/2006/main" prst="rect">
-            <a:avLst/>
-          </a:prstGeom>
-          <a:noFill xmlns:a="http://schemas.openxmlformats.org/drawingml/2006/main"/>
-          <a:ln xmlns:a="http://schemas.openxmlformats.org/drawingml/2006/main" w="0">
-            <a:noFill/>
-          </a:ln>
-        </p:spPr>
-        <p:txBody>
-          <a:bodyPr xmlns:a="http://schemas.openxmlformats.org/drawingml/2006/main" wrap="square" lIns="0" tIns="0" rIns="0" bIns="0" anchor="t"/>
-          <a:lstStyle xmlns:a="http://schemas.openxmlformats.org/drawingml/2006/main"/>
-          <a:p xmlns:a="http://schemas.openxmlformats.org/drawingml/2006/main">
-            <a:pPr algn="r"/>
-            <a:r>
-              <a:rPr lang="en-US" sz="1050">
-                <a:solidFill>
-                  <a:srgbClr val="7F8081"/>
-                </a:solidFill>
-                <a:latin typeface="Tahoma"/>
-                <a:ea typeface="Tahoma"/>
-              </a:rPr>
-              <a:t>1 / 6</a:t>
-            </a:r>
-            <a:endParaRPr lang="en-US"/>
-          </a:p>
-        </p:txBody>
-      </p:sp>
-      <p:sp>
-        <p:nvSpPr>
-          <p:cNvPr id="12" name="anchor-field"/>
-          <p:cNvSpPr/>
-          <p:nvPr/>
-        </p:nvSpPr>
-        <p:spPr>
-          <a:xfrm xmlns:a="http://schemas.openxmlformats.org/drawingml/2006/main">
-            <a:off x="11620500" y="1790700"/>
-            <a:ext cx="2095500" cy="2286000"/>
-          </a:xfrm>
-          <a:prstGeom xmlns:a="http://schemas.openxmlformats.org/drawingml/2006/main" prst="rect">
-            <a:avLst/>
-          </a:prstGeom>
-          <a:solidFill xmlns:a="http://schemas.openxmlformats.org/drawingml/2006/main">
-            <a:srgbClr val="F3F5F8"/>
-          </a:solidFill>
           <a:ln xmlns:a="http://schemas.openxmlformats.org/drawingml/2006/main" w="25400">
             <a:solidFill>
               <a:srgbClr val="7047FF"/>
@@ -625,357 +451,111 @@
       </p:sp>
       <p:sp>
         <p:nvSpPr>
-          <p:cNvPr id="13" name="anchor-grid-0-0"/>
-          <p:cNvSpPr/>
-          <p:nvPr/>
-        </p:nvSpPr>
-        <p:spPr>
-          <a:xfrm xmlns:a="http://schemas.openxmlformats.org/drawingml/2006/main">
-            <a:off x="11925300" y="2152650"/>
-            <a:ext cx="266700" cy="285750"/>
-          </a:xfrm>
-          <a:prstGeom xmlns:a="http://schemas.openxmlformats.org/drawingml/2006/main" prst="rect">
-            <a:avLst/>
-          </a:prstGeom>
-          <a:solidFill xmlns:a="http://schemas.openxmlformats.org/drawingml/2006/main">
-            <a:srgbClr val="7047FF"/>
-          </a:solidFill>
-          <a:ln xmlns:a="http://schemas.openxmlformats.org/drawingml/2006/main" w="12700">
-            <a:solidFill>
-              <a:srgbClr val="7047FF"/>
-            </a:solidFill>
-            <a:prstDash val="solid"/>
-          </a:ln>
-        </p:spPr>
-        <p:txBody>
-          <a:bodyPr xmlns:a="http://schemas.openxmlformats.org/drawingml/2006/main" wrap="square" lIns="0" tIns="0" rIns="0" bIns="0" anchor="t"/>
-          <a:lstStyle xmlns:a="http://schemas.openxmlformats.org/drawingml/2006/main"/>
-          <a:p xmlns:a="http://schemas.openxmlformats.org/drawingml/2006/main">
-            <a:r>
-              <a:rPr lang="en-US"/>
-              <a:t/>
-            </a:r>
-            <a:endParaRPr lang="en-US"/>
-          </a:p>
-        </p:txBody>
-      </p:sp>
-      <p:sp>
-        <p:nvSpPr>
-          <p:cNvPr id="14" name="anchor-grid-0-1"/>
-          <p:cNvSpPr/>
-          <p:nvPr/>
-        </p:nvSpPr>
-        <p:spPr>
-          <a:xfrm xmlns:a="http://schemas.openxmlformats.org/drawingml/2006/main">
-            <a:off x="12420600" y="2152650"/>
-            <a:ext cx="266700" cy="285750"/>
-          </a:xfrm>
-          <a:prstGeom xmlns:a="http://schemas.openxmlformats.org/drawingml/2006/main" prst="rect">
-            <a:avLst/>
-          </a:prstGeom>
-          <a:solidFill xmlns:a="http://schemas.openxmlformats.org/drawingml/2006/main">
-            <a:srgbClr val="7047FF"/>
-          </a:solidFill>
-          <a:ln xmlns:a="http://schemas.openxmlformats.org/drawingml/2006/main" w="12700">
-            <a:solidFill>
-              <a:srgbClr val="7047FF"/>
-            </a:solidFill>
-            <a:prstDash val="solid"/>
-          </a:ln>
-        </p:spPr>
-        <p:txBody>
-          <a:bodyPr xmlns:a="http://schemas.openxmlformats.org/drawingml/2006/main" wrap="square" lIns="0" tIns="0" rIns="0" bIns="0" anchor="t"/>
-          <a:lstStyle xmlns:a="http://schemas.openxmlformats.org/drawingml/2006/main"/>
-          <a:p xmlns:a="http://schemas.openxmlformats.org/drawingml/2006/main">
-            <a:r>
-              <a:rPr lang="en-US"/>
-              <a:t/>
-            </a:r>
-            <a:endParaRPr lang="en-US"/>
-          </a:p>
-        </p:txBody>
-      </p:sp>
-      <p:sp>
-        <p:nvSpPr>
-          <p:cNvPr id="15" name="anchor-grid-0-2"/>
-          <p:cNvSpPr/>
-          <p:nvPr/>
-        </p:nvSpPr>
-        <p:spPr>
-          <a:xfrm xmlns:a="http://schemas.openxmlformats.org/drawingml/2006/main">
-            <a:off x="12915900" y="2152650"/>
-            <a:ext cx="266700" cy="285750"/>
-          </a:xfrm>
-          <a:prstGeom xmlns:a="http://schemas.openxmlformats.org/drawingml/2006/main" prst="rect">
-            <a:avLst/>
-          </a:prstGeom>
-          <a:solidFill xmlns:a="http://schemas.openxmlformats.org/drawingml/2006/main">
-            <a:srgbClr val="101115"/>
-          </a:solidFill>
-          <a:ln xmlns:a="http://schemas.openxmlformats.org/drawingml/2006/main" w="12700">
-            <a:solidFill>
-              <a:srgbClr val="7047FF"/>
-            </a:solidFill>
-            <a:prstDash val="solid"/>
-          </a:ln>
-        </p:spPr>
-        <p:txBody>
-          <a:bodyPr xmlns:a="http://schemas.openxmlformats.org/drawingml/2006/main" wrap="square" lIns="0" tIns="0" rIns="0" bIns="0" anchor="t"/>
-          <a:lstStyle xmlns:a="http://schemas.openxmlformats.org/drawingml/2006/main"/>
-          <a:p xmlns:a="http://schemas.openxmlformats.org/drawingml/2006/main">
-            <a:r>
-              <a:rPr lang="en-US"/>
-              <a:t/>
-            </a:r>
-            <a:endParaRPr lang="en-US"/>
-          </a:p>
-        </p:txBody>
-      </p:sp>
-      <p:sp>
-        <p:nvSpPr>
-          <p:cNvPr id="16" name="anchor-grid-1-0"/>
-          <p:cNvSpPr/>
-          <p:nvPr/>
-        </p:nvSpPr>
-        <p:spPr>
-          <a:xfrm xmlns:a="http://schemas.openxmlformats.org/drawingml/2006/main">
-            <a:off x="11925300" y="2686050"/>
-            <a:ext cx="266700" cy="285750"/>
-          </a:xfrm>
-          <a:prstGeom xmlns:a="http://schemas.openxmlformats.org/drawingml/2006/main" prst="rect">
-            <a:avLst/>
-          </a:prstGeom>
-          <a:solidFill xmlns:a="http://schemas.openxmlformats.org/drawingml/2006/main">
-            <a:srgbClr val="7047FF"/>
-          </a:solidFill>
-          <a:ln xmlns:a="http://schemas.openxmlformats.org/drawingml/2006/main" w="12700">
-            <a:solidFill>
-              <a:srgbClr val="7047FF"/>
-            </a:solidFill>
-            <a:prstDash val="solid"/>
-          </a:ln>
-        </p:spPr>
-        <p:txBody>
-          <a:bodyPr xmlns:a="http://schemas.openxmlformats.org/drawingml/2006/main" wrap="square" lIns="0" tIns="0" rIns="0" bIns="0" anchor="t"/>
-          <a:lstStyle xmlns:a="http://schemas.openxmlformats.org/drawingml/2006/main"/>
-          <a:p xmlns:a="http://schemas.openxmlformats.org/drawingml/2006/main">
-            <a:r>
-              <a:rPr lang="en-US"/>
-              <a:t/>
-            </a:r>
-            <a:endParaRPr lang="en-US"/>
-          </a:p>
-        </p:txBody>
-      </p:sp>
-      <p:sp>
-        <p:nvSpPr>
-          <p:cNvPr id="17" name="anchor-grid-1-1"/>
-          <p:cNvSpPr/>
-          <p:nvPr/>
-        </p:nvSpPr>
-        <p:spPr>
-          <a:xfrm xmlns:a="http://schemas.openxmlformats.org/drawingml/2006/main">
-            <a:off x="12420600" y="2686050"/>
-            <a:ext cx="266700" cy="285750"/>
-          </a:xfrm>
-          <a:prstGeom xmlns:a="http://schemas.openxmlformats.org/drawingml/2006/main" prst="rect">
-            <a:avLst/>
-          </a:prstGeom>
-          <a:solidFill xmlns:a="http://schemas.openxmlformats.org/drawingml/2006/main">
-            <a:srgbClr val="7047FF"/>
-          </a:solidFill>
-          <a:ln xmlns:a="http://schemas.openxmlformats.org/drawingml/2006/main" w="12700">
-            <a:solidFill>
-              <a:srgbClr val="7047FF"/>
-            </a:solidFill>
-            <a:prstDash val="solid"/>
-          </a:ln>
-        </p:spPr>
-        <p:txBody>
-          <a:bodyPr xmlns:a="http://schemas.openxmlformats.org/drawingml/2006/main" wrap="square" lIns="0" tIns="0" rIns="0" bIns="0" anchor="t"/>
-          <a:lstStyle xmlns:a="http://schemas.openxmlformats.org/drawingml/2006/main"/>
-          <a:p xmlns:a="http://schemas.openxmlformats.org/drawingml/2006/main">
-            <a:r>
-              <a:rPr lang="en-US"/>
-              <a:t/>
-            </a:r>
-            <a:endParaRPr lang="en-US"/>
-          </a:p>
-        </p:txBody>
-      </p:sp>
-      <p:sp>
-        <p:nvSpPr>
-          <p:cNvPr id="18" name="anchor-grid-1-2"/>
-          <p:cNvSpPr/>
-          <p:nvPr/>
-        </p:nvSpPr>
-        <p:spPr>
-          <a:xfrm xmlns:a="http://schemas.openxmlformats.org/drawingml/2006/main">
-            <a:off x="12915900" y="2686050"/>
-            <a:ext cx="266700" cy="285750"/>
-          </a:xfrm>
-          <a:prstGeom xmlns:a="http://schemas.openxmlformats.org/drawingml/2006/main" prst="rect">
-            <a:avLst/>
-          </a:prstGeom>
-          <a:solidFill xmlns:a="http://schemas.openxmlformats.org/drawingml/2006/main">
-            <a:srgbClr val="101115"/>
-          </a:solidFill>
-          <a:ln xmlns:a="http://schemas.openxmlformats.org/drawingml/2006/main" w="12700">
-            <a:solidFill>
-              <a:srgbClr val="7047FF"/>
-            </a:solidFill>
-            <a:prstDash val="solid"/>
-          </a:ln>
-        </p:spPr>
-        <p:txBody>
-          <a:bodyPr xmlns:a="http://schemas.openxmlformats.org/drawingml/2006/main" wrap="square" lIns="0" tIns="0" rIns="0" bIns="0" anchor="t"/>
-          <a:lstStyle xmlns:a="http://schemas.openxmlformats.org/drawingml/2006/main"/>
-          <a:p xmlns:a="http://schemas.openxmlformats.org/drawingml/2006/main">
-            <a:r>
-              <a:rPr lang="en-US"/>
-              <a:t/>
-            </a:r>
-            <a:endParaRPr lang="en-US"/>
-          </a:p>
-        </p:txBody>
-      </p:sp>
-      <p:sp>
-        <p:nvSpPr>
-          <p:cNvPr id="19" name="anchor-grid-2-0"/>
-          <p:cNvSpPr/>
-          <p:nvPr/>
-        </p:nvSpPr>
-        <p:spPr>
-          <a:xfrm xmlns:a="http://schemas.openxmlformats.org/drawingml/2006/main">
-            <a:off x="11925300" y="3219450"/>
-            <a:ext cx="266700" cy="285750"/>
-          </a:xfrm>
-          <a:prstGeom xmlns:a="http://schemas.openxmlformats.org/drawingml/2006/main" prst="rect">
-            <a:avLst/>
-          </a:prstGeom>
-          <a:solidFill xmlns:a="http://schemas.openxmlformats.org/drawingml/2006/main">
-            <a:srgbClr val="7047FF"/>
-          </a:solidFill>
-          <a:ln xmlns:a="http://schemas.openxmlformats.org/drawingml/2006/main" w="12700">
-            <a:solidFill>
-              <a:srgbClr val="7047FF"/>
-            </a:solidFill>
-            <a:prstDash val="solid"/>
-          </a:ln>
-        </p:spPr>
-        <p:txBody>
-          <a:bodyPr xmlns:a="http://schemas.openxmlformats.org/drawingml/2006/main" wrap="square" lIns="0" tIns="0" rIns="0" bIns="0" anchor="t"/>
-          <a:lstStyle xmlns:a="http://schemas.openxmlformats.org/drawingml/2006/main"/>
-          <a:p xmlns:a="http://schemas.openxmlformats.org/drawingml/2006/main">
-            <a:r>
-              <a:rPr lang="en-US"/>
-              <a:t/>
-            </a:r>
-            <a:endParaRPr lang="en-US"/>
-          </a:p>
-        </p:txBody>
-      </p:sp>
-      <p:sp>
-        <p:nvSpPr>
-          <p:cNvPr id="20" name="anchor-grid-2-1"/>
-          <p:cNvSpPr/>
-          <p:nvPr/>
-        </p:nvSpPr>
-        <p:spPr>
-          <a:xfrm xmlns:a="http://schemas.openxmlformats.org/drawingml/2006/main">
-            <a:off x="12420600" y="3219450"/>
-            <a:ext cx="266700" cy="285750"/>
-          </a:xfrm>
-          <a:prstGeom xmlns:a="http://schemas.openxmlformats.org/drawingml/2006/main" prst="rect">
-            <a:avLst/>
-          </a:prstGeom>
-          <a:solidFill xmlns:a="http://schemas.openxmlformats.org/drawingml/2006/main">
-            <a:srgbClr val="7047FF"/>
-          </a:solidFill>
-          <a:ln xmlns:a="http://schemas.openxmlformats.org/drawingml/2006/main" w="12700">
-            <a:solidFill>
-              <a:srgbClr val="7047FF"/>
-            </a:solidFill>
-            <a:prstDash val="solid"/>
-          </a:ln>
-        </p:spPr>
-        <p:txBody>
-          <a:bodyPr xmlns:a="http://schemas.openxmlformats.org/drawingml/2006/main" wrap="square" lIns="0" tIns="0" rIns="0" bIns="0" anchor="t"/>
-          <a:lstStyle xmlns:a="http://schemas.openxmlformats.org/drawingml/2006/main"/>
-          <a:p xmlns:a="http://schemas.openxmlformats.org/drawingml/2006/main">
-            <a:r>
-              <a:rPr lang="en-US"/>
-              <a:t/>
-            </a:r>
-            <a:endParaRPr lang="en-US"/>
-          </a:p>
-        </p:txBody>
-      </p:sp>
-      <p:sp>
-        <p:nvSpPr>
-          <p:cNvPr id="21" name="anchor-grid-2-2"/>
-          <p:cNvSpPr/>
-          <p:nvPr/>
-        </p:nvSpPr>
-        <p:spPr>
-          <a:xfrm xmlns:a="http://schemas.openxmlformats.org/drawingml/2006/main">
-            <a:off x="12915900" y="3219450"/>
-            <a:ext cx="266700" cy="285750"/>
-          </a:xfrm>
-          <a:prstGeom xmlns:a="http://schemas.openxmlformats.org/drawingml/2006/main" prst="rect">
-            <a:avLst/>
-          </a:prstGeom>
-          <a:solidFill xmlns:a="http://schemas.openxmlformats.org/drawingml/2006/main">
-            <a:srgbClr val="101115"/>
-          </a:solidFill>
-          <a:ln xmlns:a="http://schemas.openxmlformats.org/drawingml/2006/main" w="12700">
-            <a:solidFill>
-              <a:srgbClr val="7047FF"/>
-            </a:solidFill>
-            <a:prstDash val="solid"/>
-          </a:ln>
-        </p:spPr>
-        <p:txBody>
-          <a:bodyPr xmlns:a="http://schemas.openxmlformats.org/drawingml/2006/main" wrap="square" lIns="0" tIns="0" rIns="0" bIns="0" anchor="t"/>
-          <a:lstStyle xmlns:a="http://schemas.openxmlformats.org/drawingml/2006/main"/>
-          <a:p xmlns:a="http://schemas.openxmlformats.org/drawingml/2006/main">
-            <a:r>
-              <a:rPr lang="en-US"/>
-              <a:t/>
-            </a:r>
-            <a:endParaRPr lang="en-US"/>
-          </a:p>
-        </p:txBody>
-      </p:sp>
-      <p:sp>
-        <p:nvSpPr>
-          <p:cNvPr id="22" name="anchor-axis"/>
-          <p:cNvSpPr/>
-          <p:nvPr/>
-        </p:nvSpPr>
-        <p:spPr>
-          <a:xfrm xmlns:a="http://schemas.openxmlformats.org/drawingml/2006/main">
-            <a:off x="12668250" y="1638300"/>
-            <a:ext cx="0" cy="2743200"/>
-          </a:xfrm>
-          <a:prstGeom xmlns:a="http://schemas.openxmlformats.org/drawingml/2006/main" prst="line">
-            <a:avLst/>
-          </a:prstGeom>
-          <a:noFill xmlns:a="http://schemas.openxmlformats.org/drawingml/2006/main"/>
-          <a:ln xmlns:a="http://schemas.openxmlformats.org/drawingml/2006/main" w="50800">
-            <a:solidFill>
-              <a:srgbClr val="F8F8F7"/>
-            </a:solidFill>
-            <a:prstDash val="solid"/>
-          </a:ln>
-        </p:spPr>
-        <p:txBody>
-          <a:bodyPr xmlns:a="http://schemas.openxmlformats.org/drawingml/2006/main" wrap="square" lIns="0" tIns="0" rIns="0" bIns="0" anchor="t"/>
-          <a:lstStyle xmlns:a="http://schemas.openxmlformats.org/drawingml/2006/main"/>
-          <a:p xmlns:a="http://schemas.openxmlformats.org/drawingml/2006/main">
-            <a:r>
-              <a:rPr lang="en-US"/>
-              <a:t/>
+          <p:cNvPr id="9" name="electric-violet-cover-photo-label"/>
+          <p:cNvSpPr txBox="1"/>
+          <p:nvPr/>
+        </p:nvSpPr>
+        <p:spPr>
+          <a:xfrm xmlns:a="http://schemas.openxmlformats.org/drawingml/2006/main">
+            <a:off x="914400" y="3981450"/>
+            <a:ext cx="7810500" cy="190500"/>
+          </a:xfrm>
+          <a:prstGeom xmlns:a="http://schemas.openxmlformats.org/drawingml/2006/main" prst="rect">
+            <a:avLst/>
+          </a:prstGeom>
+          <a:noFill xmlns:a="http://schemas.openxmlformats.org/drawingml/2006/main"/>
+          <a:ln xmlns:a="http://schemas.openxmlformats.org/drawingml/2006/main" w="0">
+            <a:noFill/>
+          </a:ln>
+        </p:spPr>
+        <p:txBody>
+          <a:bodyPr xmlns:a="http://schemas.openxmlformats.org/drawingml/2006/main" wrap="square" lIns="0" tIns="0" rIns="0" bIns="0" anchor="t"/>
+          <a:lstStyle xmlns:a="http://schemas.openxmlformats.org/drawingml/2006/main"/>
+          <a:p xmlns:a="http://schemas.openxmlformats.org/drawingml/2006/main">
+            <a:r>
+              <a:rPr lang="en-US" sz="975" b="1">
+                <a:solidFill>
+                  <a:srgbClr val="B9B9B9"/>
+                </a:solidFill>
+                <a:latin typeface="Tahoma"/>
+                <a:ea typeface="Tahoma"/>
+              </a:rPr>
+              <a:t>MEASURED WORK · VISIBLE CONSEQUENCE</a:t>
+            </a:r>
+            <a:endParaRPr lang="en-US"/>
+          </a:p>
+        </p:txBody>
+      </p:sp>
+      <p:sp>
+        <p:nvSpPr>
+          <p:cNvPr id="10" name="electric-violet-cover-source"/>
+          <p:cNvSpPr txBox="1"/>
+          <p:nvPr/>
+        </p:nvSpPr>
+        <p:spPr>
+          <a:xfrm xmlns:a="http://schemas.openxmlformats.org/drawingml/2006/main">
+            <a:off x="914400" y="7829550"/>
+            <a:ext cx="10953750" cy="209550"/>
+          </a:xfrm>
+          <a:prstGeom xmlns:a="http://schemas.openxmlformats.org/drawingml/2006/main" prst="rect">
+            <a:avLst/>
+          </a:prstGeom>
+          <a:noFill xmlns:a="http://schemas.openxmlformats.org/drawingml/2006/main"/>
+          <a:ln xmlns:a="http://schemas.openxmlformats.org/drawingml/2006/main" w="0">
+            <a:noFill/>
+          </a:ln>
+        </p:spPr>
+        <p:txBody>
+          <a:bodyPr xmlns:a="http://schemas.openxmlformats.org/drawingml/2006/main" wrap="square" lIns="0" tIns="0" rIns="0" bIns="0" anchor="t"/>
+          <a:lstStyle xmlns:a="http://schemas.openxmlformats.org/drawingml/2006/main"/>
+          <a:p xmlns:a="http://schemas.openxmlformats.org/drawingml/2006/main">
+            <a:r>
+              <a:rPr lang="en-US" sz="1050">
+                <a:solidFill>
+                  <a:srgbClr val="B9B9B9"/>
+                </a:solidFill>
+                <a:latin typeface="Tahoma"/>
+                <a:ea typeface="Tahoma"/>
+              </a:rPr>
+              <a:t>OfficeKit original clean-room calibration · fictional content · 2026-08-29</a:t>
+            </a:r>
+            <a:endParaRPr lang="en-US"/>
+          </a:p>
+        </p:txBody>
+      </p:sp>
+      <p:sp>
+        <p:nvSpPr>
+          <p:cNvPr id="11" name="electric-violet-cover-page-number"/>
+          <p:cNvSpPr txBox="1"/>
+          <p:nvPr/>
+        </p:nvSpPr>
+        <p:spPr>
+          <a:xfrm xmlns:a="http://schemas.openxmlformats.org/drawingml/2006/main">
+            <a:off x="13335000" y="7829550"/>
+            <a:ext cx="952500" cy="209550"/>
+          </a:xfrm>
+          <a:prstGeom xmlns:a="http://schemas.openxmlformats.org/drawingml/2006/main" prst="rect">
+            <a:avLst/>
+          </a:prstGeom>
+          <a:noFill xmlns:a="http://schemas.openxmlformats.org/drawingml/2006/main"/>
+          <a:ln xmlns:a="http://schemas.openxmlformats.org/drawingml/2006/main" w="0">
+            <a:noFill/>
+          </a:ln>
+        </p:spPr>
+        <p:txBody>
+          <a:bodyPr xmlns:a="http://schemas.openxmlformats.org/drawingml/2006/main" wrap="square" lIns="0" tIns="0" rIns="0" bIns="0" anchor="t"/>
+          <a:lstStyle xmlns:a="http://schemas.openxmlformats.org/drawingml/2006/main"/>
+          <a:p xmlns:a="http://schemas.openxmlformats.org/drawingml/2006/main">
+            <a:pPr algn="r"/>
+            <a:r>
+              <a:rPr lang="en-US" sz="1050">
+                <a:solidFill>
+                  <a:srgbClr val="B9B9B9"/>
+                </a:solidFill>
+                <a:latin typeface="Tahoma"/>
+                <a:ea typeface="Tahoma"/>
+              </a:rPr>
+              <a:t>1 / 6</a:t>
             </a:r>
             <a:endParaRPr lang="en-US"/>
           </a:p>

--- a/skills/presentation-template-library/skills/artifact-template-violet-operations/assets/reference.pptx
+++ b/skills/presentation-template-library/skills/artifact-template-violet-operations/assets/reference.pptx
@@ -254,7 +254,7 @@
           <p:nvPr/>
         </p:nvPicPr>
         <p:blipFill>
-          <a:blip xmlns:r="http://schemas.openxmlformats.org/officeDocument/2006/relationships" xmlns:a="http://schemas.openxmlformats.org/drawingml/2006/main" r:embed="rIdOfficeKitImage4df9c6298f17ef7a_1"/>
+          <a:blip xmlns:r="http://schemas.openxmlformats.org/officeDocument/2006/relationships" xmlns:a="http://schemas.openxmlformats.org/drawingml/2006/main" r:embed="rIdOfficeKitImageb4650c5e003a270c_1"/>
           <a:srcRect xmlns:a="http://schemas.openxmlformats.org/drawingml/2006/main" l="0" t="41949" r="0" b="41949"/>
           <a:stretch xmlns:a="http://schemas.openxmlformats.org/drawingml/2006/main">
             <a:fillRect/>
@@ -575,7 +575,7 @@
     <p:bg>
       <p:bgPr>
         <a:blipFill xmlns:a="http://schemas.openxmlformats.org/drawingml/2006/main">
-          <a:blip xmlns:r="http://schemas.openxmlformats.org/officeDocument/2006/relationships" r:embed="rIdOfficeKitImage0d3bd4b5ccdd7cbb_1"/>
+          <a:blip xmlns:r="http://schemas.openxmlformats.org/officeDocument/2006/relationships" r:embed="rIdOfficeKitImage4df9c6298f17ef7a_1"/>
           <a:stretch>
             <a:fillRect/>
           </a:stretch>
@@ -1380,7 +1380,7 @@
     <p:bg>
       <p:bgPr>
         <a:blipFill xmlns:a="http://schemas.openxmlformats.org/drawingml/2006/main">
-          <a:blip xmlns:r="http://schemas.openxmlformats.org/officeDocument/2006/relationships" r:embed="rIdOfficeKitImagea5c00489db854fa2_1"/>
+          <a:blip xmlns:r="http://schemas.openxmlformats.org/officeDocument/2006/relationships" r:embed="rIdOfficeKitImageff039bf2f181c5d1_1"/>
           <a:stretch>
             <a:fillRect/>
           </a:stretch>
@@ -2766,7 +2766,7 @@
           <p:nvPr/>
         </p:nvPicPr>
         <p:blipFill>
-          <a:blip xmlns:r="http://schemas.openxmlformats.org/officeDocument/2006/relationships" xmlns:a="http://schemas.openxmlformats.org/drawingml/2006/main" r:embed="rIdOfficeKitImage8579b0a87ff097c1_1"/>
+          <a:blip xmlns:r="http://schemas.openxmlformats.org/officeDocument/2006/relationships" xmlns:a="http://schemas.openxmlformats.org/drawingml/2006/main" r:embed="rIdOfficeKitImage0d3bd4b5ccdd7cbb_1"/>
           <a:srcRect xmlns:a="http://schemas.openxmlformats.org/drawingml/2006/main" l="0" t="31971" r="0" b="31971"/>
           <a:stretch xmlns:a="http://schemas.openxmlformats.org/drawingml/2006/main">
             <a:fillRect/>
@@ -2795,8 +2795,8 @@
           <p:nvPr/>
         </p:nvPicPr>
         <p:blipFill>
-          <a:blip xmlns:r="http://schemas.openxmlformats.org/officeDocument/2006/relationships" xmlns:a="http://schemas.openxmlformats.org/drawingml/2006/main" r:embed="rIdOfficeKitImage7acdacea277813e8_1"/>
-          <a:srcRect xmlns:a="http://schemas.openxmlformats.org/drawingml/2006/main" l="0" t="32333" r="0" b="32333"/>
+          <a:blip xmlns:r="http://schemas.openxmlformats.org/officeDocument/2006/relationships" xmlns:a="http://schemas.openxmlformats.org/drawingml/2006/main" r:embed="rIdOfficeKitImagea5c00489db854fa2_1"/>
+          <a:srcRect xmlns:a="http://schemas.openxmlformats.org/drawingml/2006/main" l="0" t="32347" r="0" b="32347"/>
           <a:stretch xmlns:a="http://schemas.openxmlformats.org/drawingml/2006/main">
             <a:fillRect/>
           </a:stretch>
@@ -2824,8 +2824,8 @@
           <p:nvPr/>
         </p:nvPicPr>
         <p:blipFill>
-          <a:blip xmlns:r="http://schemas.openxmlformats.org/officeDocument/2006/relationships" xmlns:a="http://schemas.openxmlformats.org/drawingml/2006/main" r:embed="rIdOfficeKitImage89634c5b24a89a02_1"/>
-          <a:srcRect xmlns:a="http://schemas.openxmlformats.org/drawingml/2006/main" l="0" t="32333" r="0" b="32333"/>
+          <a:blip xmlns:r="http://schemas.openxmlformats.org/officeDocument/2006/relationships" xmlns:a="http://schemas.openxmlformats.org/drawingml/2006/main" r:embed="rIdOfficeKitImage8579b0a87ff097c1_1"/>
+          <a:srcRect xmlns:a="http://schemas.openxmlformats.org/drawingml/2006/main" l="0" t="32347" r="0" b="32347"/>
           <a:stretch xmlns:a="http://schemas.openxmlformats.org/drawingml/2006/main">
             <a:fillRect/>
           </a:stretch>
@@ -2853,7 +2853,7 @@
           <p:nvPr/>
         </p:nvPicPr>
         <p:blipFill>
-          <a:blip xmlns:r="http://schemas.openxmlformats.org/officeDocument/2006/relationships" xmlns:a="http://schemas.openxmlformats.org/drawingml/2006/main" r:embed="rIdOfficeKitImage6a3db1fe43260f32_1"/>
+          <a:blip xmlns:r="http://schemas.openxmlformats.org/officeDocument/2006/relationships" xmlns:a="http://schemas.openxmlformats.org/drawingml/2006/main" r:embed="rIdOfficeKitImage7acdacea277813e8_1"/>
           <a:srcRect xmlns:a="http://schemas.openxmlformats.org/drawingml/2006/main" l="0" t="32333" r="0" b="32333"/>
           <a:stretch xmlns:a="http://schemas.openxmlformats.org/drawingml/2006/main">
             <a:fillRect/>
@@ -2882,7 +2882,7 @@
           <p:nvPr/>
         </p:nvPicPr>
         <p:blipFill>
-          <a:blip xmlns:r="http://schemas.openxmlformats.org/officeDocument/2006/relationships" xmlns:a="http://schemas.openxmlformats.org/drawingml/2006/main" r:embed="rIdOfficeKitImage6785cc6781fd2511_1"/>
+          <a:blip xmlns:r="http://schemas.openxmlformats.org/officeDocument/2006/relationships" xmlns:a="http://schemas.openxmlformats.org/drawingml/2006/main" r:embed="rIdOfficeKitImage89634c5b24a89a02_1"/>
           <a:srcRect xmlns:a="http://schemas.openxmlformats.org/drawingml/2006/main" l="0" t="32333" r="0" b="32333"/>
           <a:stretch xmlns:a="http://schemas.openxmlformats.org/drawingml/2006/main">
             <a:fillRect/>
@@ -3124,7 +3124,7 @@
     <p:bg>
       <p:bgPr>
         <a:blipFill xmlns:a="http://schemas.openxmlformats.org/drawingml/2006/main">
-          <a:blip xmlns:r="http://schemas.openxmlformats.org/officeDocument/2006/relationships" r:embed="rIdOfficeKitImaged96cedd8678b85ac_1"/>
+          <a:blip xmlns:r="http://schemas.openxmlformats.org/officeDocument/2006/relationships" r:embed="rIdOfficeKitImage6a3db1fe43260f32_1"/>
           <a:stretch>
             <a:fillRect/>
           </a:stretch>
@@ -3454,7 +3454,7 @@
     <p:bg>
       <p:bgPr>
         <a:blipFill xmlns:a="http://schemas.openxmlformats.org/drawingml/2006/main">
-          <a:blip xmlns:r="http://schemas.openxmlformats.org/officeDocument/2006/relationships" r:embed="rIdOfficeKitImage06e55191024fa458_1"/>
+          <a:blip xmlns:r="http://schemas.openxmlformats.org/officeDocument/2006/relationships" r:embed="rIdOfficeKitImage6785cc6781fd2511_1"/>
           <a:stretch>
             <a:fillRect/>
           </a:stretch>
